--- a/CSCI5707 Principles of Database Systems/Final Project/CSCI5707 Project Presentation.pptx
+++ b/CSCI5707 Principles of Database Systems/Final Project/CSCI5707 Project Presentation.pptx
@@ -1,51 +1,50 @@
 
 <file path=ppt/presentation.xml><?xml version="1.0" encoding="utf-8"?>
-<p:presentation xmlns:a="http://schemas.openxmlformats.org/drawingml/2006/main" xmlns:r="http://schemas.openxmlformats.org/officeDocument/2006/relationships" xmlns:mc="http://schemas.openxmlformats.org/markup-compatibility/2006" xmlns:mv="urn:schemas-microsoft-com:mac:vml" xmlns:p="http://schemas.openxmlformats.org/presentationml/2006/main" xmlns:c="http://schemas.openxmlformats.org/drawingml/2006/chart" xmlns:dgm="http://schemas.openxmlformats.org/drawingml/2006/diagram" xmlns:o="urn:schemas-microsoft-com:office:office" xmlns:v="urn:schemas-microsoft-com:vml" xmlns:pvml="urn:schemas-microsoft-com:office:powerpoint" xmlns:com="http://schemas.openxmlformats.org/drawingml/2006/compatibility" xmlns:p14="http://schemas.microsoft.com/office/powerpoint/2010/main" xmlns:p15="http://schemas.microsoft.com/office/powerpoint/2012/main" xmlns:ahyp="http://schemas.microsoft.com/office/drawing/2018/hyperlinkcolor" autoCompressPictures="0" embedTrueTypeFonts="1" strictFirstAndLastChars="0" saveSubsetFonts="1">
+<p:presentation xmlns:a="http://schemas.openxmlformats.org/drawingml/2006/main" xmlns:r="http://schemas.openxmlformats.org/officeDocument/2006/relationships" xmlns:p="http://schemas.openxmlformats.org/presentationml/2006/main" strictFirstAndLastChars="0" embedTrueTypeFonts="1" saveSubsetFonts="1" autoCompressPictures="0">
   <p:sldMasterIdLst>
-    <p:sldMasterId id="2147483659" r:id="rId4"/>
+    <p:sldMasterId id="2147483659" r:id="rId1"/>
   </p:sldMasterIdLst>
   <p:notesMasterIdLst>
-    <p:notesMasterId r:id="rId5"/>
+    <p:notesMasterId r:id="rId18"/>
   </p:notesMasterIdLst>
   <p:sldIdLst>
-    <p:sldId id="256" r:id="rId6"/>
-    <p:sldId id="257" r:id="rId7"/>
-    <p:sldId id="258" r:id="rId8"/>
-    <p:sldId id="259" r:id="rId9"/>
-    <p:sldId id="260" r:id="rId10"/>
-    <p:sldId id="261" r:id="rId11"/>
-    <p:sldId id="262" r:id="rId12"/>
-    <p:sldId id="263" r:id="rId13"/>
-    <p:sldId id="264" r:id="rId14"/>
-    <p:sldId id="265" r:id="rId15"/>
-    <p:sldId id="266" r:id="rId16"/>
-    <p:sldId id="267" r:id="rId17"/>
-    <p:sldId id="268" r:id="rId18"/>
-    <p:sldId id="269" r:id="rId19"/>
-    <p:sldId id="270" r:id="rId20"/>
-    <p:sldId id="271" r:id="rId21"/>
-    <p:sldId id="272" r:id="rId22"/>
+    <p:sldId id="256" r:id="rId2"/>
+    <p:sldId id="257" r:id="rId3"/>
+    <p:sldId id="259" r:id="rId4"/>
+    <p:sldId id="260" r:id="rId5"/>
+    <p:sldId id="261" r:id="rId6"/>
+    <p:sldId id="262" r:id="rId7"/>
+    <p:sldId id="263" r:id="rId8"/>
+    <p:sldId id="264" r:id="rId9"/>
+    <p:sldId id="265" r:id="rId10"/>
+    <p:sldId id="266" r:id="rId11"/>
+    <p:sldId id="267" r:id="rId12"/>
+    <p:sldId id="268" r:id="rId13"/>
+    <p:sldId id="269" r:id="rId14"/>
+    <p:sldId id="270" r:id="rId15"/>
+    <p:sldId id="271" r:id="rId16"/>
+    <p:sldId id="272" r:id="rId17"/>
   </p:sldIdLst>
-  <p:sldSz cy="5143500" cx="9144000"/>
+  <p:sldSz cx="9144000" cy="5143500" type="screen16x9"/>
   <p:notesSz cx="6858000" cy="9144000"/>
   <p:embeddedFontLst>
     <p:embeddedFont>
-      <p:font typeface="Nunito"/>
+      <p:font typeface="Nunito" panose="020F0502020204030204" pitchFamily="2" charset="0"/>
+      <p:regular r:id="rId19"/>
+      <p:bold r:id="rId20"/>
+      <p:italic r:id="rId21"/>
+      <p:boldItalic r:id="rId22"/>
+    </p:embeddedFont>
+    <p:embeddedFont>
+      <p:font typeface="Roboto Mono" panose="020F0502020204030204" pitchFamily="49" charset="0"/>
       <p:regular r:id="rId23"/>
       <p:bold r:id="rId24"/>
       <p:italic r:id="rId25"/>
       <p:boldItalic r:id="rId26"/>
     </p:embeddedFont>
-    <p:embeddedFont>
-      <p:font typeface="Roboto Mono"/>
-      <p:regular r:id="rId27"/>
-      <p:bold r:id="rId28"/>
-      <p:italic r:id="rId29"/>
-      <p:boldItalic r:id="rId30"/>
-    </p:embeddedFont>
   </p:embeddedFontLst>
   <p:defaultTextStyle>
-    <a:defPPr lvl="0" marR="0" rtl="0" algn="l">
+    <a:defPPr marR="0" lvl="0" algn="l" rtl="0">
       <a:lnSpc>
         <a:spcPct val="100000"/>
       </a:lnSpc>
@@ -56,7 +55,7 @@
         <a:spcPts val="0"/>
       </a:spcAft>
     </a:defPPr>
-    <a:lvl1pPr lvl="0" marR="0" rtl="0" algn="l">
+    <a:lvl1pPr marR="0" lvl="0" algn="l" rtl="0">
       <a:lnSpc>
         <a:spcPct val="100000"/>
       </a:lnSpc>
@@ -70,7 +69,7 @@
         <a:srgbClr val="000000"/>
       </a:buClr>
       <a:buFont typeface="Arial"/>
-      <a:defRPr b="0" i="0" sz="1400" u="none" cap="none" strike="noStrike">
+      <a:defRPr sz="1400" b="0" i="0" u="none" strike="noStrike" cap="none">
         <a:solidFill>
           <a:srgbClr val="000000"/>
         </a:solidFill>
@@ -80,7 +79,7 @@
         <a:sym typeface="Arial"/>
       </a:defRPr>
     </a:lvl1pPr>
-    <a:lvl2pPr lvl="1" marR="0" rtl="0" algn="l">
+    <a:lvl2pPr marR="0" lvl="1" algn="l" rtl="0">
       <a:lnSpc>
         <a:spcPct val="100000"/>
       </a:lnSpc>
@@ -94,7 +93,7 @@
         <a:srgbClr val="000000"/>
       </a:buClr>
       <a:buFont typeface="Arial"/>
-      <a:defRPr b="0" i="0" sz="1400" u="none" cap="none" strike="noStrike">
+      <a:defRPr sz="1400" b="0" i="0" u="none" strike="noStrike" cap="none">
         <a:solidFill>
           <a:srgbClr val="000000"/>
         </a:solidFill>
@@ -104,7 +103,7 @@
         <a:sym typeface="Arial"/>
       </a:defRPr>
     </a:lvl2pPr>
-    <a:lvl3pPr lvl="2" marR="0" rtl="0" algn="l">
+    <a:lvl3pPr marR="0" lvl="2" algn="l" rtl="0">
       <a:lnSpc>
         <a:spcPct val="100000"/>
       </a:lnSpc>
@@ -118,7 +117,7 @@
         <a:srgbClr val="000000"/>
       </a:buClr>
       <a:buFont typeface="Arial"/>
-      <a:defRPr b="0" i="0" sz="1400" u="none" cap="none" strike="noStrike">
+      <a:defRPr sz="1400" b="0" i="0" u="none" strike="noStrike" cap="none">
         <a:solidFill>
           <a:srgbClr val="000000"/>
         </a:solidFill>
@@ -128,7 +127,7 @@
         <a:sym typeface="Arial"/>
       </a:defRPr>
     </a:lvl3pPr>
-    <a:lvl4pPr lvl="3" marR="0" rtl="0" algn="l">
+    <a:lvl4pPr marR="0" lvl="3" algn="l" rtl="0">
       <a:lnSpc>
         <a:spcPct val="100000"/>
       </a:lnSpc>
@@ -142,7 +141,7 @@
         <a:srgbClr val="000000"/>
       </a:buClr>
       <a:buFont typeface="Arial"/>
-      <a:defRPr b="0" i="0" sz="1400" u="none" cap="none" strike="noStrike">
+      <a:defRPr sz="1400" b="0" i="0" u="none" strike="noStrike" cap="none">
         <a:solidFill>
           <a:srgbClr val="000000"/>
         </a:solidFill>
@@ -152,7 +151,7 @@
         <a:sym typeface="Arial"/>
       </a:defRPr>
     </a:lvl4pPr>
-    <a:lvl5pPr lvl="4" marR="0" rtl="0" algn="l">
+    <a:lvl5pPr marR="0" lvl="4" algn="l" rtl="0">
       <a:lnSpc>
         <a:spcPct val="100000"/>
       </a:lnSpc>
@@ -166,7 +165,7 @@
         <a:srgbClr val="000000"/>
       </a:buClr>
       <a:buFont typeface="Arial"/>
-      <a:defRPr b="0" i="0" sz="1400" u="none" cap="none" strike="noStrike">
+      <a:defRPr sz="1400" b="0" i="0" u="none" strike="noStrike" cap="none">
         <a:solidFill>
           <a:srgbClr val="000000"/>
         </a:solidFill>
@@ -176,7 +175,7 @@
         <a:sym typeface="Arial"/>
       </a:defRPr>
     </a:lvl5pPr>
-    <a:lvl6pPr lvl="5" marR="0" rtl="0" algn="l">
+    <a:lvl6pPr marR="0" lvl="5" algn="l" rtl="0">
       <a:lnSpc>
         <a:spcPct val="100000"/>
       </a:lnSpc>
@@ -190,7 +189,7 @@
         <a:srgbClr val="000000"/>
       </a:buClr>
       <a:buFont typeface="Arial"/>
-      <a:defRPr b="0" i="0" sz="1400" u="none" cap="none" strike="noStrike">
+      <a:defRPr sz="1400" b="0" i="0" u="none" strike="noStrike" cap="none">
         <a:solidFill>
           <a:srgbClr val="000000"/>
         </a:solidFill>
@@ -200,7 +199,7 @@
         <a:sym typeface="Arial"/>
       </a:defRPr>
     </a:lvl6pPr>
-    <a:lvl7pPr lvl="6" marR="0" rtl="0" algn="l">
+    <a:lvl7pPr marR="0" lvl="6" algn="l" rtl="0">
       <a:lnSpc>
         <a:spcPct val="100000"/>
       </a:lnSpc>
@@ -214,7 +213,7 @@
         <a:srgbClr val="000000"/>
       </a:buClr>
       <a:buFont typeface="Arial"/>
-      <a:defRPr b="0" i="0" sz="1400" u="none" cap="none" strike="noStrike">
+      <a:defRPr sz="1400" b="0" i="0" u="none" strike="noStrike" cap="none">
         <a:solidFill>
           <a:srgbClr val="000000"/>
         </a:solidFill>
@@ -224,7 +223,7 @@
         <a:sym typeface="Arial"/>
       </a:defRPr>
     </a:lvl7pPr>
-    <a:lvl8pPr lvl="7" marR="0" rtl="0" algn="l">
+    <a:lvl8pPr marR="0" lvl="7" algn="l" rtl="0">
       <a:lnSpc>
         <a:spcPct val="100000"/>
       </a:lnSpc>
@@ -238,7 +237,7 @@
         <a:srgbClr val="000000"/>
       </a:buClr>
       <a:buFont typeface="Arial"/>
-      <a:defRPr b="0" i="0" sz="1400" u="none" cap="none" strike="noStrike">
+      <a:defRPr sz="1400" b="0" i="0" u="none" strike="noStrike" cap="none">
         <a:solidFill>
           <a:srgbClr val="000000"/>
         </a:solidFill>
@@ -248,7 +247,7 @@
         <a:sym typeface="Arial"/>
       </a:defRPr>
     </a:lvl8pPr>
-    <a:lvl9pPr lvl="8" marR="0" rtl="0" algn="l">
+    <a:lvl9pPr marR="0" lvl="8" algn="l" rtl="0">
       <a:lnSpc>
         <a:spcPct val="100000"/>
       </a:lnSpc>
@@ -262,7 +261,7 @@
         <a:srgbClr val="000000"/>
       </a:buClr>
       <a:buFont typeface="Arial"/>
-      <a:defRPr b="0" i="0" sz="1400" u="none" cap="none" strike="noStrike">
+      <a:defRPr sz="1400" b="0" i="0" u="none" strike="noStrike" cap="none">
         <a:solidFill>
           <a:srgbClr val="000000"/>
         </a:solidFill>
@@ -275,7 +274,7 @@
   </p:defaultTextStyle>
   <p:extLst>
     <p:ext uri="{EFAFB233-063F-42B5-8137-9DF3F51BA10A}">
-      <p15:sldGuideLst>
+      <p15:sldGuideLst xmlns:p15="http://schemas.microsoft.com/office/powerpoint/2012/main">
         <p15:guide id="1" orient="horz" pos="1620">
           <p15:clr>
             <a:srgbClr val="747775"/>
@@ -293,11 +292,16 @@
 </file>
 
 <file path=ppt/notesMasters/notesMaster1.xml><?xml version="1.0" encoding="utf-8"?>
-<p:notesMaster xmlns:a="http://schemas.openxmlformats.org/drawingml/2006/main" xmlns:r="http://schemas.openxmlformats.org/officeDocument/2006/relationships" xmlns:mc="http://schemas.openxmlformats.org/markup-compatibility/2006" xmlns:mv="urn:schemas-microsoft-com:mac:vml" xmlns:p="http://schemas.openxmlformats.org/presentationml/2006/main" xmlns:c="http://schemas.openxmlformats.org/drawingml/2006/chart" xmlns:dgm="http://schemas.openxmlformats.org/drawingml/2006/diagram" xmlns:o="urn:schemas-microsoft-com:office:office" xmlns:v="urn:schemas-microsoft-com:vml" xmlns:pvml="urn:schemas-microsoft-com:office:powerpoint" xmlns:com="http://schemas.openxmlformats.org/drawingml/2006/compatibility" xmlns:p14="http://schemas.microsoft.com/office/powerpoint/2010/main" xmlns:p15="http://schemas.microsoft.com/office/powerpoint/2012/main" xmlns:ahyp="http://schemas.microsoft.com/office/drawing/2018/hyperlinkcolor">
+<p:notesMaster xmlns:a="http://schemas.openxmlformats.org/drawingml/2006/main" xmlns:r="http://schemas.openxmlformats.org/officeDocument/2006/relationships" xmlns:p="http://schemas.openxmlformats.org/presentationml/2006/main">
   <p:cSld>
+    <p:bg>
+      <p:bgRef idx="1001">
+        <a:schemeClr val="bg1"/>
+      </p:bgRef>
+    </p:bg>
     <p:spTree>
       <p:nvGrpSpPr>
-        <p:cNvPr id="2" name="Shape 2"/>
+        <p:cNvPr id="1" name="Shape 2"/>
         <p:cNvGrpSpPr/>
         <p:nvPr/>
       </p:nvGrpSpPr>
@@ -312,9 +316,11 @@
       <p:sp>
         <p:nvSpPr>
           <p:cNvPr id="3" name="Google Shape;3;n"/>
-          <p:cNvSpPr/>
+          <p:cNvSpPr>
+            <a:spLocks noGrp="1" noRot="1" noChangeAspect="1"/>
+          </p:cNvSpPr>
           <p:nvPr>
-            <p:ph idx="2" type="sldImg"/>
+            <p:ph type="sldImg" idx="2"/>
           </p:nvPr>
         </p:nvSpPr>
         <p:spPr>
@@ -323,9 +329,13 @@
             <a:ext cx="6096075" cy="3429000"/>
           </a:xfrm>
           <a:custGeom>
-            <a:rect b="b" l="l" r="r" t="t"/>
+            <a:avLst/>
+            <a:gdLst/>
+            <a:ahLst/>
+            <a:cxnLst/>
+            <a:rect l="l" t="t" r="r" b="b"/>
             <a:pathLst>
-              <a:path extrusionOk="0" h="120000" w="120000">
+              <a:path w="120000" h="120000" extrusionOk="0">
                 <a:moveTo>
                   <a:pt x="0" y="0"/>
                 </a:moveTo>
@@ -343,23 +353,25 @@
             </a:pathLst>
           </a:custGeom>
           <a:noFill/>
-          <a:ln cap="flat" cmpd="sng" w="9525">
+          <a:ln w="9525" cap="flat" cmpd="sng">
             <a:solidFill>
               <a:srgbClr val="000000"/>
             </a:solidFill>
             <a:prstDash val="solid"/>
             <a:round/>
-            <a:headEnd len="sm" w="sm" type="none"/>
-            <a:tailEnd len="sm" w="sm" type="none"/>
+            <a:headEnd type="none" w="sm" len="sm"/>
+            <a:tailEnd type="none" w="sm" len="sm"/>
           </a:ln>
         </p:spPr>
       </p:sp>
       <p:sp>
         <p:nvSpPr>
           <p:cNvPr id="4" name="Google Shape;4;n"/>
-          <p:cNvSpPr txBox="1"/>
+          <p:cNvSpPr txBox="1">
+            <a:spLocks noGrp="1"/>
+          </p:cNvSpPr>
           <p:nvPr>
-            <p:ph idx="1" type="body"/>
+            <p:ph type="body" idx="1"/>
           </p:nvPr>
         </p:nvSpPr>
         <p:spPr>
@@ -376,11 +388,11 @@
           </a:ln>
         </p:spPr>
         <p:txBody>
-          <a:bodyPr anchorCtr="0" anchor="t" bIns="91425" lIns="91425" spcFirstLastPara="1" rIns="91425" wrap="square" tIns="91425">
+          <a:bodyPr spcFirstLastPara="1" wrap="square" lIns="91425" tIns="91425" rIns="91425" bIns="91425" anchor="t" anchorCtr="0">
             <a:noAutofit/>
           </a:bodyPr>
           <a:lstStyle>
-            <a:lvl1pPr indent="-298450" lvl="0" marL="457200">
+            <a:lvl1pPr marL="457200" lvl="0" indent="-298450">
               <a:spcBef>
                 <a:spcPts val="0"/>
               </a:spcBef>
@@ -391,7 +403,7 @@
               <a:buChar char="●"/>
               <a:defRPr sz="1100"/>
             </a:lvl1pPr>
-            <a:lvl2pPr indent="-298450" lvl="1" marL="914400">
+            <a:lvl2pPr marL="914400" lvl="1" indent="-298450">
               <a:spcBef>
                 <a:spcPts val="0"/>
               </a:spcBef>
@@ -402,7 +414,7 @@
               <a:buChar char="○"/>
               <a:defRPr sz="1100"/>
             </a:lvl2pPr>
-            <a:lvl3pPr indent="-298450" lvl="2" marL="1371600">
+            <a:lvl3pPr marL="1371600" lvl="2" indent="-298450">
               <a:spcBef>
                 <a:spcPts val="0"/>
               </a:spcBef>
@@ -413,7 +425,7 @@
               <a:buChar char="■"/>
               <a:defRPr sz="1100"/>
             </a:lvl3pPr>
-            <a:lvl4pPr indent="-298450" lvl="3" marL="1828800">
+            <a:lvl4pPr marL="1828800" lvl="3" indent="-298450">
               <a:spcBef>
                 <a:spcPts val="0"/>
               </a:spcBef>
@@ -424,7 +436,7 @@
               <a:buChar char="●"/>
               <a:defRPr sz="1100"/>
             </a:lvl4pPr>
-            <a:lvl5pPr indent="-298450" lvl="4" marL="2286000">
+            <a:lvl5pPr marL="2286000" lvl="4" indent="-298450">
               <a:spcBef>
                 <a:spcPts val="0"/>
               </a:spcBef>
@@ -435,7 +447,7 @@
               <a:buChar char="○"/>
               <a:defRPr sz="1100"/>
             </a:lvl5pPr>
-            <a:lvl6pPr indent="-298450" lvl="5" marL="2743200">
+            <a:lvl6pPr marL="2743200" lvl="5" indent="-298450">
               <a:spcBef>
                 <a:spcPts val="0"/>
               </a:spcBef>
@@ -446,7 +458,7 @@
               <a:buChar char="■"/>
               <a:defRPr sz="1100"/>
             </a:lvl6pPr>
-            <a:lvl7pPr indent="-298450" lvl="6" marL="3200400">
+            <a:lvl7pPr marL="3200400" lvl="6" indent="-298450">
               <a:spcBef>
                 <a:spcPts val="0"/>
               </a:spcBef>
@@ -457,7 +469,7 @@
               <a:buChar char="●"/>
               <a:defRPr sz="1100"/>
             </a:lvl7pPr>
-            <a:lvl8pPr indent="-298450" lvl="7" marL="3657600">
+            <a:lvl8pPr marL="3657600" lvl="7" indent="-298450">
               <a:spcBef>
                 <a:spcPts val="0"/>
               </a:spcBef>
@@ -468,7 +480,7 @@
               <a:buChar char="○"/>
               <a:defRPr sz="1100"/>
             </a:lvl8pPr>
-            <a:lvl9pPr indent="-298450" lvl="8" marL="4114800">
+            <a:lvl9pPr marL="4114800" lvl="8" indent="-298450">
               <a:spcBef>
                 <a:spcPts val="0"/>
               </a:spcBef>
@@ -480,14 +492,16 @@
               <a:defRPr sz="1100"/>
             </a:lvl9pPr>
           </a:lstStyle>
-          <a:p/>
+          <a:p>
+            <a:endParaRPr/>
+          </a:p>
         </p:txBody>
       </p:sp>
     </p:spTree>
   </p:cSld>
-  <p:clrMap accent1="accent1" accent2="accent2" accent3="accent3" accent4="accent4" accent5="accent5" accent6="accent6" bg1="lt1" bg2="dk2" tx1="dk1" tx2="lt2" folHlink="folHlink" hlink="hlink"/>
+  <p:clrMap bg1="lt1" tx1="dk1" bg2="dk2" tx2="lt2" accent1="accent1" accent2="accent2" accent3="accent3" accent4="accent4" accent5="accent5" accent6="accent6" hlink="hlink" folHlink="folHlink"/>
   <p:notesStyle>
-    <a:defPPr lvl="0" marR="0" rtl="0" algn="l">
+    <a:defPPr marR="0" lvl="0" algn="l" rtl="0">
       <a:lnSpc>
         <a:spcPct val="100000"/>
       </a:lnSpc>
@@ -498,7 +512,7 @@
         <a:spcPts val="0"/>
       </a:spcAft>
     </a:defPPr>
-    <a:lvl1pPr lvl="0" marR="0" rtl="0" algn="l">
+    <a:lvl1pPr marR="0" lvl="0" algn="l" rtl="0">
       <a:lnSpc>
         <a:spcPct val="100000"/>
       </a:lnSpc>
@@ -512,7 +526,7 @@
         <a:srgbClr val="000000"/>
       </a:buClr>
       <a:buFont typeface="Arial"/>
-      <a:defRPr b="0" i="0" sz="1400" u="none" cap="none" strike="noStrike">
+      <a:defRPr sz="1400" b="0" i="0" u="none" strike="noStrike" cap="none">
         <a:solidFill>
           <a:srgbClr val="000000"/>
         </a:solidFill>
@@ -522,7 +536,7 @@
         <a:sym typeface="Arial"/>
       </a:defRPr>
     </a:lvl1pPr>
-    <a:lvl2pPr lvl="1" marR="0" rtl="0" algn="l">
+    <a:lvl2pPr marR="0" lvl="1" algn="l" rtl="0">
       <a:lnSpc>
         <a:spcPct val="100000"/>
       </a:lnSpc>
@@ -536,7 +550,7 @@
         <a:srgbClr val="000000"/>
       </a:buClr>
       <a:buFont typeface="Arial"/>
-      <a:defRPr b="0" i="0" sz="1400" u="none" cap="none" strike="noStrike">
+      <a:defRPr sz="1400" b="0" i="0" u="none" strike="noStrike" cap="none">
         <a:solidFill>
           <a:srgbClr val="000000"/>
         </a:solidFill>
@@ -546,7 +560,7 @@
         <a:sym typeface="Arial"/>
       </a:defRPr>
     </a:lvl2pPr>
-    <a:lvl3pPr lvl="2" marR="0" rtl="0" algn="l">
+    <a:lvl3pPr marR="0" lvl="2" algn="l" rtl="0">
       <a:lnSpc>
         <a:spcPct val="100000"/>
       </a:lnSpc>
@@ -560,7 +574,7 @@
         <a:srgbClr val="000000"/>
       </a:buClr>
       <a:buFont typeface="Arial"/>
-      <a:defRPr b="0" i="0" sz="1400" u="none" cap="none" strike="noStrike">
+      <a:defRPr sz="1400" b="0" i="0" u="none" strike="noStrike" cap="none">
         <a:solidFill>
           <a:srgbClr val="000000"/>
         </a:solidFill>
@@ -570,7 +584,7 @@
         <a:sym typeface="Arial"/>
       </a:defRPr>
     </a:lvl3pPr>
-    <a:lvl4pPr lvl="3" marR="0" rtl="0" algn="l">
+    <a:lvl4pPr marR="0" lvl="3" algn="l" rtl="0">
       <a:lnSpc>
         <a:spcPct val="100000"/>
       </a:lnSpc>
@@ -584,7 +598,7 @@
         <a:srgbClr val="000000"/>
       </a:buClr>
       <a:buFont typeface="Arial"/>
-      <a:defRPr b="0" i="0" sz="1400" u="none" cap="none" strike="noStrike">
+      <a:defRPr sz="1400" b="0" i="0" u="none" strike="noStrike" cap="none">
         <a:solidFill>
           <a:srgbClr val="000000"/>
         </a:solidFill>
@@ -594,7 +608,7 @@
         <a:sym typeface="Arial"/>
       </a:defRPr>
     </a:lvl4pPr>
-    <a:lvl5pPr lvl="4" marR="0" rtl="0" algn="l">
+    <a:lvl5pPr marR="0" lvl="4" algn="l" rtl="0">
       <a:lnSpc>
         <a:spcPct val="100000"/>
       </a:lnSpc>
@@ -608,7 +622,7 @@
         <a:srgbClr val="000000"/>
       </a:buClr>
       <a:buFont typeface="Arial"/>
-      <a:defRPr b="0" i="0" sz="1400" u="none" cap="none" strike="noStrike">
+      <a:defRPr sz="1400" b="0" i="0" u="none" strike="noStrike" cap="none">
         <a:solidFill>
           <a:srgbClr val="000000"/>
         </a:solidFill>
@@ -618,7 +632,7 @@
         <a:sym typeface="Arial"/>
       </a:defRPr>
     </a:lvl5pPr>
-    <a:lvl6pPr lvl="5" marR="0" rtl="0" algn="l">
+    <a:lvl6pPr marR="0" lvl="5" algn="l" rtl="0">
       <a:lnSpc>
         <a:spcPct val="100000"/>
       </a:lnSpc>
@@ -632,7 +646,7 @@
         <a:srgbClr val="000000"/>
       </a:buClr>
       <a:buFont typeface="Arial"/>
-      <a:defRPr b="0" i="0" sz="1400" u="none" cap="none" strike="noStrike">
+      <a:defRPr sz="1400" b="0" i="0" u="none" strike="noStrike" cap="none">
         <a:solidFill>
           <a:srgbClr val="000000"/>
         </a:solidFill>
@@ -642,7 +656,7 @@
         <a:sym typeface="Arial"/>
       </a:defRPr>
     </a:lvl6pPr>
-    <a:lvl7pPr lvl="6" marR="0" rtl="0" algn="l">
+    <a:lvl7pPr marR="0" lvl="6" algn="l" rtl="0">
       <a:lnSpc>
         <a:spcPct val="100000"/>
       </a:lnSpc>
@@ -656,7 +670,7 @@
         <a:srgbClr val="000000"/>
       </a:buClr>
       <a:buFont typeface="Arial"/>
-      <a:defRPr b="0" i="0" sz="1400" u="none" cap="none" strike="noStrike">
+      <a:defRPr sz="1400" b="0" i="0" u="none" strike="noStrike" cap="none">
         <a:solidFill>
           <a:srgbClr val="000000"/>
         </a:solidFill>
@@ -666,7 +680,7 @@
         <a:sym typeface="Arial"/>
       </a:defRPr>
     </a:lvl7pPr>
-    <a:lvl8pPr lvl="7" marR="0" rtl="0" algn="l">
+    <a:lvl8pPr marR="0" lvl="7" algn="l" rtl="0">
       <a:lnSpc>
         <a:spcPct val="100000"/>
       </a:lnSpc>
@@ -680,7 +694,7 @@
         <a:srgbClr val="000000"/>
       </a:buClr>
       <a:buFont typeface="Arial"/>
-      <a:defRPr b="0" i="0" sz="1400" u="none" cap="none" strike="noStrike">
+      <a:defRPr sz="1400" b="0" i="0" u="none" strike="noStrike" cap="none">
         <a:solidFill>
           <a:srgbClr val="000000"/>
         </a:solidFill>
@@ -690,7 +704,7 @@
         <a:sym typeface="Arial"/>
       </a:defRPr>
     </a:lvl8pPr>
-    <a:lvl9pPr lvl="8" marR="0" rtl="0" algn="l">
+    <a:lvl9pPr marR="0" lvl="8" algn="l" rtl="0">
       <a:lnSpc>
         <a:spcPct val="100000"/>
       </a:lnSpc>
@@ -704,7 +718,7 @@
         <a:srgbClr val="000000"/>
       </a:buClr>
       <a:buFont typeface="Arial"/>
-      <a:defRPr b="0" i="0" sz="1400" u="none" cap="none" strike="noStrike">
+      <a:defRPr sz="1400" b="0" i="0" u="none" strike="noStrike" cap="none">
         <a:solidFill>
           <a:srgbClr val="000000"/>
         </a:solidFill>
@@ -719,11 +733,11 @@
 </file>
 
 <file path=ppt/notesSlides/notesSlide1.xml><?xml version="1.0" encoding="utf-8"?>
-<p:notes xmlns:a="http://schemas.openxmlformats.org/drawingml/2006/main" xmlns:r="http://schemas.openxmlformats.org/officeDocument/2006/relationships" xmlns:mc="http://schemas.openxmlformats.org/markup-compatibility/2006" xmlns:mv="urn:schemas-microsoft-com:mac:vml" xmlns:p="http://schemas.openxmlformats.org/presentationml/2006/main" xmlns:c="http://schemas.openxmlformats.org/drawingml/2006/chart" xmlns:dgm="http://schemas.openxmlformats.org/drawingml/2006/diagram" xmlns:o="urn:schemas-microsoft-com:office:office" xmlns:v="urn:schemas-microsoft-com:vml" xmlns:pvml="urn:schemas-microsoft-com:office:powerpoint" xmlns:com="http://schemas.openxmlformats.org/drawingml/2006/compatibility" xmlns:p14="http://schemas.microsoft.com/office/powerpoint/2010/main" xmlns:p15="http://schemas.microsoft.com/office/powerpoint/2012/main" xmlns:ahyp="http://schemas.microsoft.com/office/drawing/2018/hyperlinkcolor" showMasterPhAnim="0" showMasterSp="0">
+<p:notes xmlns:a="http://schemas.openxmlformats.org/drawingml/2006/main" xmlns:r="http://schemas.openxmlformats.org/officeDocument/2006/relationships" xmlns:p="http://schemas.openxmlformats.org/presentationml/2006/main" showMasterSp="0" showMasterPhAnim="0">
   <p:cSld>
     <p:spTree>
       <p:nvGrpSpPr>
-        <p:cNvPr id="124" name="Shape 124"/>
+        <p:cNvPr id="1" name="Shape 124"/>
         <p:cNvGrpSpPr/>
         <p:nvPr/>
       </p:nvGrpSpPr>
@@ -738,9 +752,11 @@
       <p:sp>
         <p:nvSpPr>
           <p:cNvPr id="125" name="Google Shape;125;p:notes"/>
-          <p:cNvSpPr/>
+          <p:cNvSpPr>
+            <a:spLocks noGrp="1" noRot="1" noChangeAspect="1"/>
+          </p:cNvSpPr>
           <p:nvPr>
-            <p:ph idx="2" type="sldImg"/>
+            <p:ph type="sldImg" idx="2"/>
           </p:nvPr>
         </p:nvSpPr>
         <p:spPr>
@@ -749,9 +765,13 @@
             <a:ext cx="6096075" cy="3429000"/>
           </a:xfrm>
           <a:custGeom>
-            <a:rect b="b" l="l" r="r" t="t"/>
+            <a:avLst/>
+            <a:gdLst/>
+            <a:ahLst/>
+            <a:cxnLst/>
+            <a:rect l="l" t="t" r="r" b="b"/>
             <a:pathLst>
-              <a:path extrusionOk="0" h="120000" w="120000">
+              <a:path w="120000" h="120000" extrusionOk="0">
                 <a:moveTo>
                   <a:pt x="0" y="0"/>
                 </a:moveTo>
@@ -773,9 +793,11 @@
       <p:sp>
         <p:nvSpPr>
           <p:cNvPr id="126" name="Google Shape;126;p:notes"/>
-          <p:cNvSpPr txBox="1"/>
+          <p:cNvSpPr txBox="1">
+            <a:spLocks noGrp="1"/>
+          </p:cNvSpPr>
           <p:nvPr>
-            <p:ph idx="1" type="body"/>
+            <p:ph type="body" idx="1"/>
           </p:nvPr>
         </p:nvSpPr>
         <p:spPr>
@@ -788,12 +810,12 @@
           </a:prstGeom>
         </p:spPr>
         <p:txBody>
-          <a:bodyPr anchorCtr="0" anchor="t" bIns="91425" lIns="91425" spcFirstLastPara="1" rIns="91425" wrap="square" tIns="91425">
+          <a:bodyPr spcFirstLastPara="1" wrap="square" lIns="91425" tIns="91425" rIns="91425" bIns="91425" anchor="t" anchorCtr="0">
             <a:noAutofit/>
           </a:bodyPr>
           <a:lstStyle/>
           <a:p>
-            <a:pPr indent="0" lvl="0" marL="0" rtl="0" algn="l">
+            <a:pPr marL="0" lvl="0" indent="0" algn="l" rtl="0">
               <a:spcBef>
                 <a:spcPts val="0"/>
               </a:spcBef>
@@ -802,9 +824,6 @@
               </a:spcAft>
               <a:buNone/>
             </a:pPr>
-            <a:r>
-              <a:t/>
-            </a:r>
             <a:endParaRPr/>
           </a:p>
         </p:txBody>
@@ -818,11 +837,11 @@
 </file>
 
 <file path=ppt/notesSlides/notesSlide10.xml><?xml version="1.0" encoding="utf-8"?>
-<p:notes xmlns:a="http://schemas.openxmlformats.org/drawingml/2006/main" xmlns:r="http://schemas.openxmlformats.org/officeDocument/2006/relationships" xmlns:mc="http://schemas.openxmlformats.org/markup-compatibility/2006" xmlns:mv="urn:schemas-microsoft-com:mac:vml" xmlns:p="http://schemas.openxmlformats.org/presentationml/2006/main" xmlns:c="http://schemas.openxmlformats.org/drawingml/2006/chart" xmlns:dgm="http://schemas.openxmlformats.org/drawingml/2006/diagram" xmlns:o="urn:schemas-microsoft-com:office:office" xmlns:v="urn:schemas-microsoft-com:vml" xmlns:pvml="urn:schemas-microsoft-com:office:powerpoint" xmlns:com="http://schemas.openxmlformats.org/drawingml/2006/compatibility" xmlns:p14="http://schemas.microsoft.com/office/powerpoint/2010/main" xmlns:p15="http://schemas.microsoft.com/office/powerpoint/2012/main" xmlns:ahyp="http://schemas.microsoft.com/office/drawing/2018/hyperlinkcolor" showMasterPhAnim="0" showMasterSp="0">
+<p:notes xmlns:a="http://schemas.openxmlformats.org/drawingml/2006/main" xmlns:r="http://schemas.openxmlformats.org/officeDocument/2006/relationships" xmlns:p="http://schemas.openxmlformats.org/presentationml/2006/main" showMasterSp="0" showMasterPhAnim="0">
   <p:cSld>
     <p:spTree>
       <p:nvGrpSpPr>
-        <p:cNvPr id="185" name="Shape 185"/>
+        <p:cNvPr id="1" name="Shape 192"/>
         <p:cNvGrpSpPr/>
         <p:nvPr/>
       </p:nvGrpSpPr>
@@ -836,10 +855,12 @@
       </p:grpSpPr>
       <p:sp>
         <p:nvSpPr>
-          <p:cNvPr id="186" name="Google Shape;186;g321457fc196_0_464:notes"/>
-          <p:cNvSpPr/>
+          <p:cNvPr id="193" name="Google Shape;193;g321457fc196_0_450:notes"/>
+          <p:cNvSpPr>
+            <a:spLocks noGrp="1" noRot="1" noChangeAspect="1"/>
+          </p:cNvSpPr>
           <p:nvPr>
-            <p:ph idx="2" type="sldImg"/>
+            <p:ph type="sldImg" idx="2"/>
           </p:nvPr>
         </p:nvSpPr>
         <p:spPr>
@@ -848,9 +869,13 @@
             <a:ext cx="6096000" cy="3429000"/>
           </a:xfrm>
           <a:custGeom>
-            <a:rect b="b" l="l" r="r" t="t"/>
+            <a:avLst/>
+            <a:gdLst/>
+            <a:ahLst/>
+            <a:cxnLst/>
+            <a:rect l="l" t="t" r="r" b="b"/>
             <a:pathLst>
-              <a:path extrusionOk="0" h="120000" w="120000">
+              <a:path w="120000" h="120000" extrusionOk="0">
                 <a:moveTo>
                   <a:pt x="0" y="0"/>
                 </a:moveTo>
@@ -871,10 +896,12 @@
       </p:sp>
       <p:sp>
         <p:nvSpPr>
-          <p:cNvPr id="187" name="Google Shape;187;g321457fc196_0_464:notes"/>
-          <p:cNvSpPr txBox="1"/>
+          <p:cNvPr id="194" name="Google Shape;194;g321457fc196_0_450:notes"/>
+          <p:cNvSpPr txBox="1">
+            <a:spLocks noGrp="1"/>
+          </p:cNvSpPr>
           <p:nvPr>
-            <p:ph idx="1" type="body"/>
+            <p:ph type="body" idx="1"/>
           </p:nvPr>
         </p:nvSpPr>
         <p:spPr>
@@ -887,12 +914,12 @@
           </a:prstGeom>
         </p:spPr>
         <p:txBody>
-          <a:bodyPr anchorCtr="0" anchor="t" bIns="91425" lIns="91425" spcFirstLastPara="1" rIns="91425" wrap="square" tIns="91425">
+          <a:bodyPr spcFirstLastPara="1" wrap="square" lIns="91425" tIns="91425" rIns="91425" bIns="91425" anchor="t" anchorCtr="0">
             <a:noAutofit/>
           </a:bodyPr>
           <a:lstStyle/>
           <a:p>
-            <a:pPr indent="0" lvl="0" marL="0" rtl="0" algn="l">
+            <a:pPr marL="0" lvl="0" indent="0" algn="l" rtl="0">
               <a:spcBef>
                 <a:spcPts val="0"/>
               </a:spcBef>
@@ -901,9 +928,6 @@
               </a:spcAft>
               <a:buNone/>
             </a:pPr>
-            <a:r>
-              <a:t/>
-            </a:r>
             <a:endParaRPr/>
           </a:p>
         </p:txBody>
@@ -917,11 +941,11 @@
 </file>
 
 <file path=ppt/notesSlides/notesSlide11.xml><?xml version="1.0" encoding="utf-8"?>
-<p:notes xmlns:a="http://schemas.openxmlformats.org/drawingml/2006/main" xmlns:r="http://schemas.openxmlformats.org/officeDocument/2006/relationships" xmlns:mc="http://schemas.openxmlformats.org/markup-compatibility/2006" xmlns:mv="urn:schemas-microsoft-com:mac:vml" xmlns:p="http://schemas.openxmlformats.org/presentationml/2006/main" xmlns:c="http://schemas.openxmlformats.org/drawingml/2006/chart" xmlns:dgm="http://schemas.openxmlformats.org/drawingml/2006/diagram" xmlns:o="urn:schemas-microsoft-com:office:office" xmlns:v="urn:schemas-microsoft-com:vml" xmlns:pvml="urn:schemas-microsoft-com:office:powerpoint" xmlns:com="http://schemas.openxmlformats.org/drawingml/2006/compatibility" xmlns:p14="http://schemas.microsoft.com/office/powerpoint/2010/main" xmlns:p15="http://schemas.microsoft.com/office/powerpoint/2012/main" xmlns:ahyp="http://schemas.microsoft.com/office/drawing/2018/hyperlinkcolor" showMasterPhAnim="0" showMasterSp="0">
+<p:notes xmlns:a="http://schemas.openxmlformats.org/drawingml/2006/main" xmlns:r="http://schemas.openxmlformats.org/officeDocument/2006/relationships" xmlns:p="http://schemas.openxmlformats.org/presentationml/2006/main" showMasterSp="0" showMasterPhAnim="0">
   <p:cSld>
     <p:spTree>
       <p:nvGrpSpPr>
-        <p:cNvPr id="192" name="Shape 192"/>
+        <p:cNvPr id="1" name="Shape 200"/>
         <p:cNvGrpSpPr/>
         <p:nvPr/>
       </p:nvGrpSpPr>
@@ -935,10 +959,12 @@
       </p:grpSpPr>
       <p:sp>
         <p:nvSpPr>
-          <p:cNvPr id="193" name="Google Shape;193;g321457fc196_0_450:notes"/>
-          <p:cNvSpPr/>
+          <p:cNvPr id="201" name="Google Shape;201;g323d8c9fca5_0_0:notes"/>
+          <p:cNvSpPr>
+            <a:spLocks noGrp="1" noRot="1" noChangeAspect="1"/>
+          </p:cNvSpPr>
           <p:nvPr>
-            <p:ph idx="2" type="sldImg"/>
+            <p:ph type="sldImg" idx="2"/>
           </p:nvPr>
         </p:nvSpPr>
         <p:spPr>
@@ -947,9 +973,13 @@
             <a:ext cx="6096000" cy="3429000"/>
           </a:xfrm>
           <a:custGeom>
-            <a:rect b="b" l="l" r="r" t="t"/>
+            <a:avLst/>
+            <a:gdLst/>
+            <a:ahLst/>
+            <a:cxnLst/>
+            <a:rect l="l" t="t" r="r" b="b"/>
             <a:pathLst>
-              <a:path extrusionOk="0" h="120000" w="120000">
+              <a:path w="120000" h="120000" extrusionOk="0">
                 <a:moveTo>
                   <a:pt x="0" y="0"/>
                 </a:moveTo>
@@ -970,10 +1000,12 @@
       </p:sp>
       <p:sp>
         <p:nvSpPr>
-          <p:cNvPr id="194" name="Google Shape;194;g321457fc196_0_450:notes"/>
-          <p:cNvSpPr txBox="1"/>
+          <p:cNvPr id="202" name="Google Shape;202;g323d8c9fca5_0_0:notes"/>
+          <p:cNvSpPr txBox="1">
+            <a:spLocks noGrp="1"/>
+          </p:cNvSpPr>
           <p:nvPr>
-            <p:ph idx="1" type="body"/>
+            <p:ph type="body" idx="1"/>
           </p:nvPr>
         </p:nvSpPr>
         <p:spPr>
@@ -986,12 +1018,12 @@
           </a:prstGeom>
         </p:spPr>
         <p:txBody>
-          <a:bodyPr anchorCtr="0" anchor="t" bIns="91425" lIns="91425" spcFirstLastPara="1" rIns="91425" wrap="square" tIns="91425">
+          <a:bodyPr spcFirstLastPara="1" wrap="square" lIns="91425" tIns="91425" rIns="91425" bIns="91425" anchor="t" anchorCtr="0">
             <a:noAutofit/>
           </a:bodyPr>
           <a:lstStyle/>
           <a:p>
-            <a:pPr indent="0" lvl="0" marL="0" rtl="0" algn="l">
+            <a:pPr marL="0" lvl="0" indent="0" algn="l" rtl="0">
               <a:spcBef>
                 <a:spcPts val="0"/>
               </a:spcBef>
@@ -1000,9 +1032,6 @@
               </a:spcAft>
               <a:buNone/>
             </a:pPr>
-            <a:r>
-              <a:t/>
-            </a:r>
             <a:endParaRPr/>
           </a:p>
         </p:txBody>
@@ -1016,11 +1045,11 @@
 </file>
 
 <file path=ppt/notesSlides/notesSlide12.xml><?xml version="1.0" encoding="utf-8"?>
-<p:notes xmlns:a="http://schemas.openxmlformats.org/drawingml/2006/main" xmlns:r="http://schemas.openxmlformats.org/officeDocument/2006/relationships" xmlns:mc="http://schemas.openxmlformats.org/markup-compatibility/2006" xmlns:mv="urn:schemas-microsoft-com:mac:vml" xmlns:p="http://schemas.openxmlformats.org/presentationml/2006/main" xmlns:c="http://schemas.openxmlformats.org/drawingml/2006/chart" xmlns:dgm="http://schemas.openxmlformats.org/drawingml/2006/diagram" xmlns:o="urn:schemas-microsoft-com:office:office" xmlns:v="urn:schemas-microsoft-com:vml" xmlns:pvml="urn:schemas-microsoft-com:office:powerpoint" xmlns:com="http://schemas.openxmlformats.org/drawingml/2006/compatibility" xmlns:p14="http://schemas.microsoft.com/office/powerpoint/2010/main" xmlns:p15="http://schemas.microsoft.com/office/powerpoint/2012/main" xmlns:ahyp="http://schemas.microsoft.com/office/drawing/2018/hyperlinkcolor" showMasterPhAnim="0" showMasterSp="0">
+<p:notes xmlns:a="http://schemas.openxmlformats.org/drawingml/2006/main" xmlns:r="http://schemas.openxmlformats.org/officeDocument/2006/relationships" xmlns:p="http://schemas.openxmlformats.org/presentationml/2006/main" showMasterSp="0" showMasterPhAnim="0">
   <p:cSld>
     <p:spTree>
       <p:nvGrpSpPr>
-        <p:cNvPr id="200" name="Shape 200"/>
+        <p:cNvPr id="1" name="Shape 207"/>
         <p:cNvGrpSpPr/>
         <p:nvPr/>
       </p:nvGrpSpPr>
@@ -1034,10 +1063,12 @@
       </p:grpSpPr>
       <p:sp>
         <p:nvSpPr>
-          <p:cNvPr id="201" name="Google Shape;201;g323d8c9fca5_0_0:notes"/>
-          <p:cNvSpPr/>
+          <p:cNvPr id="208" name="Google Shape;208;g321457fc196_0_417:notes"/>
+          <p:cNvSpPr>
+            <a:spLocks noGrp="1" noRot="1" noChangeAspect="1"/>
+          </p:cNvSpPr>
           <p:nvPr>
-            <p:ph idx="2" type="sldImg"/>
+            <p:ph type="sldImg" idx="2"/>
           </p:nvPr>
         </p:nvSpPr>
         <p:spPr>
@@ -1046,9 +1077,13 @@
             <a:ext cx="6096000" cy="3429000"/>
           </a:xfrm>
           <a:custGeom>
-            <a:rect b="b" l="l" r="r" t="t"/>
+            <a:avLst/>
+            <a:gdLst/>
+            <a:ahLst/>
+            <a:cxnLst/>
+            <a:rect l="l" t="t" r="r" b="b"/>
             <a:pathLst>
-              <a:path extrusionOk="0" h="120000" w="120000">
+              <a:path w="120000" h="120000" extrusionOk="0">
                 <a:moveTo>
                   <a:pt x="0" y="0"/>
                 </a:moveTo>
@@ -1069,10 +1104,12 @@
       </p:sp>
       <p:sp>
         <p:nvSpPr>
-          <p:cNvPr id="202" name="Google Shape;202;g323d8c9fca5_0_0:notes"/>
-          <p:cNvSpPr txBox="1"/>
+          <p:cNvPr id="209" name="Google Shape;209;g321457fc196_0_417:notes"/>
+          <p:cNvSpPr txBox="1">
+            <a:spLocks noGrp="1"/>
+          </p:cNvSpPr>
           <p:nvPr>
-            <p:ph idx="1" type="body"/>
+            <p:ph type="body" idx="1"/>
           </p:nvPr>
         </p:nvSpPr>
         <p:spPr>
@@ -1085,12 +1122,12 @@
           </a:prstGeom>
         </p:spPr>
         <p:txBody>
-          <a:bodyPr anchorCtr="0" anchor="t" bIns="91425" lIns="91425" spcFirstLastPara="1" rIns="91425" wrap="square" tIns="91425">
+          <a:bodyPr spcFirstLastPara="1" wrap="square" lIns="91425" tIns="91425" rIns="91425" bIns="91425" anchor="t" anchorCtr="0">
             <a:noAutofit/>
           </a:bodyPr>
           <a:lstStyle/>
           <a:p>
-            <a:pPr indent="0" lvl="0" marL="0" rtl="0" algn="l">
+            <a:pPr marL="0" lvl="0" indent="0" algn="l" rtl="0">
               <a:spcBef>
                 <a:spcPts val="0"/>
               </a:spcBef>
@@ -1099,9 +1136,6 @@
               </a:spcAft>
               <a:buNone/>
             </a:pPr>
-            <a:r>
-              <a:t/>
-            </a:r>
             <a:endParaRPr/>
           </a:p>
         </p:txBody>
@@ -1115,11 +1149,11 @@
 </file>
 
 <file path=ppt/notesSlides/notesSlide13.xml><?xml version="1.0" encoding="utf-8"?>
-<p:notes xmlns:a="http://schemas.openxmlformats.org/drawingml/2006/main" xmlns:r="http://schemas.openxmlformats.org/officeDocument/2006/relationships" xmlns:mc="http://schemas.openxmlformats.org/markup-compatibility/2006" xmlns:mv="urn:schemas-microsoft-com:mac:vml" xmlns:p="http://schemas.openxmlformats.org/presentationml/2006/main" xmlns:c="http://schemas.openxmlformats.org/drawingml/2006/chart" xmlns:dgm="http://schemas.openxmlformats.org/drawingml/2006/diagram" xmlns:o="urn:schemas-microsoft-com:office:office" xmlns:v="urn:schemas-microsoft-com:vml" xmlns:pvml="urn:schemas-microsoft-com:office:powerpoint" xmlns:com="http://schemas.openxmlformats.org/drawingml/2006/compatibility" xmlns:p14="http://schemas.microsoft.com/office/powerpoint/2010/main" xmlns:p15="http://schemas.microsoft.com/office/powerpoint/2012/main" xmlns:ahyp="http://schemas.microsoft.com/office/drawing/2018/hyperlinkcolor" showMasterPhAnim="0" showMasterSp="0">
+<p:notes xmlns:a="http://schemas.openxmlformats.org/drawingml/2006/main" xmlns:r="http://schemas.openxmlformats.org/officeDocument/2006/relationships" xmlns:p="http://schemas.openxmlformats.org/presentationml/2006/main" showMasterSp="0" showMasterPhAnim="0">
   <p:cSld>
     <p:spTree>
       <p:nvGrpSpPr>
-        <p:cNvPr id="207" name="Shape 207"/>
+        <p:cNvPr id="1" name="Shape 214"/>
         <p:cNvGrpSpPr/>
         <p:nvPr/>
       </p:nvGrpSpPr>
@@ -1133,10 +1167,12 @@
       </p:grpSpPr>
       <p:sp>
         <p:nvSpPr>
-          <p:cNvPr id="208" name="Google Shape;208;g321457fc196_0_417:notes"/>
-          <p:cNvSpPr/>
+          <p:cNvPr id="215" name="Google Shape;215;g321457fc196_0_427:notes"/>
+          <p:cNvSpPr>
+            <a:spLocks noGrp="1" noRot="1" noChangeAspect="1"/>
+          </p:cNvSpPr>
           <p:nvPr>
-            <p:ph idx="2" type="sldImg"/>
+            <p:ph type="sldImg" idx="2"/>
           </p:nvPr>
         </p:nvSpPr>
         <p:spPr>
@@ -1145,9 +1181,13 @@
             <a:ext cx="6096000" cy="3429000"/>
           </a:xfrm>
           <a:custGeom>
-            <a:rect b="b" l="l" r="r" t="t"/>
+            <a:avLst/>
+            <a:gdLst/>
+            <a:ahLst/>
+            <a:cxnLst/>
+            <a:rect l="l" t="t" r="r" b="b"/>
             <a:pathLst>
-              <a:path extrusionOk="0" h="120000" w="120000">
+              <a:path w="120000" h="120000" extrusionOk="0">
                 <a:moveTo>
                   <a:pt x="0" y="0"/>
                 </a:moveTo>
@@ -1168,10 +1208,12 @@
       </p:sp>
       <p:sp>
         <p:nvSpPr>
-          <p:cNvPr id="209" name="Google Shape;209;g321457fc196_0_417:notes"/>
-          <p:cNvSpPr txBox="1"/>
+          <p:cNvPr id="216" name="Google Shape;216;g321457fc196_0_427:notes"/>
+          <p:cNvSpPr txBox="1">
+            <a:spLocks noGrp="1"/>
+          </p:cNvSpPr>
           <p:nvPr>
-            <p:ph idx="1" type="body"/>
+            <p:ph type="body" idx="1"/>
           </p:nvPr>
         </p:nvSpPr>
         <p:spPr>
@@ -1184,12 +1226,12 @@
           </a:prstGeom>
         </p:spPr>
         <p:txBody>
-          <a:bodyPr anchorCtr="0" anchor="t" bIns="91425" lIns="91425" spcFirstLastPara="1" rIns="91425" wrap="square" tIns="91425">
+          <a:bodyPr spcFirstLastPara="1" wrap="square" lIns="91425" tIns="91425" rIns="91425" bIns="91425" anchor="t" anchorCtr="0">
             <a:noAutofit/>
           </a:bodyPr>
           <a:lstStyle/>
           <a:p>
-            <a:pPr indent="0" lvl="0" marL="0" rtl="0" algn="l">
+            <a:pPr marL="0" lvl="0" indent="0" algn="l" rtl="0">
               <a:spcBef>
                 <a:spcPts val="0"/>
               </a:spcBef>
@@ -1198,9 +1240,6 @@
               </a:spcAft>
               <a:buNone/>
             </a:pPr>
-            <a:r>
-              <a:t/>
-            </a:r>
             <a:endParaRPr/>
           </a:p>
         </p:txBody>
@@ -1214,11 +1253,11 @@
 </file>
 
 <file path=ppt/notesSlides/notesSlide14.xml><?xml version="1.0" encoding="utf-8"?>
-<p:notes xmlns:a="http://schemas.openxmlformats.org/drawingml/2006/main" xmlns:r="http://schemas.openxmlformats.org/officeDocument/2006/relationships" xmlns:mc="http://schemas.openxmlformats.org/markup-compatibility/2006" xmlns:mv="urn:schemas-microsoft-com:mac:vml" xmlns:p="http://schemas.openxmlformats.org/presentationml/2006/main" xmlns:c="http://schemas.openxmlformats.org/drawingml/2006/chart" xmlns:dgm="http://schemas.openxmlformats.org/drawingml/2006/diagram" xmlns:o="urn:schemas-microsoft-com:office:office" xmlns:v="urn:schemas-microsoft-com:vml" xmlns:pvml="urn:schemas-microsoft-com:office:powerpoint" xmlns:com="http://schemas.openxmlformats.org/drawingml/2006/compatibility" xmlns:p14="http://schemas.microsoft.com/office/powerpoint/2010/main" xmlns:p15="http://schemas.microsoft.com/office/powerpoint/2012/main" xmlns:ahyp="http://schemas.microsoft.com/office/drawing/2018/hyperlinkcolor" showMasterPhAnim="0" showMasterSp="0">
+<p:notes xmlns:a="http://schemas.openxmlformats.org/drawingml/2006/main" xmlns:r="http://schemas.openxmlformats.org/officeDocument/2006/relationships" xmlns:p="http://schemas.openxmlformats.org/presentationml/2006/main" showMasterSp="0" showMasterPhAnim="0">
   <p:cSld>
     <p:spTree>
       <p:nvGrpSpPr>
-        <p:cNvPr id="214" name="Shape 214"/>
+        <p:cNvPr id="1" name="Shape 221"/>
         <p:cNvGrpSpPr/>
         <p:nvPr/>
       </p:nvGrpSpPr>
@@ -1232,10 +1271,12 @@
       </p:grpSpPr>
       <p:sp>
         <p:nvSpPr>
-          <p:cNvPr id="215" name="Google Shape;215;g321457fc196_0_427:notes"/>
-          <p:cNvSpPr/>
+          <p:cNvPr id="222" name="Google Shape;222;g321457fc196_0_432:notes"/>
+          <p:cNvSpPr>
+            <a:spLocks noGrp="1" noRot="1" noChangeAspect="1"/>
+          </p:cNvSpPr>
           <p:nvPr>
-            <p:ph idx="2" type="sldImg"/>
+            <p:ph type="sldImg" idx="2"/>
           </p:nvPr>
         </p:nvSpPr>
         <p:spPr>
@@ -1244,9 +1285,13 @@
             <a:ext cx="6096000" cy="3429000"/>
           </a:xfrm>
           <a:custGeom>
-            <a:rect b="b" l="l" r="r" t="t"/>
+            <a:avLst/>
+            <a:gdLst/>
+            <a:ahLst/>
+            <a:cxnLst/>
+            <a:rect l="l" t="t" r="r" b="b"/>
             <a:pathLst>
-              <a:path extrusionOk="0" h="120000" w="120000">
+              <a:path w="120000" h="120000" extrusionOk="0">
                 <a:moveTo>
                   <a:pt x="0" y="0"/>
                 </a:moveTo>
@@ -1267,10 +1312,12 @@
       </p:sp>
       <p:sp>
         <p:nvSpPr>
-          <p:cNvPr id="216" name="Google Shape;216;g321457fc196_0_427:notes"/>
-          <p:cNvSpPr txBox="1"/>
+          <p:cNvPr id="223" name="Google Shape;223;g321457fc196_0_432:notes"/>
+          <p:cNvSpPr txBox="1">
+            <a:spLocks noGrp="1"/>
+          </p:cNvSpPr>
           <p:nvPr>
-            <p:ph idx="1" type="body"/>
+            <p:ph type="body" idx="1"/>
           </p:nvPr>
         </p:nvSpPr>
         <p:spPr>
@@ -1283,12 +1330,12 @@
           </a:prstGeom>
         </p:spPr>
         <p:txBody>
-          <a:bodyPr anchorCtr="0" anchor="t" bIns="91425" lIns="91425" spcFirstLastPara="1" rIns="91425" wrap="square" tIns="91425">
+          <a:bodyPr spcFirstLastPara="1" wrap="square" lIns="91425" tIns="91425" rIns="91425" bIns="91425" anchor="t" anchorCtr="0">
             <a:noAutofit/>
           </a:bodyPr>
           <a:lstStyle/>
           <a:p>
-            <a:pPr indent="0" lvl="0" marL="0" rtl="0" algn="l">
+            <a:pPr marL="0" lvl="0" indent="0" algn="l" rtl="0">
               <a:spcBef>
                 <a:spcPts val="0"/>
               </a:spcBef>
@@ -1297,9 +1344,6 @@
               </a:spcAft>
               <a:buNone/>
             </a:pPr>
-            <a:r>
-              <a:t/>
-            </a:r>
             <a:endParaRPr/>
           </a:p>
         </p:txBody>
@@ -1313,11 +1357,11 @@
 </file>
 
 <file path=ppt/notesSlides/notesSlide15.xml><?xml version="1.0" encoding="utf-8"?>
-<p:notes xmlns:a="http://schemas.openxmlformats.org/drawingml/2006/main" xmlns:r="http://schemas.openxmlformats.org/officeDocument/2006/relationships" xmlns:mc="http://schemas.openxmlformats.org/markup-compatibility/2006" xmlns:mv="urn:schemas-microsoft-com:mac:vml" xmlns:p="http://schemas.openxmlformats.org/presentationml/2006/main" xmlns:c="http://schemas.openxmlformats.org/drawingml/2006/chart" xmlns:dgm="http://schemas.openxmlformats.org/drawingml/2006/diagram" xmlns:o="urn:schemas-microsoft-com:office:office" xmlns:v="urn:schemas-microsoft-com:vml" xmlns:pvml="urn:schemas-microsoft-com:office:powerpoint" xmlns:com="http://schemas.openxmlformats.org/drawingml/2006/compatibility" xmlns:p14="http://schemas.microsoft.com/office/powerpoint/2010/main" xmlns:p15="http://schemas.microsoft.com/office/powerpoint/2012/main" xmlns:ahyp="http://schemas.microsoft.com/office/drawing/2018/hyperlinkcolor" showMasterPhAnim="0" showMasterSp="0">
+<p:notes xmlns:a="http://schemas.openxmlformats.org/drawingml/2006/main" xmlns:r="http://schemas.openxmlformats.org/officeDocument/2006/relationships" xmlns:p="http://schemas.openxmlformats.org/presentationml/2006/main" showMasterSp="0" showMasterPhAnim="0">
   <p:cSld>
     <p:spTree>
       <p:nvGrpSpPr>
-        <p:cNvPr id="221" name="Shape 221"/>
+        <p:cNvPr id="1" name="Shape 232"/>
         <p:cNvGrpSpPr/>
         <p:nvPr/>
       </p:nvGrpSpPr>
@@ -1331,10 +1375,12 @@
       </p:grpSpPr>
       <p:sp>
         <p:nvSpPr>
-          <p:cNvPr id="222" name="Google Shape;222;g321457fc196_0_432:notes"/>
-          <p:cNvSpPr/>
+          <p:cNvPr id="233" name="Google Shape;233;g323fc4411f9_0_0:notes"/>
+          <p:cNvSpPr>
+            <a:spLocks noGrp="1" noRot="1" noChangeAspect="1"/>
+          </p:cNvSpPr>
           <p:nvPr>
-            <p:ph idx="2" type="sldImg"/>
+            <p:ph type="sldImg" idx="2"/>
           </p:nvPr>
         </p:nvSpPr>
         <p:spPr>
@@ -1343,9 +1389,13 @@
             <a:ext cx="6096000" cy="3429000"/>
           </a:xfrm>
           <a:custGeom>
-            <a:rect b="b" l="l" r="r" t="t"/>
+            <a:avLst/>
+            <a:gdLst/>
+            <a:ahLst/>
+            <a:cxnLst/>
+            <a:rect l="l" t="t" r="r" b="b"/>
             <a:pathLst>
-              <a:path extrusionOk="0" h="120000" w="120000">
+              <a:path w="120000" h="120000" extrusionOk="0">
                 <a:moveTo>
                   <a:pt x="0" y="0"/>
                 </a:moveTo>
@@ -1366,10 +1416,12 @@
       </p:sp>
       <p:sp>
         <p:nvSpPr>
-          <p:cNvPr id="223" name="Google Shape;223;g321457fc196_0_432:notes"/>
-          <p:cNvSpPr txBox="1"/>
+          <p:cNvPr id="234" name="Google Shape;234;g323fc4411f9_0_0:notes"/>
+          <p:cNvSpPr txBox="1">
+            <a:spLocks noGrp="1"/>
+          </p:cNvSpPr>
           <p:nvPr>
-            <p:ph idx="1" type="body"/>
+            <p:ph type="body" idx="1"/>
           </p:nvPr>
         </p:nvSpPr>
         <p:spPr>
@@ -1382,12 +1434,12 @@
           </a:prstGeom>
         </p:spPr>
         <p:txBody>
-          <a:bodyPr anchorCtr="0" anchor="t" bIns="91425" lIns="91425" spcFirstLastPara="1" rIns="91425" wrap="square" tIns="91425">
+          <a:bodyPr spcFirstLastPara="1" wrap="square" lIns="91425" tIns="91425" rIns="91425" bIns="91425" anchor="t" anchorCtr="0">
             <a:noAutofit/>
           </a:bodyPr>
           <a:lstStyle/>
           <a:p>
-            <a:pPr indent="0" lvl="0" marL="0" rtl="0" algn="l">
+            <a:pPr marL="0" lvl="0" indent="0" algn="l" rtl="0">
               <a:spcBef>
                 <a:spcPts val="0"/>
               </a:spcBef>
@@ -1396,9 +1448,6 @@
               </a:spcAft>
               <a:buNone/>
             </a:pPr>
-            <a:r>
-              <a:t/>
-            </a:r>
             <a:endParaRPr/>
           </a:p>
         </p:txBody>
@@ -1412,11 +1461,11 @@
 </file>
 
 <file path=ppt/notesSlides/notesSlide16.xml><?xml version="1.0" encoding="utf-8"?>
-<p:notes xmlns:a="http://schemas.openxmlformats.org/drawingml/2006/main" xmlns:r="http://schemas.openxmlformats.org/officeDocument/2006/relationships" xmlns:mc="http://schemas.openxmlformats.org/markup-compatibility/2006" xmlns:mv="urn:schemas-microsoft-com:mac:vml" xmlns:p="http://schemas.openxmlformats.org/presentationml/2006/main" xmlns:c="http://schemas.openxmlformats.org/drawingml/2006/chart" xmlns:dgm="http://schemas.openxmlformats.org/drawingml/2006/diagram" xmlns:o="urn:schemas-microsoft-com:office:office" xmlns:v="urn:schemas-microsoft-com:vml" xmlns:pvml="urn:schemas-microsoft-com:office:powerpoint" xmlns:com="http://schemas.openxmlformats.org/drawingml/2006/compatibility" xmlns:p14="http://schemas.microsoft.com/office/powerpoint/2010/main" xmlns:p15="http://schemas.microsoft.com/office/powerpoint/2012/main" xmlns:ahyp="http://schemas.microsoft.com/office/drawing/2018/hyperlinkcolor" showMasterPhAnim="0" showMasterSp="0">
+<p:notes xmlns:a="http://schemas.openxmlformats.org/drawingml/2006/main" xmlns:r="http://schemas.openxmlformats.org/officeDocument/2006/relationships" xmlns:p="http://schemas.openxmlformats.org/presentationml/2006/main" showMasterSp="0" showMasterPhAnim="0">
   <p:cSld>
     <p:spTree>
       <p:nvGrpSpPr>
-        <p:cNvPr id="232" name="Shape 232"/>
+        <p:cNvPr id="1" name="Shape 240"/>
         <p:cNvGrpSpPr/>
         <p:nvPr/>
       </p:nvGrpSpPr>
@@ -1430,10 +1479,12 @@
       </p:grpSpPr>
       <p:sp>
         <p:nvSpPr>
-          <p:cNvPr id="233" name="Google Shape;233;g323fc4411f9_0_0:notes"/>
-          <p:cNvSpPr/>
+          <p:cNvPr id="241" name="Google Shape;241;g321457fc196_0_437:notes"/>
+          <p:cNvSpPr>
+            <a:spLocks noGrp="1" noRot="1" noChangeAspect="1"/>
+          </p:cNvSpPr>
           <p:nvPr>
-            <p:ph idx="2" type="sldImg"/>
+            <p:ph type="sldImg" idx="2"/>
           </p:nvPr>
         </p:nvSpPr>
         <p:spPr>
@@ -1442,9 +1493,13 @@
             <a:ext cx="6096000" cy="3429000"/>
           </a:xfrm>
           <a:custGeom>
-            <a:rect b="b" l="l" r="r" t="t"/>
+            <a:avLst/>
+            <a:gdLst/>
+            <a:ahLst/>
+            <a:cxnLst/>
+            <a:rect l="l" t="t" r="r" b="b"/>
             <a:pathLst>
-              <a:path extrusionOk="0" h="120000" w="120000">
+              <a:path w="120000" h="120000" extrusionOk="0">
                 <a:moveTo>
                   <a:pt x="0" y="0"/>
                 </a:moveTo>
@@ -1465,10 +1520,12 @@
       </p:sp>
       <p:sp>
         <p:nvSpPr>
-          <p:cNvPr id="234" name="Google Shape;234;g323fc4411f9_0_0:notes"/>
-          <p:cNvSpPr txBox="1"/>
+          <p:cNvPr id="242" name="Google Shape;242;g321457fc196_0_437:notes"/>
+          <p:cNvSpPr txBox="1">
+            <a:spLocks noGrp="1"/>
+          </p:cNvSpPr>
           <p:nvPr>
-            <p:ph idx="1" type="body"/>
+            <p:ph type="body" idx="1"/>
           </p:nvPr>
         </p:nvSpPr>
         <p:spPr>
@@ -1481,12 +1538,12 @@
           </a:prstGeom>
         </p:spPr>
         <p:txBody>
-          <a:bodyPr anchorCtr="0" anchor="t" bIns="91425" lIns="91425" spcFirstLastPara="1" rIns="91425" wrap="square" tIns="91425">
+          <a:bodyPr spcFirstLastPara="1" wrap="square" lIns="91425" tIns="91425" rIns="91425" bIns="91425" anchor="t" anchorCtr="0">
             <a:noAutofit/>
           </a:bodyPr>
           <a:lstStyle/>
           <a:p>
-            <a:pPr indent="0" lvl="0" marL="0" rtl="0" algn="l">
+            <a:pPr marL="0" lvl="0" indent="0" algn="l" rtl="0">
               <a:spcBef>
                 <a:spcPts val="0"/>
               </a:spcBef>
@@ -1495,9 +1552,6 @@
               </a:spcAft>
               <a:buNone/>
             </a:pPr>
-            <a:r>
-              <a:t/>
-            </a:r>
             <a:endParaRPr/>
           </a:p>
         </p:txBody>
@@ -1510,12 +1564,12 @@
 </p:notes>
 </file>
 
-<file path=ppt/notesSlides/notesSlide17.xml><?xml version="1.0" encoding="utf-8"?>
-<p:notes xmlns:a="http://schemas.openxmlformats.org/drawingml/2006/main" xmlns:r="http://schemas.openxmlformats.org/officeDocument/2006/relationships" xmlns:mc="http://schemas.openxmlformats.org/markup-compatibility/2006" xmlns:mv="urn:schemas-microsoft-com:mac:vml" xmlns:p="http://schemas.openxmlformats.org/presentationml/2006/main" xmlns:c="http://schemas.openxmlformats.org/drawingml/2006/chart" xmlns:dgm="http://schemas.openxmlformats.org/drawingml/2006/diagram" xmlns:o="urn:schemas-microsoft-com:office:office" xmlns:v="urn:schemas-microsoft-com:vml" xmlns:pvml="urn:schemas-microsoft-com:office:powerpoint" xmlns:com="http://schemas.openxmlformats.org/drawingml/2006/compatibility" xmlns:p14="http://schemas.microsoft.com/office/powerpoint/2010/main" xmlns:p15="http://schemas.microsoft.com/office/powerpoint/2012/main" xmlns:ahyp="http://schemas.microsoft.com/office/drawing/2018/hyperlinkcolor" showMasterPhAnim="0" showMasterSp="0">
+<file path=ppt/notesSlides/notesSlide2.xml><?xml version="1.0" encoding="utf-8"?>
+<p:notes xmlns:a="http://schemas.openxmlformats.org/drawingml/2006/main" xmlns:r="http://schemas.openxmlformats.org/officeDocument/2006/relationships" xmlns:p="http://schemas.openxmlformats.org/presentationml/2006/main" showMasterSp="0" showMasterPhAnim="0">
   <p:cSld>
     <p:spTree>
       <p:nvGrpSpPr>
-        <p:cNvPr id="240" name="Shape 240"/>
+        <p:cNvPr id="1" name="Shape 130"/>
         <p:cNvGrpSpPr/>
         <p:nvPr/>
       </p:nvGrpSpPr>
@@ -1529,10 +1583,12 @@
       </p:grpSpPr>
       <p:sp>
         <p:nvSpPr>
-          <p:cNvPr id="241" name="Google Shape;241;g321457fc196_0_437:notes"/>
-          <p:cNvSpPr/>
+          <p:cNvPr id="131" name="Google Shape;131;g321457fc196_0_268:notes"/>
+          <p:cNvSpPr>
+            <a:spLocks noGrp="1" noRot="1" noChangeAspect="1"/>
+          </p:cNvSpPr>
           <p:nvPr>
-            <p:ph idx="2" type="sldImg"/>
+            <p:ph type="sldImg" idx="2"/>
           </p:nvPr>
         </p:nvSpPr>
         <p:spPr>
@@ -1541,9 +1597,13 @@
             <a:ext cx="6096000" cy="3429000"/>
           </a:xfrm>
           <a:custGeom>
-            <a:rect b="b" l="l" r="r" t="t"/>
+            <a:avLst/>
+            <a:gdLst/>
+            <a:ahLst/>
+            <a:cxnLst/>
+            <a:rect l="l" t="t" r="r" b="b"/>
             <a:pathLst>
-              <a:path extrusionOk="0" h="120000" w="120000">
+              <a:path w="120000" h="120000" extrusionOk="0">
                 <a:moveTo>
                   <a:pt x="0" y="0"/>
                 </a:moveTo>
@@ -1564,10 +1624,12 @@
       </p:sp>
       <p:sp>
         <p:nvSpPr>
-          <p:cNvPr id="242" name="Google Shape;242;g321457fc196_0_437:notes"/>
-          <p:cNvSpPr txBox="1"/>
+          <p:cNvPr id="132" name="Google Shape;132;g321457fc196_0_268:notes"/>
+          <p:cNvSpPr txBox="1">
+            <a:spLocks noGrp="1"/>
+          </p:cNvSpPr>
           <p:nvPr>
-            <p:ph idx="1" type="body"/>
+            <p:ph type="body" idx="1"/>
           </p:nvPr>
         </p:nvSpPr>
         <p:spPr>
@@ -1580,12 +1642,12 @@
           </a:prstGeom>
         </p:spPr>
         <p:txBody>
-          <a:bodyPr anchorCtr="0" anchor="t" bIns="91425" lIns="91425" spcFirstLastPara="1" rIns="91425" wrap="square" tIns="91425">
+          <a:bodyPr spcFirstLastPara="1" wrap="square" lIns="91425" tIns="91425" rIns="91425" bIns="91425" anchor="t" anchorCtr="0">
             <a:noAutofit/>
           </a:bodyPr>
           <a:lstStyle/>
           <a:p>
-            <a:pPr indent="0" lvl="0" marL="0" rtl="0" algn="l">
+            <a:pPr marL="0" lvl="0" indent="0" algn="l" rtl="0">
               <a:spcBef>
                 <a:spcPts val="0"/>
               </a:spcBef>
@@ -1594,9 +1656,6 @@
               </a:spcAft>
               <a:buNone/>
             </a:pPr>
-            <a:r>
-              <a:t/>
-            </a:r>
             <a:endParaRPr/>
           </a:p>
         </p:txBody>
@@ -1609,12 +1668,12 @@
 </p:notes>
 </file>
 
-<file path=ppt/notesSlides/notesSlide2.xml><?xml version="1.0" encoding="utf-8"?>
-<p:notes xmlns:a="http://schemas.openxmlformats.org/drawingml/2006/main" xmlns:r="http://schemas.openxmlformats.org/officeDocument/2006/relationships" xmlns:mc="http://schemas.openxmlformats.org/markup-compatibility/2006" xmlns:mv="urn:schemas-microsoft-com:mac:vml" xmlns:p="http://schemas.openxmlformats.org/presentationml/2006/main" xmlns:c="http://schemas.openxmlformats.org/drawingml/2006/chart" xmlns:dgm="http://schemas.openxmlformats.org/drawingml/2006/diagram" xmlns:o="urn:schemas-microsoft-com:office:office" xmlns:v="urn:schemas-microsoft-com:vml" xmlns:pvml="urn:schemas-microsoft-com:office:powerpoint" xmlns:com="http://schemas.openxmlformats.org/drawingml/2006/compatibility" xmlns:p14="http://schemas.microsoft.com/office/powerpoint/2010/main" xmlns:p15="http://schemas.microsoft.com/office/powerpoint/2012/main" xmlns:ahyp="http://schemas.microsoft.com/office/drawing/2018/hyperlinkcolor" showMasterPhAnim="0" showMasterSp="0">
+<file path=ppt/notesSlides/notesSlide3.xml><?xml version="1.0" encoding="utf-8"?>
+<p:notes xmlns:a="http://schemas.openxmlformats.org/drawingml/2006/main" xmlns:r="http://schemas.openxmlformats.org/officeDocument/2006/relationships" xmlns:p="http://schemas.openxmlformats.org/presentationml/2006/main" showMasterSp="0" showMasterPhAnim="0">
   <p:cSld>
     <p:spTree>
       <p:nvGrpSpPr>
-        <p:cNvPr id="130" name="Shape 130"/>
+        <p:cNvPr id="1" name="Shape 142"/>
         <p:cNvGrpSpPr/>
         <p:nvPr/>
       </p:nvGrpSpPr>
@@ -1628,10 +1687,12 @@
       </p:grpSpPr>
       <p:sp>
         <p:nvSpPr>
-          <p:cNvPr id="131" name="Google Shape;131;g321457fc196_0_268:notes"/>
-          <p:cNvSpPr/>
+          <p:cNvPr id="143" name="Google Shape;143;g31e490f5968_0_14:notes"/>
+          <p:cNvSpPr>
+            <a:spLocks noGrp="1" noRot="1" noChangeAspect="1"/>
+          </p:cNvSpPr>
           <p:nvPr>
-            <p:ph idx="2" type="sldImg"/>
+            <p:ph type="sldImg" idx="2"/>
           </p:nvPr>
         </p:nvSpPr>
         <p:spPr>
@@ -1640,9 +1701,13 @@
             <a:ext cx="6096000" cy="3429000"/>
           </a:xfrm>
           <a:custGeom>
-            <a:rect b="b" l="l" r="r" t="t"/>
+            <a:avLst/>
+            <a:gdLst/>
+            <a:ahLst/>
+            <a:cxnLst/>
+            <a:rect l="l" t="t" r="r" b="b"/>
             <a:pathLst>
-              <a:path extrusionOk="0" h="120000" w="120000">
+              <a:path w="120000" h="120000" extrusionOk="0">
                 <a:moveTo>
                   <a:pt x="0" y="0"/>
                 </a:moveTo>
@@ -1663,10 +1728,12 @@
       </p:sp>
       <p:sp>
         <p:nvSpPr>
-          <p:cNvPr id="132" name="Google Shape;132;g321457fc196_0_268:notes"/>
-          <p:cNvSpPr txBox="1"/>
+          <p:cNvPr id="144" name="Google Shape;144;g31e490f5968_0_14:notes"/>
+          <p:cNvSpPr txBox="1">
+            <a:spLocks noGrp="1"/>
+          </p:cNvSpPr>
           <p:nvPr>
-            <p:ph idx="1" type="body"/>
+            <p:ph type="body" idx="1"/>
           </p:nvPr>
         </p:nvSpPr>
         <p:spPr>
@@ -1679,12 +1746,12 @@
           </a:prstGeom>
         </p:spPr>
         <p:txBody>
-          <a:bodyPr anchorCtr="0" anchor="t" bIns="91425" lIns="91425" spcFirstLastPara="1" rIns="91425" wrap="square" tIns="91425">
+          <a:bodyPr spcFirstLastPara="1" wrap="square" lIns="91425" tIns="91425" rIns="91425" bIns="91425" anchor="t" anchorCtr="0">
             <a:noAutofit/>
           </a:bodyPr>
           <a:lstStyle/>
           <a:p>
-            <a:pPr indent="0" lvl="0" marL="0" rtl="0" algn="l">
+            <a:pPr marL="0" lvl="0" indent="0" algn="l" rtl="0">
               <a:spcBef>
                 <a:spcPts val="0"/>
               </a:spcBef>
@@ -1693,9 +1760,6 @@
               </a:spcAft>
               <a:buNone/>
             </a:pPr>
-            <a:r>
-              <a:t/>
-            </a:r>
             <a:endParaRPr/>
           </a:p>
         </p:txBody>
@@ -1708,12 +1772,12 @@
 </p:notes>
 </file>
 
-<file path=ppt/notesSlides/notesSlide3.xml><?xml version="1.0" encoding="utf-8"?>
-<p:notes xmlns:a="http://schemas.openxmlformats.org/drawingml/2006/main" xmlns:r="http://schemas.openxmlformats.org/officeDocument/2006/relationships" xmlns:mc="http://schemas.openxmlformats.org/markup-compatibility/2006" xmlns:mv="urn:schemas-microsoft-com:mac:vml" xmlns:p="http://schemas.openxmlformats.org/presentationml/2006/main" xmlns:c="http://schemas.openxmlformats.org/drawingml/2006/chart" xmlns:dgm="http://schemas.openxmlformats.org/drawingml/2006/diagram" xmlns:o="urn:schemas-microsoft-com:office:office" xmlns:v="urn:schemas-microsoft-com:vml" xmlns:pvml="urn:schemas-microsoft-com:office:powerpoint" xmlns:com="http://schemas.openxmlformats.org/drawingml/2006/compatibility" xmlns:p14="http://schemas.microsoft.com/office/powerpoint/2010/main" xmlns:p15="http://schemas.microsoft.com/office/powerpoint/2012/main" xmlns:ahyp="http://schemas.microsoft.com/office/drawing/2018/hyperlinkcolor" showMasterPhAnim="0" showMasterSp="0">
+<file path=ppt/notesSlides/notesSlide4.xml><?xml version="1.0" encoding="utf-8"?>
+<p:notes xmlns:a="http://schemas.openxmlformats.org/drawingml/2006/main" xmlns:r="http://schemas.openxmlformats.org/officeDocument/2006/relationships" xmlns:p="http://schemas.openxmlformats.org/presentationml/2006/main" showMasterSp="0" showMasterPhAnim="0">
   <p:cSld>
     <p:spTree>
       <p:nvGrpSpPr>
-        <p:cNvPr id="136" name="Shape 136"/>
+        <p:cNvPr id="1" name="Shape 148"/>
         <p:cNvGrpSpPr/>
         <p:nvPr/>
       </p:nvGrpSpPr>
@@ -1727,10 +1791,12 @@
       </p:grpSpPr>
       <p:sp>
         <p:nvSpPr>
-          <p:cNvPr id="137" name="Google Shape;137;g31e490f5968_0_1:notes"/>
-          <p:cNvSpPr/>
+          <p:cNvPr id="149" name="Google Shape;149;g31e490f5968_0_21:notes"/>
+          <p:cNvSpPr>
+            <a:spLocks noGrp="1" noRot="1" noChangeAspect="1"/>
+          </p:cNvSpPr>
           <p:nvPr>
-            <p:ph idx="2" type="sldImg"/>
+            <p:ph type="sldImg" idx="2"/>
           </p:nvPr>
         </p:nvSpPr>
         <p:spPr>
@@ -1739,9 +1805,13 @@
             <a:ext cx="6096000" cy="3429000"/>
           </a:xfrm>
           <a:custGeom>
-            <a:rect b="b" l="l" r="r" t="t"/>
+            <a:avLst/>
+            <a:gdLst/>
+            <a:ahLst/>
+            <a:cxnLst/>
+            <a:rect l="l" t="t" r="r" b="b"/>
             <a:pathLst>
-              <a:path extrusionOk="0" h="120000" w="120000">
+              <a:path w="120000" h="120000" extrusionOk="0">
                 <a:moveTo>
                   <a:pt x="0" y="0"/>
                 </a:moveTo>
@@ -1762,10 +1832,12 @@
       </p:sp>
       <p:sp>
         <p:nvSpPr>
-          <p:cNvPr id="138" name="Google Shape;138;g31e490f5968_0_1:notes"/>
-          <p:cNvSpPr txBox="1"/>
+          <p:cNvPr id="150" name="Google Shape;150;g31e490f5968_0_21:notes"/>
+          <p:cNvSpPr txBox="1">
+            <a:spLocks noGrp="1"/>
+          </p:cNvSpPr>
           <p:nvPr>
-            <p:ph idx="1" type="body"/>
+            <p:ph type="body" idx="1"/>
           </p:nvPr>
         </p:nvSpPr>
         <p:spPr>
@@ -1778,12 +1850,12 @@
           </a:prstGeom>
         </p:spPr>
         <p:txBody>
-          <a:bodyPr anchorCtr="0" anchor="t" bIns="91425" lIns="91425" spcFirstLastPara="1" rIns="91425" wrap="square" tIns="91425">
+          <a:bodyPr spcFirstLastPara="1" wrap="square" lIns="91425" tIns="91425" rIns="91425" bIns="91425" anchor="t" anchorCtr="0">
             <a:noAutofit/>
           </a:bodyPr>
           <a:lstStyle/>
           <a:p>
-            <a:pPr indent="0" lvl="0" marL="0" rtl="0" algn="l">
+            <a:pPr marL="0" lvl="0" indent="0" algn="l" rtl="0">
               <a:spcBef>
                 <a:spcPts val="0"/>
               </a:spcBef>
@@ -1792,9 +1864,6 @@
               </a:spcAft>
               <a:buNone/>
             </a:pPr>
-            <a:r>
-              <a:t/>
-            </a:r>
             <a:endParaRPr/>
           </a:p>
         </p:txBody>
@@ -1807,12 +1876,12 @@
 </p:notes>
 </file>
 
-<file path=ppt/notesSlides/notesSlide4.xml><?xml version="1.0" encoding="utf-8"?>
-<p:notes xmlns:a="http://schemas.openxmlformats.org/drawingml/2006/main" xmlns:r="http://schemas.openxmlformats.org/officeDocument/2006/relationships" xmlns:mc="http://schemas.openxmlformats.org/markup-compatibility/2006" xmlns:mv="urn:schemas-microsoft-com:mac:vml" xmlns:p="http://schemas.openxmlformats.org/presentationml/2006/main" xmlns:c="http://schemas.openxmlformats.org/drawingml/2006/chart" xmlns:dgm="http://schemas.openxmlformats.org/drawingml/2006/diagram" xmlns:o="urn:schemas-microsoft-com:office:office" xmlns:v="urn:schemas-microsoft-com:vml" xmlns:pvml="urn:schemas-microsoft-com:office:powerpoint" xmlns:com="http://schemas.openxmlformats.org/drawingml/2006/compatibility" xmlns:p14="http://schemas.microsoft.com/office/powerpoint/2010/main" xmlns:p15="http://schemas.microsoft.com/office/powerpoint/2012/main" xmlns:ahyp="http://schemas.microsoft.com/office/drawing/2018/hyperlinkcolor" showMasterPhAnim="0" showMasterSp="0">
+<file path=ppt/notesSlides/notesSlide5.xml><?xml version="1.0" encoding="utf-8"?>
+<p:notes xmlns:a="http://schemas.openxmlformats.org/drawingml/2006/main" xmlns:r="http://schemas.openxmlformats.org/officeDocument/2006/relationships" xmlns:p="http://schemas.openxmlformats.org/presentationml/2006/main" showMasterSp="0" showMasterPhAnim="0">
   <p:cSld>
     <p:spTree>
       <p:nvGrpSpPr>
-        <p:cNvPr id="142" name="Shape 142"/>
+        <p:cNvPr id="1" name="Shape 154"/>
         <p:cNvGrpSpPr/>
         <p:nvPr/>
       </p:nvGrpSpPr>
@@ -1826,10 +1895,12 @@
       </p:grpSpPr>
       <p:sp>
         <p:nvSpPr>
-          <p:cNvPr id="143" name="Google Shape;143;g31e490f5968_0_14:notes"/>
-          <p:cNvSpPr/>
+          <p:cNvPr id="155" name="Google Shape;155;g321457fc196_0_397:notes"/>
+          <p:cNvSpPr>
+            <a:spLocks noGrp="1" noRot="1" noChangeAspect="1"/>
+          </p:cNvSpPr>
           <p:nvPr>
-            <p:ph idx="2" type="sldImg"/>
+            <p:ph type="sldImg" idx="2"/>
           </p:nvPr>
         </p:nvSpPr>
         <p:spPr>
@@ -1838,9 +1909,13 @@
             <a:ext cx="6096000" cy="3429000"/>
           </a:xfrm>
           <a:custGeom>
-            <a:rect b="b" l="l" r="r" t="t"/>
+            <a:avLst/>
+            <a:gdLst/>
+            <a:ahLst/>
+            <a:cxnLst/>
+            <a:rect l="l" t="t" r="r" b="b"/>
             <a:pathLst>
-              <a:path extrusionOk="0" h="120000" w="120000">
+              <a:path w="120000" h="120000" extrusionOk="0">
                 <a:moveTo>
                   <a:pt x="0" y="0"/>
                 </a:moveTo>
@@ -1861,10 +1936,12 @@
       </p:sp>
       <p:sp>
         <p:nvSpPr>
-          <p:cNvPr id="144" name="Google Shape;144;g31e490f5968_0_14:notes"/>
-          <p:cNvSpPr txBox="1"/>
+          <p:cNvPr id="156" name="Google Shape;156;g321457fc196_0_397:notes"/>
+          <p:cNvSpPr txBox="1">
+            <a:spLocks noGrp="1"/>
+          </p:cNvSpPr>
           <p:nvPr>
-            <p:ph idx="1" type="body"/>
+            <p:ph type="body" idx="1"/>
           </p:nvPr>
         </p:nvSpPr>
         <p:spPr>
@@ -1877,12 +1954,12 @@
           </a:prstGeom>
         </p:spPr>
         <p:txBody>
-          <a:bodyPr anchorCtr="0" anchor="t" bIns="91425" lIns="91425" spcFirstLastPara="1" rIns="91425" wrap="square" tIns="91425">
+          <a:bodyPr spcFirstLastPara="1" wrap="square" lIns="91425" tIns="91425" rIns="91425" bIns="91425" anchor="t" anchorCtr="0">
             <a:noAutofit/>
           </a:bodyPr>
           <a:lstStyle/>
           <a:p>
-            <a:pPr indent="0" lvl="0" marL="0" rtl="0" algn="l">
+            <a:pPr marL="0" lvl="0" indent="0" algn="l" rtl="0">
               <a:spcBef>
                 <a:spcPts val="0"/>
               </a:spcBef>
@@ -1891,9 +1968,6 @@
               </a:spcAft>
               <a:buNone/>
             </a:pPr>
-            <a:r>
-              <a:t/>
-            </a:r>
             <a:endParaRPr/>
           </a:p>
         </p:txBody>
@@ -1906,12 +1980,12 @@
 </p:notes>
 </file>
 
-<file path=ppt/notesSlides/notesSlide5.xml><?xml version="1.0" encoding="utf-8"?>
-<p:notes xmlns:a="http://schemas.openxmlformats.org/drawingml/2006/main" xmlns:r="http://schemas.openxmlformats.org/officeDocument/2006/relationships" xmlns:mc="http://schemas.openxmlformats.org/markup-compatibility/2006" xmlns:mv="urn:schemas-microsoft-com:mac:vml" xmlns:p="http://schemas.openxmlformats.org/presentationml/2006/main" xmlns:c="http://schemas.openxmlformats.org/drawingml/2006/chart" xmlns:dgm="http://schemas.openxmlformats.org/drawingml/2006/diagram" xmlns:o="urn:schemas-microsoft-com:office:office" xmlns:v="urn:schemas-microsoft-com:vml" xmlns:pvml="urn:schemas-microsoft-com:office:powerpoint" xmlns:com="http://schemas.openxmlformats.org/drawingml/2006/compatibility" xmlns:p14="http://schemas.microsoft.com/office/powerpoint/2010/main" xmlns:p15="http://schemas.microsoft.com/office/powerpoint/2012/main" xmlns:ahyp="http://schemas.microsoft.com/office/drawing/2018/hyperlinkcolor" showMasterPhAnim="0" showMasterSp="0">
+<file path=ppt/notesSlides/notesSlide6.xml><?xml version="1.0" encoding="utf-8"?>
+<p:notes xmlns:a="http://schemas.openxmlformats.org/drawingml/2006/main" xmlns:r="http://schemas.openxmlformats.org/officeDocument/2006/relationships" xmlns:p="http://schemas.openxmlformats.org/presentationml/2006/main" showMasterSp="0" showMasterPhAnim="0">
   <p:cSld>
     <p:spTree>
       <p:nvGrpSpPr>
-        <p:cNvPr id="148" name="Shape 148"/>
+        <p:cNvPr id="1" name="Shape 167"/>
         <p:cNvGrpSpPr/>
         <p:nvPr/>
       </p:nvGrpSpPr>
@@ -1925,10 +1999,12 @@
       </p:grpSpPr>
       <p:sp>
         <p:nvSpPr>
-          <p:cNvPr id="149" name="Google Shape;149;g31e490f5968_0_21:notes"/>
-          <p:cNvSpPr/>
+          <p:cNvPr id="168" name="Google Shape;168;g321457fc196_0_402:notes"/>
+          <p:cNvSpPr>
+            <a:spLocks noGrp="1" noRot="1" noChangeAspect="1"/>
+          </p:cNvSpPr>
           <p:nvPr>
-            <p:ph idx="2" type="sldImg"/>
+            <p:ph type="sldImg" idx="2"/>
           </p:nvPr>
         </p:nvSpPr>
         <p:spPr>
@@ -1937,9 +2013,13 @@
             <a:ext cx="6096000" cy="3429000"/>
           </a:xfrm>
           <a:custGeom>
-            <a:rect b="b" l="l" r="r" t="t"/>
+            <a:avLst/>
+            <a:gdLst/>
+            <a:ahLst/>
+            <a:cxnLst/>
+            <a:rect l="l" t="t" r="r" b="b"/>
             <a:pathLst>
-              <a:path extrusionOk="0" h="120000" w="120000">
+              <a:path w="120000" h="120000" extrusionOk="0">
                 <a:moveTo>
                   <a:pt x="0" y="0"/>
                 </a:moveTo>
@@ -1960,10 +2040,12 @@
       </p:sp>
       <p:sp>
         <p:nvSpPr>
-          <p:cNvPr id="150" name="Google Shape;150;g31e490f5968_0_21:notes"/>
-          <p:cNvSpPr txBox="1"/>
+          <p:cNvPr id="169" name="Google Shape;169;g321457fc196_0_402:notes"/>
+          <p:cNvSpPr txBox="1">
+            <a:spLocks noGrp="1"/>
+          </p:cNvSpPr>
           <p:nvPr>
-            <p:ph idx="1" type="body"/>
+            <p:ph type="body" idx="1"/>
           </p:nvPr>
         </p:nvSpPr>
         <p:spPr>
@@ -1976,12 +2058,12 @@
           </a:prstGeom>
         </p:spPr>
         <p:txBody>
-          <a:bodyPr anchorCtr="0" anchor="t" bIns="91425" lIns="91425" spcFirstLastPara="1" rIns="91425" wrap="square" tIns="91425">
+          <a:bodyPr spcFirstLastPara="1" wrap="square" lIns="91425" tIns="91425" rIns="91425" bIns="91425" anchor="t" anchorCtr="0">
             <a:noAutofit/>
           </a:bodyPr>
           <a:lstStyle/>
           <a:p>
-            <a:pPr indent="0" lvl="0" marL="0" rtl="0" algn="l">
+            <a:pPr marL="0" lvl="0" indent="0" algn="l" rtl="0">
               <a:spcBef>
                 <a:spcPts val="0"/>
               </a:spcBef>
@@ -1990,9 +2072,6 @@
               </a:spcAft>
               <a:buNone/>
             </a:pPr>
-            <a:r>
-              <a:t/>
-            </a:r>
             <a:endParaRPr/>
           </a:p>
         </p:txBody>
@@ -2005,12 +2084,12 @@
 </p:notes>
 </file>
 
-<file path=ppt/notesSlides/notesSlide6.xml><?xml version="1.0" encoding="utf-8"?>
-<p:notes xmlns:a="http://schemas.openxmlformats.org/drawingml/2006/main" xmlns:r="http://schemas.openxmlformats.org/officeDocument/2006/relationships" xmlns:mc="http://schemas.openxmlformats.org/markup-compatibility/2006" xmlns:mv="urn:schemas-microsoft-com:mac:vml" xmlns:p="http://schemas.openxmlformats.org/presentationml/2006/main" xmlns:c="http://schemas.openxmlformats.org/drawingml/2006/chart" xmlns:dgm="http://schemas.openxmlformats.org/drawingml/2006/diagram" xmlns:o="urn:schemas-microsoft-com:office:office" xmlns:v="urn:schemas-microsoft-com:vml" xmlns:pvml="urn:schemas-microsoft-com:office:powerpoint" xmlns:com="http://schemas.openxmlformats.org/drawingml/2006/compatibility" xmlns:p14="http://schemas.microsoft.com/office/powerpoint/2010/main" xmlns:p15="http://schemas.microsoft.com/office/powerpoint/2012/main" xmlns:ahyp="http://schemas.microsoft.com/office/drawing/2018/hyperlinkcolor" showMasterPhAnim="0" showMasterSp="0">
+<file path=ppt/notesSlides/notesSlide7.xml><?xml version="1.0" encoding="utf-8"?>
+<p:notes xmlns:a="http://schemas.openxmlformats.org/drawingml/2006/main" xmlns:r="http://schemas.openxmlformats.org/officeDocument/2006/relationships" xmlns:p="http://schemas.openxmlformats.org/presentationml/2006/main" showMasterSp="0" showMasterPhAnim="0">
   <p:cSld>
     <p:spTree>
       <p:nvGrpSpPr>
-        <p:cNvPr id="154" name="Shape 154"/>
+        <p:cNvPr id="1" name="Shape 173"/>
         <p:cNvGrpSpPr/>
         <p:nvPr/>
       </p:nvGrpSpPr>
@@ -2024,10 +2103,12 @@
       </p:grpSpPr>
       <p:sp>
         <p:nvSpPr>
-          <p:cNvPr id="155" name="Google Shape;155;g321457fc196_0_397:notes"/>
-          <p:cNvSpPr/>
+          <p:cNvPr id="174" name="Google Shape;174;g321457fc196_0_407:notes"/>
+          <p:cNvSpPr>
+            <a:spLocks noGrp="1" noRot="1" noChangeAspect="1"/>
+          </p:cNvSpPr>
           <p:nvPr>
-            <p:ph idx="2" type="sldImg"/>
+            <p:ph type="sldImg" idx="2"/>
           </p:nvPr>
         </p:nvSpPr>
         <p:spPr>
@@ -2036,9 +2117,13 @@
             <a:ext cx="6096000" cy="3429000"/>
           </a:xfrm>
           <a:custGeom>
-            <a:rect b="b" l="l" r="r" t="t"/>
+            <a:avLst/>
+            <a:gdLst/>
+            <a:ahLst/>
+            <a:cxnLst/>
+            <a:rect l="l" t="t" r="r" b="b"/>
             <a:pathLst>
-              <a:path extrusionOk="0" h="120000" w="120000">
+              <a:path w="120000" h="120000" extrusionOk="0">
                 <a:moveTo>
                   <a:pt x="0" y="0"/>
                 </a:moveTo>
@@ -2059,10 +2144,12 @@
       </p:sp>
       <p:sp>
         <p:nvSpPr>
-          <p:cNvPr id="156" name="Google Shape;156;g321457fc196_0_397:notes"/>
-          <p:cNvSpPr txBox="1"/>
+          <p:cNvPr id="175" name="Google Shape;175;g321457fc196_0_407:notes"/>
+          <p:cNvSpPr txBox="1">
+            <a:spLocks noGrp="1"/>
+          </p:cNvSpPr>
           <p:nvPr>
-            <p:ph idx="1" type="body"/>
+            <p:ph type="body" idx="1"/>
           </p:nvPr>
         </p:nvSpPr>
         <p:spPr>
@@ -2075,12 +2162,12 @@
           </a:prstGeom>
         </p:spPr>
         <p:txBody>
-          <a:bodyPr anchorCtr="0" anchor="t" bIns="91425" lIns="91425" spcFirstLastPara="1" rIns="91425" wrap="square" tIns="91425">
+          <a:bodyPr spcFirstLastPara="1" wrap="square" lIns="91425" tIns="91425" rIns="91425" bIns="91425" anchor="t" anchorCtr="0">
             <a:noAutofit/>
           </a:bodyPr>
           <a:lstStyle/>
           <a:p>
-            <a:pPr indent="0" lvl="0" marL="0" rtl="0" algn="l">
+            <a:pPr marL="0" lvl="0" indent="0" algn="l" rtl="0">
               <a:spcBef>
                 <a:spcPts val="0"/>
               </a:spcBef>
@@ -2089,9 +2176,6 @@
               </a:spcAft>
               <a:buNone/>
             </a:pPr>
-            <a:r>
-              <a:t/>
-            </a:r>
             <a:endParaRPr/>
           </a:p>
         </p:txBody>
@@ -2104,12 +2188,12 @@
 </p:notes>
 </file>
 
-<file path=ppt/notesSlides/notesSlide7.xml><?xml version="1.0" encoding="utf-8"?>
-<p:notes xmlns:a="http://schemas.openxmlformats.org/drawingml/2006/main" xmlns:r="http://schemas.openxmlformats.org/officeDocument/2006/relationships" xmlns:mc="http://schemas.openxmlformats.org/markup-compatibility/2006" xmlns:mv="urn:schemas-microsoft-com:mac:vml" xmlns:p="http://schemas.openxmlformats.org/presentationml/2006/main" xmlns:c="http://schemas.openxmlformats.org/drawingml/2006/chart" xmlns:dgm="http://schemas.openxmlformats.org/drawingml/2006/diagram" xmlns:o="urn:schemas-microsoft-com:office:office" xmlns:v="urn:schemas-microsoft-com:vml" xmlns:pvml="urn:schemas-microsoft-com:office:powerpoint" xmlns:com="http://schemas.openxmlformats.org/drawingml/2006/compatibility" xmlns:p14="http://schemas.microsoft.com/office/powerpoint/2010/main" xmlns:p15="http://schemas.microsoft.com/office/powerpoint/2012/main" xmlns:ahyp="http://schemas.microsoft.com/office/drawing/2018/hyperlinkcolor" showMasterPhAnim="0" showMasterSp="0">
+<file path=ppt/notesSlides/notesSlide8.xml><?xml version="1.0" encoding="utf-8"?>
+<p:notes xmlns:a="http://schemas.openxmlformats.org/drawingml/2006/main" xmlns:r="http://schemas.openxmlformats.org/officeDocument/2006/relationships" xmlns:p="http://schemas.openxmlformats.org/presentationml/2006/main" showMasterSp="0" showMasterPhAnim="0">
   <p:cSld>
     <p:spTree>
       <p:nvGrpSpPr>
-        <p:cNvPr id="167" name="Shape 167"/>
+        <p:cNvPr id="1" name="Shape 179"/>
         <p:cNvGrpSpPr/>
         <p:nvPr/>
       </p:nvGrpSpPr>
@@ -2123,10 +2207,12 @@
       </p:grpSpPr>
       <p:sp>
         <p:nvSpPr>
-          <p:cNvPr id="168" name="Google Shape;168;g321457fc196_0_402:notes"/>
-          <p:cNvSpPr/>
+          <p:cNvPr id="180" name="Google Shape;180;g321457fc196_0_412:notes"/>
+          <p:cNvSpPr>
+            <a:spLocks noGrp="1" noRot="1" noChangeAspect="1"/>
+          </p:cNvSpPr>
           <p:nvPr>
-            <p:ph idx="2" type="sldImg"/>
+            <p:ph type="sldImg" idx="2"/>
           </p:nvPr>
         </p:nvSpPr>
         <p:spPr>
@@ -2135,9 +2221,13 @@
             <a:ext cx="6096000" cy="3429000"/>
           </a:xfrm>
           <a:custGeom>
-            <a:rect b="b" l="l" r="r" t="t"/>
+            <a:avLst/>
+            <a:gdLst/>
+            <a:ahLst/>
+            <a:cxnLst/>
+            <a:rect l="l" t="t" r="r" b="b"/>
             <a:pathLst>
-              <a:path extrusionOk="0" h="120000" w="120000">
+              <a:path w="120000" h="120000" extrusionOk="0">
                 <a:moveTo>
                   <a:pt x="0" y="0"/>
                 </a:moveTo>
@@ -2158,10 +2248,12 @@
       </p:sp>
       <p:sp>
         <p:nvSpPr>
-          <p:cNvPr id="169" name="Google Shape;169;g321457fc196_0_402:notes"/>
-          <p:cNvSpPr txBox="1"/>
+          <p:cNvPr id="181" name="Google Shape;181;g321457fc196_0_412:notes"/>
+          <p:cNvSpPr txBox="1">
+            <a:spLocks noGrp="1"/>
+          </p:cNvSpPr>
           <p:nvPr>
-            <p:ph idx="1" type="body"/>
+            <p:ph type="body" idx="1"/>
           </p:nvPr>
         </p:nvSpPr>
         <p:spPr>
@@ -2174,12 +2266,12 @@
           </a:prstGeom>
         </p:spPr>
         <p:txBody>
-          <a:bodyPr anchorCtr="0" anchor="t" bIns="91425" lIns="91425" spcFirstLastPara="1" rIns="91425" wrap="square" tIns="91425">
+          <a:bodyPr spcFirstLastPara="1" wrap="square" lIns="91425" tIns="91425" rIns="91425" bIns="91425" anchor="t" anchorCtr="0">
             <a:noAutofit/>
           </a:bodyPr>
           <a:lstStyle/>
           <a:p>
-            <a:pPr indent="0" lvl="0" marL="0" rtl="0" algn="l">
+            <a:pPr marL="0" lvl="0" indent="0" algn="l" rtl="0">
               <a:spcBef>
                 <a:spcPts val="0"/>
               </a:spcBef>
@@ -2188,9 +2280,6 @@
               </a:spcAft>
               <a:buNone/>
             </a:pPr>
-            <a:r>
-              <a:t/>
-            </a:r>
             <a:endParaRPr/>
           </a:p>
         </p:txBody>
@@ -2203,12 +2292,12 @@
 </p:notes>
 </file>
 
-<file path=ppt/notesSlides/notesSlide8.xml><?xml version="1.0" encoding="utf-8"?>
-<p:notes xmlns:a="http://schemas.openxmlformats.org/drawingml/2006/main" xmlns:r="http://schemas.openxmlformats.org/officeDocument/2006/relationships" xmlns:mc="http://schemas.openxmlformats.org/markup-compatibility/2006" xmlns:mv="urn:schemas-microsoft-com:mac:vml" xmlns:p="http://schemas.openxmlformats.org/presentationml/2006/main" xmlns:c="http://schemas.openxmlformats.org/drawingml/2006/chart" xmlns:dgm="http://schemas.openxmlformats.org/drawingml/2006/diagram" xmlns:o="urn:schemas-microsoft-com:office:office" xmlns:v="urn:schemas-microsoft-com:vml" xmlns:pvml="urn:schemas-microsoft-com:office:powerpoint" xmlns:com="http://schemas.openxmlformats.org/drawingml/2006/compatibility" xmlns:p14="http://schemas.microsoft.com/office/powerpoint/2010/main" xmlns:p15="http://schemas.microsoft.com/office/powerpoint/2012/main" xmlns:ahyp="http://schemas.microsoft.com/office/drawing/2018/hyperlinkcolor" showMasterPhAnim="0" showMasterSp="0">
+<file path=ppt/notesSlides/notesSlide9.xml><?xml version="1.0" encoding="utf-8"?>
+<p:notes xmlns:a="http://schemas.openxmlformats.org/drawingml/2006/main" xmlns:r="http://schemas.openxmlformats.org/officeDocument/2006/relationships" xmlns:p="http://schemas.openxmlformats.org/presentationml/2006/main" showMasterSp="0" showMasterPhAnim="0">
   <p:cSld>
     <p:spTree>
       <p:nvGrpSpPr>
-        <p:cNvPr id="173" name="Shape 173"/>
+        <p:cNvPr id="1" name="Shape 185"/>
         <p:cNvGrpSpPr/>
         <p:nvPr/>
       </p:nvGrpSpPr>
@@ -2222,10 +2311,12 @@
       </p:grpSpPr>
       <p:sp>
         <p:nvSpPr>
-          <p:cNvPr id="174" name="Google Shape;174;g321457fc196_0_407:notes"/>
-          <p:cNvSpPr/>
+          <p:cNvPr id="186" name="Google Shape;186;g321457fc196_0_464:notes"/>
+          <p:cNvSpPr>
+            <a:spLocks noGrp="1" noRot="1" noChangeAspect="1"/>
+          </p:cNvSpPr>
           <p:nvPr>
-            <p:ph idx="2" type="sldImg"/>
+            <p:ph type="sldImg" idx="2"/>
           </p:nvPr>
         </p:nvSpPr>
         <p:spPr>
@@ -2234,9 +2325,13 @@
             <a:ext cx="6096000" cy="3429000"/>
           </a:xfrm>
           <a:custGeom>
-            <a:rect b="b" l="l" r="r" t="t"/>
+            <a:avLst/>
+            <a:gdLst/>
+            <a:ahLst/>
+            <a:cxnLst/>
+            <a:rect l="l" t="t" r="r" b="b"/>
             <a:pathLst>
-              <a:path extrusionOk="0" h="120000" w="120000">
+              <a:path w="120000" h="120000" extrusionOk="0">
                 <a:moveTo>
                   <a:pt x="0" y="0"/>
                 </a:moveTo>
@@ -2257,10 +2352,12 @@
       </p:sp>
       <p:sp>
         <p:nvSpPr>
-          <p:cNvPr id="175" name="Google Shape;175;g321457fc196_0_407:notes"/>
-          <p:cNvSpPr txBox="1"/>
+          <p:cNvPr id="187" name="Google Shape;187;g321457fc196_0_464:notes"/>
+          <p:cNvSpPr txBox="1">
+            <a:spLocks noGrp="1"/>
+          </p:cNvSpPr>
           <p:nvPr>
-            <p:ph idx="1" type="body"/>
+            <p:ph type="body" idx="1"/>
           </p:nvPr>
         </p:nvSpPr>
         <p:spPr>
@@ -2273,12 +2370,12 @@
           </a:prstGeom>
         </p:spPr>
         <p:txBody>
-          <a:bodyPr anchorCtr="0" anchor="t" bIns="91425" lIns="91425" spcFirstLastPara="1" rIns="91425" wrap="square" tIns="91425">
+          <a:bodyPr spcFirstLastPara="1" wrap="square" lIns="91425" tIns="91425" rIns="91425" bIns="91425" anchor="t" anchorCtr="0">
             <a:noAutofit/>
           </a:bodyPr>
           <a:lstStyle/>
           <a:p>
-            <a:pPr indent="0" lvl="0" marL="0" rtl="0" algn="l">
+            <a:pPr marL="0" lvl="0" indent="0" algn="l" rtl="0">
               <a:spcBef>
                 <a:spcPts val="0"/>
               </a:spcBef>
@@ -2287,108 +2384,6 @@
               </a:spcAft>
               <a:buNone/>
             </a:pPr>
-            <a:r>
-              <a:t/>
-            </a:r>
-            <a:endParaRPr/>
-          </a:p>
-        </p:txBody>
-      </p:sp>
-    </p:spTree>
-  </p:cSld>
-  <p:clrMapOvr>
-    <a:masterClrMapping/>
-  </p:clrMapOvr>
-</p:notes>
-</file>
-
-<file path=ppt/notesSlides/notesSlide9.xml><?xml version="1.0" encoding="utf-8"?>
-<p:notes xmlns:a="http://schemas.openxmlformats.org/drawingml/2006/main" xmlns:r="http://schemas.openxmlformats.org/officeDocument/2006/relationships" xmlns:mc="http://schemas.openxmlformats.org/markup-compatibility/2006" xmlns:mv="urn:schemas-microsoft-com:mac:vml" xmlns:p="http://schemas.openxmlformats.org/presentationml/2006/main" xmlns:c="http://schemas.openxmlformats.org/drawingml/2006/chart" xmlns:dgm="http://schemas.openxmlformats.org/drawingml/2006/diagram" xmlns:o="urn:schemas-microsoft-com:office:office" xmlns:v="urn:schemas-microsoft-com:vml" xmlns:pvml="urn:schemas-microsoft-com:office:powerpoint" xmlns:com="http://schemas.openxmlformats.org/drawingml/2006/compatibility" xmlns:p14="http://schemas.microsoft.com/office/powerpoint/2010/main" xmlns:p15="http://schemas.microsoft.com/office/powerpoint/2012/main" xmlns:ahyp="http://schemas.microsoft.com/office/drawing/2018/hyperlinkcolor" showMasterPhAnim="0" showMasterSp="0">
-  <p:cSld>
-    <p:spTree>
-      <p:nvGrpSpPr>
-        <p:cNvPr id="179" name="Shape 179"/>
-        <p:cNvGrpSpPr/>
-        <p:nvPr/>
-      </p:nvGrpSpPr>
-      <p:grpSpPr>
-        <a:xfrm>
-          <a:off x="0" y="0"/>
-          <a:ext cx="0" cy="0"/>
-          <a:chOff x="0" y="0"/>
-          <a:chExt cx="0" cy="0"/>
-        </a:xfrm>
-      </p:grpSpPr>
-      <p:sp>
-        <p:nvSpPr>
-          <p:cNvPr id="180" name="Google Shape;180;g321457fc196_0_412:notes"/>
-          <p:cNvSpPr/>
-          <p:nvPr>
-            <p:ph idx="2" type="sldImg"/>
-          </p:nvPr>
-        </p:nvSpPr>
-        <p:spPr>
-          <a:xfrm>
-            <a:off x="381300" y="685800"/>
-            <a:ext cx="6096000" cy="3429000"/>
-          </a:xfrm>
-          <a:custGeom>
-            <a:rect b="b" l="l" r="r" t="t"/>
-            <a:pathLst>
-              <a:path extrusionOk="0" h="120000" w="120000">
-                <a:moveTo>
-                  <a:pt x="0" y="0"/>
-                </a:moveTo>
-                <a:lnTo>
-                  <a:pt x="120000" y="0"/>
-                </a:lnTo>
-                <a:lnTo>
-                  <a:pt x="120000" y="120000"/>
-                </a:lnTo>
-                <a:lnTo>
-                  <a:pt x="0" y="120000"/>
-                </a:lnTo>
-                <a:close/>
-              </a:path>
-            </a:pathLst>
-          </a:custGeom>
-        </p:spPr>
-      </p:sp>
-      <p:sp>
-        <p:nvSpPr>
-          <p:cNvPr id="181" name="Google Shape;181;g321457fc196_0_412:notes"/>
-          <p:cNvSpPr txBox="1"/>
-          <p:nvPr>
-            <p:ph idx="1" type="body"/>
-          </p:nvPr>
-        </p:nvSpPr>
-        <p:spPr>
-          <a:xfrm>
-            <a:off x="685800" y="4343400"/>
-            <a:ext cx="5486400" cy="4114800"/>
-          </a:xfrm>
-          <a:prstGeom prst="rect">
-            <a:avLst/>
-          </a:prstGeom>
-        </p:spPr>
-        <p:txBody>
-          <a:bodyPr anchorCtr="0" anchor="t" bIns="91425" lIns="91425" spcFirstLastPara="1" rIns="91425" wrap="square" tIns="91425">
-            <a:noAutofit/>
-          </a:bodyPr>
-          <a:lstStyle/>
-          <a:p>
-            <a:pPr indent="0" lvl="0" marL="0" rtl="0" algn="l">
-              <a:spcBef>
-                <a:spcPts val="0"/>
-              </a:spcBef>
-              <a:spcAft>
-                <a:spcPts val="0"/>
-              </a:spcAft>
-              <a:buNone/>
-            </a:pPr>
-            <a:r>
-              <a:t/>
-            </a:r>
             <a:endParaRPr/>
           </a:p>
         </p:txBody>
@@ -2402,18 +2397,19 @@
 </file>
 
 <file path=ppt/slideLayouts/slideLayout1.xml><?xml version="1.0" encoding="utf-8"?>
-<p:sldLayout xmlns:a="http://schemas.openxmlformats.org/drawingml/2006/main" xmlns:r="http://schemas.openxmlformats.org/officeDocument/2006/relationships" xmlns:mc="http://schemas.openxmlformats.org/markup-compatibility/2006" xmlns:mv="urn:schemas-microsoft-com:mac:vml" xmlns:p="http://schemas.openxmlformats.org/presentationml/2006/main" xmlns:c="http://schemas.openxmlformats.org/drawingml/2006/chart" xmlns:dgm="http://schemas.openxmlformats.org/drawingml/2006/diagram" xmlns:o="urn:schemas-microsoft-com:office:office" xmlns:v="urn:schemas-microsoft-com:vml" xmlns:pvml="urn:schemas-microsoft-com:office:powerpoint" xmlns:com="http://schemas.openxmlformats.org/drawingml/2006/compatibility" xmlns:p14="http://schemas.microsoft.com/office/powerpoint/2010/main" xmlns:p15="http://schemas.microsoft.com/office/powerpoint/2012/main" xmlns:ahyp="http://schemas.microsoft.com/office/drawing/2018/hyperlinkcolor" matchingName="Title slide" type="title">
+<p:sldLayout xmlns:a="http://schemas.openxmlformats.org/drawingml/2006/main" xmlns:r="http://schemas.openxmlformats.org/officeDocument/2006/relationships" xmlns:p="http://schemas.openxmlformats.org/presentationml/2006/main" matchingName="Title slide" type="title">
   <p:cSld name="TITLE">
     <p:bg>
       <p:bgPr>
         <a:solidFill>
           <a:schemeClr val="accent6"/>
         </a:solidFill>
+        <a:effectLst/>
       </p:bgPr>
     </p:bg>
     <p:spTree>
       <p:nvGrpSpPr>
-        <p:cNvPr id="9" name="Shape 9"/>
+        <p:cNvPr id="1" name="Shape 9"/>
         <p:cNvGrpSpPr/>
         <p:nvPr/>
       </p:nvGrpSpPr>
@@ -2447,12 +2443,12 @@
           </a:ln>
         </p:spPr>
         <p:txBody>
-          <a:bodyPr anchorCtr="0" anchor="ctr" bIns="91425" lIns="91425" spcFirstLastPara="1" rIns="91425" wrap="square" tIns="91425">
+          <a:bodyPr spcFirstLastPara="1" wrap="square" lIns="91425" tIns="91425" rIns="91425" bIns="91425" anchor="ctr" anchorCtr="0">
             <a:noAutofit/>
           </a:bodyPr>
           <a:lstStyle/>
           <a:p>
-            <a:pPr indent="0" lvl="0" marL="0" rtl="0" algn="l">
+            <a:pPr marL="0" lvl="0" indent="0" algn="l" rtl="0">
               <a:spcBef>
                 <a:spcPts val="0"/>
               </a:spcBef>
@@ -2461,9 +2457,6 @@
               </a:spcAft>
               <a:buNone/>
             </a:pPr>
-            <a:r>
-              <a:t/>
-            </a:r>
             <a:endParaRPr/>
           </a:p>
         </p:txBody>
@@ -2490,12 +2483,12 @@
           </a:ln>
         </p:spPr>
         <p:txBody>
-          <a:bodyPr anchorCtr="0" anchor="ctr" bIns="91425" lIns="91425" spcFirstLastPara="1" rIns="91425" wrap="square" tIns="91425">
+          <a:bodyPr spcFirstLastPara="1" wrap="square" lIns="91425" tIns="91425" rIns="91425" bIns="91425" anchor="ctr" anchorCtr="0">
             <a:noAutofit/>
           </a:bodyPr>
           <a:lstStyle/>
           <a:p>
-            <a:pPr indent="0" lvl="0" marL="0" rtl="0" algn="l">
+            <a:pPr marL="0" lvl="0" indent="0" algn="l" rtl="0">
               <a:spcBef>
                 <a:spcPts val="0"/>
               </a:spcBef>
@@ -2504,9 +2497,6 @@
               </a:spcAft>
               <a:buNone/>
             </a:pPr>
-            <a:r>
-              <a:t/>
-            </a:r>
             <a:endParaRPr/>
           </a:p>
         </p:txBody>
@@ -2533,12 +2523,12 @@
           </a:ln>
         </p:spPr>
         <p:txBody>
-          <a:bodyPr anchorCtr="0" anchor="ctr" bIns="91425" lIns="91425" spcFirstLastPara="1" rIns="91425" wrap="square" tIns="91425">
+          <a:bodyPr spcFirstLastPara="1" wrap="square" lIns="91425" tIns="91425" rIns="91425" bIns="91425" anchor="ctr" anchorCtr="0">
             <a:noAutofit/>
           </a:bodyPr>
           <a:lstStyle/>
           <a:p>
-            <a:pPr indent="0" lvl="0" marL="0" rtl="0" algn="l">
+            <a:pPr marL="0" lvl="0" indent="0" algn="l" rtl="0">
               <a:spcBef>
                 <a:spcPts val="0"/>
               </a:spcBef>
@@ -2547,9 +2537,6 @@
               </a:spcAft>
               <a:buNone/>
             </a:pPr>
-            <a:r>
-              <a:t/>
-            </a:r>
             <a:endParaRPr/>
           </a:p>
         </p:txBody>
@@ -2575,7 +2562,7 @@
             <a:noFill/>
           </a:ln>
           <a:effectLst>
-            <a:outerShdw blurRad="228600" sx="101000" rotWithShape="0" algn="ctr" sy="101000">
+            <a:outerShdw blurRad="228600" sx="101000" sy="101000" algn="ctr" rotWithShape="0">
               <a:srgbClr val="000000">
                 <a:alpha val="40000"/>
               </a:srgbClr>
@@ -2583,12 +2570,12 @@
           </a:effectLst>
         </p:spPr>
         <p:txBody>
-          <a:bodyPr anchorCtr="0" anchor="ctr" bIns="91425" lIns="91425" spcFirstLastPara="1" rIns="91425" wrap="square" tIns="91425">
+          <a:bodyPr spcFirstLastPara="1" wrap="square" lIns="91425" tIns="91425" rIns="91425" bIns="91425" anchor="ctr" anchorCtr="0">
             <a:noAutofit/>
           </a:bodyPr>
           <a:lstStyle/>
           <a:p>
-            <a:pPr indent="0" lvl="0" marL="0" rtl="0" algn="l">
+            <a:pPr marL="0" lvl="0" indent="0" algn="l" rtl="0">
               <a:spcBef>
                 <a:spcPts val="0"/>
               </a:spcBef>
@@ -2597,9 +2584,6 @@
               </a:spcAft>
               <a:buNone/>
             </a:pPr>
-            <a:r>
-              <a:t/>
-            </a:r>
             <a:endParaRPr/>
           </a:p>
         </p:txBody>
@@ -2631,7 +2615,7 @@
             </a:xfrm>
             <a:prstGeom prst="parallelogram">
               <a:avLst>
-                <a:gd fmla="val 153193" name="adj"/>
+                <a:gd name="adj" fmla="val 153193"/>
               </a:avLst>
             </a:prstGeom>
             <a:solidFill>
@@ -2642,12 +2626,12 @@
             </a:ln>
           </p:spPr>
           <p:txBody>
-            <a:bodyPr anchorCtr="0" anchor="ctr" bIns="91425" lIns="91425" spcFirstLastPara="1" rIns="91425" wrap="square" tIns="91425">
+            <a:bodyPr spcFirstLastPara="1" wrap="square" lIns="91425" tIns="91425" rIns="91425" bIns="91425" anchor="ctr" anchorCtr="0">
               <a:noAutofit/>
             </a:bodyPr>
             <a:lstStyle/>
             <a:p>
-              <a:pPr indent="0" lvl="0" marL="0" rtl="0" algn="l">
+              <a:pPr marL="0" lvl="0" indent="0" algn="l" rtl="0">
                 <a:spcBef>
                   <a:spcPts val="0"/>
                 </a:spcBef>
@@ -2656,9 +2640,6 @@
                 </a:spcAft>
                 <a:buNone/>
               </a:pPr>
-              <a:r>
-                <a:t/>
-              </a:r>
               <a:endParaRPr/>
             </a:p>
           </p:txBody>
@@ -2676,7 +2657,7 @@
             </a:xfrm>
             <a:prstGeom prst="parallelogram">
               <a:avLst>
-                <a:gd fmla="val 153193" name="adj"/>
+                <a:gd name="adj" fmla="val 153193"/>
               </a:avLst>
             </a:prstGeom>
             <a:solidFill>
@@ -2687,12 +2668,12 @@
             </a:ln>
           </p:spPr>
           <p:txBody>
-            <a:bodyPr anchorCtr="0" anchor="ctr" bIns="91425" lIns="91425" spcFirstLastPara="1" rIns="91425" wrap="square" tIns="91425">
+            <a:bodyPr spcFirstLastPara="1" wrap="square" lIns="91425" tIns="91425" rIns="91425" bIns="91425" anchor="ctr" anchorCtr="0">
               <a:noAutofit/>
             </a:bodyPr>
             <a:lstStyle/>
             <a:p>
-              <a:pPr indent="0" lvl="0" marL="0" rtl="0" algn="l">
+              <a:pPr marL="0" lvl="0" indent="0" algn="l" rtl="0">
                 <a:spcBef>
                   <a:spcPts val="0"/>
                 </a:spcBef>
@@ -2701,9 +2682,6 @@
                 </a:spcAft>
                 <a:buNone/>
               </a:pPr>
-              <a:r>
-                <a:t/>
-              </a:r>
               <a:endParaRPr/>
             </a:p>
           </p:txBody>
@@ -2721,7 +2699,7 @@
             </a:xfrm>
             <a:prstGeom prst="parallelogram">
               <a:avLst>
-                <a:gd fmla="val 153193" name="adj"/>
+                <a:gd name="adj" fmla="val 153193"/>
               </a:avLst>
             </a:prstGeom>
             <a:solidFill>
@@ -2732,12 +2710,12 @@
             </a:ln>
           </p:spPr>
           <p:txBody>
-            <a:bodyPr anchorCtr="0" anchor="ctr" bIns="91425" lIns="91425" spcFirstLastPara="1" rIns="91425" wrap="square" tIns="91425">
+            <a:bodyPr spcFirstLastPara="1" wrap="square" lIns="91425" tIns="91425" rIns="91425" bIns="91425" anchor="ctr" anchorCtr="0">
               <a:noAutofit/>
             </a:bodyPr>
             <a:lstStyle/>
             <a:p>
-              <a:pPr indent="0" lvl="0" marL="0" rtl="0" algn="l">
+              <a:pPr marL="0" lvl="0" indent="0" algn="l" rtl="0">
                 <a:spcBef>
                   <a:spcPts val="0"/>
                 </a:spcBef>
@@ -2746,9 +2724,6 @@
                 </a:spcAft>
                 <a:buNone/>
               </a:pPr>
-              <a:r>
-                <a:t/>
-              </a:r>
               <a:endParaRPr/>
             </a:p>
           </p:txBody>
@@ -2781,7 +2756,7 @@
             </a:xfrm>
             <a:prstGeom prst="parallelogram">
               <a:avLst>
-                <a:gd fmla="val 153193" name="adj"/>
+                <a:gd name="adj" fmla="val 153193"/>
               </a:avLst>
             </a:prstGeom>
             <a:solidFill>
@@ -2792,12 +2767,12 @@
             </a:ln>
           </p:spPr>
           <p:txBody>
-            <a:bodyPr anchorCtr="0" anchor="ctr" bIns="91425" lIns="91425" spcFirstLastPara="1" rIns="91425" wrap="square" tIns="91425">
+            <a:bodyPr spcFirstLastPara="1" wrap="square" lIns="91425" tIns="91425" rIns="91425" bIns="91425" anchor="ctr" anchorCtr="0">
               <a:noAutofit/>
             </a:bodyPr>
             <a:lstStyle/>
             <a:p>
-              <a:pPr indent="0" lvl="0" marL="0" rtl="0" algn="l">
+              <a:pPr marL="0" lvl="0" indent="0" algn="l" rtl="0">
                 <a:spcBef>
                   <a:spcPts val="0"/>
                 </a:spcBef>
@@ -2806,9 +2781,6 @@
                 </a:spcAft>
                 <a:buNone/>
               </a:pPr>
-              <a:r>
-                <a:t/>
-              </a:r>
               <a:endParaRPr/>
             </a:p>
           </p:txBody>
@@ -2826,7 +2798,7 @@
             </a:xfrm>
             <a:prstGeom prst="parallelogram">
               <a:avLst>
-                <a:gd fmla="val 153193" name="adj"/>
+                <a:gd name="adj" fmla="val 153193"/>
               </a:avLst>
             </a:prstGeom>
             <a:solidFill>
@@ -2837,12 +2809,12 @@
             </a:ln>
           </p:spPr>
           <p:txBody>
-            <a:bodyPr anchorCtr="0" anchor="ctr" bIns="91425" lIns="91425" spcFirstLastPara="1" rIns="91425" wrap="square" tIns="91425">
+            <a:bodyPr spcFirstLastPara="1" wrap="square" lIns="91425" tIns="91425" rIns="91425" bIns="91425" anchor="ctr" anchorCtr="0">
               <a:noAutofit/>
             </a:bodyPr>
             <a:lstStyle/>
             <a:p>
-              <a:pPr indent="0" lvl="0" marL="0" rtl="0" algn="l">
+              <a:pPr marL="0" lvl="0" indent="0" algn="l" rtl="0">
                 <a:spcBef>
                   <a:spcPts val="0"/>
                 </a:spcBef>
@@ -2851,9 +2823,6 @@
                 </a:spcAft>
                 <a:buNone/>
               </a:pPr>
-              <a:r>
-                <a:t/>
-              </a:r>
               <a:endParaRPr/>
             </a:p>
           </p:txBody>
@@ -2871,7 +2840,7 @@
             </a:xfrm>
             <a:prstGeom prst="parallelogram">
               <a:avLst>
-                <a:gd fmla="val 153193" name="adj"/>
+                <a:gd name="adj" fmla="val 153193"/>
               </a:avLst>
             </a:prstGeom>
             <a:solidFill>
@@ -2882,12 +2851,12 @@
             </a:ln>
           </p:spPr>
           <p:txBody>
-            <a:bodyPr anchorCtr="0" anchor="ctr" bIns="91425" lIns="91425" spcFirstLastPara="1" rIns="91425" wrap="square" tIns="91425">
+            <a:bodyPr spcFirstLastPara="1" wrap="square" lIns="91425" tIns="91425" rIns="91425" bIns="91425" anchor="ctr" anchorCtr="0">
               <a:noAutofit/>
             </a:bodyPr>
             <a:lstStyle/>
             <a:p>
-              <a:pPr indent="0" lvl="0" marL="0" rtl="0" algn="l">
+              <a:pPr marL="0" lvl="0" indent="0" algn="l" rtl="0">
                 <a:spcBef>
                   <a:spcPts val="0"/>
                 </a:spcBef>
@@ -2896,9 +2865,6 @@
                 </a:spcAft>
                 <a:buNone/>
               </a:pPr>
-              <a:r>
-                <a:t/>
-              </a:r>
               <a:endParaRPr/>
             </a:p>
           </p:txBody>
@@ -2931,7 +2897,7 @@
             </a:xfrm>
             <a:prstGeom prst="parallelogram">
               <a:avLst>
-                <a:gd fmla="val 158024" name="adj"/>
+                <a:gd name="adj" fmla="val 158024"/>
               </a:avLst>
             </a:prstGeom>
             <a:solidFill>
@@ -2942,12 +2908,12 @@
             </a:ln>
           </p:spPr>
           <p:txBody>
-            <a:bodyPr anchorCtr="0" anchor="ctr" bIns="91425" lIns="91425" spcFirstLastPara="1" rIns="91425" wrap="square" tIns="91425">
+            <a:bodyPr spcFirstLastPara="1" wrap="square" lIns="91425" tIns="91425" rIns="91425" bIns="91425" anchor="ctr" anchorCtr="0">
               <a:noAutofit/>
             </a:bodyPr>
             <a:lstStyle/>
             <a:p>
-              <a:pPr indent="0" lvl="0" marL="0" rtl="0" algn="l">
+              <a:pPr marL="0" lvl="0" indent="0" algn="l" rtl="0">
                 <a:spcBef>
                   <a:spcPts val="0"/>
                 </a:spcBef>
@@ -2956,9 +2922,6 @@
                 </a:spcAft>
                 <a:buNone/>
               </a:pPr>
-              <a:r>
-                <a:t/>
-              </a:r>
               <a:endParaRPr/>
             </a:p>
           </p:txBody>
@@ -2976,7 +2939,7 @@
             </a:xfrm>
             <a:prstGeom prst="parallelogram">
               <a:avLst>
-                <a:gd fmla="val 158024" name="adj"/>
+                <a:gd name="adj" fmla="val 158024"/>
               </a:avLst>
             </a:prstGeom>
             <a:solidFill>
@@ -2987,12 +2950,12 @@
             </a:ln>
           </p:spPr>
           <p:txBody>
-            <a:bodyPr anchorCtr="0" anchor="ctr" bIns="91425" lIns="91425" spcFirstLastPara="1" rIns="91425" wrap="square" tIns="91425">
+            <a:bodyPr spcFirstLastPara="1" wrap="square" lIns="91425" tIns="91425" rIns="91425" bIns="91425" anchor="ctr" anchorCtr="0">
               <a:noAutofit/>
             </a:bodyPr>
             <a:lstStyle/>
             <a:p>
-              <a:pPr indent="0" lvl="0" marL="0" rtl="0" algn="l">
+              <a:pPr marL="0" lvl="0" indent="0" algn="l" rtl="0">
                 <a:spcBef>
                   <a:spcPts val="0"/>
                 </a:spcBef>
@@ -3001,9 +2964,6 @@
                 </a:spcAft>
                 <a:buNone/>
               </a:pPr>
-              <a:r>
-                <a:t/>
-              </a:r>
               <a:endParaRPr/>
             </a:p>
           </p:txBody>
@@ -3021,7 +2981,7 @@
             </a:xfrm>
             <a:prstGeom prst="parallelogram">
               <a:avLst>
-                <a:gd fmla="val 158024" name="adj"/>
+                <a:gd name="adj" fmla="val 158024"/>
               </a:avLst>
             </a:prstGeom>
             <a:solidFill>
@@ -3032,12 +2992,12 @@
             </a:ln>
           </p:spPr>
           <p:txBody>
-            <a:bodyPr anchorCtr="0" anchor="ctr" bIns="91425" lIns="91425" spcFirstLastPara="1" rIns="91425" wrap="square" tIns="91425">
+            <a:bodyPr spcFirstLastPara="1" wrap="square" lIns="91425" tIns="91425" rIns="91425" bIns="91425" anchor="ctr" anchorCtr="0">
               <a:noAutofit/>
             </a:bodyPr>
             <a:lstStyle/>
             <a:p>
-              <a:pPr indent="0" lvl="0" marL="0" rtl="0" algn="l">
+              <a:pPr marL="0" lvl="0" indent="0" algn="l" rtl="0">
                 <a:spcBef>
                   <a:spcPts val="0"/>
                 </a:spcBef>
@@ -3046,9 +3006,6 @@
                 </a:spcAft>
                 <a:buNone/>
               </a:pPr>
-              <a:r>
-                <a:t/>
-              </a:r>
               <a:endParaRPr/>
             </a:p>
           </p:txBody>
@@ -3081,7 +3038,7 @@
             </a:xfrm>
             <a:prstGeom prst="parallelogram">
               <a:avLst>
-                <a:gd fmla="val 158024" name="adj"/>
+                <a:gd name="adj" fmla="val 158024"/>
               </a:avLst>
             </a:prstGeom>
             <a:solidFill>
@@ -3092,12 +3049,12 @@
             </a:ln>
           </p:spPr>
           <p:txBody>
-            <a:bodyPr anchorCtr="0" anchor="ctr" bIns="91425" lIns="91425" spcFirstLastPara="1" rIns="91425" wrap="square" tIns="91425">
+            <a:bodyPr spcFirstLastPara="1" wrap="square" lIns="91425" tIns="91425" rIns="91425" bIns="91425" anchor="ctr" anchorCtr="0">
               <a:noAutofit/>
             </a:bodyPr>
             <a:lstStyle/>
             <a:p>
-              <a:pPr indent="0" lvl="0" marL="0" rtl="0" algn="l">
+              <a:pPr marL="0" lvl="0" indent="0" algn="l" rtl="0">
                 <a:spcBef>
                   <a:spcPts val="0"/>
                 </a:spcBef>
@@ -3106,9 +3063,6 @@
                 </a:spcAft>
                 <a:buNone/>
               </a:pPr>
-              <a:r>
-                <a:t/>
-              </a:r>
               <a:endParaRPr/>
             </a:p>
           </p:txBody>
@@ -3126,7 +3080,7 @@
             </a:xfrm>
             <a:prstGeom prst="parallelogram">
               <a:avLst>
-                <a:gd fmla="val 158024" name="adj"/>
+                <a:gd name="adj" fmla="val 158024"/>
               </a:avLst>
             </a:prstGeom>
             <a:solidFill>
@@ -3137,12 +3091,12 @@
             </a:ln>
           </p:spPr>
           <p:txBody>
-            <a:bodyPr anchorCtr="0" anchor="ctr" bIns="91425" lIns="91425" spcFirstLastPara="1" rIns="91425" wrap="square" tIns="91425">
+            <a:bodyPr spcFirstLastPara="1" wrap="square" lIns="91425" tIns="91425" rIns="91425" bIns="91425" anchor="ctr" anchorCtr="0">
               <a:noAutofit/>
             </a:bodyPr>
             <a:lstStyle/>
             <a:p>
-              <a:pPr indent="0" lvl="0" marL="0" rtl="0" algn="l">
+              <a:pPr marL="0" lvl="0" indent="0" algn="l" rtl="0">
                 <a:spcBef>
                   <a:spcPts val="0"/>
                 </a:spcBef>
@@ -3151,9 +3105,6 @@
                 </a:spcAft>
                 <a:buNone/>
               </a:pPr>
-              <a:r>
-                <a:t/>
-              </a:r>
               <a:endParaRPr/>
             </a:p>
           </p:txBody>
@@ -3171,7 +3122,7 @@
             </a:xfrm>
             <a:prstGeom prst="parallelogram">
               <a:avLst>
-                <a:gd fmla="val 158024" name="adj"/>
+                <a:gd name="adj" fmla="val 158024"/>
               </a:avLst>
             </a:prstGeom>
             <a:solidFill>
@@ -3182,12 +3133,12 @@
             </a:ln>
           </p:spPr>
           <p:txBody>
-            <a:bodyPr anchorCtr="0" anchor="ctr" bIns="91425" lIns="91425" spcFirstLastPara="1" rIns="91425" wrap="square" tIns="91425">
+            <a:bodyPr spcFirstLastPara="1" wrap="square" lIns="91425" tIns="91425" rIns="91425" bIns="91425" anchor="ctr" anchorCtr="0">
               <a:noAutofit/>
             </a:bodyPr>
             <a:lstStyle/>
             <a:p>
-              <a:pPr indent="0" lvl="0" marL="0" rtl="0" algn="l">
+              <a:pPr marL="0" lvl="0" indent="0" algn="l" rtl="0">
                 <a:spcBef>
                   <a:spcPts val="0"/>
                 </a:spcBef>
@@ -3196,9 +3147,6 @@
                 </a:spcAft>
                 <a:buNone/>
               </a:pPr>
-              <a:r>
-                <a:t/>
-              </a:r>
               <a:endParaRPr/>
             </a:p>
           </p:txBody>
@@ -3231,7 +3179,7 @@
             </a:xfrm>
             <a:prstGeom prst="parallelogram">
               <a:avLst>
-                <a:gd fmla="val 158024" name="adj"/>
+                <a:gd name="adj" fmla="val 158024"/>
               </a:avLst>
             </a:prstGeom>
             <a:solidFill>
@@ -3242,12 +3190,12 @@
             </a:ln>
           </p:spPr>
           <p:txBody>
-            <a:bodyPr anchorCtr="0" anchor="ctr" bIns="91425" lIns="91425" spcFirstLastPara="1" rIns="91425" wrap="square" tIns="91425">
+            <a:bodyPr spcFirstLastPara="1" wrap="square" lIns="91425" tIns="91425" rIns="91425" bIns="91425" anchor="ctr" anchorCtr="0">
               <a:noAutofit/>
             </a:bodyPr>
             <a:lstStyle/>
             <a:p>
-              <a:pPr indent="0" lvl="0" marL="0" rtl="0" algn="l">
+              <a:pPr marL="0" lvl="0" indent="0" algn="l" rtl="0">
                 <a:spcBef>
                   <a:spcPts val="0"/>
                 </a:spcBef>
@@ -3256,9 +3204,6 @@
                 </a:spcAft>
                 <a:buNone/>
               </a:pPr>
-              <a:r>
-                <a:t/>
-              </a:r>
               <a:endParaRPr/>
             </a:p>
           </p:txBody>
@@ -3276,7 +3221,7 @@
             </a:xfrm>
             <a:prstGeom prst="parallelogram">
               <a:avLst>
-                <a:gd fmla="val 158024" name="adj"/>
+                <a:gd name="adj" fmla="val 158024"/>
               </a:avLst>
             </a:prstGeom>
             <a:solidFill>
@@ -3287,12 +3232,12 @@
             </a:ln>
           </p:spPr>
           <p:txBody>
-            <a:bodyPr anchorCtr="0" anchor="ctr" bIns="91425" lIns="91425" spcFirstLastPara="1" rIns="91425" wrap="square" tIns="91425">
+            <a:bodyPr spcFirstLastPara="1" wrap="square" lIns="91425" tIns="91425" rIns="91425" bIns="91425" anchor="ctr" anchorCtr="0">
               <a:noAutofit/>
             </a:bodyPr>
             <a:lstStyle/>
             <a:p>
-              <a:pPr indent="0" lvl="0" marL="0" rtl="0" algn="l">
+              <a:pPr marL="0" lvl="0" indent="0" algn="l" rtl="0">
                 <a:spcBef>
                   <a:spcPts val="0"/>
                 </a:spcBef>
@@ -3301,9 +3246,6 @@
                 </a:spcAft>
                 <a:buNone/>
               </a:pPr>
-              <a:r>
-                <a:t/>
-              </a:r>
               <a:endParaRPr/>
             </a:p>
           </p:txBody>
@@ -3321,7 +3263,7 @@
             </a:xfrm>
             <a:prstGeom prst="parallelogram">
               <a:avLst>
-                <a:gd fmla="val 158024" name="adj"/>
+                <a:gd name="adj" fmla="val 158024"/>
               </a:avLst>
             </a:prstGeom>
             <a:solidFill>
@@ -3332,12 +3274,12 @@
             </a:ln>
           </p:spPr>
           <p:txBody>
-            <a:bodyPr anchorCtr="0" anchor="ctr" bIns="91425" lIns="91425" spcFirstLastPara="1" rIns="91425" wrap="square" tIns="91425">
+            <a:bodyPr spcFirstLastPara="1" wrap="square" lIns="91425" tIns="91425" rIns="91425" bIns="91425" anchor="ctr" anchorCtr="0">
               <a:noAutofit/>
             </a:bodyPr>
             <a:lstStyle/>
             <a:p>
-              <a:pPr indent="0" lvl="0" marL="0" rtl="0" algn="l">
+              <a:pPr marL="0" lvl="0" indent="0" algn="l" rtl="0">
                 <a:spcBef>
                   <a:spcPts val="0"/>
                 </a:spcBef>
@@ -3346,9 +3288,6 @@
                 </a:spcAft>
                 <a:buNone/>
               </a:pPr>
-              <a:r>
-                <a:t/>
-              </a:r>
               <a:endParaRPr/>
             </a:p>
           </p:txBody>
@@ -3357,7 +3296,9 @@
       <p:sp>
         <p:nvSpPr>
           <p:cNvPr id="34" name="Google Shape;34;p2"/>
-          <p:cNvSpPr txBox="1"/>
+          <p:cNvSpPr txBox="1">
+            <a:spLocks noGrp="1"/>
+          </p:cNvSpPr>
           <p:nvPr>
             <p:ph type="ctrTitle"/>
           </p:nvPr>
@@ -3372,7 +3313,7 @@
           </a:prstGeom>
         </p:spPr>
         <p:txBody>
-          <a:bodyPr anchorCtr="0" anchor="ctr" bIns="91425" lIns="91425" spcFirstLastPara="1" rIns="91425" wrap="square" tIns="91425">
+          <a:bodyPr spcFirstLastPara="1" wrap="square" lIns="91425" tIns="91425" rIns="91425" bIns="91425" anchor="ctr" anchorCtr="0">
             <a:normAutofit/>
           </a:bodyPr>
           <a:lstStyle>
@@ -3476,15 +3417,19 @@
               <a:defRPr sz="3800"/>
             </a:lvl9pPr>
           </a:lstStyle>
-          <a:p/>
+          <a:p>
+            <a:endParaRPr/>
+          </a:p>
         </p:txBody>
       </p:sp>
       <p:sp>
         <p:nvSpPr>
           <p:cNvPr id="35" name="Google Shape;35;p2"/>
-          <p:cNvSpPr txBox="1"/>
+          <p:cNvSpPr txBox="1">
+            <a:spLocks noGrp="1"/>
+          </p:cNvSpPr>
           <p:nvPr>
-            <p:ph idx="1" type="subTitle"/>
+            <p:ph type="subTitle" idx="1"/>
           </p:nvPr>
         </p:nvSpPr>
         <p:spPr>
@@ -3497,7 +3442,7 @@
           </a:prstGeom>
         </p:spPr>
         <p:txBody>
-          <a:bodyPr anchorCtr="0" anchor="t" bIns="91425" lIns="91425" spcFirstLastPara="1" rIns="91425" wrap="square" tIns="91425">
+          <a:bodyPr spcFirstLastPara="1" wrap="square" lIns="91425" tIns="91425" rIns="91425" bIns="91425" anchor="t" anchorCtr="0">
             <a:normAutofit/>
           </a:bodyPr>
           <a:lstStyle>
@@ -3691,15 +3636,19 @@
               </a:defRPr>
             </a:lvl9pPr>
           </a:lstStyle>
-          <a:p/>
+          <a:p>
+            <a:endParaRPr/>
+          </a:p>
         </p:txBody>
       </p:sp>
       <p:sp>
         <p:nvSpPr>
           <p:cNvPr id="36" name="Google Shape;36;p2"/>
-          <p:cNvSpPr txBox="1"/>
+          <p:cNvSpPr txBox="1">
+            <a:spLocks noGrp="1"/>
+          </p:cNvSpPr>
           <p:nvPr>
-            <p:ph idx="12" type="sldNum"/>
+            <p:ph type="sldNum" idx="12"/>
           </p:nvPr>
         </p:nvSpPr>
         <p:spPr>
@@ -3712,7 +3661,7 @@
           </a:prstGeom>
         </p:spPr>
         <p:txBody>
-          <a:bodyPr anchorCtr="0" anchor="ctr" bIns="91425" lIns="91425" spcFirstLastPara="1" rIns="91425" wrap="square" tIns="91425">
+          <a:bodyPr spcFirstLastPara="1" wrap="square" lIns="91425" tIns="91425" rIns="91425" bIns="91425" anchor="ctr" anchorCtr="0">
             <a:normAutofit/>
           </a:bodyPr>
           <a:lstStyle>
@@ -3754,7 +3703,7 @@
             </a:lvl9pPr>
           </a:lstStyle>
           <a:p>
-            <a:pPr indent="0" lvl="0" marL="0" rtl="0" algn="r">
+            <a:pPr marL="0" lvl="0" indent="0" algn="r" rtl="0">
               <a:spcBef>
                 <a:spcPts val="0"/>
               </a:spcBef>
@@ -3780,18 +3729,19 @@
 </file>
 
 <file path=ppt/slideLayouts/slideLayout10.xml><?xml version="1.0" encoding="utf-8"?>
-<p:sldLayout xmlns:a="http://schemas.openxmlformats.org/drawingml/2006/main" xmlns:r="http://schemas.openxmlformats.org/officeDocument/2006/relationships" xmlns:mc="http://schemas.openxmlformats.org/markup-compatibility/2006" xmlns:mv="urn:schemas-microsoft-com:mac:vml" xmlns:p="http://schemas.openxmlformats.org/presentationml/2006/main" xmlns:c="http://schemas.openxmlformats.org/drawingml/2006/chart" xmlns:dgm="http://schemas.openxmlformats.org/drawingml/2006/diagram" xmlns:o="urn:schemas-microsoft-com:office:office" xmlns:v="urn:schemas-microsoft-com:vml" xmlns:pvml="urn:schemas-microsoft-com:office:powerpoint" xmlns:com="http://schemas.openxmlformats.org/drawingml/2006/compatibility" xmlns:p14="http://schemas.microsoft.com/office/powerpoint/2010/main" xmlns:p15="http://schemas.microsoft.com/office/powerpoint/2012/main" xmlns:ahyp="http://schemas.microsoft.com/office/drawing/2018/hyperlinkcolor" matchingName="Big number">
+<p:sldLayout xmlns:a="http://schemas.openxmlformats.org/drawingml/2006/main" xmlns:r="http://schemas.openxmlformats.org/officeDocument/2006/relationships" xmlns:p="http://schemas.openxmlformats.org/presentationml/2006/main" matchingName="Big number">
   <p:cSld name="BIG_NUMBER">
     <p:bg>
       <p:bgPr>
         <a:solidFill>
           <a:schemeClr val="accent3"/>
         </a:solidFill>
+        <a:effectLst/>
       </p:bgPr>
     </p:bg>
     <p:spTree>
       <p:nvGrpSpPr>
-        <p:cNvPr id="109" name="Shape 109"/>
+        <p:cNvPr id="1" name="Shape 109"/>
         <p:cNvGrpSpPr/>
         <p:nvPr/>
       </p:nvGrpSpPr>
@@ -3825,12 +3775,12 @@
           </a:ln>
         </p:spPr>
         <p:txBody>
-          <a:bodyPr anchorCtr="0" anchor="ctr" bIns="91425" lIns="91425" spcFirstLastPara="1" rIns="91425" wrap="square" tIns="91425">
+          <a:bodyPr spcFirstLastPara="1" wrap="square" lIns="91425" tIns="91425" rIns="91425" bIns="91425" anchor="ctr" anchorCtr="0">
             <a:noAutofit/>
           </a:bodyPr>
           <a:lstStyle/>
           <a:p>
-            <a:pPr indent="0" lvl="0" marL="0" rtl="0" algn="l">
+            <a:pPr marL="0" lvl="0" indent="0" algn="l" rtl="0">
               <a:spcBef>
                 <a:spcPts val="0"/>
               </a:spcBef>
@@ -3839,9 +3789,6 @@
               </a:spcAft>
               <a:buNone/>
             </a:pPr>
-            <a:r>
-              <a:t/>
-            </a:r>
             <a:endParaRPr/>
           </a:p>
         </p:txBody>
@@ -3873,7 +3820,7 @@
             </a:xfrm>
             <a:prstGeom prst="parallelogram">
               <a:avLst>
-                <a:gd fmla="val 158024" name="adj"/>
+                <a:gd name="adj" fmla="val 158024"/>
               </a:avLst>
             </a:prstGeom>
             <a:solidFill>
@@ -3884,12 +3831,12 @@
             </a:ln>
           </p:spPr>
           <p:txBody>
-            <a:bodyPr anchorCtr="0" anchor="ctr" bIns="91425" lIns="91425" spcFirstLastPara="1" rIns="91425" wrap="square" tIns="91425">
+            <a:bodyPr spcFirstLastPara="1" wrap="square" lIns="91425" tIns="91425" rIns="91425" bIns="91425" anchor="ctr" anchorCtr="0">
               <a:noAutofit/>
             </a:bodyPr>
             <a:lstStyle/>
             <a:p>
-              <a:pPr indent="0" lvl="0" marL="0" rtl="0" algn="l">
+              <a:pPr marL="0" lvl="0" indent="0" algn="l" rtl="0">
                 <a:spcBef>
                   <a:spcPts val="0"/>
                 </a:spcBef>
@@ -3898,9 +3845,6 @@
                 </a:spcAft>
                 <a:buNone/>
               </a:pPr>
-              <a:r>
-                <a:t/>
-              </a:r>
               <a:endParaRPr/>
             </a:p>
           </p:txBody>
@@ -3918,7 +3862,7 @@
             </a:xfrm>
             <a:prstGeom prst="parallelogram">
               <a:avLst>
-                <a:gd fmla="val 158024" name="adj"/>
+                <a:gd name="adj" fmla="val 158024"/>
               </a:avLst>
             </a:prstGeom>
             <a:solidFill>
@@ -3929,12 +3873,12 @@
             </a:ln>
           </p:spPr>
           <p:txBody>
-            <a:bodyPr anchorCtr="0" anchor="ctr" bIns="91425" lIns="91425" spcFirstLastPara="1" rIns="91425" wrap="square" tIns="91425">
+            <a:bodyPr spcFirstLastPara="1" wrap="square" lIns="91425" tIns="91425" rIns="91425" bIns="91425" anchor="ctr" anchorCtr="0">
               <a:noAutofit/>
             </a:bodyPr>
             <a:lstStyle/>
             <a:p>
-              <a:pPr indent="0" lvl="0" marL="0" rtl="0" algn="l">
+              <a:pPr marL="0" lvl="0" indent="0" algn="l" rtl="0">
                 <a:spcBef>
                   <a:spcPts val="0"/>
                 </a:spcBef>
@@ -3943,9 +3887,6 @@
                 </a:spcAft>
                 <a:buNone/>
               </a:pPr>
-              <a:r>
-                <a:t/>
-              </a:r>
               <a:endParaRPr/>
             </a:p>
           </p:txBody>
@@ -3963,7 +3904,7 @@
             </a:xfrm>
             <a:prstGeom prst="parallelogram">
               <a:avLst>
-                <a:gd fmla="val 158024" name="adj"/>
+                <a:gd name="adj" fmla="val 158024"/>
               </a:avLst>
             </a:prstGeom>
             <a:solidFill>
@@ -3974,12 +3915,12 @@
             </a:ln>
           </p:spPr>
           <p:txBody>
-            <a:bodyPr anchorCtr="0" anchor="ctr" bIns="91425" lIns="91425" spcFirstLastPara="1" rIns="91425" wrap="square" tIns="91425">
+            <a:bodyPr spcFirstLastPara="1" wrap="square" lIns="91425" tIns="91425" rIns="91425" bIns="91425" anchor="ctr" anchorCtr="0">
               <a:noAutofit/>
             </a:bodyPr>
             <a:lstStyle/>
             <a:p>
-              <a:pPr indent="0" lvl="0" marL="0" rtl="0" algn="l">
+              <a:pPr marL="0" lvl="0" indent="0" algn="l" rtl="0">
                 <a:spcBef>
                   <a:spcPts val="0"/>
                 </a:spcBef>
@@ -3988,9 +3929,6 @@
                 </a:spcAft>
                 <a:buNone/>
               </a:pPr>
-              <a:r>
-                <a:t/>
-              </a:r>
               <a:endParaRPr/>
             </a:p>
           </p:txBody>
@@ -4023,7 +3961,7 @@
             </a:xfrm>
             <a:prstGeom prst="parallelogram">
               <a:avLst>
-                <a:gd fmla="val 158024" name="adj"/>
+                <a:gd name="adj" fmla="val 158024"/>
               </a:avLst>
             </a:prstGeom>
             <a:solidFill>
@@ -4034,12 +3972,12 @@
             </a:ln>
           </p:spPr>
           <p:txBody>
-            <a:bodyPr anchorCtr="0" anchor="ctr" bIns="91425" lIns="91425" spcFirstLastPara="1" rIns="91425" wrap="square" tIns="91425">
+            <a:bodyPr spcFirstLastPara="1" wrap="square" lIns="91425" tIns="91425" rIns="91425" bIns="91425" anchor="ctr" anchorCtr="0">
               <a:noAutofit/>
             </a:bodyPr>
             <a:lstStyle/>
             <a:p>
-              <a:pPr indent="0" lvl="0" marL="0" rtl="0" algn="l">
+              <a:pPr marL="0" lvl="0" indent="0" algn="l" rtl="0">
                 <a:spcBef>
                   <a:spcPts val="0"/>
                 </a:spcBef>
@@ -4048,9 +3986,6 @@
                 </a:spcAft>
                 <a:buNone/>
               </a:pPr>
-              <a:r>
-                <a:t/>
-              </a:r>
               <a:endParaRPr/>
             </a:p>
           </p:txBody>
@@ -4068,7 +4003,7 @@
             </a:xfrm>
             <a:prstGeom prst="parallelogram">
               <a:avLst>
-                <a:gd fmla="val 158024" name="adj"/>
+                <a:gd name="adj" fmla="val 158024"/>
               </a:avLst>
             </a:prstGeom>
             <a:solidFill>
@@ -4079,12 +4014,12 @@
             </a:ln>
           </p:spPr>
           <p:txBody>
-            <a:bodyPr anchorCtr="0" anchor="ctr" bIns="91425" lIns="91425" spcFirstLastPara="1" rIns="91425" wrap="square" tIns="91425">
+            <a:bodyPr spcFirstLastPara="1" wrap="square" lIns="91425" tIns="91425" rIns="91425" bIns="91425" anchor="ctr" anchorCtr="0">
               <a:noAutofit/>
             </a:bodyPr>
             <a:lstStyle/>
             <a:p>
-              <a:pPr indent="0" lvl="0" marL="0" rtl="0" algn="l">
+              <a:pPr marL="0" lvl="0" indent="0" algn="l" rtl="0">
                 <a:spcBef>
                   <a:spcPts val="0"/>
                 </a:spcBef>
@@ -4093,9 +4028,6 @@
                 </a:spcAft>
                 <a:buNone/>
               </a:pPr>
-              <a:r>
-                <a:t/>
-              </a:r>
               <a:endParaRPr/>
             </a:p>
           </p:txBody>
@@ -4113,7 +4045,7 @@
             </a:xfrm>
             <a:prstGeom prst="parallelogram">
               <a:avLst>
-                <a:gd fmla="val 158024" name="adj"/>
+                <a:gd name="adj" fmla="val 158024"/>
               </a:avLst>
             </a:prstGeom>
             <a:solidFill>
@@ -4124,12 +4056,12 @@
             </a:ln>
           </p:spPr>
           <p:txBody>
-            <a:bodyPr anchorCtr="0" anchor="ctr" bIns="91425" lIns="91425" spcFirstLastPara="1" rIns="91425" wrap="square" tIns="91425">
+            <a:bodyPr spcFirstLastPara="1" wrap="square" lIns="91425" tIns="91425" rIns="91425" bIns="91425" anchor="ctr" anchorCtr="0">
               <a:noAutofit/>
             </a:bodyPr>
             <a:lstStyle/>
             <a:p>
-              <a:pPr indent="0" lvl="0" marL="0" rtl="0" algn="l">
+              <a:pPr marL="0" lvl="0" indent="0" algn="l" rtl="0">
                 <a:spcBef>
                   <a:spcPts val="0"/>
                 </a:spcBef>
@@ -4138,9 +4070,6 @@
                 </a:spcAft>
                 <a:buNone/>
               </a:pPr>
-              <a:r>
-                <a:t/>
-              </a:r>
               <a:endParaRPr/>
             </a:p>
           </p:txBody>
@@ -4149,9 +4078,11 @@
       <p:sp>
         <p:nvSpPr>
           <p:cNvPr id="119" name="Google Shape;119;p11"/>
-          <p:cNvSpPr txBox="1"/>
+          <p:cNvSpPr txBox="1">
+            <a:spLocks noGrp="1"/>
+          </p:cNvSpPr>
           <p:nvPr>
-            <p:ph hasCustomPrompt="1" type="title"/>
+            <p:ph type="title" hasCustomPrompt="1"/>
           </p:nvPr>
         </p:nvSpPr>
         <p:spPr>
@@ -4164,7 +4095,7 @@
           </a:prstGeom>
         </p:spPr>
         <p:txBody>
-          <a:bodyPr anchorCtr="0" anchor="ctr" bIns="91425" lIns="91425" spcFirstLastPara="1" rIns="91425" wrap="square" tIns="91425">
+          <a:bodyPr spcFirstLastPara="1" wrap="square" lIns="91425" tIns="91425" rIns="91425" bIns="91425" anchor="ctr" anchorCtr="0">
             <a:normAutofit/>
           </a:bodyPr>
           <a:lstStyle>
@@ -4341,9 +4272,11 @@
       <p:sp>
         <p:nvSpPr>
           <p:cNvPr id="120" name="Google Shape;120;p11"/>
-          <p:cNvSpPr txBox="1"/>
+          <p:cNvSpPr txBox="1">
+            <a:spLocks noGrp="1"/>
+          </p:cNvSpPr>
           <p:nvPr>
-            <p:ph idx="1" type="body"/>
+            <p:ph type="body" idx="1"/>
           </p:nvPr>
         </p:nvSpPr>
         <p:spPr>
@@ -4356,11 +4289,11 @@
           </a:prstGeom>
         </p:spPr>
         <p:txBody>
-          <a:bodyPr anchorCtr="0" anchor="t" bIns="91425" lIns="91425" spcFirstLastPara="1" rIns="91425" wrap="square" tIns="91425">
+          <a:bodyPr spcFirstLastPara="1" wrap="square" lIns="91425" tIns="91425" rIns="91425" bIns="91425" anchor="t" anchorCtr="0">
             <a:normAutofit/>
           </a:bodyPr>
           <a:lstStyle>
-            <a:lvl1pPr indent="-311150" lvl="0" marL="457200" algn="ctr">
+            <a:lvl1pPr marL="457200" lvl="0" indent="-311150" algn="ctr">
               <a:spcBef>
                 <a:spcPts val="0"/>
               </a:spcBef>
@@ -4371,7 +4304,7 @@
               <a:buChar char="●"/>
               <a:defRPr/>
             </a:lvl1pPr>
-            <a:lvl2pPr indent="-298450" lvl="1" marL="914400" algn="ctr">
+            <a:lvl2pPr marL="914400" lvl="1" indent="-298450" algn="ctr">
               <a:spcBef>
                 <a:spcPts val="0"/>
               </a:spcBef>
@@ -4382,7 +4315,7 @@
               <a:buChar char="○"/>
               <a:defRPr/>
             </a:lvl2pPr>
-            <a:lvl3pPr indent="-298450" lvl="2" marL="1371600" algn="ctr">
+            <a:lvl3pPr marL="1371600" lvl="2" indent="-298450" algn="ctr">
               <a:spcBef>
                 <a:spcPts val="0"/>
               </a:spcBef>
@@ -4393,7 +4326,7 @@
               <a:buChar char="■"/>
               <a:defRPr/>
             </a:lvl3pPr>
-            <a:lvl4pPr indent="-298450" lvl="3" marL="1828800" algn="ctr">
+            <a:lvl4pPr marL="1828800" lvl="3" indent="-298450" algn="ctr">
               <a:spcBef>
                 <a:spcPts val="0"/>
               </a:spcBef>
@@ -4404,7 +4337,7 @@
               <a:buChar char="●"/>
               <a:defRPr/>
             </a:lvl4pPr>
-            <a:lvl5pPr indent="-298450" lvl="4" marL="2286000" algn="ctr">
+            <a:lvl5pPr marL="2286000" lvl="4" indent="-298450" algn="ctr">
               <a:spcBef>
                 <a:spcPts val="0"/>
               </a:spcBef>
@@ -4415,7 +4348,7 @@
               <a:buChar char="○"/>
               <a:defRPr/>
             </a:lvl5pPr>
-            <a:lvl6pPr indent="-298450" lvl="5" marL="2743200" algn="ctr">
+            <a:lvl6pPr marL="2743200" lvl="5" indent="-298450" algn="ctr">
               <a:spcBef>
                 <a:spcPts val="0"/>
               </a:spcBef>
@@ -4426,7 +4359,7 @@
               <a:buChar char="■"/>
               <a:defRPr/>
             </a:lvl6pPr>
-            <a:lvl7pPr indent="-298450" lvl="6" marL="3200400" algn="ctr">
+            <a:lvl7pPr marL="3200400" lvl="6" indent="-298450" algn="ctr">
               <a:spcBef>
                 <a:spcPts val="0"/>
               </a:spcBef>
@@ -4437,7 +4370,7 @@
               <a:buChar char="●"/>
               <a:defRPr/>
             </a:lvl7pPr>
-            <a:lvl8pPr indent="-298450" lvl="7" marL="3657600" algn="ctr">
+            <a:lvl8pPr marL="3657600" lvl="7" indent="-298450" algn="ctr">
               <a:spcBef>
                 <a:spcPts val="0"/>
               </a:spcBef>
@@ -4448,7 +4381,7 @@
               <a:buChar char="○"/>
               <a:defRPr/>
             </a:lvl8pPr>
-            <a:lvl9pPr indent="-298450" lvl="8" marL="4114800" algn="ctr">
+            <a:lvl9pPr marL="4114800" lvl="8" indent="-298450" algn="ctr">
               <a:spcBef>
                 <a:spcPts val="0"/>
               </a:spcBef>
@@ -4460,15 +4393,19 @@
               <a:defRPr/>
             </a:lvl9pPr>
           </a:lstStyle>
-          <a:p/>
+          <a:p>
+            <a:endParaRPr/>
+          </a:p>
         </p:txBody>
       </p:sp>
       <p:sp>
         <p:nvSpPr>
           <p:cNvPr id="121" name="Google Shape;121;p11"/>
-          <p:cNvSpPr txBox="1"/>
+          <p:cNvSpPr txBox="1">
+            <a:spLocks noGrp="1"/>
+          </p:cNvSpPr>
           <p:nvPr>
-            <p:ph idx="12" type="sldNum"/>
+            <p:ph type="sldNum" idx="12"/>
           </p:nvPr>
         </p:nvSpPr>
         <p:spPr>
@@ -4481,7 +4418,7 @@
           </a:prstGeom>
         </p:spPr>
         <p:txBody>
-          <a:bodyPr anchorCtr="0" anchor="ctr" bIns="91425" lIns="91425" spcFirstLastPara="1" rIns="91425" wrap="square" tIns="91425">
+          <a:bodyPr spcFirstLastPara="1" wrap="square" lIns="91425" tIns="91425" rIns="91425" bIns="91425" anchor="ctr" anchorCtr="0">
             <a:normAutofit/>
           </a:bodyPr>
           <a:lstStyle>
@@ -4523,7 +4460,7 @@
             </a:lvl9pPr>
           </a:lstStyle>
           <a:p>
-            <a:pPr indent="0" lvl="0" marL="0" rtl="0" algn="r">
+            <a:pPr marL="0" lvl="0" indent="0" algn="r" rtl="0">
               <a:spcBef>
                 <a:spcPts val="0"/>
               </a:spcBef>
@@ -4549,11 +4486,11 @@
 </file>
 
 <file path=ppt/slideLayouts/slideLayout11.xml><?xml version="1.0" encoding="utf-8"?>
-<p:sldLayout xmlns:a="http://schemas.openxmlformats.org/drawingml/2006/main" xmlns:r="http://schemas.openxmlformats.org/officeDocument/2006/relationships" xmlns:mc="http://schemas.openxmlformats.org/markup-compatibility/2006" xmlns:mv="urn:schemas-microsoft-com:mac:vml" xmlns:p="http://schemas.openxmlformats.org/presentationml/2006/main" xmlns:c="http://schemas.openxmlformats.org/drawingml/2006/chart" xmlns:dgm="http://schemas.openxmlformats.org/drawingml/2006/diagram" xmlns:o="urn:schemas-microsoft-com:office:office" xmlns:v="urn:schemas-microsoft-com:vml" xmlns:pvml="urn:schemas-microsoft-com:office:powerpoint" xmlns:com="http://schemas.openxmlformats.org/drawingml/2006/compatibility" xmlns:p14="http://schemas.microsoft.com/office/powerpoint/2010/main" xmlns:p15="http://schemas.microsoft.com/office/powerpoint/2012/main" xmlns:ahyp="http://schemas.microsoft.com/office/drawing/2018/hyperlinkcolor" matchingName="Blank" type="blank">
+<p:sldLayout xmlns:a="http://schemas.openxmlformats.org/drawingml/2006/main" xmlns:r="http://schemas.openxmlformats.org/officeDocument/2006/relationships" xmlns:p="http://schemas.openxmlformats.org/presentationml/2006/main" matchingName="Blank" type="blank">
   <p:cSld name="BLANK">
     <p:spTree>
       <p:nvGrpSpPr>
-        <p:cNvPr id="122" name="Shape 122"/>
+        <p:cNvPr id="1" name="Shape 122"/>
         <p:cNvGrpSpPr/>
         <p:nvPr/>
       </p:nvGrpSpPr>
@@ -4568,9 +4505,11 @@
       <p:sp>
         <p:nvSpPr>
           <p:cNvPr id="123" name="Google Shape;123;p12"/>
-          <p:cNvSpPr txBox="1"/>
+          <p:cNvSpPr txBox="1">
+            <a:spLocks noGrp="1"/>
+          </p:cNvSpPr>
           <p:nvPr>
-            <p:ph idx="12" type="sldNum"/>
+            <p:ph type="sldNum" idx="12"/>
           </p:nvPr>
         </p:nvSpPr>
         <p:spPr>
@@ -4583,7 +4522,7 @@
           </a:prstGeom>
         </p:spPr>
         <p:txBody>
-          <a:bodyPr anchorCtr="0" anchor="ctr" bIns="91425" lIns="91425" spcFirstLastPara="1" rIns="91425" wrap="square" tIns="91425">
+          <a:bodyPr spcFirstLastPara="1" wrap="square" lIns="91425" tIns="91425" rIns="91425" bIns="91425" anchor="ctr" anchorCtr="0">
             <a:normAutofit/>
           </a:bodyPr>
           <a:lstStyle>
@@ -4625,7 +4564,7 @@
             </a:lvl9pPr>
           </a:lstStyle>
           <a:p>
-            <a:pPr indent="0" lvl="0" marL="0" rtl="0" algn="r">
+            <a:pPr marL="0" lvl="0" indent="0" algn="r" rtl="0">
               <a:spcBef>
                 <a:spcPts val="0"/>
               </a:spcBef>
@@ -4651,18 +4590,19 @@
 </file>
 
 <file path=ppt/slideLayouts/slideLayout2.xml><?xml version="1.0" encoding="utf-8"?>
-<p:sldLayout xmlns:a="http://schemas.openxmlformats.org/drawingml/2006/main" xmlns:r="http://schemas.openxmlformats.org/officeDocument/2006/relationships" xmlns:mc="http://schemas.openxmlformats.org/markup-compatibility/2006" xmlns:mv="urn:schemas-microsoft-com:mac:vml" xmlns:p="http://schemas.openxmlformats.org/presentationml/2006/main" xmlns:c="http://schemas.openxmlformats.org/drawingml/2006/chart" xmlns:dgm="http://schemas.openxmlformats.org/drawingml/2006/diagram" xmlns:o="urn:schemas-microsoft-com:office:office" xmlns:v="urn:schemas-microsoft-com:vml" xmlns:pvml="urn:schemas-microsoft-com:office:powerpoint" xmlns:com="http://schemas.openxmlformats.org/drawingml/2006/compatibility" xmlns:p14="http://schemas.microsoft.com/office/powerpoint/2010/main" xmlns:p15="http://schemas.microsoft.com/office/powerpoint/2012/main" xmlns:ahyp="http://schemas.microsoft.com/office/drawing/2018/hyperlinkcolor" matchingName="Section header" type="secHead">
+<p:sldLayout xmlns:a="http://schemas.openxmlformats.org/drawingml/2006/main" xmlns:r="http://schemas.openxmlformats.org/officeDocument/2006/relationships" xmlns:p="http://schemas.openxmlformats.org/presentationml/2006/main" matchingName="Section header" type="secHead">
   <p:cSld name="SECTION_HEADER">
     <p:bg>
       <p:bgPr>
         <a:solidFill>
           <a:schemeClr val="accent3"/>
         </a:solidFill>
+        <a:effectLst/>
       </p:bgPr>
     </p:bg>
     <p:spTree>
       <p:nvGrpSpPr>
-        <p:cNvPr id="37" name="Shape 37"/>
+        <p:cNvPr id="1" name="Shape 37"/>
         <p:cNvGrpSpPr/>
         <p:nvPr/>
       </p:nvGrpSpPr>
@@ -4696,12 +4636,12 @@
           </a:ln>
         </p:spPr>
         <p:txBody>
-          <a:bodyPr anchorCtr="0" anchor="ctr" bIns="91425" lIns="91425" spcFirstLastPara="1" rIns="91425" wrap="square" tIns="91425">
+          <a:bodyPr spcFirstLastPara="1" wrap="square" lIns="91425" tIns="91425" rIns="91425" bIns="91425" anchor="ctr" anchorCtr="0">
             <a:noAutofit/>
           </a:bodyPr>
           <a:lstStyle/>
           <a:p>
-            <a:pPr indent="0" lvl="0" marL="0" rtl="0" algn="l">
+            <a:pPr marL="0" lvl="0" indent="0" algn="l" rtl="0">
               <a:spcBef>
                 <a:spcPts val="0"/>
               </a:spcBef>
@@ -4710,9 +4650,6 @@
               </a:spcAft>
               <a:buNone/>
             </a:pPr>
-            <a:r>
-              <a:t/>
-            </a:r>
             <a:endParaRPr/>
           </a:p>
         </p:txBody>
@@ -4744,7 +4681,7 @@
             </a:xfrm>
             <a:prstGeom prst="parallelogram">
               <a:avLst>
-                <a:gd fmla="val 158024" name="adj"/>
+                <a:gd name="adj" fmla="val 158024"/>
               </a:avLst>
             </a:prstGeom>
             <a:solidFill>
@@ -4755,12 +4692,12 @@
             </a:ln>
           </p:spPr>
           <p:txBody>
-            <a:bodyPr anchorCtr="0" anchor="ctr" bIns="91425" lIns="91425" spcFirstLastPara="1" rIns="91425" wrap="square" tIns="91425">
+            <a:bodyPr spcFirstLastPara="1" wrap="square" lIns="91425" tIns="91425" rIns="91425" bIns="91425" anchor="ctr" anchorCtr="0">
               <a:noAutofit/>
             </a:bodyPr>
             <a:lstStyle/>
             <a:p>
-              <a:pPr indent="0" lvl="0" marL="0" rtl="0" algn="l">
+              <a:pPr marL="0" lvl="0" indent="0" algn="l" rtl="0">
                 <a:spcBef>
                   <a:spcPts val="0"/>
                 </a:spcBef>
@@ -4769,9 +4706,6 @@
                 </a:spcAft>
                 <a:buNone/>
               </a:pPr>
-              <a:r>
-                <a:t/>
-              </a:r>
               <a:endParaRPr/>
             </a:p>
           </p:txBody>
@@ -4789,7 +4723,7 @@
             </a:xfrm>
             <a:prstGeom prst="parallelogram">
               <a:avLst>
-                <a:gd fmla="val 158024" name="adj"/>
+                <a:gd name="adj" fmla="val 158024"/>
               </a:avLst>
             </a:prstGeom>
             <a:solidFill>
@@ -4800,12 +4734,12 @@
             </a:ln>
           </p:spPr>
           <p:txBody>
-            <a:bodyPr anchorCtr="0" anchor="ctr" bIns="91425" lIns="91425" spcFirstLastPara="1" rIns="91425" wrap="square" tIns="91425">
+            <a:bodyPr spcFirstLastPara="1" wrap="square" lIns="91425" tIns="91425" rIns="91425" bIns="91425" anchor="ctr" anchorCtr="0">
               <a:noAutofit/>
             </a:bodyPr>
             <a:lstStyle/>
             <a:p>
-              <a:pPr indent="0" lvl="0" marL="0" rtl="0" algn="l">
+              <a:pPr marL="0" lvl="0" indent="0" algn="l" rtl="0">
                 <a:spcBef>
                   <a:spcPts val="0"/>
                 </a:spcBef>
@@ -4814,9 +4748,6 @@
                 </a:spcAft>
                 <a:buNone/>
               </a:pPr>
-              <a:r>
-                <a:t/>
-              </a:r>
               <a:endParaRPr/>
             </a:p>
           </p:txBody>
@@ -4834,7 +4765,7 @@
             </a:xfrm>
             <a:prstGeom prst="parallelogram">
               <a:avLst>
-                <a:gd fmla="val 158024" name="adj"/>
+                <a:gd name="adj" fmla="val 158024"/>
               </a:avLst>
             </a:prstGeom>
             <a:solidFill>
@@ -4845,12 +4776,12 @@
             </a:ln>
           </p:spPr>
           <p:txBody>
-            <a:bodyPr anchorCtr="0" anchor="ctr" bIns="91425" lIns="91425" spcFirstLastPara="1" rIns="91425" wrap="square" tIns="91425">
+            <a:bodyPr spcFirstLastPara="1" wrap="square" lIns="91425" tIns="91425" rIns="91425" bIns="91425" anchor="ctr" anchorCtr="0">
               <a:noAutofit/>
             </a:bodyPr>
             <a:lstStyle/>
             <a:p>
-              <a:pPr indent="0" lvl="0" marL="0" rtl="0" algn="l">
+              <a:pPr marL="0" lvl="0" indent="0" algn="l" rtl="0">
                 <a:spcBef>
                   <a:spcPts val="0"/>
                 </a:spcBef>
@@ -4859,9 +4790,6 @@
                 </a:spcAft>
                 <a:buNone/>
               </a:pPr>
-              <a:r>
-                <a:t/>
-              </a:r>
               <a:endParaRPr/>
             </a:p>
           </p:txBody>
@@ -4894,7 +4822,7 @@
             </a:xfrm>
             <a:prstGeom prst="parallelogram">
               <a:avLst>
-                <a:gd fmla="val 158024" name="adj"/>
+                <a:gd name="adj" fmla="val 158024"/>
               </a:avLst>
             </a:prstGeom>
             <a:solidFill>
@@ -4905,12 +4833,12 @@
             </a:ln>
           </p:spPr>
           <p:txBody>
-            <a:bodyPr anchorCtr="0" anchor="ctr" bIns="91425" lIns="91425" spcFirstLastPara="1" rIns="91425" wrap="square" tIns="91425">
+            <a:bodyPr spcFirstLastPara="1" wrap="square" lIns="91425" tIns="91425" rIns="91425" bIns="91425" anchor="ctr" anchorCtr="0">
               <a:noAutofit/>
             </a:bodyPr>
             <a:lstStyle/>
             <a:p>
-              <a:pPr indent="0" lvl="0" marL="0" rtl="0" algn="l">
+              <a:pPr marL="0" lvl="0" indent="0" algn="l" rtl="0">
                 <a:spcBef>
                   <a:spcPts val="0"/>
                 </a:spcBef>
@@ -4919,9 +4847,6 @@
                 </a:spcAft>
                 <a:buNone/>
               </a:pPr>
-              <a:r>
-                <a:t/>
-              </a:r>
               <a:endParaRPr/>
             </a:p>
           </p:txBody>
@@ -4939,7 +4864,7 @@
             </a:xfrm>
             <a:prstGeom prst="parallelogram">
               <a:avLst>
-                <a:gd fmla="val 158024" name="adj"/>
+                <a:gd name="adj" fmla="val 158024"/>
               </a:avLst>
             </a:prstGeom>
             <a:solidFill>
@@ -4950,12 +4875,12 @@
             </a:ln>
           </p:spPr>
           <p:txBody>
-            <a:bodyPr anchorCtr="0" anchor="ctr" bIns="91425" lIns="91425" spcFirstLastPara="1" rIns="91425" wrap="square" tIns="91425">
+            <a:bodyPr spcFirstLastPara="1" wrap="square" lIns="91425" tIns="91425" rIns="91425" bIns="91425" anchor="ctr" anchorCtr="0">
               <a:noAutofit/>
             </a:bodyPr>
             <a:lstStyle/>
             <a:p>
-              <a:pPr indent="0" lvl="0" marL="0" rtl="0" algn="l">
+              <a:pPr marL="0" lvl="0" indent="0" algn="l" rtl="0">
                 <a:spcBef>
                   <a:spcPts val="0"/>
                 </a:spcBef>
@@ -4964,9 +4889,6 @@
                 </a:spcAft>
                 <a:buNone/>
               </a:pPr>
-              <a:r>
-                <a:t/>
-              </a:r>
               <a:endParaRPr/>
             </a:p>
           </p:txBody>
@@ -4984,7 +4906,7 @@
             </a:xfrm>
             <a:prstGeom prst="parallelogram">
               <a:avLst>
-                <a:gd fmla="val 158024" name="adj"/>
+                <a:gd name="adj" fmla="val 158024"/>
               </a:avLst>
             </a:prstGeom>
             <a:solidFill>
@@ -4995,12 +4917,12 @@
             </a:ln>
           </p:spPr>
           <p:txBody>
-            <a:bodyPr anchorCtr="0" anchor="ctr" bIns="91425" lIns="91425" spcFirstLastPara="1" rIns="91425" wrap="square" tIns="91425">
+            <a:bodyPr spcFirstLastPara="1" wrap="square" lIns="91425" tIns="91425" rIns="91425" bIns="91425" anchor="ctr" anchorCtr="0">
               <a:noAutofit/>
             </a:bodyPr>
             <a:lstStyle/>
             <a:p>
-              <a:pPr indent="0" lvl="0" marL="0" rtl="0" algn="l">
+              <a:pPr marL="0" lvl="0" indent="0" algn="l" rtl="0">
                 <a:spcBef>
                   <a:spcPts val="0"/>
                 </a:spcBef>
@@ -5009,9 +4931,6 @@
                 </a:spcAft>
                 <a:buNone/>
               </a:pPr>
-              <a:r>
-                <a:t/>
-              </a:r>
               <a:endParaRPr/>
             </a:p>
           </p:txBody>
@@ -5020,7 +4939,9 @@
       <p:sp>
         <p:nvSpPr>
           <p:cNvPr id="47" name="Google Shape;47;p3"/>
-          <p:cNvSpPr txBox="1"/>
+          <p:cNvSpPr txBox="1">
+            <a:spLocks noGrp="1"/>
+          </p:cNvSpPr>
           <p:nvPr>
             <p:ph type="title"/>
           </p:nvPr>
@@ -5035,7 +4956,7 @@
           </a:prstGeom>
         </p:spPr>
         <p:txBody>
-          <a:bodyPr anchorCtr="0" anchor="ctr" bIns="91425" lIns="91425" spcFirstLastPara="1" rIns="91425" wrap="square" tIns="91425">
+          <a:bodyPr spcFirstLastPara="1" wrap="square" lIns="91425" tIns="91425" rIns="91425" bIns="91425" anchor="ctr" anchorCtr="0">
             <a:normAutofit/>
           </a:bodyPr>
           <a:lstStyle>
@@ -5202,15 +5123,19 @@
               </a:defRPr>
             </a:lvl9pPr>
           </a:lstStyle>
-          <a:p/>
+          <a:p>
+            <a:endParaRPr/>
+          </a:p>
         </p:txBody>
       </p:sp>
       <p:sp>
         <p:nvSpPr>
           <p:cNvPr id="48" name="Google Shape;48;p3"/>
-          <p:cNvSpPr txBox="1"/>
+          <p:cNvSpPr txBox="1">
+            <a:spLocks noGrp="1"/>
+          </p:cNvSpPr>
           <p:nvPr>
-            <p:ph idx="12" type="sldNum"/>
+            <p:ph type="sldNum" idx="12"/>
           </p:nvPr>
         </p:nvSpPr>
         <p:spPr>
@@ -5223,7 +5148,7 @@
           </a:prstGeom>
         </p:spPr>
         <p:txBody>
-          <a:bodyPr anchorCtr="0" anchor="ctr" bIns="91425" lIns="91425" spcFirstLastPara="1" rIns="91425" wrap="square" tIns="91425">
+          <a:bodyPr spcFirstLastPara="1" wrap="square" lIns="91425" tIns="91425" rIns="91425" bIns="91425" anchor="ctr" anchorCtr="0">
             <a:normAutofit/>
           </a:bodyPr>
           <a:lstStyle>
@@ -5265,7 +5190,7 @@
             </a:lvl9pPr>
           </a:lstStyle>
           <a:p>
-            <a:pPr indent="0" lvl="0" marL="0" rtl="0" algn="r">
+            <a:pPr marL="0" lvl="0" indent="0" algn="r" rtl="0">
               <a:spcBef>
                 <a:spcPts val="0"/>
               </a:spcBef>
@@ -5291,18 +5216,19 @@
 </file>
 
 <file path=ppt/slideLayouts/slideLayout3.xml><?xml version="1.0" encoding="utf-8"?>
-<p:sldLayout xmlns:a="http://schemas.openxmlformats.org/drawingml/2006/main" xmlns:r="http://schemas.openxmlformats.org/officeDocument/2006/relationships" xmlns:mc="http://schemas.openxmlformats.org/markup-compatibility/2006" xmlns:mv="urn:schemas-microsoft-com:mac:vml" xmlns:p="http://schemas.openxmlformats.org/presentationml/2006/main" xmlns:c="http://schemas.openxmlformats.org/drawingml/2006/chart" xmlns:dgm="http://schemas.openxmlformats.org/drawingml/2006/diagram" xmlns:o="urn:schemas-microsoft-com:office:office" xmlns:v="urn:schemas-microsoft-com:vml" xmlns:pvml="urn:schemas-microsoft-com:office:powerpoint" xmlns:com="http://schemas.openxmlformats.org/drawingml/2006/compatibility" xmlns:p14="http://schemas.microsoft.com/office/powerpoint/2010/main" xmlns:p15="http://schemas.microsoft.com/office/powerpoint/2012/main" xmlns:ahyp="http://schemas.microsoft.com/office/drawing/2018/hyperlinkcolor" matchingName="Title and body" type="tx">
+<p:sldLayout xmlns:a="http://schemas.openxmlformats.org/drawingml/2006/main" xmlns:r="http://schemas.openxmlformats.org/officeDocument/2006/relationships" xmlns:p="http://schemas.openxmlformats.org/presentationml/2006/main" matchingName="Title and body" type="tx">
   <p:cSld name="TITLE_AND_BODY">
     <p:bg>
       <p:bgPr>
         <a:solidFill>
           <a:schemeClr val="dk2"/>
         </a:solidFill>
+        <a:effectLst/>
       </p:bgPr>
     </p:bg>
     <p:spTree>
       <p:nvGrpSpPr>
-        <p:cNvPr id="49" name="Shape 49"/>
+        <p:cNvPr id="1" name="Shape 49"/>
         <p:cNvGrpSpPr/>
         <p:nvPr/>
       </p:nvGrpSpPr>
@@ -5336,12 +5262,12 @@
           </a:ln>
         </p:spPr>
         <p:txBody>
-          <a:bodyPr anchorCtr="0" anchor="ctr" bIns="91425" lIns="91425" spcFirstLastPara="1" rIns="91425" wrap="square" tIns="91425">
+          <a:bodyPr spcFirstLastPara="1" wrap="square" lIns="91425" tIns="91425" rIns="91425" bIns="91425" anchor="ctr" anchorCtr="0">
             <a:noAutofit/>
           </a:bodyPr>
           <a:lstStyle/>
           <a:p>
-            <a:pPr indent="0" lvl="0" marL="0" rtl="0" algn="l">
+            <a:pPr marL="0" lvl="0" indent="0" algn="l" rtl="0">
               <a:spcBef>
                 <a:spcPts val="0"/>
               </a:spcBef>
@@ -5350,9 +5276,6 @@
               </a:spcAft>
               <a:buNone/>
             </a:pPr>
-            <a:r>
-              <a:t/>
-            </a:r>
             <a:endParaRPr/>
           </a:p>
         </p:txBody>
@@ -5379,12 +5302,12 @@
           </a:ln>
         </p:spPr>
         <p:txBody>
-          <a:bodyPr anchorCtr="0" anchor="ctr" bIns="91425" lIns="91425" spcFirstLastPara="1" rIns="91425" wrap="square" tIns="91425">
+          <a:bodyPr spcFirstLastPara="1" wrap="square" lIns="91425" tIns="91425" rIns="91425" bIns="91425" anchor="ctr" anchorCtr="0">
             <a:noAutofit/>
           </a:bodyPr>
           <a:lstStyle/>
           <a:p>
-            <a:pPr indent="0" lvl="0" marL="0" rtl="0" algn="l">
+            <a:pPr marL="0" lvl="0" indent="0" algn="l" rtl="0">
               <a:spcBef>
                 <a:spcPts val="0"/>
               </a:spcBef>
@@ -5393,9 +5316,6 @@
               </a:spcAft>
               <a:buNone/>
             </a:pPr>
-            <a:r>
-              <a:t/>
-            </a:r>
             <a:endParaRPr/>
           </a:p>
         </p:txBody>
@@ -5421,7 +5341,7 @@
             <a:noFill/>
           </a:ln>
           <a:effectLst>
-            <a:outerShdw blurRad="228600" sx="101000" rotWithShape="0" algn="ctr" sy="101000">
+            <a:outerShdw blurRad="228600" sx="101000" sy="101000" algn="ctr" rotWithShape="0">
               <a:srgbClr val="000000">
                 <a:alpha val="40000"/>
               </a:srgbClr>
@@ -5429,12 +5349,12 @@
           </a:effectLst>
         </p:spPr>
         <p:txBody>
-          <a:bodyPr anchorCtr="0" anchor="ctr" bIns="91425" lIns="91425" spcFirstLastPara="1" rIns="91425" wrap="square" tIns="91425">
+          <a:bodyPr spcFirstLastPara="1" wrap="square" lIns="91425" tIns="91425" rIns="91425" bIns="91425" anchor="ctr" anchorCtr="0">
             <a:noAutofit/>
           </a:bodyPr>
           <a:lstStyle/>
           <a:p>
-            <a:pPr indent="0" lvl="0" marL="0" rtl="0" algn="l">
+            <a:pPr marL="0" lvl="0" indent="0" algn="l" rtl="0">
               <a:spcBef>
                 <a:spcPts val="0"/>
               </a:spcBef>
@@ -5443,9 +5363,6 @@
               </a:spcAft>
               <a:buNone/>
             </a:pPr>
-            <a:r>
-              <a:t/>
-            </a:r>
             <a:endParaRPr/>
           </a:p>
         </p:txBody>
@@ -5453,7 +5370,9 @@
       <p:sp>
         <p:nvSpPr>
           <p:cNvPr id="53" name="Google Shape;53;p4"/>
-          <p:cNvSpPr txBox="1"/>
+          <p:cNvSpPr txBox="1">
+            <a:spLocks noGrp="1"/>
+          </p:cNvSpPr>
           <p:nvPr>
             <p:ph type="title"/>
           </p:nvPr>
@@ -5468,7 +5387,7 @@
           </a:prstGeom>
         </p:spPr>
         <p:txBody>
-          <a:bodyPr anchorCtr="0" anchor="t" bIns="91425" lIns="91425" spcFirstLastPara="1" rIns="91425" wrap="square" tIns="91425">
+          <a:bodyPr spcFirstLastPara="1" wrap="square" lIns="91425" tIns="91425" rIns="91425" bIns="91425" anchor="t" anchorCtr="0">
             <a:normAutofit/>
           </a:bodyPr>
           <a:lstStyle>
@@ -5572,15 +5491,19 @@
               <a:defRPr sz="3000"/>
             </a:lvl9pPr>
           </a:lstStyle>
-          <a:p/>
+          <a:p>
+            <a:endParaRPr/>
+          </a:p>
         </p:txBody>
       </p:sp>
       <p:sp>
         <p:nvSpPr>
           <p:cNvPr id="54" name="Google Shape;54;p4"/>
-          <p:cNvSpPr txBox="1"/>
+          <p:cNvSpPr txBox="1">
+            <a:spLocks noGrp="1"/>
+          </p:cNvSpPr>
           <p:nvPr>
-            <p:ph idx="1" type="body"/>
+            <p:ph type="body" idx="1"/>
           </p:nvPr>
         </p:nvSpPr>
         <p:spPr>
@@ -5593,11 +5516,11 @@
           </a:prstGeom>
         </p:spPr>
         <p:txBody>
-          <a:bodyPr anchorCtr="0" anchor="t" bIns="91425" lIns="91425" spcFirstLastPara="1" rIns="91425" wrap="square" tIns="91425">
+          <a:bodyPr spcFirstLastPara="1" wrap="square" lIns="91425" tIns="91425" rIns="91425" bIns="91425" anchor="t" anchorCtr="0">
             <a:normAutofit/>
           </a:bodyPr>
           <a:lstStyle>
-            <a:lvl1pPr indent="-311150" lvl="0" marL="457200">
+            <a:lvl1pPr marL="457200" lvl="0" indent="-311150">
               <a:spcBef>
                 <a:spcPts val="0"/>
               </a:spcBef>
@@ -5608,7 +5531,7 @@
               <a:buChar char="●"/>
               <a:defRPr/>
             </a:lvl1pPr>
-            <a:lvl2pPr indent="-298450" lvl="1" marL="914400">
+            <a:lvl2pPr marL="914400" lvl="1" indent="-298450">
               <a:spcBef>
                 <a:spcPts val="0"/>
               </a:spcBef>
@@ -5619,7 +5542,7 @@
               <a:buChar char="○"/>
               <a:defRPr/>
             </a:lvl2pPr>
-            <a:lvl3pPr indent="-298450" lvl="2" marL="1371600">
+            <a:lvl3pPr marL="1371600" lvl="2" indent="-298450">
               <a:spcBef>
                 <a:spcPts val="0"/>
               </a:spcBef>
@@ -5630,7 +5553,7 @@
               <a:buChar char="■"/>
               <a:defRPr/>
             </a:lvl3pPr>
-            <a:lvl4pPr indent="-298450" lvl="3" marL="1828800">
+            <a:lvl4pPr marL="1828800" lvl="3" indent="-298450">
               <a:spcBef>
                 <a:spcPts val="0"/>
               </a:spcBef>
@@ -5641,7 +5564,7 @@
               <a:buChar char="●"/>
               <a:defRPr/>
             </a:lvl4pPr>
-            <a:lvl5pPr indent="-298450" lvl="4" marL="2286000">
+            <a:lvl5pPr marL="2286000" lvl="4" indent="-298450">
               <a:spcBef>
                 <a:spcPts val="0"/>
               </a:spcBef>
@@ -5652,7 +5575,7 @@
               <a:buChar char="○"/>
               <a:defRPr/>
             </a:lvl5pPr>
-            <a:lvl6pPr indent="-298450" lvl="5" marL="2743200">
+            <a:lvl6pPr marL="2743200" lvl="5" indent="-298450">
               <a:spcBef>
                 <a:spcPts val="0"/>
               </a:spcBef>
@@ -5663,7 +5586,7 @@
               <a:buChar char="■"/>
               <a:defRPr/>
             </a:lvl6pPr>
-            <a:lvl7pPr indent="-298450" lvl="6" marL="3200400">
+            <a:lvl7pPr marL="3200400" lvl="6" indent="-298450">
               <a:spcBef>
                 <a:spcPts val="0"/>
               </a:spcBef>
@@ -5674,7 +5597,7 @@
               <a:buChar char="●"/>
               <a:defRPr/>
             </a:lvl7pPr>
-            <a:lvl8pPr indent="-298450" lvl="7" marL="3657600">
+            <a:lvl8pPr marL="3657600" lvl="7" indent="-298450">
               <a:spcBef>
                 <a:spcPts val="0"/>
               </a:spcBef>
@@ -5685,7 +5608,7 @@
               <a:buChar char="○"/>
               <a:defRPr/>
             </a:lvl8pPr>
-            <a:lvl9pPr indent="-298450" lvl="8" marL="4114800">
+            <a:lvl9pPr marL="4114800" lvl="8" indent="-298450">
               <a:spcBef>
                 <a:spcPts val="0"/>
               </a:spcBef>
@@ -5697,15 +5620,19 @@
               <a:defRPr/>
             </a:lvl9pPr>
           </a:lstStyle>
-          <a:p/>
+          <a:p>
+            <a:endParaRPr/>
+          </a:p>
         </p:txBody>
       </p:sp>
       <p:sp>
         <p:nvSpPr>
           <p:cNvPr id="55" name="Google Shape;55;p4"/>
-          <p:cNvSpPr txBox="1"/>
+          <p:cNvSpPr txBox="1">
+            <a:spLocks noGrp="1"/>
+          </p:cNvSpPr>
           <p:nvPr>
-            <p:ph idx="12" type="sldNum"/>
+            <p:ph type="sldNum" idx="12"/>
           </p:nvPr>
         </p:nvSpPr>
         <p:spPr>
@@ -5718,7 +5645,7 @@
           </a:prstGeom>
         </p:spPr>
         <p:txBody>
-          <a:bodyPr anchorCtr="0" anchor="ctr" bIns="91425" lIns="91425" spcFirstLastPara="1" rIns="91425" wrap="square" tIns="91425">
+          <a:bodyPr spcFirstLastPara="1" wrap="square" lIns="91425" tIns="91425" rIns="91425" bIns="91425" anchor="ctr" anchorCtr="0">
             <a:normAutofit/>
           </a:bodyPr>
           <a:lstStyle>
@@ -5760,7 +5687,7 @@
             </a:lvl9pPr>
           </a:lstStyle>
           <a:p>
-            <a:pPr indent="0" lvl="0" marL="0" rtl="0" algn="r">
+            <a:pPr marL="0" lvl="0" indent="0" algn="r" rtl="0">
               <a:spcBef>
                 <a:spcPts val="0"/>
               </a:spcBef>
@@ -5786,18 +5713,19 @@
 </file>
 
 <file path=ppt/slideLayouts/slideLayout4.xml><?xml version="1.0" encoding="utf-8"?>
-<p:sldLayout xmlns:a="http://schemas.openxmlformats.org/drawingml/2006/main" xmlns:r="http://schemas.openxmlformats.org/officeDocument/2006/relationships" xmlns:mc="http://schemas.openxmlformats.org/markup-compatibility/2006" xmlns:mv="urn:schemas-microsoft-com:mac:vml" xmlns:p="http://schemas.openxmlformats.org/presentationml/2006/main" xmlns:c="http://schemas.openxmlformats.org/drawingml/2006/chart" xmlns:dgm="http://schemas.openxmlformats.org/drawingml/2006/diagram" xmlns:o="urn:schemas-microsoft-com:office:office" xmlns:v="urn:schemas-microsoft-com:vml" xmlns:pvml="urn:schemas-microsoft-com:office:powerpoint" xmlns:com="http://schemas.openxmlformats.org/drawingml/2006/compatibility" xmlns:p14="http://schemas.microsoft.com/office/powerpoint/2010/main" xmlns:p15="http://schemas.microsoft.com/office/powerpoint/2012/main" xmlns:ahyp="http://schemas.microsoft.com/office/drawing/2018/hyperlinkcolor" matchingName="Title and two columns" type="twoColTx">
+<p:sldLayout xmlns:a="http://schemas.openxmlformats.org/drawingml/2006/main" xmlns:r="http://schemas.openxmlformats.org/officeDocument/2006/relationships" xmlns:p="http://schemas.openxmlformats.org/presentationml/2006/main" matchingName="Title and two columns" type="twoColTx">
   <p:cSld name="TITLE_AND_TWO_COLUMNS">
     <p:bg>
       <p:bgPr>
         <a:solidFill>
           <a:schemeClr val="dk2"/>
         </a:solidFill>
+        <a:effectLst/>
       </p:bgPr>
     </p:bg>
     <p:spTree>
       <p:nvGrpSpPr>
-        <p:cNvPr id="56" name="Shape 56"/>
+        <p:cNvPr id="1" name="Shape 56"/>
         <p:cNvGrpSpPr/>
         <p:nvPr/>
       </p:nvGrpSpPr>
@@ -5831,12 +5759,12 @@
           </a:ln>
         </p:spPr>
         <p:txBody>
-          <a:bodyPr anchorCtr="0" anchor="ctr" bIns="91425" lIns="91425" spcFirstLastPara="1" rIns="91425" wrap="square" tIns="91425">
+          <a:bodyPr spcFirstLastPara="1" wrap="square" lIns="91425" tIns="91425" rIns="91425" bIns="91425" anchor="ctr" anchorCtr="0">
             <a:noAutofit/>
           </a:bodyPr>
           <a:lstStyle/>
           <a:p>
-            <a:pPr indent="0" lvl="0" marL="0" rtl="0" algn="l">
+            <a:pPr marL="0" lvl="0" indent="0" algn="l" rtl="0">
               <a:spcBef>
                 <a:spcPts val="0"/>
               </a:spcBef>
@@ -5845,9 +5773,6 @@
               </a:spcAft>
               <a:buNone/>
             </a:pPr>
-            <a:r>
-              <a:t/>
-            </a:r>
             <a:endParaRPr/>
           </a:p>
         </p:txBody>
@@ -5874,12 +5799,12 @@
           </a:ln>
         </p:spPr>
         <p:txBody>
-          <a:bodyPr anchorCtr="0" anchor="ctr" bIns="91425" lIns="91425" spcFirstLastPara="1" rIns="91425" wrap="square" tIns="91425">
+          <a:bodyPr spcFirstLastPara="1" wrap="square" lIns="91425" tIns="91425" rIns="91425" bIns="91425" anchor="ctr" anchorCtr="0">
             <a:noAutofit/>
           </a:bodyPr>
           <a:lstStyle/>
           <a:p>
-            <a:pPr indent="0" lvl="0" marL="0" rtl="0" algn="l">
+            <a:pPr marL="0" lvl="0" indent="0" algn="l" rtl="0">
               <a:spcBef>
                 <a:spcPts val="0"/>
               </a:spcBef>
@@ -5888,9 +5813,6 @@
               </a:spcAft>
               <a:buNone/>
             </a:pPr>
-            <a:r>
-              <a:t/>
-            </a:r>
             <a:endParaRPr/>
           </a:p>
         </p:txBody>
@@ -5916,7 +5838,7 @@
             <a:noFill/>
           </a:ln>
           <a:effectLst>
-            <a:outerShdw blurRad="228600" sx="101000" rotWithShape="0" algn="ctr" sy="101000">
+            <a:outerShdw blurRad="228600" sx="101000" sy="101000" algn="ctr" rotWithShape="0">
               <a:srgbClr val="000000">
                 <a:alpha val="40000"/>
               </a:srgbClr>
@@ -5924,12 +5846,12 @@
           </a:effectLst>
         </p:spPr>
         <p:txBody>
-          <a:bodyPr anchorCtr="0" anchor="ctr" bIns="91425" lIns="91425" spcFirstLastPara="1" rIns="91425" wrap="square" tIns="91425">
+          <a:bodyPr spcFirstLastPara="1" wrap="square" lIns="91425" tIns="91425" rIns="91425" bIns="91425" anchor="ctr" anchorCtr="0">
             <a:noAutofit/>
           </a:bodyPr>
           <a:lstStyle/>
           <a:p>
-            <a:pPr indent="0" lvl="0" marL="0" rtl="0" algn="l">
+            <a:pPr marL="0" lvl="0" indent="0" algn="l" rtl="0">
               <a:spcBef>
                 <a:spcPts val="0"/>
               </a:spcBef>
@@ -5938,9 +5860,6 @@
               </a:spcAft>
               <a:buNone/>
             </a:pPr>
-            <a:r>
-              <a:t/>
-            </a:r>
             <a:endParaRPr/>
           </a:p>
         </p:txBody>
@@ -5948,7 +5867,9 @@
       <p:sp>
         <p:nvSpPr>
           <p:cNvPr id="60" name="Google Shape;60;p5"/>
-          <p:cNvSpPr txBox="1"/>
+          <p:cNvSpPr txBox="1">
+            <a:spLocks noGrp="1"/>
+          </p:cNvSpPr>
           <p:nvPr>
             <p:ph type="title"/>
           </p:nvPr>
@@ -5963,7 +5884,7 @@
           </a:prstGeom>
         </p:spPr>
         <p:txBody>
-          <a:bodyPr anchorCtr="0" anchor="t" bIns="91425" lIns="91425" spcFirstLastPara="1" rIns="91425" wrap="square" tIns="91425">
+          <a:bodyPr spcFirstLastPara="1" wrap="square" lIns="91425" tIns="91425" rIns="91425" bIns="91425" anchor="t" anchorCtr="0">
             <a:normAutofit/>
           </a:bodyPr>
           <a:lstStyle>
@@ -6067,15 +5988,19 @@
               <a:defRPr sz="3000"/>
             </a:lvl9pPr>
           </a:lstStyle>
-          <a:p/>
+          <a:p>
+            <a:endParaRPr/>
+          </a:p>
         </p:txBody>
       </p:sp>
       <p:sp>
         <p:nvSpPr>
           <p:cNvPr id="61" name="Google Shape;61;p5"/>
-          <p:cNvSpPr txBox="1"/>
+          <p:cNvSpPr txBox="1">
+            <a:spLocks noGrp="1"/>
+          </p:cNvSpPr>
           <p:nvPr>
-            <p:ph idx="1" type="body"/>
+            <p:ph type="body" idx="1"/>
           </p:nvPr>
         </p:nvSpPr>
         <p:spPr>
@@ -6088,11 +6013,11 @@
           </a:prstGeom>
         </p:spPr>
         <p:txBody>
-          <a:bodyPr anchorCtr="0" anchor="t" bIns="91425" lIns="91425" spcFirstLastPara="1" rIns="91425" wrap="square" tIns="91425">
+          <a:bodyPr spcFirstLastPara="1" wrap="square" lIns="91425" tIns="91425" rIns="91425" bIns="91425" anchor="t" anchorCtr="0">
             <a:normAutofit/>
           </a:bodyPr>
           <a:lstStyle>
-            <a:lvl1pPr indent="-311150" lvl="0" marL="457200">
+            <a:lvl1pPr marL="457200" lvl="0" indent="-311150">
               <a:spcBef>
                 <a:spcPts val="0"/>
               </a:spcBef>
@@ -6103,7 +6028,7 @@
               <a:buChar char="●"/>
               <a:defRPr/>
             </a:lvl1pPr>
-            <a:lvl2pPr indent="-298450" lvl="1" marL="914400">
+            <a:lvl2pPr marL="914400" lvl="1" indent="-298450">
               <a:spcBef>
                 <a:spcPts val="0"/>
               </a:spcBef>
@@ -6114,7 +6039,7 @@
               <a:buChar char="○"/>
               <a:defRPr/>
             </a:lvl2pPr>
-            <a:lvl3pPr indent="-298450" lvl="2" marL="1371600">
+            <a:lvl3pPr marL="1371600" lvl="2" indent="-298450">
               <a:spcBef>
                 <a:spcPts val="0"/>
               </a:spcBef>
@@ -6125,7 +6050,7 @@
               <a:buChar char="■"/>
               <a:defRPr/>
             </a:lvl3pPr>
-            <a:lvl4pPr indent="-298450" lvl="3" marL="1828800">
+            <a:lvl4pPr marL="1828800" lvl="3" indent="-298450">
               <a:spcBef>
                 <a:spcPts val="0"/>
               </a:spcBef>
@@ -6136,7 +6061,7 @@
               <a:buChar char="●"/>
               <a:defRPr/>
             </a:lvl4pPr>
-            <a:lvl5pPr indent="-298450" lvl="4" marL="2286000">
+            <a:lvl5pPr marL="2286000" lvl="4" indent="-298450">
               <a:spcBef>
                 <a:spcPts val="0"/>
               </a:spcBef>
@@ -6147,7 +6072,7 @@
               <a:buChar char="○"/>
               <a:defRPr/>
             </a:lvl5pPr>
-            <a:lvl6pPr indent="-298450" lvl="5" marL="2743200">
+            <a:lvl6pPr marL="2743200" lvl="5" indent="-298450">
               <a:spcBef>
                 <a:spcPts val="0"/>
               </a:spcBef>
@@ -6158,7 +6083,7 @@
               <a:buChar char="■"/>
               <a:defRPr/>
             </a:lvl6pPr>
-            <a:lvl7pPr indent="-298450" lvl="6" marL="3200400">
+            <a:lvl7pPr marL="3200400" lvl="6" indent="-298450">
               <a:spcBef>
                 <a:spcPts val="0"/>
               </a:spcBef>
@@ -6169,7 +6094,7 @@
               <a:buChar char="●"/>
               <a:defRPr/>
             </a:lvl7pPr>
-            <a:lvl8pPr indent="-298450" lvl="7" marL="3657600">
+            <a:lvl8pPr marL="3657600" lvl="7" indent="-298450">
               <a:spcBef>
                 <a:spcPts val="0"/>
               </a:spcBef>
@@ -6180,7 +6105,7 @@
               <a:buChar char="○"/>
               <a:defRPr/>
             </a:lvl8pPr>
-            <a:lvl9pPr indent="-298450" lvl="8" marL="4114800">
+            <a:lvl9pPr marL="4114800" lvl="8" indent="-298450">
               <a:spcBef>
                 <a:spcPts val="0"/>
               </a:spcBef>
@@ -6192,15 +6117,19 @@
               <a:defRPr/>
             </a:lvl9pPr>
           </a:lstStyle>
-          <a:p/>
+          <a:p>
+            <a:endParaRPr/>
+          </a:p>
         </p:txBody>
       </p:sp>
       <p:sp>
         <p:nvSpPr>
           <p:cNvPr id="62" name="Google Shape;62;p5"/>
-          <p:cNvSpPr txBox="1"/>
+          <p:cNvSpPr txBox="1">
+            <a:spLocks noGrp="1"/>
+          </p:cNvSpPr>
           <p:nvPr>
-            <p:ph idx="2" type="body"/>
+            <p:ph type="body" idx="2"/>
           </p:nvPr>
         </p:nvSpPr>
         <p:spPr>
@@ -6213,11 +6142,11 @@
           </a:prstGeom>
         </p:spPr>
         <p:txBody>
-          <a:bodyPr anchorCtr="0" anchor="t" bIns="91425" lIns="91425" spcFirstLastPara="1" rIns="91425" wrap="square" tIns="91425">
+          <a:bodyPr spcFirstLastPara="1" wrap="square" lIns="91425" tIns="91425" rIns="91425" bIns="91425" anchor="t" anchorCtr="0">
             <a:normAutofit/>
           </a:bodyPr>
           <a:lstStyle>
-            <a:lvl1pPr indent="-311150" lvl="0" marL="457200">
+            <a:lvl1pPr marL="457200" lvl="0" indent="-311150">
               <a:spcBef>
                 <a:spcPts val="0"/>
               </a:spcBef>
@@ -6228,7 +6157,7 @@
               <a:buChar char="●"/>
               <a:defRPr/>
             </a:lvl1pPr>
-            <a:lvl2pPr indent="-298450" lvl="1" marL="914400">
+            <a:lvl2pPr marL="914400" lvl="1" indent="-298450">
               <a:spcBef>
                 <a:spcPts val="0"/>
               </a:spcBef>
@@ -6239,7 +6168,7 @@
               <a:buChar char="○"/>
               <a:defRPr/>
             </a:lvl2pPr>
-            <a:lvl3pPr indent="-298450" lvl="2" marL="1371600">
+            <a:lvl3pPr marL="1371600" lvl="2" indent="-298450">
               <a:spcBef>
                 <a:spcPts val="0"/>
               </a:spcBef>
@@ -6250,7 +6179,7 @@
               <a:buChar char="■"/>
               <a:defRPr/>
             </a:lvl3pPr>
-            <a:lvl4pPr indent="-298450" lvl="3" marL="1828800">
+            <a:lvl4pPr marL="1828800" lvl="3" indent="-298450">
               <a:spcBef>
                 <a:spcPts val="0"/>
               </a:spcBef>
@@ -6261,7 +6190,7 @@
               <a:buChar char="●"/>
               <a:defRPr/>
             </a:lvl4pPr>
-            <a:lvl5pPr indent="-298450" lvl="4" marL="2286000">
+            <a:lvl5pPr marL="2286000" lvl="4" indent="-298450">
               <a:spcBef>
                 <a:spcPts val="0"/>
               </a:spcBef>
@@ -6272,7 +6201,7 @@
               <a:buChar char="○"/>
               <a:defRPr/>
             </a:lvl5pPr>
-            <a:lvl6pPr indent="-298450" lvl="5" marL="2743200">
+            <a:lvl6pPr marL="2743200" lvl="5" indent="-298450">
               <a:spcBef>
                 <a:spcPts val="0"/>
               </a:spcBef>
@@ -6283,7 +6212,7 @@
               <a:buChar char="■"/>
               <a:defRPr/>
             </a:lvl6pPr>
-            <a:lvl7pPr indent="-298450" lvl="6" marL="3200400">
+            <a:lvl7pPr marL="3200400" lvl="6" indent="-298450">
               <a:spcBef>
                 <a:spcPts val="0"/>
               </a:spcBef>
@@ -6294,7 +6223,7 @@
               <a:buChar char="●"/>
               <a:defRPr/>
             </a:lvl7pPr>
-            <a:lvl8pPr indent="-298450" lvl="7" marL="3657600">
+            <a:lvl8pPr marL="3657600" lvl="7" indent="-298450">
               <a:spcBef>
                 <a:spcPts val="0"/>
               </a:spcBef>
@@ -6305,7 +6234,7 @@
               <a:buChar char="○"/>
               <a:defRPr/>
             </a:lvl8pPr>
-            <a:lvl9pPr indent="-298450" lvl="8" marL="4114800">
+            <a:lvl9pPr marL="4114800" lvl="8" indent="-298450">
               <a:spcBef>
                 <a:spcPts val="0"/>
               </a:spcBef>
@@ -6317,15 +6246,19 @@
               <a:defRPr/>
             </a:lvl9pPr>
           </a:lstStyle>
-          <a:p/>
+          <a:p>
+            <a:endParaRPr/>
+          </a:p>
         </p:txBody>
       </p:sp>
       <p:sp>
         <p:nvSpPr>
           <p:cNvPr id="63" name="Google Shape;63;p5"/>
-          <p:cNvSpPr txBox="1"/>
+          <p:cNvSpPr txBox="1">
+            <a:spLocks noGrp="1"/>
+          </p:cNvSpPr>
           <p:nvPr>
-            <p:ph idx="12" type="sldNum"/>
+            <p:ph type="sldNum" idx="12"/>
           </p:nvPr>
         </p:nvSpPr>
         <p:spPr>
@@ -6338,7 +6271,7 @@
           </a:prstGeom>
         </p:spPr>
         <p:txBody>
-          <a:bodyPr anchorCtr="0" anchor="ctr" bIns="91425" lIns="91425" spcFirstLastPara="1" rIns="91425" wrap="square" tIns="91425">
+          <a:bodyPr spcFirstLastPara="1" wrap="square" lIns="91425" tIns="91425" rIns="91425" bIns="91425" anchor="ctr" anchorCtr="0">
             <a:normAutofit/>
           </a:bodyPr>
           <a:lstStyle>
@@ -6380,7 +6313,7 @@
             </a:lvl9pPr>
           </a:lstStyle>
           <a:p>
-            <a:pPr indent="0" lvl="0" marL="0" rtl="0" algn="r">
+            <a:pPr marL="0" lvl="0" indent="0" algn="r" rtl="0">
               <a:spcBef>
                 <a:spcPts val="0"/>
               </a:spcBef>
@@ -6406,18 +6339,19 @@
 </file>
 
 <file path=ppt/slideLayouts/slideLayout5.xml><?xml version="1.0" encoding="utf-8"?>
-<p:sldLayout xmlns:a="http://schemas.openxmlformats.org/drawingml/2006/main" xmlns:r="http://schemas.openxmlformats.org/officeDocument/2006/relationships" xmlns:mc="http://schemas.openxmlformats.org/markup-compatibility/2006" xmlns:mv="urn:schemas-microsoft-com:mac:vml" xmlns:p="http://schemas.openxmlformats.org/presentationml/2006/main" xmlns:c="http://schemas.openxmlformats.org/drawingml/2006/chart" xmlns:dgm="http://schemas.openxmlformats.org/drawingml/2006/diagram" xmlns:o="urn:schemas-microsoft-com:office:office" xmlns:v="urn:schemas-microsoft-com:vml" xmlns:pvml="urn:schemas-microsoft-com:office:powerpoint" xmlns:com="http://schemas.openxmlformats.org/drawingml/2006/compatibility" xmlns:p14="http://schemas.microsoft.com/office/powerpoint/2010/main" xmlns:p15="http://schemas.microsoft.com/office/powerpoint/2012/main" xmlns:ahyp="http://schemas.microsoft.com/office/drawing/2018/hyperlinkcolor" matchingName="Title only" type="titleOnly">
+<p:sldLayout xmlns:a="http://schemas.openxmlformats.org/drawingml/2006/main" xmlns:r="http://schemas.openxmlformats.org/officeDocument/2006/relationships" xmlns:p="http://schemas.openxmlformats.org/presentationml/2006/main" matchingName="Title only" type="titleOnly">
   <p:cSld name="TITLE_ONLY">
     <p:bg>
       <p:bgPr>
         <a:solidFill>
           <a:schemeClr val="dk2"/>
         </a:solidFill>
+        <a:effectLst/>
       </p:bgPr>
     </p:bg>
     <p:spTree>
       <p:nvGrpSpPr>
-        <p:cNvPr id="64" name="Shape 64"/>
+        <p:cNvPr id="1" name="Shape 64"/>
         <p:cNvGrpSpPr/>
         <p:nvPr/>
       </p:nvGrpSpPr>
@@ -6451,12 +6385,12 @@
           </a:ln>
         </p:spPr>
         <p:txBody>
-          <a:bodyPr anchorCtr="0" anchor="ctr" bIns="91425" lIns="91425" spcFirstLastPara="1" rIns="91425" wrap="square" tIns="91425">
+          <a:bodyPr spcFirstLastPara="1" wrap="square" lIns="91425" tIns="91425" rIns="91425" bIns="91425" anchor="ctr" anchorCtr="0">
             <a:noAutofit/>
           </a:bodyPr>
           <a:lstStyle/>
           <a:p>
-            <a:pPr indent="0" lvl="0" marL="0" rtl="0" algn="l">
+            <a:pPr marL="0" lvl="0" indent="0" algn="l" rtl="0">
               <a:spcBef>
                 <a:spcPts val="0"/>
               </a:spcBef>
@@ -6465,9 +6399,6 @@
               </a:spcAft>
               <a:buNone/>
             </a:pPr>
-            <a:r>
-              <a:t/>
-            </a:r>
             <a:endParaRPr/>
           </a:p>
         </p:txBody>
@@ -6494,12 +6425,12 @@
           </a:ln>
         </p:spPr>
         <p:txBody>
-          <a:bodyPr anchorCtr="0" anchor="ctr" bIns="91425" lIns="91425" spcFirstLastPara="1" rIns="91425" wrap="square" tIns="91425">
+          <a:bodyPr spcFirstLastPara="1" wrap="square" lIns="91425" tIns="91425" rIns="91425" bIns="91425" anchor="ctr" anchorCtr="0">
             <a:noAutofit/>
           </a:bodyPr>
           <a:lstStyle/>
           <a:p>
-            <a:pPr indent="0" lvl="0" marL="0" rtl="0" algn="l">
+            <a:pPr marL="0" lvl="0" indent="0" algn="l" rtl="0">
               <a:spcBef>
                 <a:spcPts val="0"/>
               </a:spcBef>
@@ -6508,9 +6439,6 @@
               </a:spcAft>
               <a:buNone/>
             </a:pPr>
-            <a:r>
-              <a:t/>
-            </a:r>
             <a:endParaRPr/>
           </a:p>
         </p:txBody>
@@ -6536,7 +6464,7 @@
             <a:noFill/>
           </a:ln>
           <a:effectLst>
-            <a:outerShdw blurRad="228600" sx="101000" rotWithShape="0" algn="ctr" sy="101000">
+            <a:outerShdw blurRad="228600" sx="101000" sy="101000" algn="ctr" rotWithShape="0">
               <a:srgbClr val="000000">
                 <a:alpha val="40000"/>
               </a:srgbClr>
@@ -6544,12 +6472,12 @@
           </a:effectLst>
         </p:spPr>
         <p:txBody>
-          <a:bodyPr anchorCtr="0" anchor="ctr" bIns="91425" lIns="91425" spcFirstLastPara="1" rIns="91425" wrap="square" tIns="91425">
+          <a:bodyPr spcFirstLastPara="1" wrap="square" lIns="91425" tIns="91425" rIns="91425" bIns="91425" anchor="ctr" anchorCtr="0">
             <a:noAutofit/>
           </a:bodyPr>
           <a:lstStyle/>
           <a:p>
-            <a:pPr indent="0" lvl="0" marL="0" rtl="0" algn="l">
+            <a:pPr marL="0" lvl="0" indent="0" algn="l" rtl="0">
               <a:spcBef>
                 <a:spcPts val="0"/>
               </a:spcBef>
@@ -6558,9 +6486,6 @@
               </a:spcAft>
               <a:buNone/>
             </a:pPr>
-            <a:r>
-              <a:t/>
-            </a:r>
             <a:endParaRPr/>
           </a:p>
         </p:txBody>
@@ -6568,7 +6493,9 @@
       <p:sp>
         <p:nvSpPr>
           <p:cNvPr id="68" name="Google Shape;68;p6"/>
-          <p:cNvSpPr txBox="1"/>
+          <p:cNvSpPr txBox="1">
+            <a:spLocks noGrp="1"/>
+          </p:cNvSpPr>
           <p:nvPr>
             <p:ph type="title"/>
           </p:nvPr>
@@ -6583,7 +6510,7 @@
           </a:prstGeom>
         </p:spPr>
         <p:txBody>
-          <a:bodyPr anchorCtr="0" anchor="t" bIns="91425" lIns="91425" spcFirstLastPara="1" rIns="91425" wrap="square" tIns="91425">
+          <a:bodyPr spcFirstLastPara="1" wrap="square" lIns="91425" tIns="91425" rIns="91425" bIns="91425" anchor="t" anchorCtr="0">
             <a:normAutofit/>
           </a:bodyPr>
           <a:lstStyle>
@@ -6687,15 +6614,19 @@
               <a:defRPr sz="3000"/>
             </a:lvl9pPr>
           </a:lstStyle>
-          <a:p/>
+          <a:p>
+            <a:endParaRPr/>
+          </a:p>
         </p:txBody>
       </p:sp>
       <p:sp>
         <p:nvSpPr>
           <p:cNvPr id="69" name="Google Shape;69;p6"/>
-          <p:cNvSpPr txBox="1"/>
+          <p:cNvSpPr txBox="1">
+            <a:spLocks noGrp="1"/>
+          </p:cNvSpPr>
           <p:nvPr>
-            <p:ph idx="12" type="sldNum"/>
+            <p:ph type="sldNum" idx="12"/>
           </p:nvPr>
         </p:nvSpPr>
         <p:spPr>
@@ -6708,7 +6639,7 @@
           </a:prstGeom>
         </p:spPr>
         <p:txBody>
-          <a:bodyPr anchorCtr="0" anchor="ctr" bIns="91425" lIns="91425" spcFirstLastPara="1" rIns="91425" wrap="square" tIns="91425">
+          <a:bodyPr spcFirstLastPara="1" wrap="square" lIns="91425" tIns="91425" rIns="91425" bIns="91425" anchor="ctr" anchorCtr="0">
             <a:normAutofit/>
           </a:bodyPr>
           <a:lstStyle>
@@ -6750,7 +6681,7 @@
             </a:lvl9pPr>
           </a:lstStyle>
           <a:p>
-            <a:pPr indent="0" lvl="0" marL="0" rtl="0" algn="r">
+            <a:pPr marL="0" lvl="0" indent="0" algn="r" rtl="0">
               <a:spcBef>
                 <a:spcPts val="0"/>
               </a:spcBef>
@@ -6776,18 +6707,19 @@
 </file>
 
 <file path=ppt/slideLayouts/slideLayout6.xml><?xml version="1.0" encoding="utf-8"?>
-<p:sldLayout xmlns:a="http://schemas.openxmlformats.org/drawingml/2006/main" xmlns:r="http://schemas.openxmlformats.org/officeDocument/2006/relationships" xmlns:mc="http://schemas.openxmlformats.org/markup-compatibility/2006" xmlns:mv="urn:schemas-microsoft-com:mac:vml" xmlns:p="http://schemas.openxmlformats.org/presentationml/2006/main" xmlns:c="http://schemas.openxmlformats.org/drawingml/2006/chart" xmlns:dgm="http://schemas.openxmlformats.org/drawingml/2006/diagram" xmlns:o="urn:schemas-microsoft-com:office:office" xmlns:v="urn:schemas-microsoft-com:vml" xmlns:pvml="urn:schemas-microsoft-com:office:powerpoint" xmlns:com="http://schemas.openxmlformats.org/drawingml/2006/compatibility" xmlns:p14="http://schemas.microsoft.com/office/powerpoint/2010/main" xmlns:p15="http://schemas.microsoft.com/office/powerpoint/2012/main" xmlns:ahyp="http://schemas.microsoft.com/office/drawing/2018/hyperlinkcolor" matchingName="One column text">
+<p:sldLayout xmlns:a="http://schemas.openxmlformats.org/drawingml/2006/main" xmlns:r="http://schemas.openxmlformats.org/officeDocument/2006/relationships" xmlns:p="http://schemas.openxmlformats.org/presentationml/2006/main" matchingName="One column text">
   <p:cSld name="ONE_COLUMN_TEXT">
     <p:bg>
       <p:bgPr>
         <a:solidFill>
           <a:schemeClr val="accent3"/>
         </a:solidFill>
+        <a:effectLst/>
       </p:bgPr>
     </p:bg>
     <p:spTree>
       <p:nvGrpSpPr>
-        <p:cNvPr id="70" name="Shape 70"/>
+        <p:cNvPr id="1" name="Shape 70"/>
         <p:cNvGrpSpPr/>
         <p:nvPr/>
       </p:nvGrpSpPr>
@@ -6821,12 +6753,12 @@
           </a:ln>
         </p:spPr>
         <p:txBody>
-          <a:bodyPr anchorCtr="0" anchor="ctr" bIns="91425" lIns="91425" spcFirstLastPara="1" rIns="91425" wrap="square" tIns="91425">
+          <a:bodyPr spcFirstLastPara="1" wrap="square" lIns="91425" tIns="91425" rIns="91425" bIns="91425" anchor="ctr" anchorCtr="0">
             <a:noAutofit/>
           </a:bodyPr>
           <a:lstStyle/>
           <a:p>
-            <a:pPr indent="0" lvl="0" marL="0" rtl="0" algn="l">
+            <a:pPr marL="0" lvl="0" indent="0" algn="l" rtl="0">
               <a:spcBef>
                 <a:spcPts val="0"/>
               </a:spcBef>
@@ -6835,9 +6767,6 @@
               </a:spcAft>
               <a:buNone/>
             </a:pPr>
-            <a:r>
-              <a:t/>
-            </a:r>
             <a:endParaRPr/>
           </a:p>
         </p:txBody>
@@ -6864,12 +6793,12 @@
           </a:ln>
         </p:spPr>
         <p:txBody>
-          <a:bodyPr anchorCtr="0" anchor="ctr" bIns="91425" lIns="91425" spcFirstLastPara="1" rIns="91425" wrap="square" tIns="91425">
+          <a:bodyPr spcFirstLastPara="1" wrap="square" lIns="91425" tIns="91425" rIns="91425" bIns="91425" anchor="ctr" anchorCtr="0">
             <a:noAutofit/>
           </a:bodyPr>
           <a:lstStyle/>
           <a:p>
-            <a:pPr indent="0" lvl="0" marL="0" rtl="0" algn="l">
+            <a:pPr marL="0" lvl="0" indent="0" algn="l" rtl="0">
               <a:spcBef>
                 <a:spcPts val="0"/>
               </a:spcBef>
@@ -6878,9 +6807,6 @@
               </a:spcAft>
               <a:buNone/>
             </a:pPr>
-            <a:r>
-              <a:t/>
-            </a:r>
             <a:endParaRPr/>
           </a:p>
         </p:txBody>
@@ -6906,7 +6832,7 @@
             <a:noFill/>
           </a:ln>
           <a:effectLst>
-            <a:outerShdw blurRad="228600" sx="101000" rotWithShape="0" algn="ctr" sy="101000">
+            <a:outerShdw blurRad="228600" sx="101000" sy="101000" algn="ctr" rotWithShape="0">
               <a:srgbClr val="000000">
                 <a:alpha val="40000"/>
               </a:srgbClr>
@@ -6914,12 +6840,12 @@
           </a:effectLst>
         </p:spPr>
         <p:txBody>
-          <a:bodyPr anchorCtr="0" anchor="ctr" bIns="91425" lIns="91425" spcFirstLastPara="1" rIns="91425" wrap="square" tIns="91425">
+          <a:bodyPr spcFirstLastPara="1" wrap="square" lIns="91425" tIns="91425" rIns="91425" bIns="91425" anchor="ctr" anchorCtr="0">
             <a:noAutofit/>
           </a:bodyPr>
           <a:lstStyle/>
           <a:p>
-            <a:pPr indent="0" lvl="0" marL="0" rtl="0" algn="l">
+            <a:pPr marL="0" lvl="0" indent="0" algn="l" rtl="0">
               <a:spcBef>
                 <a:spcPts val="0"/>
               </a:spcBef>
@@ -6928,9 +6854,6 @@
               </a:spcAft>
               <a:buNone/>
             </a:pPr>
-            <a:r>
-              <a:t/>
-            </a:r>
             <a:endParaRPr/>
           </a:p>
         </p:txBody>
@@ -6938,7 +6861,9 @@
       <p:sp>
         <p:nvSpPr>
           <p:cNvPr id="74" name="Google Shape;74;p7"/>
-          <p:cNvSpPr txBox="1"/>
+          <p:cNvSpPr txBox="1">
+            <a:spLocks noGrp="1"/>
+          </p:cNvSpPr>
           <p:nvPr>
             <p:ph type="title"/>
           </p:nvPr>
@@ -6953,7 +6878,7 @@
           </a:prstGeom>
         </p:spPr>
         <p:txBody>
-          <a:bodyPr anchorCtr="0" anchor="t" bIns="91425" lIns="91425" spcFirstLastPara="1" rIns="91425" wrap="square" tIns="91425">
+          <a:bodyPr spcFirstLastPara="1" wrap="square" lIns="91425" tIns="91425" rIns="91425" bIns="91425" anchor="t" anchorCtr="0">
             <a:normAutofit/>
           </a:bodyPr>
           <a:lstStyle>
@@ -7057,15 +6982,19 @@
               <a:defRPr sz="3000"/>
             </a:lvl9pPr>
           </a:lstStyle>
-          <a:p/>
+          <a:p>
+            <a:endParaRPr/>
+          </a:p>
         </p:txBody>
       </p:sp>
       <p:sp>
         <p:nvSpPr>
           <p:cNvPr id="75" name="Google Shape;75;p7"/>
-          <p:cNvSpPr txBox="1"/>
+          <p:cNvSpPr txBox="1">
+            <a:spLocks noGrp="1"/>
+          </p:cNvSpPr>
           <p:nvPr>
-            <p:ph idx="1" type="body"/>
+            <p:ph type="body" idx="1"/>
           </p:nvPr>
         </p:nvSpPr>
         <p:spPr>
@@ -7078,11 +7007,11 @@
           </a:prstGeom>
         </p:spPr>
         <p:txBody>
-          <a:bodyPr anchorCtr="0" anchor="t" bIns="91425" lIns="91425" spcFirstLastPara="1" rIns="91425" wrap="square" tIns="91425">
+          <a:bodyPr spcFirstLastPara="1" wrap="square" lIns="91425" tIns="91425" rIns="91425" bIns="91425" anchor="t" anchorCtr="0">
             <a:normAutofit/>
           </a:bodyPr>
           <a:lstStyle>
-            <a:lvl1pPr indent="-311150" lvl="0" marL="457200">
+            <a:lvl1pPr marL="457200" lvl="0" indent="-311150">
               <a:spcBef>
                 <a:spcPts val="0"/>
               </a:spcBef>
@@ -7093,7 +7022,7 @@
               <a:buChar char="●"/>
               <a:defRPr/>
             </a:lvl1pPr>
-            <a:lvl2pPr indent="-298450" lvl="1" marL="914400">
+            <a:lvl2pPr marL="914400" lvl="1" indent="-298450">
               <a:spcBef>
                 <a:spcPts val="0"/>
               </a:spcBef>
@@ -7104,7 +7033,7 @@
               <a:buChar char="○"/>
               <a:defRPr/>
             </a:lvl2pPr>
-            <a:lvl3pPr indent="-298450" lvl="2" marL="1371600">
+            <a:lvl3pPr marL="1371600" lvl="2" indent="-298450">
               <a:spcBef>
                 <a:spcPts val="0"/>
               </a:spcBef>
@@ -7115,7 +7044,7 @@
               <a:buChar char="■"/>
               <a:defRPr/>
             </a:lvl3pPr>
-            <a:lvl4pPr indent="-298450" lvl="3" marL="1828800">
+            <a:lvl4pPr marL="1828800" lvl="3" indent="-298450">
               <a:spcBef>
                 <a:spcPts val="0"/>
               </a:spcBef>
@@ -7126,7 +7055,7 @@
               <a:buChar char="●"/>
               <a:defRPr/>
             </a:lvl4pPr>
-            <a:lvl5pPr indent="-298450" lvl="4" marL="2286000">
+            <a:lvl5pPr marL="2286000" lvl="4" indent="-298450">
               <a:spcBef>
                 <a:spcPts val="0"/>
               </a:spcBef>
@@ -7137,7 +7066,7 @@
               <a:buChar char="○"/>
               <a:defRPr/>
             </a:lvl5pPr>
-            <a:lvl6pPr indent="-298450" lvl="5" marL="2743200">
+            <a:lvl6pPr marL="2743200" lvl="5" indent="-298450">
               <a:spcBef>
                 <a:spcPts val="0"/>
               </a:spcBef>
@@ -7148,7 +7077,7 @@
               <a:buChar char="■"/>
               <a:defRPr/>
             </a:lvl6pPr>
-            <a:lvl7pPr indent="-298450" lvl="6" marL="3200400">
+            <a:lvl7pPr marL="3200400" lvl="6" indent="-298450">
               <a:spcBef>
                 <a:spcPts val="0"/>
               </a:spcBef>
@@ -7159,7 +7088,7 @@
               <a:buChar char="●"/>
               <a:defRPr/>
             </a:lvl7pPr>
-            <a:lvl8pPr indent="-298450" lvl="7" marL="3657600">
+            <a:lvl8pPr marL="3657600" lvl="7" indent="-298450">
               <a:spcBef>
                 <a:spcPts val="0"/>
               </a:spcBef>
@@ -7170,7 +7099,7 @@
               <a:buChar char="○"/>
               <a:defRPr/>
             </a:lvl8pPr>
-            <a:lvl9pPr indent="-298450" lvl="8" marL="4114800">
+            <a:lvl9pPr marL="4114800" lvl="8" indent="-298450">
               <a:spcBef>
                 <a:spcPts val="0"/>
               </a:spcBef>
@@ -7182,15 +7111,19 @@
               <a:defRPr/>
             </a:lvl9pPr>
           </a:lstStyle>
-          <a:p/>
+          <a:p>
+            <a:endParaRPr/>
+          </a:p>
         </p:txBody>
       </p:sp>
       <p:sp>
         <p:nvSpPr>
           <p:cNvPr id="76" name="Google Shape;76;p7"/>
-          <p:cNvSpPr txBox="1"/>
+          <p:cNvSpPr txBox="1">
+            <a:spLocks noGrp="1"/>
+          </p:cNvSpPr>
           <p:nvPr>
-            <p:ph idx="12" type="sldNum"/>
+            <p:ph type="sldNum" idx="12"/>
           </p:nvPr>
         </p:nvSpPr>
         <p:spPr>
@@ -7203,7 +7136,7 @@
           </a:prstGeom>
         </p:spPr>
         <p:txBody>
-          <a:bodyPr anchorCtr="0" anchor="ctr" bIns="91425" lIns="91425" spcFirstLastPara="1" rIns="91425" wrap="square" tIns="91425">
+          <a:bodyPr spcFirstLastPara="1" wrap="square" lIns="91425" tIns="91425" rIns="91425" bIns="91425" anchor="ctr" anchorCtr="0">
             <a:normAutofit/>
           </a:bodyPr>
           <a:lstStyle>
@@ -7245,7 +7178,7 @@
             </a:lvl9pPr>
           </a:lstStyle>
           <a:p>
-            <a:pPr indent="0" lvl="0" marL="0" rtl="0" algn="r">
+            <a:pPr marL="0" lvl="0" indent="0" algn="r" rtl="0">
               <a:spcBef>
                 <a:spcPts val="0"/>
               </a:spcBef>
@@ -7271,18 +7204,19 @@
 </file>
 
 <file path=ppt/slideLayouts/slideLayout7.xml><?xml version="1.0" encoding="utf-8"?>
-<p:sldLayout xmlns:a="http://schemas.openxmlformats.org/drawingml/2006/main" xmlns:r="http://schemas.openxmlformats.org/officeDocument/2006/relationships" xmlns:mc="http://schemas.openxmlformats.org/markup-compatibility/2006" xmlns:mv="urn:schemas-microsoft-com:mac:vml" xmlns:p="http://schemas.openxmlformats.org/presentationml/2006/main" xmlns:c="http://schemas.openxmlformats.org/drawingml/2006/chart" xmlns:dgm="http://schemas.openxmlformats.org/drawingml/2006/diagram" xmlns:o="urn:schemas-microsoft-com:office:office" xmlns:v="urn:schemas-microsoft-com:vml" xmlns:pvml="urn:schemas-microsoft-com:office:powerpoint" xmlns:com="http://schemas.openxmlformats.org/drawingml/2006/compatibility" xmlns:p14="http://schemas.microsoft.com/office/powerpoint/2010/main" xmlns:p15="http://schemas.microsoft.com/office/powerpoint/2012/main" xmlns:ahyp="http://schemas.microsoft.com/office/drawing/2018/hyperlinkcolor" matchingName="Main point">
+<p:sldLayout xmlns:a="http://schemas.openxmlformats.org/drawingml/2006/main" xmlns:r="http://schemas.openxmlformats.org/officeDocument/2006/relationships" xmlns:p="http://schemas.openxmlformats.org/presentationml/2006/main" matchingName="Main point">
   <p:cSld name="MAIN_POINT">
     <p:bg>
       <p:bgPr>
         <a:solidFill>
           <a:schemeClr val="accent1"/>
         </a:solidFill>
+        <a:effectLst/>
       </p:bgPr>
     </p:bg>
     <p:spTree>
       <p:nvGrpSpPr>
-        <p:cNvPr id="77" name="Shape 77"/>
+        <p:cNvPr id="1" name="Shape 77"/>
         <p:cNvGrpSpPr/>
         <p:nvPr/>
       </p:nvGrpSpPr>
@@ -7316,12 +7250,12 @@
           </a:ln>
         </p:spPr>
         <p:txBody>
-          <a:bodyPr anchorCtr="0" anchor="ctr" bIns="91425" lIns="91425" spcFirstLastPara="1" rIns="91425" wrap="square" tIns="91425">
+          <a:bodyPr spcFirstLastPara="1" wrap="square" lIns="91425" tIns="91425" rIns="91425" bIns="91425" anchor="ctr" anchorCtr="0">
             <a:noAutofit/>
           </a:bodyPr>
           <a:lstStyle/>
           <a:p>
-            <a:pPr indent="0" lvl="0" marL="0" rtl="0" algn="l">
+            <a:pPr marL="0" lvl="0" indent="0" algn="l" rtl="0">
               <a:spcBef>
                 <a:spcPts val="0"/>
               </a:spcBef>
@@ -7330,9 +7264,6 @@
               </a:spcAft>
               <a:buNone/>
             </a:pPr>
-            <a:r>
-              <a:t/>
-            </a:r>
             <a:endParaRPr/>
           </a:p>
         </p:txBody>
@@ -7359,12 +7290,12 @@
           </a:ln>
         </p:spPr>
         <p:txBody>
-          <a:bodyPr anchorCtr="0" anchor="ctr" bIns="91425" lIns="91425" spcFirstLastPara="1" rIns="91425" wrap="square" tIns="91425">
+          <a:bodyPr spcFirstLastPara="1" wrap="square" lIns="91425" tIns="91425" rIns="91425" bIns="91425" anchor="ctr" anchorCtr="0">
             <a:noAutofit/>
           </a:bodyPr>
           <a:lstStyle/>
           <a:p>
-            <a:pPr indent="0" lvl="0" marL="0" rtl="0" algn="l">
+            <a:pPr marL="0" lvl="0" indent="0" algn="l" rtl="0">
               <a:spcBef>
                 <a:spcPts val="0"/>
               </a:spcBef>
@@ -7373,9 +7304,6 @@
               </a:spcAft>
               <a:buNone/>
             </a:pPr>
-            <a:r>
-              <a:t/>
-            </a:r>
             <a:endParaRPr/>
           </a:p>
         </p:txBody>
@@ -7407,7 +7335,7 @@
             </a:xfrm>
             <a:prstGeom prst="parallelogram">
               <a:avLst>
-                <a:gd fmla="val 153193" name="adj"/>
+                <a:gd name="adj" fmla="val 153193"/>
               </a:avLst>
             </a:prstGeom>
             <a:solidFill>
@@ -7418,12 +7346,12 @@
             </a:ln>
           </p:spPr>
           <p:txBody>
-            <a:bodyPr anchorCtr="0" anchor="ctr" bIns="91425" lIns="91425" spcFirstLastPara="1" rIns="91425" wrap="square" tIns="91425">
+            <a:bodyPr spcFirstLastPara="1" wrap="square" lIns="91425" tIns="91425" rIns="91425" bIns="91425" anchor="ctr" anchorCtr="0">
               <a:noAutofit/>
             </a:bodyPr>
             <a:lstStyle/>
             <a:p>
-              <a:pPr indent="0" lvl="0" marL="0" rtl="0" algn="l">
+              <a:pPr marL="0" lvl="0" indent="0" algn="l" rtl="0">
                 <a:spcBef>
                   <a:spcPts val="0"/>
                 </a:spcBef>
@@ -7432,9 +7360,6 @@
                 </a:spcAft>
                 <a:buNone/>
               </a:pPr>
-              <a:r>
-                <a:t/>
-              </a:r>
               <a:endParaRPr/>
             </a:p>
           </p:txBody>
@@ -7452,7 +7377,7 @@
             </a:xfrm>
             <a:prstGeom prst="parallelogram">
               <a:avLst>
-                <a:gd fmla="val 153193" name="adj"/>
+                <a:gd name="adj" fmla="val 153193"/>
               </a:avLst>
             </a:prstGeom>
             <a:solidFill>
@@ -7463,12 +7388,12 @@
             </a:ln>
           </p:spPr>
           <p:txBody>
-            <a:bodyPr anchorCtr="0" anchor="ctr" bIns="91425" lIns="91425" spcFirstLastPara="1" rIns="91425" wrap="square" tIns="91425">
+            <a:bodyPr spcFirstLastPara="1" wrap="square" lIns="91425" tIns="91425" rIns="91425" bIns="91425" anchor="ctr" anchorCtr="0">
               <a:noAutofit/>
             </a:bodyPr>
             <a:lstStyle/>
             <a:p>
-              <a:pPr indent="0" lvl="0" marL="0" rtl="0" algn="l">
+              <a:pPr marL="0" lvl="0" indent="0" algn="l" rtl="0">
                 <a:spcBef>
                   <a:spcPts val="0"/>
                 </a:spcBef>
@@ -7477,9 +7402,6 @@
                 </a:spcAft>
                 <a:buNone/>
               </a:pPr>
-              <a:r>
-                <a:t/>
-              </a:r>
               <a:endParaRPr/>
             </a:p>
           </p:txBody>
@@ -7497,7 +7419,7 @@
             </a:xfrm>
             <a:prstGeom prst="parallelogram">
               <a:avLst>
-                <a:gd fmla="val 153193" name="adj"/>
+                <a:gd name="adj" fmla="val 153193"/>
               </a:avLst>
             </a:prstGeom>
             <a:solidFill>
@@ -7508,12 +7430,12 @@
             </a:ln>
           </p:spPr>
           <p:txBody>
-            <a:bodyPr anchorCtr="0" anchor="ctr" bIns="91425" lIns="91425" spcFirstLastPara="1" rIns="91425" wrap="square" tIns="91425">
+            <a:bodyPr spcFirstLastPara="1" wrap="square" lIns="91425" tIns="91425" rIns="91425" bIns="91425" anchor="ctr" anchorCtr="0">
               <a:noAutofit/>
             </a:bodyPr>
             <a:lstStyle/>
             <a:p>
-              <a:pPr indent="0" lvl="0" marL="0" rtl="0" algn="l">
+              <a:pPr marL="0" lvl="0" indent="0" algn="l" rtl="0">
                 <a:spcBef>
                   <a:spcPts val="0"/>
                 </a:spcBef>
@@ -7522,9 +7444,6 @@
                 </a:spcAft>
                 <a:buNone/>
               </a:pPr>
-              <a:r>
-                <a:t/>
-              </a:r>
               <a:endParaRPr/>
             </a:p>
           </p:txBody>
@@ -7551,7 +7470,7 @@
             <a:noFill/>
           </a:ln>
           <a:effectLst>
-            <a:outerShdw blurRad="228600" sx="101000" rotWithShape="0" algn="ctr" sy="101000">
+            <a:outerShdw blurRad="228600" sx="101000" sy="101000" algn="ctr" rotWithShape="0">
               <a:srgbClr val="000000">
                 <a:alpha val="40000"/>
               </a:srgbClr>
@@ -7559,12 +7478,12 @@
           </a:effectLst>
         </p:spPr>
         <p:txBody>
-          <a:bodyPr anchorCtr="0" anchor="ctr" bIns="91425" lIns="91425" spcFirstLastPara="1" rIns="91425" wrap="square" tIns="91425">
+          <a:bodyPr spcFirstLastPara="1" wrap="square" lIns="91425" tIns="91425" rIns="91425" bIns="91425" anchor="ctr" anchorCtr="0">
             <a:noAutofit/>
           </a:bodyPr>
           <a:lstStyle/>
           <a:p>
-            <a:pPr indent="0" lvl="0" marL="0" rtl="0" algn="l">
+            <a:pPr marL="0" lvl="0" indent="0" algn="l" rtl="0">
               <a:spcBef>
                 <a:spcPts val="0"/>
               </a:spcBef>
@@ -7573,9 +7492,6 @@
               </a:spcAft>
               <a:buNone/>
             </a:pPr>
-            <a:r>
-              <a:t/>
-            </a:r>
             <a:endParaRPr/>
           </a:p>
         </p:txBody>
@@ -7607,7 +7523,7 @@
             </a:xfrm>
             <a:prstGeom prst="parallelogram">
               <a:avLst>
-                <a:gd fmla="val 158024" name="adj"/>
+                <a:gd name="adj" fmla="val 158024"/>
               </a:avLst>
             </a:prstGeom>
             <a:solidFill>
@@ -7618,12 +7534,12 @@
             </a:ln>
           </p:spPr>
           <p:txBody>
-            <a:bodyPr anchorCtr="0" anchor="ctr" bIns="91425" lIns="91425" spcFirstLastPara="1" rIns="91425" wrap="square" tIns="91425">
+            <a:bodyPr spcFirstLastPara="1" wrap="square" lIns="91425" tIns="91425" rIns="91425" bIns="91425" anchor="ctr" anchorCtr="0">
               <a:noAutofit/>
             </a:bodyPr>
             <a:lstStyle/>
             <a:p>
-              <a:pPr indent="0" lvl="0" marL="0" rtl="0" algn="l">
+              <a:pPr marL="0" lvl="0" indent="0" algn="l" rtl="0">
                 <a:spcBef>
                   <a:spcPts val="0"/>
                 </a:spcBef>
@@ -7632,9 +7548,6 @@
                 </a:spcAft>
                 <a:buNone/>
               </a:pPr>
-              <a:r>
-                <a:t/>
-              </a:r>
               <a:endParaRPr/>
             </a:p>
           </p:txBody>
@@ -7652,7 +7565,7 @@
             </a:xfrm>
             <a:prstGeom prst="parallelogram">
               <a:avLst>
-                <a:gd fmla="val 158024" name="adj"/>
+                <a:gd name="adj" fmla="val 158024"/>
               </a:avLst>
             </a:prstGeom>
             <a:solidFill>
@@ -7663,12 +7576,12 @@
             </a:ln>
           </p:spPr>
           <p:txBody>
-            <a:bodyPr anchorCtr="0" anchor="ctr" bIns="91425" lIns="91425" spcFirstLastPara="1" rIns="91425" wrap="square" tIns="91425">
+            <a:bodyPr spcFirstLastPara="1" wrap="square" lIns="91425" tIns="91425" rIns="91425" bIns="91425" anchor="ctr" anchorCtr="0">
               <a:noAutofit/>
             </a:bodyPr>
             <a:lstStyle/>
             <a:p>
-              <a:pPr indent="0" lvl="0" marL="0" rtl="0" algn="l">
+              <a:pPr marL="0" lvl="0" indent="0" algn="l" rtl="0">
                 <a:spcBef>
                   <a:spcPts val="0"/>
                 </a:spcBef>
@@ -7677,9 +7590,6 @@
                 </a:spcAft>
                 <a:buNone/>
               </a:pPr>
-              <a:r>
-                <a:t/>
-              </a:r>
               <a:endParaRPr/>
             </a:p>
           </p:txBody>
@@ -7697,7 +7607,7 @@
             </a:xfrm>
             <a:prstGeom prst="parallelogram">
               <a:avLst>
-                <a:gd fmla="val 158024" name="adj"/>
+                <a:gd name="adj" fmla="val 158024"/>
               </a:avLst>
             </a:prstGeom>
             <a:solidFill>
@@ -7708,12 +7618,12 @@
             </a:ln>
           </p:spPr>
           <p:txBody>
-            <a:bodyPr anchorCtr="0" anchor="ctr" bIns="91425" lIns="91425" spcFirstLastPara="1" rIns="91425" wrap="square" tIns="91425">
+            <a:bodyPr spcFirstLastPara="1" wrap="square" lIns="91425" tIns="91425" rIns="91425" bIns="91425" anchor="ctr" anchorCtr="0">
               <a:noAutofit/>
             </a:bodyPr>
             <a:lstStyle/>
             <a:p>
-              <a:pPr indent="0" lvl="0" marL="0" rtl="0" algn="l">
+              <a:pPr marL="0" lvl="0" indent="0" algn="l" rtl="0">
                 <a:spcBef>
                   <a:spcPts val="0"/>
                 </a:spcBef>
@@ -7722,9 +7632,6 @@
                 </a:spcAft>
                 <a:buNone/>
               </a:pPr>
-              <a:r>
-                <a:t/>
-              </a:r>
               <a:endParaRPr/>
             </a:p>
           </p:txBody>
@@ -7757,7 +7664,7 @@
             </a:xfrm>
             <a:prstGeom prst="parallelogram">
               <a:avLst>
-                <a:gd fmla="val 158024" name="adj"/>
+                <a:gd name="adj" fmla="val 158024"/>
               </a:avLst>
             </a:prstGeom>
             <a:solidFill>
@@ -7768,12 +7675,12 @@
             </a:ln>
           </p:spPr>
           <p:txBody>
-            <a:bodyPr anchorCtr="0" anchor="ctr" bIns="91425" lIns="91425" spcFirstLastPara="1" rIns="91425" wrap="square" tIns="91425">
+            <a:bodyPr spcFirstLastPara="1" wrap="square" lIns="91425" tIns="91425" rIns="91425" bIns="91425" anchor="ctr" anchorCtr="0">
               <a:noAutofit/>
             </a:bodyPr>
             <a:lstStyle/>
             <a:p>
-              <a:pPr indent="0" lvl="0" marL="0" rtl="0" algn="l">
+              <a:pPr marL="0" lvl="0" indent="0" algn="l" rtl="0">
                 <a:spcBef>
                   <a:spcPts val="0"/>
                 </a:spcBef>
@@ -7782,9 +7689,6 @@
                 </a:spcAft>
                 <a:buNone/>
               </a:pPr>
-              <a:r>
-                <a:t/>
-              </a:r>
               <a:endParaRPr/>
             </a:p>
           </p:txBody>
@@ -7802,7 +7706,7 @@
             </a:xfrm>
             <a:prstGeom prst="parallelogram">
               <a:avLst>
-                <a:gd fmla="val 158024" name="adj"/>
+                <a:gd name="adj" fmla="val 158024"/>
               </a:avLst>
             </a:prstGeom>
             <a:solidFill>
@@ -7813,12 +7717,12 @@
             </a:ln>
           </p:spPr>
           <p:txBody>
-            <a:bodyPr anchorCtr="0" anchor="ctr" bIns="91425" lIns="91425" spcFirstLastPara="1" rIns="91425" wrap="square" tIns="91425">
+            <a:bodyPr spcFirstLastPara="1" wrap="square" lIns="91425" tIns="91425" rIns="91425" bIns="91425" anchor="ctr" anchorCtr="0">
               <a:noAutofit/>
             </a:bodyPr>
             <a:lstStyle/>
             <a:p>
-              <a:pPr indent="0" lvl="0" marL="0" rtl="0" algn="l">
+              <a:pPr marL="0" lvl="0" indent="0" algn="l" rtl="0">
                 <a:spcBef>
                   <a:spcPts val="0"/>
                 </a:spcBef>
@@ -7827,9 +7731,6 @@
                 </a:spcAft>
                 <a:buNone/>
               </a:pPr>
-              <a:r>
-                <a:t/>
-              </a:r>
               <a:endParaRPr/>
             </a:p>
           </p:txBody>
@@ -7847,7 +7748,7 @@
             </a:xfrm>
             <a:prstGeom prst="parallelogram">
               <a:avLst>
-                <a:gd fmla="val 158024" name="adj"/>
+                <a:gd name="adj" fmla="val 158024"/>
               </a:avLst>
             </a:prstGeom>
             <a:solidFill>
@@ -7858,12 +7759,12 @@
             </a:ln>
           </p:spPr>
           <p:txBody>
-            <a:bodyPr anchorCtr="0" anchor="ctr" bIns="91425" lIns="91425" spcFirstLastPara="1" rIns="91425" wrap="square" tIns="91425">
+            <a:bodyPr spcFirstLastPara="1" wrap="square" lIns="91425" tIns="91425" rIns="91425" bIns="91425" anchor="ctr" anchorCtr="0">
               <a:noAutofit/>
             </a:bodyPr>
             <a:lstStyle/>
             <a:p>
-              <a:pPr indent="0" lvl="0" marL="0" rtl="0" algn="l">
+              <a:pPr marL="0" lvl="0" indent="0" algn="l" rtl="0">
                 <a:spcBef>
                   <a:spcPts val="0"/>
                 </a:spcBef>
@@ -7872,9 +7773,6 @@
                 </a:spcAft>
                 <a:buNone/>
               </a:pPr>
-              <a:r>
-                <a:t/>
-              </a:r>
               <a:endParaRPr/>
             </a:p>
           </p:txBody>
@@ -7883,7 +7781,9 @@
       <p:sp>
         <p:nvSpPr>
           <p:cNvPr id="93" name="Google Shape;93;p8"/>
-          <p:cNvSpPr txBox="1"/>
+          <p:cNvSpPr txBox="1">
+            <a:spLocks noGrp="1"/>
+          </p:cNvSpPr>
           <p:nvPr>
             <p:ph type="title"/>
           </p:nvPr>
@@ -7898,7 +7798,7 @@
           </a:prstGeom>
         </p:spPr>
         <p:txBody>
-          <a:bodyPr anchorCtr="0" anchor="ctr" bIns="91425" lIns="91425" spcFirstLastPara="1" rIns="91425" wrap="square" tIns="91425">
+          <a:bodyPr spcFirstLastPara="1" wrap="square" lIns="91425" tIns="91425" rIns="91425" bIns="91425" anchor="ctr" anchorCtr="0">
             <a:normAutofit/>
           </a:bodyPr>
           <a:lstStyle>
@@ -8002,15 +7902,19 @@
               <a:defRPr sz="3200"/>
             </a:lvl9pPr>
           </a:lstStyle>
-          <a:p/>
+          <a:p>
+            <a:endParaRPr/>
+          </a:p>
         </p:txBody>
       </p:sp>
       <p:sp>
         <p:nvSpPr>
           <p:cNvPr id="94" name="Google Shape;94;p8"/>
-          <p:cNvSpPr txBox="1"/>
+          <p:cNvSpPr txBox="1">
+            <a:spLocks noGrp="1"/>
+          </p:cNvSpPr>
           <p:nvPr>
-            <p:ph idx="12" type="sldNum"/>
+            <p:ph type="sldNum" idx="12"/>
           </p:nvPr>
         </p:nvSpPr>
         <p:spPr>
@@ -8023,7 +7927,7 @@
           </a:prstGeom>
         </p:spPr>
         <p:txBody>
-          <a:bodyPr anchorCtr="0" anchor="ctr" bIns="91425" lIns="91425" spcFirstLastPara="1" rIns="91425" wrap="square" tIns="91425">
+          <a:bodyPr spcFirstLastPara="1" wrap="square" lIns="91425" tIns="91425" rIns="91425" bIns="91425" anchor="ctr" anchorCtr="0">
             <a:normAutofit/>
           </a:bodyPr>
           <a:lstStyle>
@@ -8065,7 +7969,7 @@
             </a:lvl9pPr>
           </a:lstStyle>
           <a:p>
-            <a:pPr indent="0" lvl="0" marL="0" rtl="0" algn="r">
+            <a:pPr marL="0" lvl="0" indent="0" algn="r" rtl="0">
               <a:spcBef>
                 <a:spcPts val="0"/>
               </a:spcBef>
@@ -8091,18 +7995,19 @@
 </file>
 
 <file path=ppt/slideLayouts/slideLayout8.xml><?xml version="1.0" encoding="utf-8"?>
-<p:sldLayout xmlns:a="http://schemas.openxmlformats.org/drawingml/2006/main" xmlns:r="http://schemas.openxmlformats.org/officeDocument/2006/relationships" xmlns:mc="http://schemas.openxmlformats.org/markup-compatibility/2006" xmlns:mv="urn:schemas-microsoft-com:mac:vml" xmlns:p="http://schemas.openxmlformats.org/presentationml/2006/main" xmlns:c="http://schemas.openxmlformats.org/drawingml/2006/chart" xmlns:dgm="http://schemas.openxmlformats.org/drawingml/2006/diagram" xmlns:o="urn:schemas-microsoft-com:office:office" xmlns:v="urn:schemas-microsoft-com:vml" xmlns:pvml="urn:schemas-microsoft-com:office:powerpoint" xmlns:com="http://schemas.openxmlformats.org/drawingml/2006/compatibility" xmlns:p14="http://schemas.microsoft.com/office/powerpoint/2010/main" xmlns:p15="http://schemas.microsoft.com/office/powerpoint/2012/main" xmlns:ahyp="http://schemas.microsoft.com/office/drawing/2018/hyperlinkcolor" matchingName="Section title and description">
+<p:sldLayout xmlns:a="http://schemas.openxmlformats.org/drawingml/2006/main" xmlns:r="http://schemas.openxmlformats.org/officeDocument/2006/relationships" xmlns:p="http://schemas.openxmlformats.org/presentationml/2006/main" matchingName="Section title and description">
   <p:cSld name="SECTION_TITLE_AND_DESCRIPTION">
     <p:bg>
       <p:bgPr>
         <a:solidFill>
           <a:schemeClr val="dk2"/>
         </a:solidFill>
+        <a:effectLst/>
       </p:bgPr>
     </p:bg>
     <p:spTree>
       <p:nvGrpSpPr>
-        <p:cNvPr id="95" name="Shape 95"/>
+        <p:cNvPr id="1" name="Shape 95"/>
         <p:cNvGrpSpPr/>
         <p:nvPr/>
       </p:nvGrpSpPr>
@@ -8136,12 +8041,12 @@
           </a:ln>
         </p:spPr>
         <p:txBody>
-          <a:bodyPr anchorCtr="0" anchor="ctr" bIns="91425" lIns="91425" spcFirstLastPara="1" rIns="91425" wrap="square" tIns="91425">
+          <a:bodyPr spcFirstLastPara="1" wrap="square" lIns="91425" tIns="91425" rIns="91425" bIns="91425" anchor="ctr" anchorCtr="0">
             <a:noAutofit/>
           </a:bodyPr>
           <a:lstStyle/>
           <a:p>
-            <a:pPr indent="0" lvl="0" marL="0" rtl="0" algn="l">
+            <a:pPr marL="0" lvl="0" indent="0" algn="l" rtl="0">
               <a:spcBef>
                 <a:spcPts val="0"/>
               </a:spcBef>
@@ -8150,9 +8055,6 @@
               </a:spcAft>
               <a:buNone/>
             </a:pPr>
-            <a:r>
-              <a:t/>
-            </a:r>
             <a:endParaRPr/>
           </a:p>
         </p:txBody>
@@ -8179,12 +8081,12 @@
           </a:ln>
         </p:spPr>
         <p:txBody>
-          <a:bodyPr anchorCtr="0" anchor="ctr" bIns="91425" lIns="91425" spcFirstLastPara="1" rIns="91425" wrap="square" tIns="91425">
+          <a:bodyPr spcFirstLastPara="1" wrap="square" lIns="91425" tIns="91425" rIns="91425" bIns="91425" anchor="ctr" anchorCtr="0">
             <a:noAutofit/>
           </a:bodyPr>
           <a:lstStyle/>
           <a:p>
-            <a:pPr indent="0" lvl="0" marL="0" rtl="0" algn="l">
+            <a:pPr marL="0" lvl="0" indent="0" algn="l" rtl="0">
               <a:spcBef>
                 <a:spcPts val="0"/>
               </a:spcBef>
@@ -8193,9 +8095,6 @@
               </a:spcAft>
               <a:buNone/>
             </a:pPr>
-            <a:r>
-              <a:t/>
-            </a:r>
             <a:endParaRPr/>
           </a:p>
         </p:txBody>
@@ -8221,7 +8120,7 @@
             <a:noFill/>
           </a:ln>
           <a:effectLst>
-            <a:outerShdw blurRad="228600" sx="101000" rotWithShape="0" algn="ctr" sy="101000">
+            <a:outerShdw blurRad="228600" sx="101000" sy="101000" algn="ctr" rotWithShape="0">
               <a:srgbClr val="000000">
                 <a:alpha val="40000"/>
               </a:srgbClr>
@@ -8229,12 +8128,12 @@
           </a:effectLst>
         </p:spPr>
         <p:txBody>
-          <a:bodyPr anchorCtr="0" anchor="ctr" bIns="91425" lIns="91425" spcFirstLastPara="1" rIns="91425" wrap="square" tIns="91425">
+          <a:bodyPr spcFirstLastPara="1" wrap="square" lIns="91425" tIns="91425" rIns="91425" bIns="91425" anchor="ctr" anchorCtr="0">
             <a:noAutofit/>
           </a:bodyPr>
           <a:lstStyle/>
           <a:p>
-            <a:pPr indent="0" lvl="0" marL="0" rtl="0" algn="l">
+            <a:pPr marL="0" lvl="0" indent="0" algn="l" rtl="0">
               <a:spcBef>
                 <a:spcPts val="0"/>
               </a:spcBef>
@@ -8243,9 +8142,6 @@
               </a:spcAft>
               <a:buNone/>
             </a:pPr>
-            <a:r>
-              <a:t/>
-            </a:r>
             <a:endParaRPr/>
           </a:p>
         </p:txBody>
@@ -8253,7 +8149,9 @@
       <p:sp>
         <p:nvSpPr>
           <p:cNvPr id="99" name="Google Shape;99;p9"/>
-          <p:cNvSpPr txBox="1"/>
+          <p:cNvSpPr txBox="1">
+            <a:spLocks noGrp="1"/>
+          </p:cNvSpPr>
           <p:nvPr>
             <p:ph type="title"/>
           </p:nvPr>
@@ -8268,7 +8166,7 @@
           </a:prstGeom>
         </p:spPr>
         <p:txBody>
-          <a:bodyPr anchorCtr="0" anchor="t" bIns="91425" lIns="91425" spcFirstLastPara="1" rIns="91425" wrap="square" tIns="91425">
+          <a:bodyPr spcFirstLastPara="1" wrap="square" lIns="91425" tIns="91425" rIns="91425" bIns="91425" anchor="t" anchorCtr="0">
             <a:normAutofit/>
           </a:bodyPr>
           <a:lstStyle>
@@ -8372,15 +8270,19 @@
               <a:defRPr sz="3000"/>
             </a:lvl9pPr>
           </a:lstStyle>
-          <a:p/>
+          <a:p>
+            <a:endParaRPr/>
+          </a:p>
         </p:txBody>
       </p:sp>
       <p:sp>
         <p:nvSpPr>
           <p:cNvPr id="100" name="Google Shape;100;p9"/>
-          <p:cNvSpPr txBox="1"/>
+          <p:cNvSpPr txBox="1">
+            <a:spLocks noGrp="1"/>
+          </p:cNvSpPr>
           <p:nvPr>
-            <p:ph idx="1" type="subTitle"/>
+            <p:ph type="subTitle" idx="1"/>
           </p:nvPr>
         </p:nvSpPr>
         <p:spPr>
@@ -8393,7 +8295,7 @@
           </a:prstGeom>
         </p:spPr>
         <p:txBody>
-          <a:bodyPr anchorCtr="0" anchor="t" bIns="91425" lIns="91425" spcFirstLastPara="1" rIns="91425" wrap="square" tIns="91425">
+          <a:bodyPr spcFirstLastPara="1" wrap="square" lIns="91425" tIns="91425" rIns="91425" bIns="91425" anchor="t" anchorCtr="0">
             <a:normAutofit/>
           </a:bodyPr>
           <a:lstStyle>
@@ -8587,15 +8489,19 @@
               </a:defRPr>
             </a:lvl9pPr>
           </a:lstStyle>
-          <a:p/>
+          <a:p>
+            <a:endParaRPr/>
+          </a:p>
         </p:txBody>
       </p:sp>
       <p:sp>
         <p:nvSpPr>
           <p:cNvPr id="101" name="Google Shape;101;p9"/>
-          <p:cNvSpPr txBox="1"/>
+          <p:cNvSpPr txBox="1">
+            <a:spLocks noGrp="1"/>
+          </p:cNvSpPr>
           <p:nvPr>
-            <p:ph idx="2" type="body"/>
+            <p:ph type="body" idx="2"/>
           </p:nvPr>
         </p:nvSpPr>
         <p:spPr>
@@ -8608,11 +8514,11 @@
           </a:prstGeom>
         </p:spPr>
         <p:txBody>
-          <a:bodyPr anchorCtr="0" anchor="t" bIns="91425" lIns="91425" spcFirstLastPara="1" rIns="91425" wrap="square" tIns="91425">
+          <a:bodyPr spcFirstLastPara="1" wrap="square" lIns="91425" tIns="91425" rIns="91425" bIns="91425" anchor="t" anchorCtr="0">
             <a:normAutofit/>
           </a:bodyPr>
           <a:lstStyle>
-            <a:lvl1pPr indent="-311150" lvl="0" marL="457200">
+            <a:lvl1pPr marL="457200" lvl="0" indent="-311150">
               <a:spcBef>
                 <a:spcPts val="0"/>
               </a:spcBef>
@@ -8623,7 +8529,7 @@
               <a:buChar char="●"/>
               <a:defRPr/>
             </a:lvl1pPr>
-            <a:lvl2pPr indent="-298450" lvl="1" marL="914400">
+            <a:lvl2pPr marL="914400" lvl="1" indent="-298450">
               <a:spcBef>
                 <a:spcPts val="0"/>
               </a:spcBef>
@@ -8634,7 +8540,7 @@
               <a:buChar char="○"/>
               <a:defRPr/>
             </a:lvl2pPr>
-            <a:lvl3pPr indent="-298450" lvl="2" marL="1371600">
+            <a:lvl3pPr marL="1371600" lvl="2" indent="-298450">
               <a:spcBef>
                 <a:spcPts val="0"/>
               </a:spcBef>
@@ -8645,7 +8551,7 @@
               <a:buChar char="■"/>
               <a:defRPr/>
             </a:lvl3pPr>
-            <a:lvl4pPr indent="-298450" lvl="3" marL="1828800">
+            <a:lvl4pPr marL="1828800" lvl="3" indent="-298450">
               <a:spcBef>
                 <a:spcPts val="0"/>
               </a:spcBef>
@@ -8656,7 +8562,7 @@
               <a:buChar char="●"/>
               <a:defRPr/>
             </a:lvl4pPr>
-            <a:lvl5pPr indent="-298450" lvl="4" marL="2286000">
+            <a:lvl5pPr marL="2286000" lvl="4" indent="-298450">
               <a:spcBef>
                 <a:spcPts val="0"/>
               </a:spcBef>
@@ -8667,7 +8573,7 @@
               <a:buChar char="○"/>
               <a:defRPr/>
             </a:lvl5pPr>
-            <a:lvl6pPr indent="-298450" lvl="5" marL="2743200">
+            <a:lvl6pPr marL="2743200" lvl="5" indent="-298450">
               <a:spcBef>
                 <a:spcPts val="0"/>
               </a:spcBef>
@@ -8678,7 +8584,7 @@
               <a:buChar char="■"/>
               <a:defRPr/>
             </a:lvl6pPr>
-            <a:lvl7pPr indent="-298450" lvl="6" marL="3200400">
+            <a:lvl7pPr marL="3200400" lvl="6" indent="-298450">
               <a:spcBef>
                 <a:spcPts val="0"/>
               </a:spcBef>
@@ -8689,7 +8595,7 @@
               <a:buChar char="●"/>
               <a:defRPr/>
             </a:lvl7pPr>
-            <a:lvl8pPr indent="-298450" lvl="7" marL="3657600">
+            <a:lvl8pPr marL="3657600" lvl="7" indent="-298450">
               <a:spcBef>
                 <a:spcPts val="0"/>
               </a:spcBef>
@@ -8700,7 +8606,7 @@
               <a:buChar char="○"/>
               <a:defRPr/>
             </a:lvl8pPr>
-            <a:lvl9pPr indent="-298450" lvl="8" marL="4114800">
+            <a:lvl9pPr marL="4114800" lvl="8" indent="-298450">
               <a:spcBef>
                 <a:spcPts val="0"/>
               </a:spcBef>
@@ -8712,15 +8618,19 @@
               <a:defRPr/>
             </a:lvl9pPr>
           </a:lstStyle>
-          <a:p/>
+          <a:p>
+            <a:endParaRPr/>
+          </a:p>
         </p:txBody>
       </p:sp>
       <p:sp>
         <p:nvSpPr>
           <p:cNvPr id="102" name="Google Shape;102;p9"/>
-          <p:cNvSpPr txBox="1"/>
+          <p:cNvSpPr txBox="1">
+            <a:spLocks noGrp="1"/>
+          </p:cNvSpPr>
           <p:nvPr>
-            <p:ph idx="12" type="sldNum"/>
+            <p:ph type="sldNum" idx="12"/>
           </p:nvPr>
         </p:nvSpPr>
         <p:spPr>
@@ -8733,7 +8643,7 @@
           </a:prstGeom>
         </p:spPr>
         <p:txBody>
-          <a:bodyPr anchorCtr="0" anchor="ctr" bIns="91425" lIns="91425" spcFirstLastPara="1" rIns="91425" wrap="square" tIns="91425">
+          <a:bodyPr spcFirstLastPara="1" wrap="square" lIns="91425" tIns="91425" rIns="91425" bIns="91425" anchor="ctr" anchorCtr="0">
             <a:normAutofit/>
           </a:bodyPr>
           <a:lstStyle>
@@ -8775,7 +8685,7 @@
             </a:lvl9pPr>
           </a:lstStyle>
           <a:p>
-            <a:pPr indent="0" lvl="0" marL="0" rtl="0" algn="r">
+            <a:pPr marL="0" lvl="0" indent="0" algn="r" rtl="0">
               <a:spcBef>
                 <a:spcPts val="0"/>
               </a:spcBef>
@@ -8801,18 +8711,19 @@
 </file>
 
 <file path=ppt/slideLayouts/slideLayout9.xml><?xml version="1.0" encoding="utf-8"?>
-<p:sldLayout xmlns:a="http://schemas.openxmlformats.org/drawingml/2006/main" xmlns:r="http://schemas.openxmlformats.org/officeDocument/2006/relationships" xmlns:mc="http://schemas.openxmlformats.org/markup-compatibility/2006" xmlns:mv="urn:schemas-microsoft-com:mac:vml" xmlns:p="http://schemas.openxmlformats.org/presentationml/2006/main" xmlns:c="http://schemas.openxmlformats.org/drawingml/2006/chart" xmlns:dgm="http://schemas.openxmlformats.org/drawingml/2006/diagram" xmlns:o="urn:schemas-microsoft-com:office:office" xmlns:v="urn:schemas-microsoft-com:vml" xmlns:pvml="urn:schemas-microsoft-com:office:powerpoint" xmlns:com="http://schemas.openxmlformats.org/drawingml/2006/compatibility" xmlns:p14="http://schemas.microsoft.com/office/powerpoint/2010/main" xmlns:p15="http://schemas.microsoft.com/office/powerpoint/2012/main" xmlns:ahyp="http://schemas.microsoft.com/office/drawing/2018/hyperlinkcolor" matchingName="Caption">
+<p:sldLayout xmlns:a="http://schemas.openxmlformats.org/drawingml/2006/main" xmlns:r="http://schemas.openxmlformats.org/officeDocument/2006/relationships" xmlns:p="http://schemas.openxmlformats.org/presentationml/2006/main" matchingName="Caption">
   <p:cSld name="CAPTION_ONLY">
     <p:bg>
       <p:bgPr>
         <a:solidFill>
           <a:schemeClr val="accent1"/>
         </a:solidFill>
+        <a:effectLst/>
       </p:bgPr>
     </p:bg>
     <p:spTree>
       <p:nvGrpSpPr>
-        <p:cNvPr id="103" name="Shape 103"/>
+        <p:cNvPr id="1" name="Shape 103"/>
         <p:cNvGrpSpPr/>
         <p:nvPr/>
       </p:nvGrpSpPr>
@@ -8846,12 +8757,12 @@
           </a:ln>
         </p:spPr>
         <p:txBody>
-          <a:bodyPr anchorCtr="0" anchor="ctr" bIns="91425" lIns="91425" spcFirstLastPara="1" rIns="91425" wrap="square" tIns="91425">
+          <a:bodyPr spcFirstLastPara="1" wrap="square" lIns="91425" tIns="91425" rIns="91425" bIns="91425" anchor="ctr" anchorCtr="0">
             <a:noAutofit/>
           </a:bodyPr>
           <a:lstStyle/>
           <a:p>
-            <a:pPr indent="0" lvl="0" marL="0" rtl="0" algn="l">
+            <a:pPr marL="0" lvl="0" indent="0" algn="l" rtl="0">
               <a:spcBef>
                 <a:spcPts val="0"/>
               </a:spcBef>
@@ -8860,9 +8771,6 @@
               </a:spcAft>
               <a:buNone/>
             </a:pPr>
-            <a:r>
-              <a:t/>
-            </a:r>
             <a:endParaRPr/>
           </a:p>
         </p:txBody>
@@ -8889,12 +8797,12 @@
           </a:ln>
         </p:spPr>
         <p:txBody>
-          <a:bodyPr anchorCtr="0" anchor="ctr" bIns="91425" lIns="91425" spcFirstLastPara="1" rIns="91425" wrap="square" tIns="91425">
+          <a:bodyPr spcFirstLastPara="1" wrap="square" lIns="91425" tIns="91425" rIns="91425" bIns="91425" anchor="ctr" anchorCtr="0">
             <a:noAutofit/>
           </a:bodyPr>
           <a:lstStyle/>
           <a:p>
-            <a:pPr indent="0" lvl="0" marL="0" rtl="0" algn="l">
+            <a:pPr marL="0" lvl="0" indent="0" algn="l" rtl="0">
               <a:spcBef>
                 <a:spcPts val="0"/>
               </a:spcBef>
@@ -8903,9 +8811,6 @@
               </a:spcAft>
               <a:buNone/>
             </a:pPr>
-            <a:r>
-              <a:t/>
-            </a:r>
             <a:endParaRPr/>
           </a:p>
         </p:txBody>
@@ -8931,7 +8836,7 @@
             <a:noFill/>
           </a:ln>
           <a:effectLst>
-            <a:outerShdw blurRad="228600" sx="101000" rotWithShape="0" algn="ctr" sy="101000">
+            <a:outerShdw blurRad="228600" sx="101000" sy="101000" algn="ctr" rotWithShape="0">
               <a:srgbClr val="000000">
                 <a:alpha val="40000"/>
               </a:srgbClr>
@@ -8939,12 +8844,12 @@
           </a:effectLst>
         </p:spPr>
         <p:txBody>
-          <a:bodyPr anchorCtr="0" anchor="ctr" bIns="91425" lIns="91425" spcFirstLastPara="1" rIns="91425" wrap="square" tIns="91425">
+          <a:bodyPr spcFirstLastPara="1" wrap="square" lIns="91425" tIns="91425" rIns="91425" bIns="91425" anchor="ctr" anchorCtr="0">
             <a:noAutofit/>
           </a:bodyPr>
           <a:lstStyle/>
           <a:p>
-            <a:pPr indent="0" lvl="0" marL="0" rtl="0" algn="l">
+            <a:pPr marL="0" lvl="0" indent="0" algn="l" rtl="0">
               <a:spcBef>
                 <a:spcPts val="0"/>
               </a:spcBef>
@@ -8953,9 +8858,6 @@
               </a:spcAft>
               <a:buNone/>
             </a:pPr>
-            <a:r>
-              <a:t/>
-            </a:r>
             <a:endParaRPr/>
           </a:p>
         </p:txBody>
@@ -8963,9 +8865,11 @@
       <p:sp>
         <p:nvSpPr>
           <p:cNvPr id="107" name="Google Shape;107;p10"/>
-          <p:cNvSpPr txBox="1"/>
+          <p:cNvSpPr txBox="1">
+            <a:spLocks noGrp="1"/>
+          </p:cNvSpPr>
           <p:nvPr>
-            <p:ph idx="1" type="body"/>
+            <p:ph type="body" idx="1"/>
           </p:nvPr>
         </p:nvSpPr>
         <p:spPr>
@@ -8978,11 +8882,11 @@
           </a:prstGeom>
         </p:spPr>
         <p:txBody>
-          <a:bodyPr anchorCtr="0" anchor="b" bIns="91425" lIns="91425" spcFirstLastPara="1" rIns="91425" wrap="square" tIns="91425">
+          <a:bodyPr spcFirstLastPara="1" wrap="square" lIns="91425" tIns="91425" rIns="91425" bIns="91425" anchor="b" anchorCtr="0">
             <a:normAutofit/>
           </a:bodyPr>
           <a:lstStyle>
-            <a:lvl1pPr indent="-228600" lvl="0" marL="457200">
+            <a:lvl1pPr marL="457200" lvl="0" indent="-228600">
               <a:lnSpc>
                 <a:spcPct val="100000"/>
               </a:lnSpc>
@@ -8997,15 +8901,19 @@
               <a:defRPr/>
             </a:lvl1pPr>
           </a:lstStyle>
-          <a:p/>
+          <a:p>
+            <a:endParaRPr/>
+          </a:p>
         </p:txBody>
       </p:sp>
       <p:sp>
         <p:nvSpPr>
           <p:cNvPr id="108" name="Google Shape;108;p10"/>
-          <p:cNvSpPr txBox="1"/>
+          <p:cNvSpPr txBox="1">
+            <a:spLocks noGrp="1"/>
+          </p:cNvSpPr>
           <p:nvPr>
-            <p:ph idx="12" type="sldNum"/>
+            <p:ph type="sldNum" idx="12"/>
           </p:nvPr>
         </p:nvSpPr>
         <p:spPr>
@@ -9018,7 +8926,7 @@
           </a:prstGeom>
         </p:spPr>
         <p:txBody>
-          <a:bodyPr anchorCtr="0" anchor="ctr" bIns="91425" lIns="91425" spcFirstLastPara="1" rIns="91425" wrap="square" tIns="91425">
+          <a:bodyPr spcFirstLastPara="1" wrap="square" lIns="91425" tIns="91425" rIns="91425" bIns="91425" anchor="ctr" anchorCtr="0">
             <a:normAutofit/>
           </a:bodyPr>
           <a:lstStyle>
@@ -9060,7 +8968,7 @@
             </a:lvl9pPr>
           </a:lstStyle>
           <a:p>
-            <a:pPr indent="0" lvl="0" marL="0" rtl="0" algn="r">
+            <a:pPr marL="0" lvl="0" indent="0" algn="r" rtl="0">
               <a:spcBef>
                 <a:spcPts val="0"/>
               </a:spcBef>
@@ -9086,18 +8994,19 @@
 </file>
 
 <file path=ppt/slideMasters/slideMaster1.xml><?xml version="1.0" encoding="utf-8"?>
-<p:sldMaster xmlns:a="http://schemas.openxmlformats.org/drawingml/2006/main" xmlns:r="http://schemas.openxmlformats.org/officeDocument/2006/relationships" xmlns:mc="http://schemas.openxmlformats.org/markup-compatibility/2006" xmlns:mv="urn:schemas-microsoft-com:mac:vml" xmlns:p="http://schemas.openxmlformats.org/presentationml/2006/main" xmlns:c="http://schemas.openxmlformats.org/drawingml/2006/chart" xmlns:dgm="http://schemas.openxmlformats.org/drawingml/2006/diagram" xmlns:o="urn:schemas-microsoft-com:office:office" xmlns:v="urn:schemas-microsoft-com:vml" xmlns:pvml="urn:schemas-microsoft-com:office:powerpoint" xmlns:com="http://schemas.openxmlformats.org/drawingml/2006/compatibility" xmlns:p14="http://schemas.microsoft.com/office/powerpoint/2010/main" xmlns:p15="http://schemas.microsoft.com/office/powerpoint/2012/main" xmlns:ahyp="http://schemas.microsoft.com/office/drawing/2018/hyperlinkcolor">
+<p:sldMaster xmlns:a="http://schemas.openxmlformats.org/drawingml/2006/main" xmlns:r="http://schemas.openxmlformats.org/officeDocument/2006/relationships" xmlns:p="http://schemas.openxmlformats.org/presentationml/2006/main">
   <p:cSld name="shift">
     <p:bg>
       <p:bgPr>
         <a:solidFill>
           <a:schemeClr val="dk1"/>
         </a:solidFill>
+        <a:effectLst/>
       </p:bgPr>
     </p:bg>
     <p:spTree>
       <p:nvGrpSpPr>
-        <p:cNvPr id="5" name="Shape 5"/>
+        <p:cNvPr id="1" name="Shape 5"/>
         <p:cNvGrpSpPr/>
         <p:nvPr/>
       </p:nvGrpSpPr>
@@ -9112,7 +9021,9 @@
       <p:sp>
         <p:nvSpPr>
           <p:cNvPr id="6" name="Google Shape;6;p1"/>
-          <p:cNvSpPr txBox="1"/>
+          <p:cNvSpPr txBox="1">
+            <a:spLocks noGrp="1"/>
+          </p:cNvSpPr>
           <p:nvPr>
             <p:ph type="title"/>
           </p:nvPr>
@@ -9131,7 +9042,7 @@
           </a:ln>
         </p:spPr>
         <p:txBody>
-          <a:bodyPr anchorCtr="0" anchor="t" bIns="91425" lIns="91425" spcFirstLastPara="1" rIns="91425" wrap="square" tIns="91425">
+          <a:bodyPr spcFirstLastPara="1" wrap="square" lIns="91425" tIns="91425" rIns="91425" bIns="91425" anchor="t" anchorCtr="0">
             <a:normAutofit/>
           </a:bodyPr>
           <a:lstStyle>
@@ -9343,15 +9254,19 @@
               </a:defRPr>
             </a:lvl9pPr>
           </a:lstStyle>
-          <a:p/>
+          <a:p>
+            <a:endParaRPr/>
+          </a:p>
         </p:txBody>
       </p:sp>
       <p:sp>
         <p:nvSpPr>
           <p:cNvPr id="7" name="Google Shape;7;p1"/>
-          <p:cNvSpPr txBox="1"/>
+          <p:cNvSpPr txBox="1">
+            <a:spLocks noGrp="1"/>
+          </p:cNvSpPr>
           <p:nvPr>
-            <p:ph idx="1" type="body"/>
+            <p:ph type="body" idx="1"/>
           </p:nvPr>
         </p:nvSpPr>
         <p:spPr>
@@ -9368,11 +9283,11 @@
           </a:ln>
         </p:spPr>
         <p:txBody>
-          <a:bodyPr anchorCtr="0" anchor="t" bIns="91425" lIns="91425" spcFirstLastPara="1" rIns="91425" wrap="square" tIns="91425">
+          <a:bodyPr spcFirstLastPara="1" wrap="square" lIns="91425" tIns="91425" rIns="91425" bIns="91425" anchor="t" anchorCtr="0">
             <a:normAutofit/>
           </a:bodyPr>
           <a:lstStyle>
-            <a:lvl1pPr indent="-311150" lvl="0" marL="457200">
+            <a:lvl1pPr marL="457200" lvl="0" indent="-311150">
               <a:lnSpc>
                 <a:spcPct val="115000"/>
               </a:lnSpc>
@@ -9398,7 +9313,7 @@
                 <a:sym typeface="Calibri"/>
               </a:defRPr>
             </a:lvl1pPr>
-            <a:lvl2pPr indent="-298450" lvl="1" marL="914400">
+            <a:lvl2pPr marL="914400" lvl="1" indent="-298450">
               <a:lnSpc>
                 <a:spcPct val="115000"/>
               </a:lnSpc>
@@ -9424,7 +9339,7 @@
                 <a:sym typeface="Calibri"/>
               </a:defRPr>
             </a:lvl2pPr>
-            <a:lvl3pPr indent="-298450" lvl="2" marL="1371600">
+            <a:lvl3pPr marL="1371600" lvl="2" indent="-298450">
               <a:lnSpc>
                 <a:spcPct val="115000"/>
               </a:lnSpc>
@@ -9450,7 +9365,7 @@
                 <a:sym typeface="Calibri"/>
               </a:defRPr>
             </a:lvl3pPr>
-            <a:lvl4pPr indent="-298450" lvl="3" marL="1828800">
+            <a:lvl4pPr marL="1828800" lvl="3" indent="-298450">
               <a:lnSpc>
                 <a:spcPct val="115000"/>
               </a:lnSpc>
@@ -9476,7 +9391,7 @@
                 <a:sym typeface="Calibri"/>
               </a:defRPr>
             </a:lvl4pPr>
-            <a:lvl5pPr indent="-298450" lvl="4" marL="2286000">
+            <a:lvl5pPr marL="2286000" lvl="4" indent="-298450">
               <a:lnSpc>
                 <a:spcPct val="115000"/>
               </a:lnSpc>
@@ -9502,7 +9417,7 @@
                 <a:sym typeface="Calibri"/>
               </a:defRPr>
             </a:lvl5pPr>
-            <a:lvl6pPr indent="-298450" lvl="5" marL="2743200">
+            <a:lvl6pPr marL="2743200" lvl="5" indent="-298450">
               <a:lnSpc>
                 <a:spcPct val="115000"/>
               </a:lnSpc>
@@ -9528,7 +9443,7 @@
                 <a:sym typeface="Calibri"/>
               </a:defRPr>
             </a:lvl6pPr>
-            <a:lvl7pPr indent="-298450" lvl="6" marL="3200400">
+            <a:lvl7pPr marL="3200400" lvl="6" indent="-298450">
               <a:lnSpc>
                 <a:spcPct val="115000"/>
               </a:lnSpc>
@@ -9554,7 +9469,7 @@
                 <a:sym typeface="Calibri"/>
               </a:defRPr>
             </a:lvl7pPr>
-            <a:lvl8pPr indent="-298450" lvl="7" marL="3657600">
+            <a:lvl8pPr marL="3657600" lvl="7" indent="-298450">
               <a:lnSpc>
                 <a:spcPct val="115000"/>
               </a:lnSpc>
@@ -9580,7 +9495,7 @@
                 <a:sym typeface="Calibri"/>
               </a:defRPr>
             </a:lvl8pPr>
-            <a:lvl9pPr indent="-298450" lvl="8" marL="4114800">
+            <a:lvl9pPr marL="4114800" lvl="8" indent="-298450">
               <a:lnSpc>
                 <a:spcPct val="115000"/>
               </a:lnSpc>
@@ -9607,15 +9522,19 @@
               </a:defRPr>
             </a:lvl9pPr>
           </a:lstStyle>
-          <a:p/>
+          <a:p>
+            <a:endParaRPr/>
+          </a:p>
         </p:txBody>
       </p:sp>
       <p:sp>
         <p:nvSpPr>
           <p:cNvPr id="8" name="Google Shape;8;p1"/>
-          <p:cNvSpPr txBox="1"/>
+          <p:cNvSpPr txBox="1">
+            <a:spLocks noGrp="1"/>
+          </p:cNvSpPr>
           <p:nvPr>
-            <p:ph idx="12" type="sldNum"/>
+            <p:ph type="sldNum" idx="12"/>
           </p:nvPr>
         </p:nvSpPr>
         <p:spPr>
@@ -9632,7 +9551,7 @@
           </a:ln>
         </p:spPr>
         <p:txBody>
-          <a:bodyPr anchorCtr="0" anchor="ctr" bIns="91425" lIns="91425" spcFirstLastPara="1" rIns="91425" wrap="square" tIns="91425">
+          <a:bodyPr spcFirstLastPara="1" wrap="square" lIns="91425" tIns="91425" rIns="91425" bIns="91425" anchor="ctr" anchorCtr="0">
             <a:normAutofit/>
           </a:bodyPr>
           <a:lstStyle>
@@ -9746,7 +9665,7 @@
             </a:lvl9pPr>
           </a:lstStyle>
           <a:p>
-            <a:pPr indent="0" lvl="0" marL="0" rtl="0" algn="r">
+            <a:pPr marL="0" lvl="0" indent="0" algn="r" rtl="0">
               <a:spcBef>
                 <a:spcPts val="0"/>
               </a:spcBef>
@@ -9765,7 +9684,7 @@
       </p:sp>
     </p:spTree>
   </p:cSld>
-  <p:clrMap accent1="accent1" accent2="accent2" accent3="accent3" accent4="accent4" accent5="accent5" accent6="accent6" bg1="lt1" bg2="dk2" tx1="dk1" tx2="lt2" folHlink="folHlink" hlink="hlink"/>
+  <p:clrMap bg1="lt1" tx1="dk1" bg2="dk2" tx2="lt2" accent1="accent1" accent2="accent2" accent3="accent3" accent4="accent4" accent5="accent5" accent6="accent6" hlink="hlink" folHlink="folHlink"/>
   <p:sldLayoutIdLst>
     <p:sldLayoutId id="2147483648" r:id="rId1"/>
     <p:sldLayoutId id="2147483649" r:id="rId2"/>
@@ -9779,10 +9698,10 @@
     <p:sldLayoutId id="2147483657" r:id="rId10"/>
     <p:sldLayoutId id="2147483658" r:id="rId11"/>
   </p:sldLayoutIdLst>
-  <p:hf dt="0" ftr="0" hdr="0" sldNum="0"/>
+  <p:hf sldNum="0" hdr="0" ftr="0" dt="0"/>
   <p:txStyles>
     <p:titleStyle>
-      <a:defPPr lvl="0" marR="0" rtl="0" algn="l">
+      <a:defPPr marR="0" lvl="0" algn="l" rtl="0">
         <a:lnSpc>
           <a:spcPct val="100000"/>
         </a:lnSpc>
@@ -9793,7 +9712,7 @@
           <a:spcPts val="0"/>
         </a:spcAft>
       </a:defPPr>
-      <a:lvl1pPr lvl="0" marR="0" rtl="0" algn="l">
+      <a:lvl1pPr marR="0" lvl="0" algn="l" rtl="0">
         <a:lnSpc>
           <a:spcPct val="100000"/>
         </a:lnSpc>
@@ -9807,7 +9726,7 @@
           <a:srgbClr val="000000"/>
         </a:buClr>
         <a:buFont typeface="Arial"/>
-        <a:defRPr b="0" i="0" sz="1400" u="none" cap="none" strike="noStrike">
+        <a:defRPr sz="1400" b="0" i="0" u="none" strike="noStrike" cap="none">
           <a:solidFill>
             <a:srgbClr val="000000"/>
           </a:solidFill>
@@ -9817,7 +9736,7 @@
           <a:sym typeface="Arial"/>
         </a:defRPr>
       </a:lvl1pPr>
-      <a:lvl2pPr lvl="1" marR="0" rtl="0" algn="l">
+      <a:lvl2pPr marR="0" lvl="1" algn="l" rtl="0">
         <a:lnSpc>
           <a:spcPct val="100000"/>
         </a:lnSpc>
@@ -9831,7 +9750,7 @@
           <a:srgbClr val="000000"/>
         </a:buClr>
         <a:buFont typeface="Arial"/>
-        <a:defRPr b="0" i="0" sz="1400" u="none" cap="none" strike="noStrike">
+        <a:defRPr sz="1400" b="0" i="0" u="none" strike="noStrike" cap="none">
           <a:solidFill>
             <a:srgbClr val="000000"/>
           </a:solidFill>
@@ -9841,7 +9760,7 @@
           <a:sym typeface="Arial"/>
         </a:defRPr>
       </a:lvl2pPr>
-      <a:lvl3pPr lvl="2" marR="0" rtl="0" algn="l">
+      <a:lvl3pPr marR="0" lvl="2" algn="l" rtl="0">
         <a:lnSpc>
           <a:spcPct val="100000"/>
         </a:lnSpc>
@@ -9855,7 +9774,7 @@
           <a:srgbClr val="000000"/>
         </a:buClr>
         <a:buFont typeface="Arial"/>
-        <a:defRPr b="0" i="0" sz="1400" u="none" cap="none" strike="noStrike">
+        <a:defRPr sz="1400" b="0" i="0" u="none" strike="noStrike" cap="none">
           <a:solidFill>
             <a:srgbClr val="000000"/>
           </a:solidFill>
@@ -9865,7 +9784,7 @@
           <a:sym typeface="Arial"/>
         </a:defRPr>
       </a:lvl3pPr>
-      <a:lvl4pPr lvl="3" marR="0" rtl="0" algn="l">
+      <a:lvl4pPr marR="0" lvl="3" algn="l" rtl="0">
         <a:lnSpc>
           <a:spcPct val="100000"/>
         </a:lnSpc>
@@ -9879,7 +9798,7 @@
           <a:srgbClr val="000000"/>
         </a:buClr>
         <a:buFont typeface="Arial"/>
-        <a:defRPr b="0" i="0" sz="1400" u="none" cap="none" strike="noStrike">
+        <a:defRPr sz="1400" b="0" i="0" u="none" strike="noStrike" cap="none">
           <a:solidFill>
             <a:srgbClr val="000000"/>
           </a:solidFill>
@@ -9889,7 +9808,7 @@
           <a:sym typeface="Arial"/>
         </a:defRPr>
       </a:lvl4pPr>
-      <a:lvl5pPr lvl="4" marR="0" rtl="0" algn="l">
+      <a:lvl5pPr marR="0" lvl="4" algn="l" rtl="0">
         <a:lnSpc>
           <a:spcPct val="100000"/>
         </a:lnSpc>
@@ -9903,7 +9822,7 @@
           <a:srgbClr val="000000"/>
         </a:buClr>
         <a:buFont typeface="Arial"/>
-        <a:defRPr b="0" i="0" sz="1400" u="none" cap="none" strike="noStrike">
+        <a:defRPr sz="1400" b="0" i="0" u="none" strike="noStrike" cap="none">
           <a:solidFill>
             <a:srgbClr val="000000"/>
           </a:solidFill>
@@ -9913,7 +9832,7 @@
           <a:sym typeface="Arial"/>
         </a:defRPr>
       </a:lvl5pPr>
-      <a:lvl6pPr lvl="5" marR="0" rtl="0" algn="l">
+      <a:lvl6pPr marR="0" lvl="5" algn="l" rtl="0">
         <a:lnSpc>
           <a:spcPct val="100000"/>
         </a:lnSpc>
@@ -9927,7 +9846,7 @@
           <a:srgbClr val="000000"/>
         </a:buClr>
         <a:buFont typeface="Arial"/>
-        <a:defRPr b="0" i="0" sz="1400" u="none" cap="none" strike="noStrike">
+        <a:defRPr sz="1400" b="0" i="0" u="none" strike="noStrike" cap="none">
           <a:solidFill>
             <a:srgbClr val="000000"/>
           </a:solidFill>
@@ -9937,7 +9856,7 @@
           <a:sym typeface="Arial"/>
         </a:defRPr>
       </a:lvl6pPr>
-      <a:lvl7pPr lvl="6" marR="0" rtl="0" algn="l">
+      <a:lvl7pPr marR="0" lvl="6" algn="l" rtl="0">
         <a:lnSpc>
           <a:spcPct val="100000"/>
         </a:lnSpc>
@@ -9951,7 +9870,7 @@
           <a:srgbClr val="000000"/>
         </a:buClr>
         <a:buFont typeface="Arial"/>
-        <a:defRPr b="0" i="0" sz="1400" u="none" cap="none" strike="noStrike">
+        <a:defRPr sz="1400" b="0" i="0" u="none" strike="noStrike" cap="none">
           <a:solidFill>
             <a:srgbClr val="000000"/>
           </a:solidFill>
@@ -9961,7 +9880,7 @@
           <a:sym typeface="Arial"/>
         </a:defRPr>
       </a:lvl7pPr>
-      <a:lvl8pPr lvl="7" marR="0" rtl="0" algn="l">
+      <a:lvl8pPr marR="0" lvl="7" algn="l" rtl="0">
         <a:lnSpc>
           <a:spcPct val="100000"/>
         </a:lnSpc>
@@ -9975,7 +9894,7 @@
           <a:srgbClr val="000000"/>
         </a:buClr>
         <a:buFont typeface="Arial"/>
-        <a:defRPr b="0" i="0" sz="1400" u="none" cap="none" strike="noStrike">
+        <a:defRPr sz="1400" b="0" i="0" u="none" strike="noStrike" cap="none">
           <a:solidFill>
             <a:srgbClr val="000000"/>
           </a:solidFill>
@@ -9985,7 +9904,7 @@
           <a:sym typeface="Arial"/>
         </a:defRPr>
       </a:lvl8pPr>
-      <a:lvl9pPr lvl="8" marR="0" rtl="0" algn="l">
+      <a:lvl9pPr marR="0" lvl="8" algn="l" rtl="0">
         <a:lnSpc>
           <a:spcPct val="100000"/>
         </a:lnSpc>
@@ -9999,7 +9918,7 @@
           <a:srgbClr val="000000"/>
         </a:buClr>
         <a:buFont typeface="Arial"/>
-        <a:defRPr b="0" i="0" sz="1400" u="none" cap="none" strike="noStrike">
+        <a:defRPr sz="1400" b="0" i="0" u="none" strike="noStrike" cap="none">
           <a:solidFill>
             <a:srgbClr val="000000"/>
           </a:solidFill>
@@ -10011,7 +9930,7 @@
       </a:lvl9pPr>
     </p:titleStyle>
     <p:bodyStyle>
-      <a:defPPr lvl="0" marR="0" rtl="0" algn="l">
+      <a:defPPr marR="0" lvl="0" algn="l" rtl="0">
         <a:lnSpc>
           <a:spcPct val="100000"/>
         </a:lnSpc>
@@ -10022,7 +9941,7 @@
           <a:spcPts val="0"/>
         </a:spcAft>
       </a:defPPr>
-      <a:lvl1pPr lvl="0" marR="0" rtl="0" algn="l">
+      <a:lvl1pPr marR="0" lvl="0" algn="l" rtl="0">
         <a:lnSpc>
           <a:spcPct val="100000"/>
         </a:lnSpc>
@@ -10036,7 +9955,7 @@
           <a:srgbClr val="000000"/>
         </a:buClr>
         <a:buFont typeface="Arial"/>
-        <a:defRPr b="0" i="0" sz="1400" u="none" cap="none" strike="noStrike">
+        <a:defRPr sz="1400" b="0" i="0" u="none" strike="noStrike" cap="none">
           <a:solidFill>
             <a:srgbClr val="000000"/>
           </a:solidFill>
@@ -10046,7 +9965,7 @@
           <a:sym typeface="Arial"/>
         </a:defRPr>
       </a:lvl1pPr>
-      <a:lvl2pPr lvl="1" marR="0" rtl="0" algn="l">
+      <a:lvl2pPr marR="0" lvl="1" algn="l" rtl="0">
         <a:lnSpc>
           <a:spcPct val="100000"/>
         </a:lnSpc>
@@ -10060,7 +9979,7 @@
           <a:srgbClr val="000000"/>
         </a:buClr>
         <a:buFont typeface="Arial"/>
-        <a:defRPr b="0" i="0" sz="1400" u="none" cap="none" strike="noStrike">
+        <a:defRPr sz="1400" b="0" i="0" u="none" strike="noStrike" cap="none">
           <a:solidFill>
             <a:srgbClr val="000000"/>
           </a:solidFill>
@@ -10070,7 +9989,7 @@
           <a:sym typeface="Arial"/>
         </a:defRPr>
       </a:lvl2pPr>
-      <a:lvl3pPr lvl="2" marR="0" rtl="0" algn="l">
+      <a:lvl3pPr marR="0" lvl="2" algn="l" rtl="0">
         <a:lnSpc>
           <a:spcPct val="100000"/>
         </a:lnSpc>
@@ -10084,7 +10003,7 @@
           <a:srgbClr val="000000"/>
         </a:buClr>
         <a:buFont typeface="Arial"/>
-        <a:defRPr b="0" i="0" sz="1400" u="none" cap="none" strike="noStrike">
+        <a:defRPr sz="1400" b="0" i="0" u="none" strike="noStrike" cap="none">
           <a:solidFill>
             <a:srgbClr val="000000"/>
           </a:solidFill>
@@ -10094,7 +10013,7 @@
           <a:sym typeface="Arial"/>
         </a:defRPr>
       </a:lvl3pPr>
-      <a:lvl4pPr lvl="3" marR="0" rtl="0" algn="l">
+      <a:lvl4pPr marR="0" lvl="3" algn="l" rtl="0">
         <a:lnSpc>
           <a:spcPct val="100000"/>
         </a:lnSpc>
@@ -10108,7 +10027,7 @@
           <a:srgbClr val="000000"/>
         </a:buClr>
         <a:buFont typeface="Arial"/>
-        <a:defRPr b="0" i="0" sz="1400" u="none" cap="none" strike="noStrike">
+        <a:defRPr sz="1400" b="0" i="0" u="none" strike="noStrike" cap="none">
           <a:solidFill>
             <a:srgbClr val="000000"/>
           </a:solidFill>
@@ -10118,7 +10037,7 @@
           <a:sym typeface="Arial"/>
         </a:defRPr>
       </a:lvl4pPr>
-      <a:lvl5pPr lvl="4" marR="0" rtl="0" algn="l">
+      <a:lvl5pPr marR="0" lvl="4" algn="l" rtl="0">
         <a:lnSpc>
           <a:spcPct val="100000"/>
         </a:lnSpc>
@@ -10132,7 +10051,7 @@
           <a:srgbClr val="000000"/>
         </a:buClr>
         <a:buFont typeface="Arial"/>
-        <a:defRPr b="0" i="0" sz="1400" u="none" cap="none" strike="noStrike">
+        <a:defRPr sz="1400" b="0" i="0" u="none" strike="noStrike" cap="none">
           <a:solidFill>
             <a:srgbClr val="000000"/>
           </a:solidFill>
@@ -10142,7 +10061,7 @@
           <a:sym typeface="Arial"/>
         </a:defRPr>
       </a:lvl5pPr>
-      <a:lvl6pPr lvl="5" marR="0" rtl="0" algn="l">
+      <a:lvl6pPr marR="0" lvl="5" algn="l" rtl="0">
         <a:lnSpc>
           <a:spcPct val="100000"/>
         </a:lnSpc>
@@ -10156,7 +10075,7 @@
           <a:srgbClr val="000000"/>
         </a:buClr>
         <a:buFont typeface="Arial"/>
-        <a:defRPr b="0" i="0" sz="1400" u="none" cap="none" strike="noStrike">
+        <a:defRPr sz="1400" b="0" i="0" u="none" strike="noStrike" cap="none">
           <a:solidFill>
             <a:srgbClr val="000000"/>
           </a:solidFill>
@@ -10166,7 +10085,7 @@
           <a:sym typeface="Arial"/>
         </a:defRPr>
       </a:lvl6pPr>
-      <a:lvl7pPr lvl="6" marR="0" rtl="0" algn="l">
+      <a:lvl7pPr marR="0" lvl="6" algn="l" rtl="0">
         <a:lnSpc>
           <a:spcPct val="100000"/>
         </a:lnSpc>
@@ -10180,7 +10099,7 @@
           <a:srgbClr val="000000"/>
         </a:buClr>
         <a:buFont typeface="Arial"/>
-        <a:defRPr b="0" i="0" sz="1400" u="none" cap="none" strike="noStrike">
+        <a:defRPr sz="1400" b="0" i="0" u="none" strike="noStrike" cap="none">
           <a:solidFill>
             <a:srgbClr val="000000"/>
           </a:solidFill>
@@ -10190,7 +10109,7 @@
           <a:sym typeface="Arial"/>
         </a:defRPr>
       </a:lvl7pPr>
-      <a:lvl8pPr lvl="7" marR="0" rtl="0" algn="l">
+      <a:lvl8pPr marR="0" lvl="7" algn="l" rtl="0">
         <a:lnSpc>
           <a:spcPct val="100000"/>
         </a:lnSpc>
@@ -10204,7 +10123,7 @@
           <a:srgbClr val="000000"/>
         </a:buClr>
         <a:buFont typeface="Arial"/>
-        <a:defRPr b="0" i="0" sz="1400" u="none" cap="none" strike="noStrike">
+        <a:defRPr sz="1400" b="0" i="0" u="none" strike="noStrike" cap="none">
           <a:solidFill>
             <a:srgbClr val="000000"/>
           </a:solidFill>
@@ -10214,7 +10133,7 @@
           <a:sym typeface="Arial"/>
         </a:defRPr>
       </a:lvl8pPr>
-      <a:lvl9pPr lvl="8" marR="0" rtl="0" algn="l">
+      <a:lvl9pPr marR="0" lvl="8" algn="l" rtl="0">
         <a:lnSpc>
           <a:spcPct val="100000"/>
         </a:lnSpc>
@@ -10228,7 +10147,7 @@
           <a:srgbClr val="000000"/>
         </a:buClr>
         <a:buFont typeface="Arial"/>
-        <a:defRPr b="0" i="0" sz="1400" u="none" cap="none" strike="noStrike">
+        <a:defRPr sz="1400" b="0" i="0" u="none" strike="noStrike" cap="none">
           <a:solidFill>
             <a:srgbClr val="000000"/>
           </a:solidFill>
@@ -10240,7 +10159,7 @@
       </a:lvl9pPr>
     </p:bodyStyle>
     <p:otherStyle>
-      <a:defPPr lvl="0" marR="0" rtl="0" algn="l">
+      <a:defPPr marR="0" lvl="0" algn="l" rtl="0">
         <a:lnSpc>
           <a:spcPct val="100000"/>
         </a:lnSpc>
@@ -10251,7 +10170,7 @@
           <a:spcPts val="0"/>
         </a:spcAft>
       </a:defPPr>
-      <a:lvl1pPr lvl="0" marR="0" rtl="0" algn="l">
+      <a:lvl1pPr marR="0" lvl="0" algn="l" rtl="0">
         <a:lnSpc>
           <a:spcPct val="100000"/>
         </a:lnSpc>
@@ -10265,7 +10184,7 @@
           <a:srgbClr val="000000"/>
         </a:buClr>
         <a:buFont typeface="Arial"/>
-        <a:defRPr b="0" i="0" sz="1400" u="none" cap="none" strike="noStrike">
+        <a:defRPr sz="1400" b="0" i="0" u="none" strike="noStrike" cap="none">
           <a:solidFill>
             <a:srgbClr val="000000"/>
           </a:solidFill>
@@ -10275,7 +10194,7 @@
           <a:sym typeface="Arial"/>
         </a:defRPr>
       </a:lvl1pPr>
-      <a:lvl2pPr lvl="1" marR="0" rtl="0" algn="l">
+      <a:lvl2pPr marR="0" lvl="1" algn="l" rtl="0">
         <a:lnSpc>
           <a:spcPct val="100000"/>
         </a:lnSpc>
@@ -10289,7 +10208,7 @@
           <a:srgbClr val="000000"/>
         </a:buClr>
         <a:buFont typeface="Arial"/>
-        <a:defRPr b="0" i="0" sz="1400" u="none" cap="none" strike="noStrike">
+        <a:defRPr sz="1400" b="0" i="0" u="none" strike="noStrike" cap="none">
           <a:solidFill>
             <a:srgbClr val="000000"/>
           </a:solidFill>
@@ -10299,7 +10218,7 @@
           <a:sym typeface="Arial"/>
         </a:defRPr>
       </a:lvl2pPr>
-      <a:lvl3pPr lvl="2" marR="0" rtl="0" algn="l">
+      <a:lvl3pPr marR="0" lvl="2" algn="l" rtl="0">
         <a:lnSpc>
           <a:spcPct val="100000"/>
         </a:lnSpc>
@@ -10313,7 +10232,7 @@
           <a:srgbClr val="000000"/>
         </a:buClr>
         <a:buFont typeface="Arial"/>
-        <a:defRPr b="0" i="0" sz="1400" u="none" cap="none" strike="noStrike">
+        <a:defRPr sz="1400" b="0" i="0" u="none" strike="noStrike" cap="none">
           <a:solidFill>
             <a:srgbClr val="000000"/>
           </a:solidFill>
@@ -10323,7 +10242,7 @@
           <a:sym typeface="Arial"/>
         </a:defRPr>
       </a:lvl3pPr>
-      <a:lvl4pPr lvl="3" marR="0" rtl="0" algn="l">
+      <a:lvl4pPr marR="0" lvl="3" algn="l" rtl="0">
         <a:lnSpc>
           <a:spcPct val="100000"/>
         </a:lnSpc>
@@ -10337,7 +10256,7 @@
           <a:srgbClr val="000000"/>
         </a:buClr>
         <a:buFont typeface="Arial"/>
-        <a:defRPr b="0" i="0" sz="1400" u="none" cap="none" strike="noStrike">
+        <a:defRPr sz="1400" b="0" i="0" u="none" strike="noStrike" cap="none">
           <a:solidFill>
             <a:srgbClr val="000000"/>
           </a:solidFill>
@@ -10347,7 +10266,7 @@
           <a:sym typeface="Arial"/>
         </a:defRPr>
       </a:lvl4pPr>
-      <a:lvl5pPr lvl="4" marR="0" rtl="0" algn="l">
+      <a:lvl5pPr marR="0" lvl="4" algn="l" rtl="0">
         <a:lnSpc>
           <a:spcPct val="100000"/>
         </a:lnSpc>
@@ -10361,7 +10280,7 @@
           <a:srgbClr val="000000"/>
         </a:buClr>
         <a:buFont typeface="Arial"/>
-        <a:defRPr b="0" i="0" sz="1400" u="none" cap="none" strike="noStrike">
+        <a:defRPr sz="1400" b="0" i="0" u="none" strike="noStrike" cap="none">
           <a:solidFill>
             <a:srgbClr val="000000"/>
           </a:solidFill>
@@ -10371,7 +10290,7 @@
           <a:sym typeface="Arial"/>
         </a:defRPr>
       </a:lvl5pPr>
-      <a:lvl6pPr lvl="5" marR="0" rtl="0" algn="l">
+      <a:lvl6pPr marR="0" lvl="5" algn="l" rtl="0">
         <a:lnSpc>
           <a:spcPct val="100000"/>
         </a:lnSpc>
@@ -10385,7 +10304,7 @@
           <a:srgbClr val="000000"/>
         </a:buClr>
         <a:buFont typeface="Arial"/>
-        <a:defRPr b="0" i="0" sz="1400" u="none" cap="none" strike="noStrike">
+        <a:defRPr sz="1400" b="0" i="0" u="none" strike="noStrike" cap="none">
           <a:solidFill>
             <a:srgbClr val="000000"/>
           </a:solidFill>
@@ -10395,7 +10314,7 @@
           <a:sym typeface="Arial"/>
         </a:defRPr>
       </a:lvl6pPr>
-      <a:lvl7pPr lvl="6" marR="0" rtl="0" algn="l">
+      <a:lvl7pPr marR="0" lvl="6" algn="l" rtl="0">
         <a:lnSpc>
           <a:spcPct val="100000"/>
         </a:lnSpc>
@@ -10409,7 +10328,7 @@
           <a:srgbClr val="000000"/>
         </a:buClr>
         <a:buFont typeface="Arial"/>
-        <a:defRPr b="0" i="0" sz="1400" u="none" cap="none" strike="noStrike">
+        <a:defRPr sz="1400" b="0" i="0" u="none" strike="noStrike" cap="none">
           <a:solidFill>
             <a:srgbClr val="000000"/>
           </a:solidFill>
@@ -10419,7 +10338,7 @@
           <a:sym typeface="Arial"/>
         </a:defRPr>
       </a:lvl7pPr>
-      <a:lvl8pPr lvl="7" marR="0" rtl="0" algn="l">
+      <a:lvl8pPr marR="0" lvl="7" algn="l" rtl="0">
         <a:lnSpc>
           <a:spcPct val="100000"/>
         </a:lnSpc>
@@ -10433,7 +10352,7 @@
           <a:srgbClr val="000000"/>
         </a:buClr>
         <a:buFont typeface="Arial"/>
-        <a:defRPr b="0" i="0" sz="1400" u="none" cap="none" strike="noStrike">
+        <a:defRPr sz="1400" b="0" i="0" u="none" strike="noStrike" cap="none">
           <a:solidFill>
             <a:srgbClr val="000000"/>
           </a:solidFill>
@@ -10443,7 +10362,7 @@
           <a:sym typeface="Arial"/>
         </a:defRPr>
       </a:lvl8pPr>
-      <a:lvl9pPr lvl="8" marR="0" rtl="0" algn="l">
+      <a:lvl9pPr marR="0" lvl="8" algn="l" rtl="0">
         <a:lnSpc>
           <a:spcPct val="100000"/>
         </a:lnSpc>
@@ -10457,7 +10376,7 @@
           <a:srgbClr val="000000"/>
         </a:buClr>
         <a:buFont typeface="Arial"/>
-        <a:defRPr b="0" i="0" sz="1400" u="none" cap="none" strike="noStrike">
+        <a:defRPr sz="1400" b="0" i="0" u="none" strike="noStrike" cap="none">
           <a:solidFill>
             <a:srgbClr val="000000"/>
           </a:solidFill>
@@ -10473,11 +10392,11 @@
 </file>
 
 <file path=ppt/slides/slide1.xml><?xml version="1.0" encoding="utf-8"?>
-<p:sld xmlns:a="http://schemas.openxmlformats.org/drawingml/2006/main" xmlns:r="http://schemas.openxmlformats.org/officeDocument/2006/relationships" xmlns:mc="http://schemas.openxmlformats.org/markup-compatibility/2006" xmlns:mv="urn:schemas-microsoft-com:mac:vml" xmlns:p="http://schemas.openxmlformats.org/presentationml/2006/main" xmlns:c="http://schemas.openxmlformats.org/drawingml/2006/chart" xmlns:dgm="http://schemas.openxmlformats.org/drawingml/2006/diagram" xmlns:o="urn:schemas-microsoft-com:office:office" xmlns:v="urn:schemas-microsoft-com:vml" xmlns:pvml="urn:schemas-microsoft-com:office:powerpoint" xmlns:com="http://schemas.openxmlformats.org/drawingml/2006/compatibility" xmlns:p14="http://schemas.microsoft.com/office/powerpoint/2010/main" xmlns:p15="http://schemas.microsoft.com/office/powerpoint/2012/main" xmlns:ahyp="http://schemas.microsoft.com/office/drawing/2018/hyperlinkcolor">
+<p:sld xmlns:a="http://schemas.openxmlformats.org/drawingml/2006/main" xmlns:r="http://schemas.openxmlformats.org/officeDocument/2006/relationships" xmlns:p="http://schemas.openxmlformats.org/presentationml/2006/main">
   <p:cSld>
     <p:spTree>
       <p:nvGrpSpPr>
-        <p:cNvPr id="127" name="Shape 127"/>
+        <p:cNvPr id="1" name="Shape 127"/>
         <p:cNvGrpSpPr/>
         <p:nvPr/>
       </p:nvGrpSpPr>
@@ -10492,7 +10411,9 @@
       <p:sp>
         <p:nvSpPr>
           <p:cNvPr id="128" name="Google Shape;128;p13"/>
-          <p:cNvSpPr txBox="1"/>
+          <p:cNvSpPr txBox="1">
+            <a:spLocks noGrp="1"/>
+          </p:cNvSpPr>
           <p:nvPr>
             <p:ph type="ctrTitle"/>
           </p:nvPr>
@@ -10507,12 +10428,12 @@
           </a:prstGeom>
         </p:spPr>
         <p:txBody>
-          <a:bodyPr anchorCtr="0" anchor="ctr" bIns="91425" lIns="91425" spcFirstLastPara="1" rIns="91425" wrap="square" tIns="91425">
+          <a:bodyPr spcFirstLastPara="1" wrap="square" lIns="91425" tIns="91425" rIns="91425" bIns="91425" anchor="ctr" anchorCtr="0">
             <a:normAutofit fontScale="90000"/>
           </a:bodyPr>
           <a:lstStyle/>
           <a:p>
-            <a:pPr indent="0" lvl="0" marL="0" rtl="0" algn="ctr">
+            <a:pPr marL="0" lvl="0" indent="0" algn="ctr" rtl="0">
               <a:spcBef>
                 <a:spcPts val="0"/>
               </a:spcBef>
@@ -10523,11 +10444,7 @@
             </a:pPr>
             <a:r>
               <a:rPr lang="en"/>
-              <a:t>Predicting</a:t>
-            </a:r>
-            <a:r>
-              <a:rPr lang="en"/>
-              <a:t> Credit Defaults Using Imbalanced Data Techniques</a:t>
+              <a:t>Predicting Credit Defaults Using Imbalanced Data Techniques</a:t>
             </a:r>
             <a:endParaRPr/>
           </a:p>
@@ -10536,9 +10453,11 @@
       <p:sp>
         <p:nvSpPr>
           <p:cNvPr id="129" name="Google Shape;129;p13"/>
-          <p:cNvSpPr txBox="1"/>
+          <p:cNvSpPr txBox="1">
+            <a:spLocks noGrp="1"/>
+          </p:cNvSpPr>
           <p:nvPr>
-            <p:ph idx="1" type="subTitle"/>
+            <p:ph type="subTitle" idx="1"/>
           </p:nvPr>
         </p:nvSpPr>
         <p:spPr>
@@ -10551,12 +10470,12 @@
           </a:prstGeom>
         </p:spPr>
         <p:txBody>
-          <a:bodyPr anchorCtr="0" anchor="t" bIns="91425" lIns="91425" spcFirstLastPara="1" rIns="91425" wrap="square" tIns="91425">
+          <a:bodyPr spcFirstLastPara="1" wrap="square" lIns="91425" tIns="91425" rIns="91425" bIns="91425" anchor="t" anchorCtr="0">
             <a:normAutofit/>
           </a:bodyPr>
           <a:lstStyle/>
           <a:p>
-            <a:pPr indent="0" lvl="0" marL="0" rtl="0" algn="ctr">
+            <a:pPr marL="0" lvl="0" indent="0" algn="ctr" rtl="0">
               <a:spcBef>
                 <a:spcPts val="0"/>
               </a:spcBef>
@@ -10582,132 +10501,11 @@
 </file>
 
 <file path=ppt/slides/slide10.xml><?xml version="1.0" encoding="utf-8"?>
-<p:sld xmlns:a="http://schemas.openxmlformats.org/drawingml/2006/main" xmlns:r="http://schemas.openxmlformats.org/officeDocument/2006/relationships" xmlns:mc="http://schemas.openxmlformats.org/markup-compatibility/2006" xmlns:mv="urn:schemas-microsoft-com:mac:vml" xmlns:p="http://schemas.openxmlformats.org/presentationml/2006/main" xmlns:c="http://schemas.openxmlformats.org/drawingml/2006/chart" xmlns:dgm="http://schemas.openxmlformats.org/drawingml/2006/diagram" xmlns:o="urn:schemas-microsoft-com:office:office" xmlns:v="urn:schemas-microsoft-com:vml" xmlns:pvml="urn:schemas-microsoft-com:office:powerpoint" xmlns:com="http://schemas.openxmlformats.org/drawingml/2006/compatibility" xmlns:p14="http://schemas.microsoft.com/office/powerpoint/2010/main" xmlns:p15="http://schemas.microsoft.com/office/powerpoint/2012/main" xmlns:ahyp="http://schemas.microsoft.com/office/drawing/2018/hyperlinkcolor">
+<p:sld xmlns:a="http://schemas.openxmlformats.org/drawingml/2006/main" xmlns:r="http://schemas.openxmlformats.org/officeDocument/2006/relationships" xmlns:p="http://schemas.openxmlformats.org/presentationml/2006/main">
   <p:cSld>
     <p:spTree>
       <p:nvGrpSpPr>
-        <p:cNvPr id="188" name="Shape 188"/>
-        <p:cNvGrpSpPr/>
-        <p:nvPr/>
-      </p:nvGrpSpPr>
-      <p:grpSpPr>
-        <a:xfrm>
-          <a:off x="0" y="0"/>
-          <a:ext cx="0" cy="0"/>
-          <a:chOff x="0" y="0"/>
-          <a:chExt cx="0" cy="0"/>
-        </a:xfrm>
-      </p:grpSpPr>
-      <p:sp>
-        <p:nvSpPr>
-          <p:cNvPr id="189" name="Google Shape;189;p22"/>
-          <p:cNvSpPr txBox="1"/>
-          <p:nvPr>
-            <p:ph type="title"/>
-          </p:nvPr>
-        </p:nvSpPr>
-        <p:spPr>
-          <a:xfrm>
-            <a:off x="819150" y="845600"/>
-            <a:ext cx="7505700" cy="954600"/>
-          </a:xfrm>
-          <a:prstGeom prst="rect">
-            <a:avLst/>
-          </a:prstGeom>
-        </p:spPr>
-        <p:txBody>
-          <a:bodyPr anchorCtr="0" anchor="t" bIns="91425" lIns="91425" spcFirstLastPara="1" rIns="91425" wrap="square" tIns="91425">
-            <a:normAutofit/>
-          </a:bodyPr>
-          <a:lstStyle/>
-          <a:p>
-            <a:pPr indent="0" lvl="0" marL="0" rtl="0" algn="l">
-              <a:spcBef>
-                <a:spcPts val="0"/>
-              </a:spcBef>
-              <a:spcAft>
-                <a:spcPts val="0"/>
-              </a:spcAft>
-              <a:buNone/>
-            </a:pPr>
-            <a:r>
-              <a:rPr lang="en"/>
-              <a:t>ADASYN</a:t>
-            </a:r>
-            <a:endParaRPr/>
-          </a:p>
-        </p:txBody>
-      </p:sp>
-      <p:pic>
-        <p:nvPicPr>
-          <p:cNvPr id="190" name="Google Shape;190;p22"/>
-          <p:cNvPicPr preferRelativeResize="0"/>
-          <p:nvPr/>
-        </p:nvPicPr>
-        <p:blipFill>
-          <a:blip r:embed="rId3">
-            <a:alphaModFix/>
-          </a:blip>
-          <a:stretch>
-            <a:fillRect/>
-          </a:stretch>
-        </p:blipFill>
-        <p:spPr>
-          <a:xfrm>
-            <a:off x="1407975" y="1562950"/>
-            <a:ext cx="1989622" cy="3038499"/>
-          </a:xfrm>
-          <a:prstGeom prst="rect">
-            <a:avLst/>
-          </a:prstGeom>
-          <a:noFill/>
-          <a:ln>
-            <a:noFill/>
-          </a:ln>
-        </p:spPr>
-      </p:pic>
-      <p:pic>
-        <p:nvPicPr>
-          <p:cNvPr id="191" name="Google Shape;191;p22"/>
-          <p:cNvPicPr preferRelativeResize="0"/>
-          <p:nvPr/>
-        </p:nvPicPr>
-        <p:blipFill>
-          <a:blip r:embed="rId4">
-            <a:alphaModFix/>
-          </a:blip>
-          <a:stretch>
-            <a:fillRect/>
-          </a:stretch>
-        </p:blipFill>
-        <p:spPr>
-          <a:xfrm>
-            <a:off x="3788122" y="1562950"/>
-            <a:ext cx="1906405" cy="3038500"/>
-          </a:xfrm>
-          <a:prstGeom prst="rect">
-            <a:avLst/>
-          </a:prstGeom>
-          <a:noFill/>
-          <a:ln>
-            <a:noFill/>
-          </a:ln>
-        </p:spPr>
-      </p:pic>
-    </p:spTree>
-  </p:cSld>
-  <p:clrMapOvr>
-    <a:masterClrMapping/>
-  </p:clrMapOvr>
-</p:sld>
-</file>
-
-<file path=ppt/slides/slide11.xml><?xml version="1.0" encoding="utf-8"?>
-<p:sld xmlns:a="http://schemas.openxmlformats.org/drawingml/2006/main" xmlns:r="http://schemas.openxmlformats.org/officeDocument/2006/relationships" xmlns:mc="http://schemas.openxmlformats.org/markup-compatibility/2006" xmlns:mv="urn:schemas-microsoft-com:mac:vml" xmlns:p="http://schemas.openxmlformats.org/presentationml/2006/main" xmlns:c="http://schemas.openxmlformats.org/drawingml/2006/chart" xmlns:dgm="http://schemas.openxmlformats.org/drawingml/2006/diagram" xmlns:o="urn:schemas-microsoft-com:office:office" xmlns:v="urn:schemas-microsoft-com:vml" xmlns:pvml="urn:schemas-microsoft-com:office:powerpoint" xmlns:com="http://schemas.openxmlformats.org/drawingml/2006/compatibility" xmlns:p14="http://schemas.microsoft.com/office/powerpoint/2010/main" xmlns:p15="http://schemas.microsoft.com/office/powerpoint/2012/main" xmlns:ahyp="http://schemas.microsoft.com/office/drawing/2018/hyperlinkcolor">
-  <p:cSld>
-    <p:spTree>
-      <p:nvGrpSpPr>
-        <p:cNvPr id="195" name="Shape 195"/>
+        <p:cNvPr id="1" name="Shape 195"/>
         <p:cNvGrpSpPr/>
         <p:nvPr/>
       </p:nvGrpSpPr>
@@ -10722,7 +10520,9 @@
       <p:sp>
         <p:nvSpPr>
           <p:cNvPr id="196" name="Google Shape;196;p23"/>
-          <p:cNvSpPr txBox="1"/>
+          <p:cNvSpPr txBox="1">
+            <a:spLocks noGrp="1"/>
+          </p:cNvSpPr>
           <p:nvPr>
             <p:ph type="title"/>
           </p:nvPr>
@@ -10737,12 +10537,12 @@
           </a:prstGeom>
         </p:spPr>
         <p:txBody>
-          <a:bodyPr anchorCtr="0" anchor="t" bIns="91425" lIns="91425" spcFirstLastPara="1" rIns="91425" wrap="square" tIns="91425">
+          <a:bodyPr spcFirstLastPara="1" wrap="square" lIns="91425" tIns="91425" rIns="91425" bIns="91425" anchor="t" anchorCtr="0">
             <a:normAutofit/>
           </a:bodyPr>
           <a:lstStyle/>
           <a:p>
-            <a:pPr indent="0" lvl="0" marL="0" rtl="0" algn="l">
+            <a:pPr marL="0" lvl="0" indent="0" algn="l" rtl="0">
               <a:spcBef>
                 <a:spcPts val="0"/>
               </a:spcBef>
@@ -10851,12 +10651,12 @@
 </p:sld>
 </file>
 
-<file path=ppt/slides/slide12.xml><?xml version="1.0" encoding="utf-8"?>
-<p:sld xmlns:a="http://schemas.openxmlformats.org/drawingml/2006/main" xmlns:r="http://schemas.openxmlformats.org/officeDocument/2006/relationships" xmlns:mc="http://schemas.openxmlformats.org/markup-compatibility/2006" xmlns:mv="urn:schemas-microsoft-com:mac:vml" xmlns:p="http://schemas.openxmlformats.org/presentationml/2006/main" xmlns:c="http://schemas.openxmlformats.org/drawingml/2006/chart" xmlns:dgm="http://schemas.openxmlformats.org/drawingml/2006/diagram" xmlns:o="urn:schemas-microsoft-com:office:office" xmlns:v="urn:schemas-microsoft-com:vml" xmlns:pvml="urn:schemas-microsoft-com:office:powerpoint" xmlns:com="http://schemas.openxmlformats.org/drawingml/2006/compatibility" xmlns:p14="http://schemas.microsoft.com/office/powerpoint/2010/main" xmlns:p15="http://schemas.microsoft.com/office/powerpoint/2012/main" xmlns:ahyp="http://schemas.microsoft.com/office/drawing/2018/hyperlinkcolor">
+<file path=ppt/slides/slide11.xml><?xml version="1.0" encoding="utf-8"?>
+<p:sld xmlns:a="http://schemas.openxmlformats.org/drawingml/2006/main" xmlns:r="http://schemas.openxmlformats.org/officeDocument/2006/relationships" xmlns:p="http://schemas.openxmlformats.org/presentationml/2006/main">
   <p:cSld>
     <p:spTree>
       <p:nvGrpSpPr>
-        <p:cNvPr id="203" name="Shape 203"/>
+        <p:cNvPr id="1" name="Shape 203"/>
         <p:cNvGrpSpPr/>
         <p:nvPr/>
       </p:nvGrpSpPr>
@@ -10871,7 +10671,9 @@
       <p:sp>
         <p:nvSpPr>
           <p:cNvPr id="204" name="Google Shape;204;p24"/>
-          <p:cNvSpPr txBox="1"/>
+          <p:cNvSpPr txBox="1">
+            <a:spLocks noGrp="1"/>
+          </p:cNvSpPr>
           <p:nvPr>
             <p:ph type="title"/>
           </p:nvPr>
@@ -10886,12 +10688,12 @@
           </a:prstGeom>
         </p:spPr>
         <p:txBody>
-          <a:bodyPr anchorCtr="0" anchor="t" bIns="91425" lIns="91425" spcFirstLastPara="1" rIns="91425" wrap="square" tIns="91425">
+          <a:bodyPr spcFirstLastPara="1" wrap="square" lIns="91425" tIns="91425" rIns="91425" bIns="91425" anchor="t" anchorCtr="0">
             <a:normAutofit/>
           </a:bodyPr>
           <a:lstStyle/>
           <a:p>
-            <a:pPr indent="0" lvl="0" marL="0" rtl="0" algn="l">
+            <a:pPr marL="0" lvl="0" indent="0" algn="l" rtl="0">
               <a:spcBef>
                 <a:spcPts val="0"/>
               </a:spcBef>
@@ -10972,12 +10774,12 @@
 </p:sld>
 </file>
 
-<file path=ppt/slides/slide13.xml><?xml version="1.0" encoding="utf-8"?>
-<p:sld xmlns:a="http://schemas.openxmlformats.org/drawingml/2006/main" xmlns:r="http://schemas.openxmlformats.org/officeDocument/2006/relationships" xmlns:mc="http://schemas.openxmlformats.org/markup-compatibility/2006" xmlns:mv="urn:schemas-microsoft-com:mac:vml" xmlns:p="http://schemas.openxmlformats.org/presentationml/2006/main" xmlns:c="http://schemas.openxmlformats.org/drawingml/2006/chart" xmlns:dgm="http://schemas.openxmlformats.org/drawingml/2006/diagram" xmlns:o="urn:schemas-microsoft-com:office:office" xmlns:v="urn:schemas-microsoft-com:vml" xmlns:pvml="urn:schemas-microsoft-com:office:powerpoint" xmlns:com="http://schemas.openxmlformats.org/drawingml/2006/compatibility" xmlns:p14="http://schemas.microsoft.com/office/powerpoint/2010/main" xmlns:p15="http://schemas.microsoft.com/office/powerpoint/2012/main" xmlns:ahyp="http://schemas.microsoft.com/office/drawing/2018/hyperlinkcolor">
+<file path=ppt/slides/slide12.xml><?xml version="1.0" encoding="utf-8"?>
+<p:sld xmlns:a="http://schemas.openxmlformats.org/drawingml/2006/main" xmlns:r="http://schemas.openxmlformats.org/officeDocument/2006/relationships" xmlns:p="http://schemas.openxmlformats.org/presentationml/2006/main">
   <p:cSld>
     <p:spTree>
       <p:nvGrpSpPr>
-        <p:cNvPr id="210" name="Shape 210"/>
+        <p:cNvPr id="1" name="Shape 210"/>
         <p:cNvGrpSpPr/>
         <p:nvPr/>
       </p:nvGrpSpPr>
@@ -10992,7 +10794,9 @@
       <p:sp>
         <p:nvSpPr>
           <p:cNvPr id="211" name="Google Shape;211;p25"/>
-          <p:cNvSpPr txBox="1"/>
+          <p:cNvSpPr txBox="1">
+            <a:spLocks noGrp="1"/>
+          </p:cNvSpPr>
           <p:nvPr>
             <p:ph type="title"/>
           </p:nvPr>
@@ -11007,12 +10811,12 @@
           </a:prstGeom>
         </p:spPr>
         <p:txBody>
-          <a:bodyPr anchorCtr="0" anchor="t" bIns="91425" lIns="91425" spcFirstLastPara="1" rIns="91425" wrap="square" tIns="91425">
+          <a:bodyPr spcFirstLastPara="1" wrap="square" lIns="91425" tIns="91425" rIns="91425" bIns="91425" anchor="t" anchorCtr="0">
             <a:normAutofit/>
           </a:bodyPr>
           <a:lstStyle/>
           <a:p>
-            <a:pPr indent="0" lvl="0" marL="0" rtl="0" algn="l">
+            <a:pPr marL="0" lvl="0" indent="0" algn="l" rtl="0">
               <a:spcBef>
                 <a:spcPts val="0"/>
               </a:spcBef>
@@ -11093,12 +10897,12 @@
 </p:sld>
 </file>
 
-<file path=ppt/slides/slide14.xml><?xml version="1.0" encoding="utf-8"?>
-<p:sld xmlns:a="http://schemas.openxmlformats.org/drawingml/2006/main" xmlns:r="http://schemas.openxmlformats.org/officeDocument/2006/relationships" xmlns:mc="http://schemas.openxmlformats.org/markup-compatibility/2006" xmlns:mv="urn:schemas-microsoft-com:mac:vml" xmlns:p="http://schemas.openxmlformats.org/presentationml/2006/main" xmlns:c="http://schemas.openxmlformats.org/drawingml/2006/chart" xmlns:dgm="http://schemas.openxmlformats.org/drawingml/2006/diagram" xmlns:o="urn:schemas-microsoft-com:office:office" xmlns:v="urn:schemas-microsoft-com:vml" xmlns:pvml="urn:schemas-microsoft-com:office:powerpoint" xmlns:com="http://schemas.openxmlformats.org/drawingml/2006/compatibility" xmlns:p14="http://schemas.microsoft.com/office/powerpoint/2010/main" xmlns:p15="http://schemas.microsoft.com/office/powerpoint/2012/main" xmlns:ahyp="http://schemas.microsoft.com/office/drawing/2018/hyperlinkcolor">
+<file path=ppt/slides/slide13.xml><?xml version="1.0" encoding="utf-8"?>
+<p:sld xmlns:a="http://schemas.openxmlformats.org/drawingml/2006/main" xmlns:r="http://schemas.openxmlformats.org/officeDocument/2006/relationships" xmlns:p="http://schemas.openxmlformats.org/presentationml/2006/main">
   <p:cSld>
     <p:spTree>
       <p:nvGrpSpPr>
-        <p:cNvPr id="217" name="Shape 217"/>
+        <p:cNvPr id="1" name="Shape 217"/>
         <p:cNvGrpSpPr/>
         <p:nvPr/>
       </p:nvGrpSpPr>
@@ -11113,7 +10917,9 @@
       <p:sp>
         <p:nvSpPr>
           <p:cNvPr id="218" name="Google Shape;218;p26"/>
-          <p:cNvSpPr txBox="1"/>
+          <p:cNvSpPr txBox="1">
+            <a:spLocks noGrp="1"/>
+          </p:cNvSpPr>
           <p:nvPr>
             <p:ph type="title"/>
           </p:nvPr>
@@ -11128,12 +10934,12 @@
           </a:prstGeom>
         </p:spPr>
         <p:txBody>
-          <a:bodyPr anchorCtr="0" anchor="t" bIns="91425" lIns="91425" spcFirstLastPara="1" rIns="91425" wrap="square" tIns="91425">
+          <a:bodyPr spcFirstLastPara="1" wrap="square" lIns="91425" tIns="91425" rIns="91425" bIns="91425" anchor="t" anchorCtr="0">
             <a:normAutofit/>
           </a:bodyPr>
           <a:lstStyle/>
           <a:p>
-            <a:pPr indent="0" lvl="0" marL="0" rtl="0" algn="l">
+            <a:pPr marL="0" lvl="0" indent="0" algn="l" rtl="0">
               <a:spcBef>
                 <a:spcPts val="0"/>
               </a:spcBef>
@@ -11153,9 +10959,11 @@
       <p:sp>
         <p:nvSpPr>
           <p:cNvPr id="219" name="Google Shape;219;p26"/>
-          <p:cNvSpPr txBox="1"/>
+          <p:cNvSpPr txBox="1">
+            <a:spLocks noGrp="1"/>
+          </p:cNvSpPr>
           <p:nvPr>
-            <p:ph idx="1" type="body"/>
+            <p:ph type="body" idx="1"/>
           </p:nvPr>
         </p:nvSpPr>
         <p:spPr>
@@ -11168,12 +10976,12 @@
           </a:prstGeom>
         </p:spPr>
         <p:txBody>
-          <a:bodyPr anchorCtr="0" anchor="t" bIns="91425" lIns="91425" spcFirstLastPara="1" rIns="91425" wrap="square" tIns="91425">
+          <a:bodyPr spcFirstLastPara="1" wrap="square" lIns="91425" tIns="91425" rIns="91425" bIns="91425" anchor="t" anchorCtr="0">
             <a:normAutofit/>
           </a:bodyPr>
           <a:lstStyle/>
           <a:p>
-            <a:pPr indent="-311150" lvl="0" marL="457200" rtl="0" algn="l">
+            <a:pPr marL="457200" lvl="0" indent="-311150" algn="l" rtl="0">
               <a:spcBef>
                 <a:spcPts val="0"/>
               </a:spcBef>
@@ -11190,7 +10998,7 @@
             <a:endParaRPr/>
           </a:p>
           <a:p>
-            <a:pPr indent="-311150" lvl="0" marL="457200" rtl="0" algn="l">
+            <a:pPr marL="457200" lvl="0" indent="-311150" algn="l" rtl="0">
               <a:spcBef>
                 <a:spcPts val="0"/>
               </a:spcBef>
@@ -11207,7 +11015,7 @@
             <a:endParaRPr/>
           </a:p>
           <a:p>
-            <a:pPr indent="-311150" lvl="0" marL="457200" rtl="0" algn="l">
+            <a:pPr marL="457200" lvl="0" indent="-311150" algn="l" rtl="0">
               <a:spcBef>
                 <a:spcPts val="0"/>
               </a:spcBef>
@@ -11227,7 +11035,7 @@
       </p:sp>
       <p:pic>
         <p:nvPicPr>
-          <p:cNvPr descr="building effective machine learning models" id="220" name="Google Shape;220;p26"/>
+          <p:cNvPr id="220" name="Google Shape;220;p26" descr="building effective machine learning models"/>
           <p:cNvPicPr preferRelativeResize="0"/>
           <p:nvPr/>
         </p:nvPicPr>
@@ -11261,12 +11069,12 @@
 </p:sld>
 </file>
 
-<file path=ppt/slides/slide15.xml><?xml version="1.0" encoding="utf-8"?>
-<p:sld xmlns:a="http://schemas.openxmlformats.org/drawingml/2006/main" xmlns:r="http://schemas.openxmlformats.org/officeDocument/2006/relationships" xmlns:mc="http://schemas.openxmlformats.org/markup-compatibility/2006" xmlns:mv="urn:schemas-microsoft-com:mac:vml" xmlns:p="http://schemas.openxmlformats.org/presentationml/2006/main" xmlns:c="http://schemas.openxmlformats.org/drawingml/2006/chart" xmlns:dgm="http://schemas.openxmlformats.org/drawingml/2006/diagram" xmlns:o="urn:schemas-microsoft-com:office:office" xmlns:v="urn:schemas-microsoft-com:vml" xmlns:pvml="urn:schemas-microsoft-com:office:powerpoint" xmlns:com="http://schemas.openxmlformats.org/drawingml/2006/compatibility" xmlns:p14="http://schemas.microsoft.com/office/powerpoint/2010/main" xmlns:p15="http://schemas.microsoft.com/office/powerpoint/2012/main" xmlns:ahyp="http://schemas.microsoft.com/office/drawing/2018/hyperlinkcolor">
+<file path=ppt/slides/slide14.xml><?xml version="1.0" encoding="utf-8"?>
+<p:sld xmlns:a="http://schemas.openxmlformats.org/drawingml/2006/main" xmlns:r="http://schemas.openxmlformats.org/officeDocument/2006/relationships" xmlns:p="http://schemas.openxmlformats.org/presentationml/2006/main">
   <p:cSld>
     <p:spTree>
       <p:nvGrpSpPr>
-        <p:cNvPr id="224" name="Shape 224"/>
+        <p:cNvPr id="1" name="Shape 224"/>
         <p:cNvGrpSpPr/>
         <p:nvPr/>
       </p:nvGrpSpPr>
@@ -11281,7 +11089,9 @@
       <p:sp>
         <p:nvSpPr>
           <p:cNvPr id="225" name="Google Shape;225;p27"/>
-          <p:cNvSpPr txBox="1"/>
+          <p:cNvSpPr txBox="1">
+            <a:spLocks noGrp="1"/>
+          </p:cNvSpPr>
           <p:nvPr>
             <p:ph type="title"/>
           </p:nvPr>
@@ -11296,12 +11106,12 @@
           </a:prstGeom>
         </p:spPr>
         <p:txBody>
-          <a:bodyPr anchorCtr="0" anchor="t" bIns="91425" lIns="91425" spcFirstLastPara="1" rIns="91425" wrap="square" tIns="91425">
+          <a:bodyPr spcFirstLastPara="1" wrap="square" lIns="91425" tIns="91425" rIns="91425" bIns="91425" anchor="t" anchorCtr="0">
             <a:normAutofit/>
           </a:bodyPr>
           <a:lstStyle/>
           <a:p>
-            <a:pPr indent="0" lvl="0" marL="0" rtl="0" algn="l">
+            <a:pPr marL="0" lvl="0" indent="0" algn="l" rtl="0">
               <a:spcBef>
                 <a:spcPts val="0"/>
               </a:spcBef>
@@ -11494,12 +11304,12 @@
 </p:sld>
 </file>
 
-<file path=ppt/slides/slide16.xml><?xml version="1.0" encoding="utf-8"?>
-<p:sld xmlns:a="http://schemas.openxmlformats.org/drawingml/2006/main" xmlns:r="http://schemas.openxmlformats.org/officeDocument/2006/relationships" xmlns:mc="http://schemas.openxmlformats.org/markup-compatibility/2006" xmlns:mv="urn:schemas-microsoft-com:mac:vml" xmlns:p="http://schemas.openxmlformats.org/presentationml/2006/main" xmlns:c="http://schemas.openxmlformats.org/drawingml/2006/chart" xmlns:dgm="http://schemas.openxmlformats.org/drawingml/2006/diagram" xmlns:o="urn:schemas-microsoft-com:office:office" xmlns:v="urn:schemas-microsoft-com:vml" xmlns:pvml="urn:schemas-microsoft-com:office:powerpoint" xmlns:com="http://schemas.openxmlformats.org/drawingml/2006/compatibility" xmlns:p14="http://schemas.microsoft.com/office/powerpoint/2010/main" xmlns:p15="http://schemas.microsoft.com/office/powerpoint/2012/main" xmlns:ahyp="http://schemas.microsoft.com/office/drawing/2018/hyperlinkcolor">
+<file path=ppt/slides/slide15.xml><?xml version="1.0" encoding="utf-8"?>
+<p:sld xmlns:a="http://schemas.openxmlformats.org/drawingml/2006/main" xmlns:r="http://schemas.openxmlformats.org/officeDocument/2006/relationships" xmlns:p="http://schemas.openxmlformats.org/presentationml/2006/main">
   <p:cSld>
     <p:spTree>
       <p:nvGrpSpPr>
-        <p:cNvPr id="235" name="Shape 235"/>
+        <p:cNvPr id="1" name="Shape 235"/>
         <p:cNvGrpSpPr/>
         <p:nvPr/>
       </p:nvGrpSpPr>
@@ -11514,7 +11324,9 @@
       <p:sp>
         <p:nvSpPr>
           <p:cNvPr id="236" name="Google Shape;236;p28"/>
-          <p:cNvSpPr txBox="1"/>
+          <p:cNvSpPr txBox="1">
+            <a:spLocks noGrp="1"/>
+          </p:cNvSpPr>
           <p:nvPr>
             <p:ph type="title"/>
           </p:nvPr>
@@ -11529,12 +11341,12 @@
           </a:prstGeom>
         </p:spPr>
         <p:txBody>
-          <a:bodyPr anchorCtr="0" anchor="t" bIns="91425" lIns="91425" spcFirstLastPara="1" rIns="91425" wrap="square" tIns="91425">
+          <a:bodyPr spcFirstLastPara="1" wrap="square" lIns="91425" tIns="91425" rIns="91425" bIns="91425" anchor="t" anchorCtr="0">
             <a:normAutofit/>
           </a:bodyPr>
           <a:lstStyle/>
           <a:p>
-            <a:pPr indent="0" lvl="0" marL="0" rtl="0" algn="l">
+            <a:pPr marL="0" lvl="0" indent="0" algn="l" rtl="0">
               <a:spcBef>
                 <a:spcPts val="0"/>
               </a:spcBef>
@@ -11554,9 +11366,11 @@
       <p:sp>
         <p:nvSpPr>
           <p:cNvPr id="237" name="Google Shape;237;p28"/>
-          <p:cNvSpPr txBox="1"/>
+          <p:cNvSpPr txBox="1">
+            <a:spLocks noGrp="1"/>
+          </p:cNvSpPr>
           <p:nvPr>
-            <p:ph idx="1" type="body"/>
+            <p:ph type="body" idx="1"/>
           </p:nvPr>
         </p:nvSpPr>
         <p:spPr>
@@ -11569,12 +11383,12 @@
           </a:prstGeom>
         </p:spPr>
         <p:txBody>
-          <a:bodyPr anchorCtr="0" anchor="t" bIns="91425" lIns="91425" spcFirstLastPara="1" rIns="91425" wrap="square" tIns="91425">
+          <a:bodyPr spcFirstLastPara="1" wrap="square" lIns="91425" tIns="91425" rIns="91425" bIns="91425" anchor="t" anchorCtr="0">
             <a:normAutofit/>
           </a:bodyPr>
           <a:lstStyle/>
           <a:p>
-            <a:pPr indent="-311150" lvl="0" marL="457200" rtl="0" algn="l">
+            <a:pPr marL="457200" lvl="0" indent="-311150" algn="l" rtl="0">
               <a:spcBef>
                 <a:spcPts val="0"/>
               </a:spcBef>
@@ -11591,7 +11405,7 @@
             <a:endParaRPr/>
           </a:p>
           <a:p>
-            <a:pPr indent="-311150" lvl="0" marL="457200" rtl="0" algn="l">
+            <a:pPr marL="457200" lvl="0" indent="-311150" algn="l" rtl="0">
               <a:spcBef>
                 <a:spcPts val="0"/>
               </a:spcBef>
@@ -11673,12 +11487,12 @@
 </p:sld>
 </file>
 
-<file path=ppt/slides/slide17.xml><?xml version="1.0" encoding="utf-8"?>
-<p:sld xmlns:a="http://schemas.openxmlformats.org/drawingml/2006/main" xmlns:r="http://schemas.openxmlformats.org/officeDocument/2006/relationships" xmlns:mc="http://schemas.openxmlformats.org/markup-compatibility/2006" xmlns:mv="urn:schemas-microsoft-com:mac:vml" xmlns:p="http://schemas.openxmlformats.org/presentationml/2006/main" xmlns:c="http://schemas.openxmlformats.org/drawingml/2006/chart" xmlns:dgm="http://schemas.openxmlformats.org/drawingml/2006/diagram" xmlns:o="urn:schemas-microsoft-com:office:office" xmlns:v="urn:schemas-microsoft-com:vml" xmlns:pvml="urn:schemas-microsoft-com:office:powerpoint" xmlns:com="http://schemas.openxmlformats.org/drawingml/2006/compatibility" xmlns:p14="http://schemas.microsoft.com/office/powerpoint/2010/main" xmlns:p15="http://schemas.microsoft.com/office/powerpoint/2012/main" xmlns:ahyp="http://schemas.microsoft.com/office/drawing/2018/hyperlinkcolor">
+<file path=ppt/slides/slide16.xml><?xml version="1.0" encoding="utf-8"?>
+<p:sld xmlns:a="http://schemas.openxmlformats.org/drawingml/2006/main" xmlns:r="http://schemas.openxmlformats.org/officeDocument/2006/relationships" xmlns:p="http://schemas.openxmlformats.org/presentationml/2006/main">
   <p:cSld>
     <p:spTree>
       <p:nvGrpSpPr>
-        <p:cNvPr id="243" name="Shape 243"/>
+        <p:cNvPr id="1" name="Shape 243"/>
         <p:cNvGrpSpPr/>
         <p:nvPr/>
       </p:nvGrpSpPr>
@@ -11693,7 +11507,9 @@
       <p:sp>
         <p:nvSpPr>
           <p:cNvPr id="244" name="Google Shape;244;p29"/>
-          <p:cNvSpPr txBox="1"/>
+          <p:cNvSpPr txBox="1">
+            <a:spLocks noGrp="1"/>
+          </p:cNvSpPr>
           <p:nvPr>
             <p:ph type="title"/>
           </p:nvPr>
@@ -11708,12 +11524,12 @@
           </a:prstGeom>
         </p:spPr>
         <p:txBody>
-          <a:bodyPr anchorCtr="0" anchor="t" bIns="91425" lIns="91425" spcFirstLastPara="1" rIns="91425" wrap="square" tIns="91425">
+          <a:bodyPr spcFirstLastPara="1" wrap="square" lIns="91425" tIns="91425" rIns="91425" bIns="91425" anchor="t" anchorCtr="0">
             <a:normAutofit/>
           </a:bodyPr>
           <a:lstStyle/>
           <a:p>
-            <a:pPr indent="0" lvl="0" marL="0" rtl="0" algn="l">
+            <a:pPr marL="0" lvl="0" indent="0" algn="l" rtl="0">
               <a:spcBef>
                 <a:spcPts val="0"/>
               </a:spcBef>
@@ -11733,9 +11549,11 @@
       <p:sp>
         <p:nvSpPr>
           <p:cNvPr id="245" name="Google Shape;245;p29"/>
-          <p:cNvSpPr txBox="1"/>
+          <p:cNvSpPr txBox="1">
+            <a:spLocks noGrp="1"/>
+          </p:cNvSpPr>
           <p:nvPr>
-            <p:ph idx="1" type="body"/>
+            <p:ph type="body" idx="1"/>
           </p:nvPr>
         </p:nvSpPr>
         <p:spPr>
@@ -11748,12 +11566,12 @@
           </a:prstGeom>
         </p:spPr>
         <p:txBody>
-          <a:bodyPr anchorCtr="0" anchor="t" bIns="91425" lIns="91425" spcFirstLastPara="1" rIns="91425" wrap="square" tIns="91425">
+          <a:bodyPr spcFirstLastPara="1" wrap="square" lIns="91425" tIns="91425" rIns="91425" bIns="91425" anchor="t" anchorCtr="0">
             <a:normAutofit lnSpcReduction="20000"/>
           </a:bodyPr>
           <a:lstStyle/>
           <a:p>
-            <a:pPr indent="-311150" lvl="0" marL="457200" rtl="0" algn="l">
+            <a:pPr marL="457200" lvl="0" indent="-311150" algn="l" rtl="0">
               <a:spcBef>
                 <a:spcPts val="0"/>
               </a:spcBef>
@@ -11765,16 +11583,12 @@
             </a:pPr>
             <a:r>
               <a:rPr lang="en"/>
-              <a:t>Naive Bayes performs extremely well in terms of recall and has the best F2 scores. It initially did so because of a </a:t>
-            </a:r>
-            <a:r>
-              <a:rPr lang="en"/>
-              <a:t>disproportionately high predicted default rate, but this was improved using hybrid approach and larger smoothing parameter</a:t>
+              <a:t>Naive Bayes performs extremely well in terms of recall and has the best F2 scores. It initially did so because of a disproportionately high predicted default rate, but this was improved using hybrid approach and larger smoothing parameter</a:t>
             </a:r>
             <a:endParaRPr/>
           </a:p>
           <a:p>
-            <a:pPr indent="-311150" lvl="0" marL="457200" rtl="0" algn="l">
+            <a:pPr marL="457200" lvl="0" indent="-311150" algn="l" rtl="0">
               <a:spcBef>
                 <a:spcPts val="0"/>
               </a:spcBef>
@@ -11791,7 +11605,7 @@
             <a:endParaRPr/>
           </a:p>
           <a:p>
-            <a:pPr indent="-311150" lvl="0" marL="457200" rtl="0" algn="l">
+            <a:pPr marL="457200" lvl="0" indent="-311150" algn="l" rtl="0">
               <a:spcBef>
                 <a:spcPts val="0"/>
               </a:spcBef>
@@ -11808,7 +11622,7 @@
             <a:endParaRPr/>
           </a:p>
           <a:p>
-            <a:pPr indent="-311150" lvl="0" marL="457200" rtl="0" algn="l">
+            <a:pPr marL="457200" lvl="0" indent="-311150" algn="l" rtl="0">
               <a:spcBef>
                 <a:spcPts val="0"/>
               </a:spcBef>
@@ -11825,7 +11639,7 @@
             <a:endParaRPr/>
           </a:p>
           <a:p>
-            <a:pPr indent="-298450" lvl="1" marL="914400" rtl="0" algn="l">
+            <a:pPr marL="914400" lvl="1" indent="-298450" algn="l" rtl="0">
               <a:spcBef>
                 <a:spcPts val="0"/>
               </a:spcBef>
@@ -11842,7 +11656,7 @@
             <a:endParaRPr/>
           </a:p>
           <a:p>
-            <a:pPr indent="-298450" lvl="1" marL="914400" rtl="0" algn="l">
+            <a:pPr marL="914400" lvl="1" indent="-298450" algn="l" rtl="0">
               <a:spcBef>
                 <a:spcPts val="0"/>
               </a:spcBef>
@@ -11859,7 +11673,7 @@
             <a:endParaRPr/>
           </a:p>
           <a:p>
-            <a:pPr indent="-298450" lvl="1" marL="914400" rtl="0" algn="l">
+            <a:pPr marL="914400" lvl="1" indent="-298450" algn="l" rtl="0">
               <a:spcBef>
                 <a:spcPts val="0"/>
               </a:spcBef>
@@ -11876,7 +11690,7 @@
             <a:endParaRPr/>
           </a:p>
           <a:p>
-            <a:pPr indent="-298450" lvl="1" marL="914400" rtl="0" algn="l">
+            <a:pPr marL="914400" lvl="1" indent="-298450" algn="l" rtl="0">
               <a:spcBef>
                 <a:spcPts val="0"/>
               </a:spcBef>
@@ -11903,11 +11717,11 @@
 </file>
 
 <file path=ppt/slides/slide2.xml><?xml version="1.0" encoding="utf-8"?>
-<p:sld xmlns:a="http://schemas.openxmlformats.org/drawingml/2006/main" xmlns:r="http://schemas.openxmlformats.org/officeDocument/2006/relationships" xmlns:mc="http://schemas.openxmlformats.org/markup-compatibility/2006" xmlns:mv="urn:schemas-microsoft-com:mac:vml" xmlns:p="http://schemas.openxmlformats.org/presentationml/2006/main" xmlns:c="http://schemas.openxmlformats.org/drawingml/2006/chart" xmlns:dgm="http://schemas.openxmlformats.org/drawingml/2006/diagram" xmlns:o="urn:schemas-microsoft-com:office:office" xmlns:v="urn:schemas-microsoft-com:vml" xmlns:pvml="urn:schemas-microsoft-com:office:powerpoint" xmlns:com="http://schemas.openxmlformats.org/drawingml/2006/compatibility" xmlns:p14="http://schemas.microsoft.com/office/powerpoint/2010/main" xmlns:p15="http://schemas.microsoft.com/office/powerpoint/2012/main" xmlns:ahyp="http://schemas.microsoft.com/office/drawing/2018/hyperlinkcolor">
+<p:sld xmlns:a="http://schemas.openxmlformats.org/drawingml/2006/main" xmlns:r="http://schemas.openxmlformats.org/officeDocument/2006/relationships" xmlns:p="http://schemas.openxmlformats.org/presentationml/2006/main">
   <p:cSld>
     <p:spTree>
       <p:nvGrpSpPr>
-        <p:cNvPr id="133" name="Shape 133"/>
+        <p:cNvPr id="1" name="Shape 133"/>
         <p:cNvGrpSpPr/>
         <p:nvPr/>
       </p:nvGrpSpPr>
@@ -11922,7 +11736,9 @@
       <p:sp>
         <p:nvSpPr>
           <p:cNvPr id="134" name="Google Shape;134;p14"/>
-          <p:cNvSpPr txBox="1"/>
+          <p:cNvSpPr txBox="1">
+            <a:spLocks noGrp="1"/>
+          </p:cNvSpPr>
           <p:nvPr>
             <p:ph type="title"/>
           </p:nvPr>
@@ -11937,12 +11753,12 @@
           </a:prstGeom>
         </p:spPr>
         <p:txBody>
-          <a:bodyPr anchorCtr="0" anchor="t" bIns="91425" lIns="91425" spcFirstLastPara="1" rIns="91425" wrap="square" tIns="91425">
+          <a:bodyPr spcFirstLastPara="1" wrap="square" lIns="91425" tIns="91425" rIns="91425" bIns="91425" anchor="t" anchorCtr="0">
             <a:normAutofit/>
           </a:bodyPr>
           <a:lstStyle/>
           <a:p>
-            <a:pPr indent="0" lvl="0" marL="0" rtl="0" algn="l">
+            <a:pPr marL="0" lvl="0" indent="0" algn="l" rtl="0">
               <a:spcBef>
                 <a:spcPts val="0"/>
               </a:spcBef>
@@ -11962,9 +11778,11 @@
       <p:sp>
         <p:nvSpPr>
           <p:cNvPr id="135" name="Google Shape;135;p14"/>
-          <p:cNvSpPr txBox="1"/>
+          <p:cNvSpPr txBox="1">
+            <a:spLocks noGrp="1"/>
+          </p:cNvSpPr>
           <p:nvPr>
-            <p:ph idx="1" type="body"/>
+            <p:ph type="body" idx="1"/>
           </p:nvPr>
         </p:nvSpPr>
         <p:spPr>
@@ -11977,12 +11795,12 @@
           </a:prstGeom>
         </p:spPr>
         <p:txBody>
-          <a:bodyPr anchorCtr="0" anchor="t" bIns="91425" lIns="91425" spcFirstLastPara="1" rIns="91425" wrap="square" tIns="91425">
+          <a:bodyPr spcFirstLastPara="1" wrap="square" lIns="91425" tIns="91425" rIns="91425" bIns="91425" anchor="t" anchorCtr="0">
             <a:normAutofit/>
           </a:bodyPr>
           <a:lstStyle/>
           <a:p>
-            <a:pPr indent="0" lvl="0" marL="0" rtl="0" algn="l">
+            <a:pPr marL="0" lvl="0" indent="0" algn="l" rtl="0">
               <a:spcBef>
                 <a:spcPts val="0"/>
               </a:spcBef>
@@ -12014,7 +11832,7 @@
             </a:endParaRPr>
           </a:p>
           <a:p>
-            <a:pPr indent="0" lvl="0" marL="0" rtl="0" algn="l">
+            <a:pPr marL="0" lvl="0" indent="0" algn="l" rtl="0">
               <a:spcBef>
                 <a:spcPts val="0"/>
               </a:spcBef>
@@ -12023,9 +11841,6 @@
               </a:spcAft>
               <a:buNone/>
             </a:pPr>
-            <a:r>
-              <a:t/>
-            </a:r>
             <a:endParaRPr sz="1100">
               <a:solidFill>
                 <a:srgbClr val="000000"/>
@@ -12037,7 +11852,7 @@
             </a:endParaRPr>
           </a:p>
           <a:p>
-            <a:pPr indent="0" lvl="0" marL="0" rtl="0" algn="l">
+            <a:pPr marL="0" lvl="0" indent="0" algn="l" rtl="0">
               <a:spcBef>
                 <a:spcPts val="0"/>
               </a:spcBef>
@@ -12073,7 +11888,7 @@
                 <a:hlinkClick r:id="rId3">
                   <a:extLst>
                     <a:ext uri="{A12FA001-AC4F-418D-AE19-62706E023703}">
-                      <ahyp:hlinkClr val="tx"/>
+                      <ahyp:hlinkClr xmlns:ahyp="http://schemas.microsoft.com/office/drawing/2018/hyperlinkcolor" val="tx"/>
                     </a:ext>
                   </a:extLst>
                 </a:hlinkClick>
@@ -12103,7 +11918,7 @@
             </a:endParaRPr>
           </a:p>
           <a:p>
-            <a:pPr indent="0" lvl="0" marL="0" rtl="0" algn="l">
+            <a:pPr marL="0" lvl="0" indent="0" algn="l" rtl="0">
               <a:spcBef>
                 <a:spcPts val="0"/>
               </a:spcBef>
@@ -12112,9 +11927,6 @@
               </a:spcAft>
               <a:buNone/>
             </a:pPr>
-            <a:r>
-              <a:t/>
-            </a:r>
             <a:endParaRPr sz="1100">
               <a:solidFill>
                 <a:srgbClr val="000000"/>
@@ -12126,7 +11938,7 @@
             </a:endParaRPr>
           </a:p>
           <a:p>
-            <a:pPr indent="0" lvl="0" marL="0" rtl="0" algn="l">
+            <a:pPr marL="0" lvl="0" indent="0" algn="l" rtl="0">
               <a:spcBef>
                 <a:spcPts val="0"/>
               </a:spcBef>
@@ -12158,7 +11970,7 @@
             </a:endParaRPr>
           </a:p>
           <a:p>
-            <a:pPr indent="0" lvl="0" marL="0" rtl="0" algn="l">
+            <a:pPr marL="0" lvl="0" indent="0" algn="l" rtl="0">
               <a:spcBef>
                 <a:spcPts val="0"/>
               </a:spcBef>
@@ -12167,9 +11979,6 @@
               </a:spcAft>
               <a:buNone/>
             </a:pPr>
-            <a:r>
-              <a:t/>
-            </a:r>
             <a:endParaRPr/>
           </a:p>
         </p:txBody>
@@ -12183,299 +11992,11 @@
 </file>
 
 <file path=ppt/slides/slide3.xml><?xml version="1.0" encoding="utf-8"?>
-<p:sld xmlns:a="http://schemas.openxmlformats.org/drawingml/2006/main" xmlns:r="http://schemas.openxmlformats.org/officeDocument/2006/relationships" xmlns:mc="http://schemas.openxmlformats.org/markup-compatibility/2006" xmlns:mv="urn:schemas-microsoft-com:mac:vml" xmlns:p="http://schemas.openxmlformats.org/presentationml/2006/main" xmlns:c="http://schemas.openxmlformats.org/drawingml/2006/chart" xmlns:dgm="http://schemas.openxmlformats.org/drawingml/2006/diagram" xmlns:o="urn:schemas-microsoft-com:office:office" xmlns:v="urn:schemas-microsoft-com:vml" xmlns:pvml="urn:schemas-microsoft-com:office:powerpoint" xmlns:com="http://schemas.openxmlformats.org/drawingml/2006/compatibility" xmlns:p14="http://schemas.microsoft.com/office/powerpoint/2010/main" xmlns:p15="http://schemas.microsoft.com/office/powerpoint/2012/main" xmlns:ahyp="http://schemas.microsoft.com/office/drawing/2018/hyperlinkcolor">
+<p:sld xmlns:a="http://schemas.openxmlformats.org/drawingml/2006/main" xmlns:r="http://schemas.openxmlformats.org/officeDocument/2006/relationships" xmlns:p="http://schemas.openxmlformats.org/presentationml/2006/main">
   <p:cSld>
     <p:spTree>
       <p:nvGrpSpPr>
-        <p:cNvPr id="139" name="Shape 139"/>
-        <p:cNvGrpSpPr/>
-        <p:nvPr/>
-      </p:nvGrpSpPr>
-      <p:grpSpPr>
-        <a:xfrm>
-          <a:off x="0" y="0"/>
-          <a:ext cx="0" cy="0"/>
-          <a:chOff x="0" y="0"/>
-          <a:chExt cx="0" cy="0"/>
-        </a:xfrm>
-      </p:grpSpPr>
-      <p:sp>
-        <p:nvSpPr>
-          <p:cNvPr id="140" name="Google Shape;140;p15"/>
-          <p:cNvSpPr txBox="1"/>
-          <p:nvPr>
-            <p:ph type="title"/>
-          </p:nvPr>
-        </p:nvSpPr>
-        <p:spPr>
-          <a:xfrm>
-            <a:off x="819150" y="845600"/>
-            <a:ext cx="7505700" cy="954600"/>
-          </a:xfrm>
-          <a:prstGeom prst="rect">
-            <a:avLst/>
-          </a:prstGeom>
-        </p:spPr>
-        <p:txBody>
-          <a:bodyPr anchorCtr="0" anchor="t" bIns="91425" lIns="91425" spcFirstLastPara="1" rIns="91425" wrap="square" tIns="91425">
-            <a:normAutofit/>
-          </a:bodyPr>
-          <a:lstStyle/>
-          <a:p>
-            <a:pPr indent="0" lvl="0" marL="0" rtl="0" algn="l">
-              <a:spcBef>
-                <a:spcPts val="0"/>
-              </a:spcBef>
-              <a:spcAft>
-                <a:spcPts val="0"/>
-              </a:spcAft>
-              <a:buNone/>
-            </a:pPr>
-            <a:r>
-              <a:rPr lang="en"/>
-              <a:t>Understanding</a:t>
-            </a:r>
-            <a:r>
-              <a:rPr lang="en"/>
-              <a:t> Credit Card Fraud</a:t>
-            </a:r>
-            <a:endParaRPr/>
-          </a:p>
-        </p:txBody>
-      </p:sp>
-      <p:sp>
-        <p:nvSpPr>
-          <p:cNvPr id="141" name="Google Shape;141;p15"/>
-          <p:cNvSpPr txBox="1"/>
-          <p:nvPr>
-            <p:ph idx="1" type="body"/>
-          </p:nvPr>
-        </p:nvSpPr>
-        <p:spPr>
-          <a:xfrm>
-            <a:off x="819150" y="1990725"/>
-            <a:ext cx="7505700" cy="2448000"/>
-          </a:xfrm>
-          <a:prstGeom prst="rect">
-            <a:avLst/>
-          </a:prstGeom>
-        </p:spPr>
-        <p:txBody>
-          <a:bodyPr anchorCtr="0" anchor="t" bIns="91425" lIns="91425" spcFirstLastPara="1" rIns="91425" wrap="square" tIns="91425">
-            <a:normAutofit/>
-          </a:bodyPr>
-          <a:lstStyle/>
-          <a:p>
-            <a:pPr indent="0" lvl="0" marL="0" rtl="0" algn="l">
-              <a:spcBef>
-                <a:spcPts val="0"/>
-              </a:spcBef>
-              <a:spcAft>
-                <a:spcPts val="0"/>
-              </a:spcAft>
-              <a:buNone/>
-            </a:pPr>
-            <a:r>
-              <a:rPr lang="en" sz="1200">
-                <a:solidFill>
-                  <a:srgbClr val="000000"/>
-                </a:solidFill>
-                <a:latin typeface="Arial"/>
-                <a:ea typeface="Arial"/>
-                <a:cs typeface="Arial"/>
-                <a:sym typeface="Arial"/>
-              </a:rPr>
-              <a:t>Credit card fraud is any dishonest act and behaviour to obtain information without the proper authorization from the account holder for financial gain. Among different ways of frauds, Skimming is the most common one, which is the way of duplicating of information located on the magnetic strip of the card. Apart from this, the other ways are:</a:t>
-            </a:r>
-            <a:endParaRPr sz="1200">
-              <a:solidFill>
-                <a:srgbClr val="000000"/>
-              </a:solidFill>
-              <a:latin typeface="Arial"/>
-              <a:ea typeface="Arial"/>
-              <a:cs typeface="Arial"/>
-              <a:sym typeface="Arial"/>
-            </a:endParaRPr>
-          </a:p>
-          <a:p>
-            <a:pPr indent="-298450" lvl="0" marL="457200" rtl="0" algn="l">
-              <a:spcBef>
-                <a:spcPts val="0"/>
-              </a:spcBef>
-              <a:spcAft>
-                <a:spcPts val="0"/>
-              </a:spcAft>
-              <a:buClr>
-                <a:srgbClr val="000000"/>
-              </a:buClr>
-              <a:buSzPts val="1100"/>
-              <a:buFont typeface="Arial"/>
-              <a:buChar char="●"/>
-            </a:pPr>
-            <a:r>
-              <a:rPr lang="en" sz="1100">
-                <a:solidFill>
-                  <a:srgbClr val="000000"/>
-                </a:solidFill>
-                <a:latin typeface="Arial"/>
-                <a:ea typeface="Arial"/>
-                <a:cs typeface="Arial"/>
-                <a:sym typeface="Arial"/>
-              </a:rPr>
-              <a:t>Manipulation/alteration of genuine cards</a:t>
-            </a:r>
-            <a:endParaRPr sz="1100">
-              <a:solidFill>
-                <a:srgbClr val="000000"/>
-              </a:solidFill>
-              <a:latin typeface="Arial"/>
-              <a:ea typeface="Arial"/>
-              <a:cs typeface="Arial"/>
-              <a:sym typeface="Arial"/>
-            </a:endParaRPr>
-          </a:p>
-          <a:p>
-            <a:pPr indent="-298450" lvl="0" marL="457200" rtl="0" algn="l">
-              <a:spcBef>
-                <a:spcPts val="0"/>
-              </a:spcBef>
-              <a:spcAft>
-                <a:spcPts val="0"/>
-              </a:spcAft>
-              <a:buClr>
-                <a:srgbClr val="000000"/>
-              </a:buClr>
-              <a:buSzPts val="1100"/>
-              <a:buFont typeface="Arial"/>
-              <a:buChar char="●"/>
-            </a:pPr>
-            <a:r>
-              <a:rPr lang="en" sz="1100">
-                <a:solidFill>
-                  <a:srgbClr val="000000"/>
-                </a:solidFill>
-                <a:latin typeface="Arial"/>
-                <a:ea typeface="Arial"/>
-                <a:cs typeface="Arial"/>
-                <a:sym typeface="Arial"/>
-              </a:rPr>
-              <a:t>Creation of counterfeit cards</a:t>
-            </a:r>
-            <a:endParaRPr sz="1100">
-              <a:solidFill>
-                <a:srgbClr val="000000"/>
-              </a:solidFill>
-              <a:latin typeface="Arial"/>
-              <a:ea typeface="Arial"/>
-              <a:cs typeface="Arial"/>
-              <a:sym typeface="Arial"/>
-            </a:endParaRPr>
-          </a:p>
-          <a:p>
-            <a:pPr indent="-298450" lvl="0" marL="457200" rtl="0" algn="l">
-              <a:spcBef>
-                <a:spcPts val="0"/>
-              </a:spcBef>
-              <a:spcAft>
-                <a:spcPts val="0"/>
-              </a:spcAft>
-              <a:buClr>
-                <a:srgbClr val="000000"/>
-              </a:buClr>
-              <a:buSzPts val="1100"/>
-              <a:buFont typeface="Arial"/>
-              <a:buChar char="●"/>
-            </a:pPr>
-            <a:r>
-              <a:rPr lang="en" sz="1100">
-                <a:solidFill>
-                  <a:srgbClr val="000000"/>
-                </a:solidFill>
-                <a:latin typeface="Arial"/>
-                <a:ea typeface="Arial"/>
-                <a:cs typeface="Arial"/>
-                <a:sym typeface="Arial"/>
-              </a:rPr>
-              <a:t>Stolen/lost credit cards</a:t>
-            </a:r>
-            <a:endParaRPr sz="1100">
-              <a:solidFill>
-                <a:srgbClr val="000000"/>
-              </a:solidFill>
-              <a:latin typeface="Arial"/>
-              <a:ea typeface="Arial"/>
-              <a:cs typeface="Arial"/>
-              <a:sym typeface="Arial"/>
-            </a:endParaRPr>
-          </a:p>
-          <a:p>
-            <a:pPr indent="-298450" lvl="0" marL="457200" rtl="0" algn="l">
-              <a:spcBef>
-                <a:spcPts val="0"/>
-              </a:spcBef>
-              <a:spcAft>
-                <a:spcPts val="0"/>
-              </a:spcAft>
-              <a:buClr>
-                <a:srgbClr val="000000"/>
-              </a:buClr>
-              <a:buSzPts val="1100"/>
-              <a:buFont typeface="Arial"/>
-              <a:buChar char="●"/>
-            </a:pPr>
-            <a:r>
-              <a:rPr lang="en" sz="1100">
-                <a:solidFill>
-                  <a:srgbClr val="000000"/>
-                </a:solidFill>
-                <a:latin typeface="Arial"/>
-                <a:ea typeface="Arial"/>
-                <a:cs typeface="Arial"/>
-                <a:sym typeface="Arial"/>
-              </a:rPr>
-              <a:t>Fraudulent telemarketing</a:t>
-            </a:r>
-            <a:endParaRPr sz="1100">
-              <a:solidFill>
-                <a:srgbClr val="000000"/>
-              </a:solidFill>
-              <a:latin typeface="Arial"/>
-              <a:ea typeface="Arial"/>
-              <a:cs typeface="Arial"/>
-              <a:sym typeface="Arial"/>
-            </a:endParaRPr>
-          </a:p>
-          <a:p>
-            <a:pPr indent="0" lvl="0" marL="0" rtl="0" algn="l">
-              <a:spcBef>
-                <a:spcPts val="0"/>
-              </a:spcBef>
-              <a:spcAft>
-                <a:spcPts val="1200"/>
-              </a:spcAft>
-              <a:buNone/>
-            </a:pPr>
-            <a:r>
-              <a:t/>
-            </a:r>
-            <a:endParaRPr/>
-          </a:p>
-        </p:txBody>
-      </p:sp>
-    </p:spTree>
-  </p:cSld>
-  <p:clrMapOvr>
-    <a:masterClrMapping/>
-  </p:clrMapOvr>
-</p:sld>
-</file>
-
-<file path=ppt/slides/slide4.xml><?xml version="1.0" encoding="utf-8"?>
-<p:sld xmlns:a="http://schemas.openxmlformats.org/drawingml/2006/main" xmlns:r="http://schemas.openxmlformats.org/officeDocument/2006/relationships" xmlns:mc="http://schemas.openxmlformats.org/markup-compatibility/2006" xmlns:mv="urn:schemas-microsoft-com:mac:vml" xmlns:p="http://schemas.openxmlformats.org/presentationml/2006/main" xmlns:c="http://schemas.openxmlformats.org/drawingml/2006/chart" xmlns:dgm="http://schemas.openxmlformats.org/drawingml/2006/diagram" xmlns:o="urn:schemas-microsoft-com:office:office" xmlns:v="urn:schemas-microsoft-com:vml" xmlns:pvml="urn:schemas-microsoft-com:office:powerpoint" xmlns:com="http://schemas.openxmlformats.org/drawingml/2006/compatibility" xmlns:p14="http://schemas.microsoft.com/office/powerpoint/2010/main" xmlns:p15="http://schemas.microsoft.com/office/powerpoint/2012/main" xmlns:ahyp="http://schemas.microsoft.com/office/drawing/2018/hyperlinkcolor">
-  <p:cSld>
-    <p:spTree>
-      <p:nvGrpSpPr>
-        <p:cNvPr id="145" name="Shape 145"/>
+        <p:cNvPr id="1" name="Shape 145"/>
         <p:cNvGrpSpPr/>
         <p:nvPr/>
       </p:nvGrpSpPr>
@@ -12490,7 +12011,9 @@
       <p:sp>
         <p:nvSpPr>
           <p:cNvPr id="146" name="Google Shape;146;p16"/>
-          <p:cNvSpPr txBox="1"/>
+          <p:cNvSpPr txBox="1">
+            <a:spLocks noGrp="1"/>
+          </p:cNvSpPr>
           <p:nvPr>
             <p:ph type="title"/>
           </p:nvPr>
@@ -12505,12 +12028,12 @@
           </a:prstGeom>
         </p:spPr>
         <p:txBody>
-          <a:bodyPr anchorCtr="0" anchor="t" bIns="91425" lIns="91425" spcFirstLastPara="1" rIns="91425" wrap="square" tIns="91425">
+          <a:bodyPr spcFirstLastPara="1" wrap="square" lIns="91425" tIns="91425" rIns="91425" bIns="91425" anchor="t" anchorCtr="0">
             <a:normAutofit/>
           </a:bodyPr>
           <a:lstStyle/>
           <a:p>
-            <a:pPr indent="0" lvl="0" marL="0" rtl="0" algn="l">
+            <a:pPr marL="0" lvl="0" indent="0" algn="l" rtl="0">
               <a:spcBef>
                 <a:spcPts val="0"/>
               </a:spcBef>
@@ -12547,12 +12070,12 @@
           </a:ln>
         </p:spPr>
         <p:txBody>
-          <a:bodyPr anchorCtr="0" anchor="t" bIns="91425" lIns="91425" spcFirstLastPara="1" rIns="91425" wrap="square" tIns="91425">
+          <a:bodyPr spcFirstLastPara="1" wrap="square" lIns="91425" tIns="91425" rIns="91425" bIns="91425" anchor="t" anchorCtr="0">
             <a:noAutofit/>
           </a:bodyPr>
           <a:lstStyle/>
           <a:p>
-            <a:pPr indent="0" lvl="0" marL="0" rtl="0" algn="l">
+            <a:pPr marL="0" lvl="0" indent="0" algn="l" rtl="0">
               <a:lnSpc>
                 <a:spcPct val="115000"/>
               </a:lnSpc>
@@ -12571,7 +12094,7 @@
             <a:endParaRPr sz="1200"/>
           </a:p>
           <a:p>
-            <a:pPr indent="0" lvl="0" marL="0" rtl="0" algn="l">
+            <a:pPr marL="0" lvl="0" indent="0" algn="l" rtl="0">
               <a:lnSpc>
                 <a:spcPct val="115000"/>
               </a:lnSpc>
@@ -12590,7 +12113,7 @@
             <a:endParaRPr sz="1200"/>
           </a:p>
           <a:p>
-            <a:pPr indent="0" lvl="0" marL="0" rtl="0" algn="l">
+            <a:pPr marL="0" lvl="0" indent="0" algn="l" rtl="0">
               <a:lnSpc>
                 <a:spcPct val="115000"/>
               </a:lnSpc>
@@ -12603,7 +12126,7 @@
               <a:buNone/>
             </a:pPr>
             <a:r>
-              <a:rPr b="1" lang="en" sz="1100"/>
+              <a:rPr lang="en" sz="1100" b="1"/>
               <a:t>Rows</a:t>
             </a:r>
             <a:r>
@@ -12611,7 +12134,7 @@
               <a:t>: The dataset contains </a:t>
             </a:r>
             <a:r>
-              <a:rPr b="1" lang="en" sz="1100"/>
+              <a:rPr lang="en" sz="1100" b="1"/>
               <a:t>65,535 entries</a:t>
             </a:r>
             <a:r>
@@ -12621,7 +12144,7 @@
             <a:endParaRPr sz="1100"/>
           </a:p>
           <a:p>
-            <a:pPr indent="0" lvl="0" marL="0" rtl="0" algn="l">
+            <a:pPr marL="0" lvl="0" indent="0" algn="l" rtl="0">
               <a:lnSpc>
                 <a:spcPct val="115000"/>
               </a:lnSpc>
@@ -12634,7 +12157,7 @@
               <a:buNone/>
             </a:pPr>
             <a:r>
-              <a:rPr b="1" lang="en" sz="1100"/>
+              <a:rPr lang="en" sz="1100" b="1"/>
               <a:t>Columns</a:t>
             </a:r>
             <a:r>
@@ -12642,7 +12165,7 @@
               <a:t>: There are </a:t>
             </a:r>
             <a:r>
-              <a:rPr b="1" lang="en" sz="1100"/>
+              <a:rPr lang="en" sz="1100" b="1"/>
               <a:t>122 columns</a:t>
             </a:r>
             <a:r>
@@ -12652,7 +12175,7 @@
             <a:endParaRPr sz="1100"/>
           </a:p>
           <a:p>
-            <a:pPr indent="-298450" lvl="0" marL="457200" rtl="0" algn="l">
+            <a:pPr marL="457200" lvl="0" indent="-298450" algn="l" rtl="0">
               <a:lnSpc>
                 <a:spcPct val="115000"/>
               </a:lnSpc>
@@ -12666,7 +12189,7 @@
               <a:buChar char="●"/>
             </a:pPr>
             <a:r>
-              <a:rPr b="1" lang="en" sz="1100"/>
+              <a:rPr lang="en" sz="1100" b="1"/>
               <a:t>SK_ID_CURR</a:t>
             </a:r>
             <a:r>
@@ -12676,7 +12199,7 @@
             <a:endParaRPr sz="1100"/>
           </a:p>
           <a:p>
-            <a:pPr indent="-298450" lvl="0" marL="457200" rtl="0" algn="l">
+            <a:pPr marL="457200" lvl="0" indent="-298450" algn="l" rtl="0">
               <a:lnSpc>
                 <a:spcPct val="115000"/>
               </a:lnSpc>
@@ -12690,7 +12213,7 @@
               <a:buChar char="●"/>
             </a:pPr>
             <a:r>
-              <a:rPr b="1" lang="en" sz="1100"/>
+              <a:rPr lang="en" sz="1100" b="1"/>
               <a:t>TARGET</a:t>
             </a:r>
             <a:r>
@@ -12700,7 +12223,7 @@
             <a:endParaRPr sz="1100"/>
           </a:p>
           <a:p>
-            <a:pPr indent="-298450" lvl="0" marL="457200" rtl="0" algn="l">
+            <a:pPr marL="457200" lvl="0" indent="-298450" algn="l" rtl="0">
               <a:lnSpc>
                 <a:spcPct val="115000"/>
               </a:lnSpc>
@@ -12714,7 +12237,7 @@
               <a:buChar char="●"/>
             </a:pPr>
             <a:r>
-              <a:rPr b="1" lang="en" sz="1100"/>
+              <a:rPr lang="en" sz="1100" b="1"/>
               <a:t>AMT_INCOME_TOTAL</a:t>
             </a:r>
             <a:r>
@@ -12724,7 +12247,7 @@
             <a:endParaRPr sz="1100"/>
           </a:p>
           <a:p>
-            <a:pPr indent="-298450" lvl="0" marL="457200" rtl="0" algn="l">
+            <a:pPr marL="457200" lvl="0" indent="-298450" algn="l" rtl="0">
               <a:lnSpc>
                 <a:spcPct val="115000"/>
               </a:lnSpc>
@@ -12738,7 +12261,7 @@
               <a:buChar char="●"/>
             </a:pPr>
             <a:r>
-              <a:rPr b="1" lang="en" sz="1100"/>
+              <a:rPr lang="en" sz="1100" b="1"/>
               <a:t>AMT_CREDIT</a:t>
             </a:r>
             <a:r>
@@ -12748,7 +12271,7 @@
             <a:endParaRPr sz="1100"/>
           </a:p>
           <a:p>
-            <a:pPr indent="-298450" lvl="0" marL="457200" rtl="0" algn="l">
+            <a:pPr marL="457200" lvl="0" indent="-298450" algn="l" rtl="0">
               <a:lnSpc>
                 <a:spcPct val="115000"/>
               </a:lnSpc>
@@ -12762,7 +12285,7 @@
               <a:buChar char="●"/>
             </a:pPr>
             <a:r>
-              <a:rPr b="1" lang="en" sz="1100"/>
+              <a:rPr lang="en" sz="1100" b="1"/>
               <a:t>EXTERNAL SOURCES</a:t>
             </a:r>
             <a:r>
@@ -12820,7 +12343,7 @@
             <a:endParaRPr sz="1100"/>
           </a:p>
           <a:p>
-            <a:pPr indent="0" lvl="0" marL="0" rtl="0" algn="l">
+            <a:pPr marL="0" lvl="0" indent="0" algn="l" rtl="0">
               <a:lnSpc>
                 <a:spcPct val="115000"/>
               </a:lnSpc>
@@ -12837,7 +12360,7 @@
               <a:t>Some behavioral features, like DAYS_EMPLOYED, AMT_CREDIT, or EXT_SOURCE_1, was analyzed to understand financial behavior, which will inform certain elements of </a:t>
             </a:r>
             <a:r>
-              <a:rPr b="1" lang="en" sz="1100"/>
+              <a:rPr lang="en" sz="1100" b="1"/>
               <a:t>fraudulent applications</a:t>
             </a:r>
             <a:r>
@@ -12845,7 +12368,7 @@
               <a:t> or </a:t>
             </a:r>
             <a:r>
-              <a:rPr b="1" lang="en" sz="1100"/>
+              <a:rPr lang="en" sz="1100" b="1"/>
               <a:t>credit misuse</a:t>
             </a:r>
             <a:r>
@@ -12855,7 +12378,7 @@
             <a:endParaRPr sz="1100"/>
           </a:p>
           <a:p>
-            <a:pPr indent="0" lvl="0" marL="0" rtl="0" algn="l">
+            <a:pPr marL="0" lvl="0" indent="0" algn="l" rtl="0">
               <a:lnSpc>
                 <a:spcPct val="115000"/>
               </a:lnSpc>
@@ -12867,13 +12390,10 @@
               </a:spcAft>
               <a:buNone/>
             </a:pPr>
-            <a:r>
-              <a:t/>
-            </a:r>
             <a:endParaRPr sz="1100"/>
           </a:p>
           <a:p>
-            <a:pPr indent="0" lvl="0" marL="0" rtl="0" algn="l">
+            <a:pPr marL="0" lvl="0" indent="0" algn="l" rtl="0">
               <a:spcBef>
                 <a:spcPts val="1200"/>
               </a:spcBef>
@@ -12882,9 +12402,6 @@
               </a:spcAft>
               <a:buNone/>
             </a:pPr>
-            <a:r>
-              <a:t/>
-            </a:r>
             <a:endParaRPr sz="1300">
               <a:solidFill>
                 <a:schemeClr val="dk2"/>
@@ -12905,12 +12422,12 @@
 </p:sld>
 </file>
 
-<file path=ppt/slides/slide5.xml><?xml version="1.0" encoding="utf-8"?>
-<p:sld xmlns:a="http://schemas.openxmlformats.org/drawingml/2006/main" xmlns:r="http://schemas.openxmlformats.org/officeDocument/2006/relationships" xmlns:mc="http://schemas.openxmlformats.org/markup-compatibility/2006" xmlns:mv="urn:schemas-microsoft-com:mac:vml" xmlns:p="http://schemas.openxmlformats.org/presentationml/2006/main" xmlns:c="http://schemas.openxmlformats.org/drawingml/2006/chart" xmlns:dgm="http://schemas.openxmlformats.org/drawingml/2006/diagram" xmlns:o="urn:schemas-microsoft-com:office:office" xmlns:v="urn:schemas-microsoft-com:vml" xmlns:pvml="urn:schemas-microsoft-com:office:powerpoint" xmlns:com="http://schemas.openxmlformats.org/drawingml/2006/compatibility" xmlns:p14="http://schemas.microsoft.com/office/powerpoint/2010/main" xmlns:p15="http://schemas.microsoft.com/office/powerpoint/2012/main" xmlns:ahyp="http://schemas.microsoft.com/office/drawing/2018/hyperlinkcolor">
+<file path=ppt/slides/slide4.xml><?xml version="1.0" encoding="utf-8"?>
+<p:sld xmlns:a="http://schemas.openxmlformats.org/drawingml/2006/main" xmlns:r="http://schemas.openxmlformats.org/officeDocument/2006/relationships" xmlns:p="http://schemas.openxmlformats.org/presentationml/2006/main">
   <p:cSld>
     <p:spTree>
       <p:nvGrpSpPr>
-        <p:cNvPr id="151" name="Shape 151"/>
+        <p:cNvPr id="1" name="Shape 151"/>
         <p:cNvGrpSpPr/>
         <p:nvPr/>
       </p:nvGrpSpPr>
@@ -12925,7 +12442,9 @@
       <p:sp>
         <p:nvSpPr>
           <p:cNvPr id="152" name="Google Shape;152;p17"/>
-          <p:cNvSpPr txBox="1"/>
+          <p:cNvSpPr txBox="1">
+            <a:spLocks noGrp="1"/>
+          </p:cNvSpPr>
           <p:nvPr>
             <p:ph type="title"/>
           </p:nvPr>
@@ -12940,12 +12459,12 @@
           </a:prstGeom>
         </p:spPr>
         <p:txBody>
-          <a:bodyPr anchorCtr="0" anchor="t" bIns="91425" lIns="91425" spcFirstLastPara="1" rIns="91425" wrap="square" tIns="91425">
+          <a:bodyPr spcFirstLastPara="1" wrap="square" lIns="91425" tIns="91425" rIns="91425" bIns="91425" anchor="t" anchorCtr="0">
             <a:normAutofit/>
           </a:bodyPr>
           <a:lstStyle/>
           <a:p>
-            <a:pPr indent="0" lvl="0" marL="0" rtl="0" algn="l">
+            <a:pPr marL="0" lvl="0" indent="0" algn="l" rtl="0">
               <a:spcBef>
                 <a:spcPts val="0"/>
               </a:spcBef>
@@ -12965,9 +12484,11 @@
       <p:sp>
         <p:nvSpPr>
           <p:cNvPr id="153" name="Google Shape;153;p17"/>
-          <p:cNvSpPr txBox="1"/>
+          <p:cNvSpPr txBox="1">
+            <a:spLocks noGrp="1"/>
+          </p:cNvSpPr>
           <p:nvPr>
-            <p:ph idx="1" type="body"/>
+            <p:ph type="body" idx="1"/>
           </p:nvPr>
         </p:nvSpPr>
         <p:spPr>
@@ -12980,12 +12501,12 @@
           </a:prstGeom>
         </p:spPr>
         <p:txBody>
-          <a:bodyPr anchorCtr="0" anchor="t" bIns="91425" lIns="91425" spcFirstLastPara="1" rIns="91425" wrap="square" tIns="91425">
+          <a:bodyPr spcFirstLastPara="1" wrap="square" lIns="91425" tIns="91425" rIns="91425" bIns="91425" anchor="t" anchorCtr="0">
             <a:normAutofit/>
           </a:bodyPr>
           <a:lstStyle/>
           <a:p>
-            <a:pPr indent="0" lvl="0" marL="0" rtl="0" algn="l">
+            <a:pPr marL="0" lvl="0" indent="0" algn="l" rtl="0">
               <a:spcBef>
                 <a:spcPts val="0"/>
               </a:spcBef>
@@ -13007,7 +12528,7 @@
               <a:t>  </a:t>
             </a:r>
             <a:r>
-              <a:rPr b="1" lang="en" sz="1100">
+              <a:rPr lang="en" sz="1100" b="1">
                 <a:solidFill>
                   <a:srgbClr val="000000"/>
                 </a:solidFill>
@@ -13041,7 +12562,7 @@
             </a:endParaRPr>
           </a:p>
           <a:p>
-            <a:pPr indent="0" lvl="0" marL="0" rtl="0" algn="l">
+            <a:pPr marL="0" lvl="0" indent="0" algn="l" rtl="0">
               <a:spcBef>
                 <a:spcPts val="0"/>
               </a:spcBef>
@@ -13050,9 +12571,6 @@
               </a:spcAft>
               <a:buNone/>
             </a:pPr>
-            <a:r>
-              <a:t/>
-            </a:r>
             <a:endParaRPr sz="1100">
               <a:solidFill>
                 <a:srgbClr val="000000"/>
@@ -13064,7 +12582,7 @@
             </a:endParaRPr>
           </a:p>
           <a:p>
-            <a:pPr indent="0" lvl="0" marL="0" rtl="0" algn="l">
+            <a:pPr marL="0" lvl="0" indent="0" algn="l" rtl="0">
               <a:spcBef>
                 <a:spcPts val="0"/>
               </a:spcBef>
@@ -13086,7 +12604,7 @@
               <a:t>  </a:t>
             </a:r>
             <a:r>
-              <a:rPr b="1" lang="en" sz="1100">
+              <a:rPr lang="en" sz="1100" b="1">
                 <a:solidFill>
                   <a:srgbClr val="000000"/>
                 </a:solidFill>
@@ -13120,7 +12638,7 @@
             </a:endParaRPr>
           </a:p>
           <a:p>
-            <a:pPr indent="0" lvl="0" marL="0" rtl="0" algn="l">
+            <a:pPr marL="0" lvl="0" indent="0" algn="l" rtl="0">
               <a:spcBef>
                 <a:spcPts val="0"/>
               </a:spcBef>
@@ -13129,9 +12647,6 @@
               </a:spcAft>
               <a:buNone/>
             </a:pPr>
-            <a:r>
-              <a:t/>
-            </a:r>
             <a:endParaRPr sz="1100">
               <a:solidFill>
                 <a:srgbClr val="000000"/>
@@ -13143,7 +12658,7 @@
             </a:endParaRPr>
           </a:p>
           <a:p>
-            <a:pPr indent="0" lvl="0" marL="0" rtl="0" algn="l">
+            <a:pPr marL="0" lvl="0" indent="0" algn="l" rtl="0">
               <a:spcBef>
                 <a:spcPts val="0"/>
               </a:spcBef>
@@ -13165,7 +12680,7 @@
               <a:t>  </a:t>
             </a:r>
             <a:r>
-              <a:rPr b="1" lang="en" sz="1100">
+              <a:rPr lang="en" sz="1100" b="1">
                 <a:solidFill>
                   <a:srgbClr val="000000"/>
                 </a:solidFill>
@@ -13199,7 +12714,7 @@
             </a:endParaRPr>
           </a:p>
           <a:p>
-            <a:pPr indent="0" lvl="0" marL="0" rtl="0" algn="l">
+            <a:pPr marL="0" lvl="0" indent="0" algn="l" rtl="0">
               <a:spcBef>
                 <a:spcPts val="0"/>
               </a:spcBef>
@@ -13208,9 +12723,6 @@
               </a:spcAft>
               <a:buNone/>
             </a:pPr>
-            <a:r>
-              <a:t/>
-            </a:r>
             <a:endParaRPr/>
           </a:p>
         </p:txBody>
@@ -13223,12 +12735,12 @@
 </p:sld>
 </file>
 
-<file path=ppt/slides/slide6.xml><?xml version="1.0" encoding="utf-8"?>
-<p:sld xmlns:a="http://schemas.openxmlformats.org/drawingml/2006/main" xmlns:r="http://schemas.openxmlformats.org/officeDocument/2006/relationships" xmlns:mc="http://schemas.openxmlformats.org/markup-compatibility/2006" xmlns:mv="urn:schemas-microsoft-com:mac:vml" xmlns:p="http://schemas.openxmlformats.org/presentationml/2006/main" xmlns:c="http://schemas.openxmlformats.org/drawingml/2006/chart" xmlns:dgm="http://schemas.openxmlformats.org/drawingml/2006/diagram" xmlns:o="urn:schemas-microsoft-com:office:office" xmlns:v="urn:schemas-microsoft-com:vml" xmlns:pvml="urn:schemas-microsoft-com:office:powerpoint" xmlns:com="http://schemas.openxmlformats.org/drawingml/2006/compatibility" xmlns:p14="http://schemas.microsoft.com/office/powerpoint/2010/main" xmlns:p15="http://schemas.microsoft.com/office/powerpoint/2012/main" xmlns:ahyp="http://schemas.microsoft.com/office/drawing/2018/hyperlinkcolor">
+<file path=ppt/slides/slide5.xml><?xml version="1.0" encoding="utf-8"?>
+<p:sld xmlns:a="http://schemas.openxmlformats.org/drawingml/2006/main" xmlns:r="http://schemas.openxmlformats.org/officeDocument/2006/relationships" xmlns:p="http://schemas.openxmlformats.org/presentationml/2006/main">
   <p:cSld>
     <p:spTree>
       <p:nvGrpSpPr>
-        <p:cNvPr id="157" name="Shape 157"/>
+        <p:cNvPr id="1" name="Shape 157"/>
         <p:cNvGrpSpPr/>
         <p:nvPr/>
       </p:nvGrpSpPr>
@@ -13243,7 +12755,9 @@
       <p:sp>
         <p:nvSpPr>
           <p:cNvPr id="158" name="Google Shape;158;p18"/>
-          <p:cNvSpPr txBox="1"/>
+          <p:cNvSpPr txBox="1">
+            <a:spLocks noGrp="1"/>
+          </p:cNvSpPr>
           <p:nvPr>
             <p:ph type="title"/>
           </p:nvPr>
@@ -13258,12 +12772,12 @@
           </a:prstGeom>
         </p:spPr>
         <p:txBody>
-          <a:bodyPr anchorCtr="0" anchor="t" bIns="91425" lIns="91425" spcFirstLastPara="1" rIns="91425" wrap="square" tIns="91425">
+          <a:bodyPr spcFirstLastPara="1" wrap="square" lIns="91425" tIns="91425" rIns="91425" bIns="91425" anchor="t" anchorCtr="0">
             <a:normAutofit fontScale="90000"/>
           </a:bodyPr>
           <a:lstStyle/>
           <a:p>
-            <a:pPr indent="0" lvl="0" marL="0" rtl="0" algn="l">
+            <a:pPr marL="0" lvl="0" indent="0" algn="l" rtl="0">
               <a:spcBef>
                 <a:spcPts val="0"/>
               </a:spcBef>
@@ -13412,12 +12926,12 @@
           </a:ln>
         </p:spPr>
         <p:txBody>
-          <a:bodyPr anchorCtr="0" anchor="t" bIns="91425" lIns="91425" spcFirstLastPara="1" rIns="91425" wrap="square" tIns="91425">
+          <a:bodyPr spcFirstLastPara="1" wrap="square" lIns="91425" tIns="91425" rIns="91425" bIns="91425" anchor="t" anchorCtr="0">
             <a:noAutofit/>
           </a:bodyPr>
           <a:lstStyle/>
           <a:p>
-            <a:pPr indent="0" lvl="0" marL="0" rtl="0" algn="l">
+            <a:pPr marL="0" lvl="0" indent="0" algn="l" rtl="0">
               <a:spcBef>
                 <a:spcPts val="0"/>
               </a:spcBef>
@@ -13470,12 +12984,12 @@
           </a:ln>
         </p:spPr>
         <p:txBody>
-          <a:bodyPr anchorCtr="0" anchor="t" bIns="91425" lIns="91425" spcFirstLastPara="1" rIns="91425" wrap="square" tIns="91425">
+          <a:bodyPr spcFirstLastPara="1" wrap="square" lIns="91425" tIns="91425" rIns="91425" bIns="91425" anchor="t" anchorCtr="0">
             <a:noAutofit/>
           </a:bodyPr>
           <a:lstStyle/>
           <a:p>
-            <a:pPr indent="0" lvl="0" marL="0" rtl="0" algn="l">
+            <a:pPr marL="0" lvl="0" indent="0" algn="l" rtl="0">
               <a:spcBef>
                 <a:spcPts val="0"/>
               </a:spcBef>
@@ -13528,12 +13042,12 @@
           </a:ln>
         </p:spPr>
         <p:txBody>
-          <a:bodyPr anchorCtr="0" anchor="t" bIns="91425" lIns="91425" spcFirstLastPara="1" rIns="91425" wrap="square" tIns="91425">
+          <a:bodyPr spcFirstLastPara="1" wrap="square" lIns="91425" tIns="91425" rIns="91425" bIns="91425" anchor="t" anchorCtr="0">
             <a:noAutofit/>
           </a:bodyPr>
           <a:lstStyle/>
           <a:p>
-            <a:pPr indent="0" lvl="0" marL="0" rtl="0" algn="l">
+            <a:pPr marL="0" lvl="0" indent="0" algn="l" rtl="0">
               <a:spcBef>
                 <a:spcPts val="0"/>
               </a:spcBef>
@@ -13586,12 +13100,12 @@
           </a:ln>
         </p:spPr>
         <p:txBody>
-          <a:bodyPr anchorCtr="0" anchor="t" bIns="91425" lIns="91425" spcFirstLastPara="1" rIns="91425" wrap="square" tIns="91425">
+          <a:bodyPr spcFirstLastPara="1" wrap="square" lIns="91425" tIns="91425" rIns="91425" bIns="91425" anchor="t" anchorCtr="0">
             <a:noAutofit/>
           </a:bodyPr>
           <a:lstStyle/>
           <a:p>
-            <a:pPr indent="0" lvl="0" marL="0" rtl="0" algn="l">
+            <a:pPr marL="0" lvl="0" indent="0" algn="l" rtl="0">
               <a:spcBef>
                 <a:spcPts val="0"/>
               </a:spcBef>
@@ -13632,12 +13146,12 @@
 </p:sld>
 </file>
 
-<file path=ppt/slides/slide7.xml><?xml version="1.0" encoding="utf-8"?>
-<p:sld xmlns:a="http://schemas.openxmlformats.org/drawingml/2006/main" xmlns:r="http://schemas.openxmlformats.org/officeDocument/2006/relationships" xmlns:mc="http://schemas.openxmlformats.org/markup-compatibility/2006" xmlns:mv="urn:schemas-microsoft-com:mac:vml" xmlns:p="http://schemas.openxmlformats.org/presentationml/2006/main" xmlns:c="http://schemas.openxmlformats.org/drawingml/2006/chart" xmlns:dgm="http://schemas.openxmlformats.org/drawingml/2006/diagram" xmlns:o="urn:schemas-microsoft-com:office:office" xmlns:v="urn:schemas-microsoft-com:vml" xmlns:pvml="urn:schemas-microsoft-com:office:powerpoint" xmlns:com="http://schemas.openxmlformats.org/drawingml/2006/compatibility" xmlns:p14="http://schemas.microsoft.com/office/powerpoint/2010/main" xmlns:p15="http://schemas.microsoft.com/office/powerpoint/2012/main" xmlns:ahyp="http://schemas.microsoft.com/office/drawing/2018/hyperlinkcolor">
+<file path=ppt/slides/slide6.xml><?xml version="1.0" encoding="utf-8"?>
+<p:sld xmlns:a="http://schemas.openxmlformats.org/drawingml/2006/main" xmlns:r="http://schemas.openxmlformats.org/officeDocument/2006/relationships" xmlns:p="http://schemas.openxmlformats.org/presentationml/2006/main">
   <p:cSld>
     <p:spTree>
       <p:nvGrpSpPr>
-        <p:cNvPr id="170" name="Shape 170"/>
+        <p:cNvPr id="1" name="Shape 170"/>
         <p:cNvGrpSpPr/>
         <p:nvPr/>
       </p:nvGrpSpPr>
@@ -13652,7 +13166,9 @@
       <p:sp>
         <p:nvSpPr>
           <p:cNvPr id="171" name="Google Shape;171;p19"/>
-          <p:cNvSpPr txBox="1"/>
+          <p:cNvSpPr txBox="1">
+            <a:spLocks noGrp="1"/>
+          </p:cNvSpPr>
           <p:nvPr>
             <p:ph type="title"/>
           </p:nvPr>
@@ -13667,12 +13183,12 @@
           </a:prstGeom>
         </p:spPr>
         <p:txBody>
-          <a:bodyPr anchorCtr="0" anchor="t" bIns="91425" lIns="91425" spcFirstLastPara="1" rIns="91425" wrap="square" tIns="91425">
+          <a:bodyPr spcFirstLastPara="1" wrap="square" lIns="91425" tIns="91425" rIns="91425" bIns="91425" anchor="t" anchorCtr="0">
             <a:normAutofit/>
           </a:bodyPr>
           <a:lstStyle/>
           <a:p>
-            <a:pPr indent="0" lvl="0" marL="0" rtl="0" algn="l">
+            <a:pPr marL="0" lvl="0" indent="0" algn="l" rtl="0">
               <a:spcBef>
                 <a:spcPts val="0"/>
               </a:spcBef>
@@ -13725,12 +13241,12 @@
 </p:sld>
 </file>
 
-<file path=ppt/slides/slide8.xml><?xml version="1.0" encoding="utf-8"?>
-<p:sld xmlns:a="http://schemas.openxmlformats.org/drawingml/2006/main" xmlns:r="http://schemas.openxmlformats.org/officeDocument/2006/relationships" xmlns:mc="http://schemas.openxmlformats.org/markup-compatibility/2006" xmlns:mv="urn:schemas-microsoft-com:mac:vml" xmlns:p="http://schemas.openxmlformats.org/presentationml/2006/main" xmlns:c="http://schemas.openxmlformats.org/drawingml/2006/chart" xmlns:dgm="http://schemas.openxmlformats.org/drawingml/2006/diagram" xmlns:o="urn:schemas-microsoft-com:office:office" xmlns:v="urn:schemas-microsoft-com:vml" xmlns:pvml="urn:schemas-microsoft-com:office:powerpoint" xmlns:com="http://schemas.openxmlformats.org/drawingml/2006/compatibility" xmlns:p14="http://schemas.microsoft.com/office/powerpoint/2010/main" xmlns:p15="http://schemas.microsoft.com/office/powerpoint/2012/main" xmlns:ahyp="http://schemas.microsoft.com/office/drawing/2018/hyperlinkcolor">
+<file path=ppt/slides/slide7.xml><?xml version="1.0" encoding="utf-8"?>
+<p:sld xmlns:a="http://schemas.openxmlformats.org/drawingml/2006/main" xmlns:r="http://schemas.openxmlformats.org/officeDocument/2006/relationships" xmlns:p="http://schemas.openxmlformats.org/presentationml/2006/main">
   <p:cSld>
     <p:spTree>
       <p:nvGrpSpPr>
-        <p:cNvPr id="176" name="Shape 176"/>
+        <p:cNvPr id="1" name="Shape 176"/>
         <p:cNvGrpSpPr/>
         <p:nvPr/>
       </p:nvGrpSpPr>
@@ -13745,7 +13261,9 @@
       <p:sp>
         <p:nvSpPr>
           <p:cNvPr id="177" name="Google Shape;177;p20"/>
-          <p:cNvSpPr txBox="1"/>
+          <p:cNvSpPr txBox="1">
+            <a:spLocks noGrp="1"/>
+          </p:cNvSpPr>
           <p:nvPr>
             <p:ph type="title"/>
           </p:nvPr>
@@ -13760,12 +13278,12 @@
           </a:prstGeom>
         </p:spPr>
         <p:txBody>
-          <a:bodyPr anchorCtr="0" anchor="t" bIns="91425" lIns="91425" spcFirstLastPara="1" rIns="91425" wrap="square" tIns="91425">
+          <a:bodyPr spcFirstLastPara="1" wrap="square" lIns="91425" tIns="91425" rIns="91425" bIns="91425" anchor="t" anchorCtr="0">
             <a:normAutofit/>
           </a:bodyPr>
           <a:lstStyle/>
           <a:p>
-            <a:pPr indent="0" lvl="0" marL="0" rtl="0" algn="l">
+            <a:pPr marL="0" lvl="0" indent="0" algn="l" rtl="0">
               <a:spcBef>
                 <a:spcPts val="0"/>
               </a:spcBef>
@@ -13818,12 +13336,12 @@
 </p:sld>
 </file>
 
-<file path=ppt/slides/slide9.xml><?xml version="1.0" encoding="utf-8"?>
-<p:sld xmlns:a="http://schemas.openxmlformats.org/drawingml/2006/main" xmlns:r="http://schemas.openxmlformats.org/officeDocument/2006/relationships" xmlns:mc="http://schemas.openxmlformats.org/markup-compatibility/2006" xmlns:mv="urn:schemas-microsoft-com:mac:vml" xmlns:p="http://schemas.openxmlformats.org/presentationml/2006/main" xmlns:c="http://schemas.openxmlformats.org/drawingml/2006/chart" xmlns:dgm="http://schemas.openxmlformats.org/drawingml/2006/diagram" xmlns:o="urn:schemas-microsoft-com:office:office" xmlns:v="urn:schemas-microsoft-com:vml" xmlns:pvml="urn:schemas-microsoft-com:office:powerpoint" xmlns:com="http://schemas.openxmlformats.org/drawingml/2006/compatibility" xmlns:p14="http://schemas.microsoft.com/office/powerpoint/2010/main" xmlns:p15="http://schemas.microsoft.com/office/powerpoint/2012/main" xmlns:ahyp="http://schemas.microsoft.com/office/drawing/2018/hyperlinkcolor">
+<file path=ppt/slides/slide8.xml><?xml version="1.0" encoding="utf-8"?>
+<p:sld xmlns:a="http://schemas.openxmlformats.org/drawingml/2006/main" xmlns:r="http://schemas.openxmlformats.org/officeDocument/2006/relationships" xmlns:p="http://schemas.openxmlformats.org/presentationml/2006/main">
   <p:cSld>
     <p:spTree>
       <p:nvGrpSpPr>
-        <p:cNvPr id="182" name="Shape 182"/>
+        <p:cNvPr id="1" name="Shape 182"/>
         <p:cNvGrpSpPr/>
         <p:nvPr/>
       </p:nvGrpSpPr>
@@ -13838,7 +13356,9 @@
       <p:sp>
         <p:nvSpPr>
           <p:cNvPr id="183" name="Google Shape;183;p21"/>
-          <p:cNvSpPr txBox="1"/>
+          <p:cNvSpPr txBox="1">
+            <a:spLocks noGrp="1"/>
+          </p:cNvSpPr>
           <p:nvPr>
             <p:ph type="title"/>
           </p:nvPr>
@@ -13853,12 +13373,12 @@
           </a:prstGeom>
         </p:spPr>
         <p:txBody>
-          <a:bodyPr anchorCtr="0" anchor="t" bIns="91425" lIns="91425" spcFirstLastPara="1" rIns="91425" wrap="square" tIns="91425">
+          <a:bodyPr spcFirstLastPara="1" wrap="square" lIns="91425" tIns="91425" rIns="91425" bIns="91425" anchor="t" anchorCtr="0">
             <a:normAutofit/>
           </a:bodyPr>
           <a:lstStyle/>
           <a:p>
-            <a:pPr indent="0" lvl="0" marL="0" rtl="0" algn="l">
+            <a:pPr marL="0" lvl="0" indent="0" algn="l" rtl="0">
               <a:spcBef>
                 <a:spcPts val="0"/>
               </a:spcBef>
@@ -13911,8 +13431,412 @@
 </p:sld>
 </file>
 
+<file path=ppt/slides/slide9.xml><?xml version="1.0" encoding="utf-8"?>
+<p:sld xmlns:a="http://schemas.openxmlformats.org/drawingml/2006/main" xmlns:r="http://schemas.openxmlformats.org/officeDocument/2006/relationships" xmlns:p="http://schemas.openxmlformats.org/presentationml/2006/main">
+  <p:cSld>
+    <p:spTree>
+      <p:nvGrpSpPr>
+        <p:cNvPr id="1" name="Shape 188"/>
+        <p:cNvGrpSpPr/>
+        <p:nvPr/>
+      </p:nvGrpSpPr>
+      <p:grpSpPr>
+        <a:xfrm>
+          <a:off x="0" y="0"/>
+          <a:ext cx="0" cy="0"/>
+          <a:chOff x="0" y="0"/>
+          <a:chExt cx="0" cy="0"/>
+        </a:xfrm>
+      </p:grpSpPr>
+      <p:sp>
+        <p:nvSpPr>
+          <p:cNvPr id="189" name="Google Shape;189;p22"/>
+          <p:cNvSpPr txBox="1">
+            <a:spLocks noGrp="1"/>
+          </p:cNvSpPr>
+          <p:nvPr>
+            <p:ph type="title"/>
+          </p:nvPr>
+        </p:nvSpPr>
+        <p:spPr>
+          <a:xfrm>
+            <a:off x="819150" y="845600"/>
+            <a:ext cx="7505700" cy="954600"/>
+          </a:xfrm>
+          <a:prstGeom prst="rect">
+            <a:avLst/>
+          </a:prstGeom>
+        </p:spPr>
+        <p:txBody>
+          <a:bodyPr spcFirstLastPara="1" wrap="square" lIns="91425" tIns="91425" rIns="91425" bIns="91425" anchor="t" anchorCtr="0">
+            <a:normAutofit/>
+          </a:bodyPr>
+          <a:lstStyle/>
+          <a:p>
+            <a:pPr marL="0" lvl="0" indent="0" algn="l" rtl="0">
+              <a:spcBef>
+                <a:spcPts val="0"/>
+              </a:spcBef>
+              <a:spcAft>
+                <a:spcPts val="0"/>
+              </a:spcAft>
+              <a:buNone/>
+            </a:pPr>
+            <a:r>
+              <a:rPr lang="en"/>
+              <a:t>ADASYN</a:t>
+            </a:r>
+            <a:endParaRPr/>
+          </a:p>
+        </p:txBody>
+      </p:sp>
+      <p:pic>
+        <p:nvPicPr>
+          <p:cNvPr id="190" name="Google Shape;190;p22"/>
+          <p:cNvPicPr preferRelativeResize="0"/>
+          <p:nvPr/>
+        </p:nvPicPr>
+        <p:blipFill>
+          <a:blip r:embed="rId3">
+            <a:alphaModFix/>
+          </a:blip>
+          <a:stretch>
+            <a:fillRect/>
+          </a:stretch>
+        </p:blipFill>
+        <p:spPr>
+          <a:xfrm>
+            <a:off x="1407975" y="1562950"/>
+            <a:ext cx="1989622" cy="3038499"/>
+          </a:xfrm>
+          <a:prstGeom prst="rect">
+            <a:avLst/>
+          </a:prstGeom>
+          <a:noFill/>
+          <a:ln>
+            <a:noFill/>
+          </a:ln>
+        </p:spPr>
+      </p:pic>
+      <p:pic>
+        <p:nvPicPr>
+          <p:cNvPr id="191" name="Google Shape;191;p22"/>
+          <p:cNvPicPr preferRelativeResize="0"/>
+          <p:nvPr/>
+        </p:nvPicPr>
+        <p:blipFill>
+          <a:blip r:embed="rId4">
+            <a:alphaModFix/>
+          </a:blip>
+          <a:stretch>
+            <a:fillRect/>
+          </a:stretch>
+        </p:blipFill>
+        <p:spPr>
+          <a:xfrm>
+            <a:off x="3788122" y="1562950"/>
+            <a:ext cx="1906405" cy="3038500"/>
+          </a:xfrm>
+          <a:prstGeom prst="rect">
+            <a:avLst/>
+          </a:prstGeom>
+          <a:noFill/>
+          <a:ln>
+            <a:noFill/>
+          </a:ln>
+        </p:spPr>
+      </p:pic>
+    </p:spTree>
+  </p:cSld>
+  <p:clrMapOvr>
+    <a:masterClrMapping/>
+  </p:clrMapOvr>
+</p:sld>
+</file>
+
 <file path=ppt/theme/theme1.xml><?xml version="1.0" encoding="utf-8"?>
-<a:theme xmlns:a="http://schemas.openxmlformats.org/drawingml/2006/main" xmlns:r="http://schemas.openxmlformats.org/officeDocument/2006/relationships">
+<a:theme xmlns:a="http://schemas.openxmlformats.org/drawingml/2006/main" name="Shift">
+  <a:themeElements>
+    <a:clrScheme name="Shift">
+      <a:dk1>
+        <a:srgbClr val="FFFFFF"/>
+      </a:dk1>
+      <a:lt1>
+        <a:srgbClr val="AF7B51"/>
+      </a:lt1>
+      <a:dk2>
+        <a:srgbClr val="233A44"/>
+      </a:dk2>
+      <a:lt2>
+        <a:srgbClr val="D9D9D9"/>
+      </a:lt2>
+      <a:accent1>
+        <a:srgbClr val="00796B"/>
+      </a:accent1>
+      <a:accent2>
+        <a:srgbClr val="D9563F"/>
+      </a:accent2>
+      <a:accent3>
+        <a:srgbClr val="C4A15A"/>
+      </a:accent3>
+      <a:accent4>
+        <a:srgbClr val="14F597"/>
+      </a:accent4>
+      <a:accent5>
+        <a:srgbClr val="3D4594"/>
+      </a:accent5>
+      <a:accent6>
+        <a:srgbClr val="163EF5"/>
+      </a:accent6>
+      <a:hlink>
+        <a:srgbClr val="3D4594"/>
+      </a:hlink>
+      <a:folHlink>
+        <a:srgbClr val="3D4594"/>
+      </a:folHlink>
+    </a:clrScheme>
+    <a:fontScheme name="Office">
+      <a:majorFont>
+        <a:latin typeface="Arial"/>
+        <a:ea typeface=""/>
+        <a:cs typeface=""/>
+        <a:font script="Jpan" typeface="ＭＳ Ｐゴシック"/>
+        <a:font script="Hang" typeface="맑은 고딕"/>
+        <a:font script="Hans" typeface="宋体"/>
+        <a:font script="Hant" typeface="新細明體"/>
+        <a:font script="Arab" typeface="Times New Roman"/>
+        <a:font script="Hebr" typeface="Times New Roman"/>
+        <a:font script="Thai" typeface="Angsana New"/>
+        <a:font script="Ethi" typeface="Nyala"/>
+        <a:font script="Beng" typeface="Vrinda"/>
+        <a:font script="Gujr" typeface="Shruti"/>
+        <a:font script="Khmr" typeface="MoolBoran"/>
+        <a:font script="Knda" typeface="Tunga"/>
+        <a:font script="Guru" typeface="Raavi"/>
+        <a:font script="Cans" typeface="Euphemia"/>
+        <a:font script="Cher" typeface="Plantagenet Cherokee"/>
+        <a:font script="Yiii" typeface="Microsoft Yi Baiti"/>
+        <a:font script="Tibt" typeface="Microsoft Himalaya"/>
+        <a:font script="Thaa" typeface="MV Boli"/>
+        <a:font script="Deva" typeface="Mangal"/>
+        <a:font script="Telu" typeface="Gautami"/>
+        <a:font script="Taml" typeface="Latha"/>
+        <a:font script="Syrc" typeface="Estrangelo Edessa"/>
+        <a:font script="Orya" typeface="Kalinga"/>
+        <a:font script="Mlym" typeface="Kartika"/>
+        <a:font script="Laoo" typeface="DokChampa"/>
+        <a:font script="Sinh" typeface="Iskoola Pota"/>
+        <a:font script="Mong" typeface="Mongolian Baiti"/>
+        <a:font script="Viet" typeface="Times New Roman"/>
+        <a:font script="Uigh" typeface="Microsoft Uighur"/>
+        <a:font script="Geor" typeface="Sylfaen"/>
+      </a:majorFont>
+      <a:minorFont>
+        <a:latin typeface="Arial"/>
+        <a:ea typeface=""/>
+        <a:cs typeface=""/>
+        <a:font script="Jpan" typeface="ＭＳ Ｐゴシック"/>
+        <a:font script="Hang" typeface="맑은 고딕"/>
+        <a:font script="Hans" typeface="宋体"/>
+        <a:font script="Hant" typeface="新細明體"/>
+        <a:font script="Arab" typeface="Arial"/>
+        <a:font script="Hebr" typeface="Arial"/>
+        <a:font script="Thai" typeface="Cordia New"/>
+        <a:font script="Ethi" typeface="Nyala"/>
+        <a:font script="Beng" typeface="Vrinda"/>
+        <a:font script="Gujr" typeface="Shruti"/>
+        <a:font script="Khmr" typeface="DaunPenh"/>
+        <a:font script="Knda" typeface="Tunga"/>
+        <a:font script="Guru" typeface="Raavi"/>
+        <a:font script="Cans" typeface="Euphemia"/>
+        <a:font script="Cher" typeface="Plantagenet Cherokee"/>
+        <a:font script="Yiii" typeface="Microsoft Yi Baiti"/>
+        <a:font script="Tibt" typeface="Microsoft Himalaya"/>
+        <a:font script="Thaa" typeface="MV Boli"/>
+        <a:font script="Deva" typeface="Mangal"/>
+        <a:font script="Telu" typeface="Gautami"/>
+        <a:font script="Taml" typeface="Latha"/>
+        <a:font script="Syrc" typeface="Estrangelo Edessa"/>
+        <a:font script="Orya" typeface="Kalinga"/>
+        <a:font script="Mlym" typeface="Kartika"/>
+        <a:font script="Laoo" typeface="DokChampa"/>
+        <a:font script="Sinh" typeface="Iskoola Pota"/>
+        <a:font script="Mong" typeface="Mongolian Baiti"/>
+        <a:font script="Viet" typeface="Arial"/>
+        <a:font script="Uigh" typeface="Microsoft Uighur"/>
+        <a:font script="Geor" typeface="Sylfaen"/>
+      </a:minorFont>
+    </a:fontScheme>
+    <a:fmtScheme name="Office">
+      <a:fillStyleLst>
+        <a:solidFill>
+          <a:schemeClr val="phClr"/>
+        </a:solidFill>
+        <a:gradFill rotWithShape="1">
+          <a:gsLst>
+            <a:gs pos="0">
+              <a:schemeClr val="phClr">
+                <a:tint val="50000"/>
+                <a:satMod val="300000"/>
+              </a:schemeClr>
+            </a:gs>
+            <a:gs pos="35000">
+              <a:schemeClr val="phClr">
+                <a:tint val="37000"/>
+                <a:satMod val="300000"/>
+              </a:schemeClr>
+            </a:gs>
+            <a:gs pos="100000">
+              <a:schemeClr val="phClr">
+                <a:tint val="15000"/>
+                <a:satMod val="350000"/>
+              </a:schemeClr>
+            </a:gs>
+          </a:gsLst>
+          <a:lin ang="16200000" scaled="1"/>
+        </a:gradFill>
+        <a:gradFill rotWithShape="1">
+          <a:gsLst>
+            <a:gs pos="0">
+              <a:schemeClr val="phClr">
+                <a:tint val="100000"/>
+                <a:shade val="100000"/>
+                <a:satMod val="130000"/>
+              </a:schemeClr>
+            </a:gs>
+            <a:gs pos="100000">
+              <a:schemeClr val="phClr">
+                <a:tint val="50000"/>
+                <a:shade val="100000"/>
+                <a:satMod val="350000"/>
+              </a:schemeClr>
+            </a:gs>
+          </a:gsLst>
+          <a:lin ang="16200000" scaled="0"/>
+        </a:gradFill>
+      </a:fillStyleLst>
+      <a:lnStyleLst>
+        <a:ln w="9525" cap="flat" cmpd="sng" algn="ctr">
+          <a:solidFill>
+            <a:schemeClr val="phClr">
+              <a:shade val="95000"/>
+              <a:satMod val="105000"/>
+            </a:schemeClr>
+          </a:solidFill>
+          <a:prstDash val="solid"/>
+        </a:ln>
+        <a:ln w="25400" cap="flat" cmpd="sng" algn="ctr">
+          <a:solidFill>
+            <a:schemeClr val="phClr"/>
+          </a:solidFill>
+          <a:prstDash val="solid"/>
+        </a:ln>
+        <a:ln w="38100" cap="flat" cmpd="sng" algn="ctr">
+          <a:solidFill>
+            <a:schemeClr val="phClr"/>
+          </a:solidFill>
+          <a:prstDash val="solid"/>
+        </a:ln>
+      </a:lnStyleLst>
+      <a:effectStyleLst>
+        <a:effectStyle>
+          <a:effectLst>
+            <a:outerShdw blurRad="40000" dist="20000" dir="5400000" rotWithShape="0">
+              <a:srgbClr val="000000">
+                <a:alpha val="38000"/>
+              </a:srgbClr>
+            </a:outerShdw>
+          </a:effectLst>
+        </a:effectStyle>
+        <a:effectStyle>
+          <a:effectLst>
+            <a:outerShdw blurRad="40000" dist="23000" dir="5400000" rotWithShape="0">
+              <a:srgbClr val="000000">
+                <a:alpha val="35000"/>
+              </a:srgbClr>
+            </a:outerShdw>
+          </a:effectLst>
+        </a:effectStyle>
+        <a:effectStyle>
+          <a:effectLst>
+            <a:outerShdw blurRad="40000" dist="23000" dir="5400000" rotWithShape="0">
+              <a:srgbClr val="000000">
+                <a:alpha val="35000"/>
+              </a:srgbClr>
+            </a:outerShdw>
+          </a:effectLst>
+          <a:scene3d>
+            <a:camera prst="orthographicFront">
+              <a:rot lat="0" lon="0" rev="0"/>
+            </a:camera>
+            <a:lightRig rig="threePt" dir="t">
+              <a:rot lat="0" lon="0" rev="1200000"/>
+            </a:lightRig>
+          </a:scene3d>
+          <a:sp3d>
+            <a:bevelT w="63500" h="25400"/>
+          </a:sp3d>
+        </a:effectStyle>
+      </a:effectStyleLst>
+      <a:bgFillStyleLst>
+        <a:solidFill>
+          <a:schemeClr val="phClr"/>
+        </a:solidFill>
+        <a:gradFill rotWithShape="1">
+          <a:gsLst>
+            <a:gs pos="0">
+              <a:schemeClr val="phClr">
+                <a:tint val="40000"/>
+                <a:satMod val="350000"/>
+              </a:schemeClr>
+            </a:gs>
+            <a:gs pos="40000">
+              <a:schemeClr val="phClr">
+                <a:tint val="45000"/>
+                <a:shade val="99000"/>
+                <a:satMod val="350000"/>
+              </a:schemeClr>
+            </a:gs>
+            <a:gs pos="100000">
+              <a:schemeClr val="phClr">
+                <a:shade val="20000"/>
+                <a:satMod val="255000"/>
+              </a:schemeClr>
+            </a:gs>
+          </a:gsLst>
+          <a:path path="circle">
+            <a:fillToRect l="50000" t="-80000" r="50000" b="180000"/>
+          </a:path>
+        </a:gradFill>
+        <a:gradFill rotWithShape="1">
+          <a:gsLst>
+            <a:gs pos="0">
+              <a:schemeClr val="phClr">
+                <a:tint val="80000"/>
+                <a:satMod val="300000"/>
+              </a:schemeClr>
+            </a:gs>
+            <a:gs pos="100000">
+              <a:schemeClr val="phClr">
+                <a:shade val="30000"/>
+                <a:satMod val="200000"/>
+              </a:schemeClr>
+            </a:gs>
+          </a:gsLst>
+          <a:path path="circle">
+            <a:fillToRect l="50000" t="50000" r="50000" b="50000"/>
+          </a:path>
+        </a:gradFill>
+      </a:bgFillStyleLst>
+    </a:fmtScheme>
+  </a:themeElements>
+  <a:objectDefaults/>
+  <a:extraClrSchemeLst/>
+</a:theme>
+</file>
+
+<file path=ppt/theme/theme2.xml><?xml version="1.0" encoding="utf-8"?>
+<a:theme xmlns:a="http://schemas.openxmlformats.org/drawingml/2006/main">
   <a:themeElements>
     <a:clrScheme name="Default">
       <a:dk1>
@@ -14187,284 +14111,7 @@
       </a:bgFillStyleLst>
     </a:fmtScheme>
   </a:themeElements>
-</a:theme>
-</file>
-
-<file path=ppt/theme/theme2.xml><?xml version="1.0" encoding="utf-8"?>
-<a:theme xmlns:a="http://schemas.openxmlformats.org/drawingml/2006/main" xmlns:r="http://schemas.openxmlformats.org/officeDocument/2006/relationships" name="Shift">
-  <a:themeElements>
-    <a:clrScheme name="Shift">
-      <a:dk1>
-        <a:srgbClr val="FFFFFF"/>
-      </a:dk1>
-      <a:lt1>
-        <a:srgbClr val="AF7B51"/>
-      </a:lt1>
-      <a:dk2>
-        <a:srgbClr val="233A44"/>
-      </a:dk2>
-      <a:lt2>
-        <a:srgbClr val="D9D9D9"/>
-      </a:lt2>
-      <a:accent1>
-        <a:srgbClr val="00796B"/>
-      </a:accent1>
-      <a:accent2>
-        <a:srgbClr val="D9563F"/>
-      </a:accent2>
-      <a:accent3>
-        <a:srgbClr val="C4A15A"/>
-      </a:accent3>
-      <a:accent4>
-        <a:srgbClr val="14F597"/>
-      </a:accent4>
-      <a:accent5>
-        <a:srgbClr val="3D4594"/>
-      </a:accent5>
-      <a:accent6>
-        <a:srgbClr val="163EF5"/>
-      </a:accent6>
-      <a:hlink>
-        <a:srgbClr val="3D4594"/>
-      </a:hlink>
-      <a:folHlink>
-        <a:srgbClr val="3D4594"/>
-      </a:folHlink>
-    </a:clrScheme>
-    <a:fontScheme name="Office">
-      <a:majorFont>
-        <a:latin typeface="Arial"/>
-        <a:ea typeface=""/>
-        <a:cs typeface=""/>
-        <a:font script="Jpan" typeface="ＭＳ Ｐゴシック"/>
-        <a:font script="Hang" typeface="맑은 고딕"/>
-        <a:font script="Hans" typeface="宋体"/>
-        <a:font script="Hant" typeface="新細明體"/>
-        <a:font script="Arab" typeface="Times New Roman"/>
-        <a:font script="Hebr" typeface="Times New Roman"/>
-        <a:font script="Thai" typeface="Angsana New"/>
-        <a:font script="Ethi" typeface="Nyala"/>
-        <a:font script="Beng" typeface="Vrinda"/>
-        <a:font script="Gujr" typeface="Shruti"/>
-        <a:font script="Khmr" typeface="MoolBoran"/>
-        <a:font script="Knda" typeface="Tunga"/>
-        <a:font script="Guru" typeface="Raavi"/>
-        <a:font script="Cans" typeface="Euphemia"/>
-        <a:font script="Cher" typeface="Plantagenet Cherokee"/>
-        <a:font script="Yiii" typeface="Microsoft Yi Baiti"/>
-        <a:font script="Tibt" typeface="Microsoft Himalaya"/>
-        <a:font script="Thaa" typeface="MV Boli"/>
-        <a:font script="Deva" typeface="Mangal"/>
-        <a:font script="Telu" typeface="Gautami"/>
-        <a:font script="Taml" typeface="Latha"/>
-        <a:font script="Syrc" typeface="Estrangelo Edessa"/>
-        <a:font script="Orya" typeface="Kalinga"/>
-        <a:font script="Mlym" typeface="Kartika"/>
-        <a:font script="Laoo" typeface="DokChampa"/>
-        <a:font script="Sinh" typeface="Iskoola Pota"/>
-        <a:font script="Mong" typeface="Mongolian Baiti"/>
-        <a:font script="Viet" typeface="Times New Roman"/>
-        <a:font script="Uigh" typeface="Microsoft Uighur"/>
-        <a:font script="Geor" typeface="Sylfaen"/>
-      </a:majorFont>
-      <a:minorFont>
-        <a:latin typeface="Arial"/>
-        <a:ea typeface=""/>
-        <a:cs typeface=""/>
-        <a:font script="Jpan" typeface="ＭＳ Ｐゴシック"/>
-        <a:font script="Hang" typeface="맑은 고딕"/>
-        <a:font script="Hans" typeface="宋体"/>
-        <a:font script="Hant" typeface="新細明體"/>
-        <a:font script="Arab" typeface="Arial"/>
-        <a:font script="Hebr" typeface="Arial"/>
-        <a:font script="Thai" typeface="Cordia New"/>
-        <a:font script="Ethi" typeface="Nyala"/>
-        <a:font script="Beng" typeface="Vrinda"/>
-        <a:font script="Gujr" typeface="Shruti"/>
-        <a:font script="Khmr" typeface="DaunPenh"/>
-        <a:font script="Knda" typeface="Tunga"/>
-        <a:font script="Guru" typeface="Raavi"/>
-        <a:font script="Cans" typeface="Euphemia"/>
-        <a:font script="Cher" typeface="Plantagenet Cherokee"/>
-        <a:font script="Yiii" typeface="Microsoft Yi Baiti"/>
-        <a:font script="Tibt" typeface="Microsoft Himalaya"/>
-        <a:font script="Thaa" typeface="MV Boli"/>
-        <a:font script="Deva" typeface="Mangal"/>
-        <a:font script="Telu" typeface="Gautami"/>
-        <a:font script="Taml" typeface="Latha"/>
-        <a:font script="Syrc" typeface="Estrangelo Edessa"/>
-        <a:font script="Orya" typeface="Kalinga"/>
-        <a:font script="Mlym" typeface="Kartika"/>
-        <a:font script="Laoo" typeface="DokChampa"/>
-        <a:font script="Sinh" typeface="Iskoola Pota"/>
-        <a:font script="Mong" typeface="Mongolian Baiti"/>
-        <a:font script="Viet" typeface="Arial"/>
-        <a:font script="Uigh" typeface="Microsoft Uighur"/>
-        <a:font script="Geor" typeface="Sylfaen"/>
-      </a:minorFont>
-    </a:fontScheme>
-    <a:fmtScheme name="Office">
-      <a:fillStyleLst>
-        <a:solidFill>
-          <a:schemeClr val="phClr"/>
-        </a:solidFill>
-        <a:gradFill rotWithShape="1">
-          <a:gsLst>
-            <a:gs pos="0">
-              <a:schemeClr val="phClr">
-                <a:tint val="50000"/>
-                <a:satMod val="300000"/>
-              </a:schemeClr>
-            </a:gs>
-            <a:gs pos="35000">
-              <a:schemeClr val="phClr">
-                <a:tint val="37000"/>
-                <a:satMod val="300000"/>
-              </a:schemeClr>
-            </a:gs>
-            <a:gs pos="100000">
-              <a:schemeClr val="phClr">
-                <a:tint val="15000"/>
-                <a:satMod val="350000"/>
-              </a:schemeClr>
-            </a:gs>
-          </a:gsLst>
-          <a:lin ang="16200000" scaled="1"/>
-        </a:gradFill>
-        <a:gradFill rotWithShape="1">
-          <a:gsLst>
-            <a:gs pos="0">
-              <a:schemeClr val="phClr">
-                <a:tint val="100000"/>
-                <a:shade val="100000"/>
-                <a:satMod val="130000"/>
-              </a:schemeClr>
-            </a:gs>
-            <a:gs pos="100000">
-              <a:schemeClr val="phClr">
-                <a:tint val="50000"/>
-                <a:shade val="100000"/>
-                <a:satMod val="350000"/>
-              </a:schemeClr>
-            </a:gs>
-          </a:gsLst>
-          <a:lin ang="16200000" scaled="0"/>
-        </a:gradFill>
-      </a:fillStyleLst>
-      <a:lnStyleLst>
-        <a:ln w="9525" cap="flat" cmpd="sng" algn="ctr">
-          <a:solidFill>
-            <a:schemeClr val="phClr">
-              <a:shade val="95000"/>
-              <a:satMod val="105000"/>
-            </a:schemeClr>
-          </a:solidFill>
-          <a:prstDash val="solid"/>
-        </a:ln>
-        <a:ln w="25400" cap="flat" cmpd="sng" algn="ctr">
-          <a:solidFill>
-            <a:schemeClr val="phClr"/>
-          </a:solidFill>
-          <a:prstDash val="solid"/>
-        </a:ln>
-        <a:ln w="38100" cap="flat" cmpd="sng" algn="ctr">
-          <a:solidFill>
-            <a:schemeClr val="phClr"/>
-          </a:solidFill>
-          <a:prstDash val="solid"/>
-        </a:ln>
-      </a:lnStyleLst>
-      <a:effectStyleLst>
-        <a:effectStyle>
-          <a:effectLst>
-            <a:outerShdw blurRad="40000" dist="20000" dir="5400000" rotWithShape="0">
-              <a:srgbClr val="000000">
-                <a:alpha val="38000"/>
-              </a:srgbClr>
-            </a:outerShdw>
-          </a:effectLst>
-        </a:effectStyle>
-        <a:effectStyle>
-          <a:effectLst>
-            <a:outerShdw blurRad="40000" dist="23000" dir="5400000" rotWithShape="0">
-              <a:srgbClr val="000000">
-                <a:alpha val="35000"/>
-              </a:srgbClr>
-            </a:outerShdw>
-          </a:effectLst>
-        </a:effectStyle>
-        <a:effectStyle>
-          <a:effectLst>
-            <a:outerShdw blurRad="40000" dist="23000" dir="5400000" rotWithShape="0">
-              <a:srgbClr val="000000">
-                <a:alpha val="35000"/>
-              </a:srgbClr>
-            </a:outerShdw>
-          </a:effectLst>
-          <a:scene3d>
-            <a:camera prst="orthographicFront">
-              <a:rot lat="0" lon="0" rev="0"/>
-            </a:camera>
-            <a:lightRig rig="threePt" dir="t">
-              <a:rot lat="0" lon="0" rev="1200000"/>
-            </a:lightRig>
-          </a:scene3d>
-          <a:sp3d>
-            <a:bevelT w="63500" h="25400"/>
-          </a:sp3d>
-        </a:effectStyle>
-      </a:effectStyleLst>
-      <a:bgFillStyleLst>
-        <a:solidFill>
-          <a:schemeClr val="phClr"/>
-        </a:solidFill>
-        <a:gradFill rotWithShape="1">
-          <a:gsLst>
-            <a:gs pos="0">
-              <a:schemeClr val="phClr">
-                <a:tint val="40000"/>
-                <a:satMod val="350000"/>
-              </a:schemeClr>
-            </a:gs>
-            <a:gs pos="40000">
-              <a:schemeClr val="phClr">
-                <a:tint val="45000"/>
-                <a:shade val="99000"/>
-                <a:satMod val="350000"/>
-              </a:schemeClr>
-            </a:gs>
-            <a:gs pos="100000">
-              <a:schemeClr val="phClr">
-                <a:shade val="20000"/>
-                <a:satMod val="255000"/>
-              </a:schemeClr>
-            </a:gs>
-          </a:gsLst>
-          <a:path path="circle">
-            <a:fillToRect l="50000" t="-80000" r="50000" b="180000"/>
-          </a:path>
-        </a:gradFill>
-        <a:gradFill rotWithShape="1">
-          <a:gsLst>
-            <a:gs pos="0">
-              <a:schemeClr val="phClr">
-                <a:tint val="80000"/>
-                <a:satMod val="300000"/>
-              </a:schemeClr>
-            </a:gs>
-            <a:gs pos="100000">
-              <a:schemeClr val="phClr">
-                <a:shade val="30000"/>
-                <a:satMod val="200000"/>
-              </a:schemeClr>
-            </a:gs>
-          </a:gsLst>
-          <a:path path="circle">
-            <a:fillToRect l="50000" t="50000" r="50000" b="50000"/>
-          </a:path>
-        </a:gradFill>
-      </a:bgFillStyleLst>
-    </a:fmtScheme>
-  </a:themeElements>
+  <a:objectDefaults/>
+  <a:extraClrSchemeLst/>
 </a:theme>
 </file>
--- a/CSCI5707 Principles of Database Systems/Final Project/CSCI5707 Project Presentation.pptx
+++ b/CSCI5707 Principles of Database Systems/Final Project/CSCI5707 Project Presentation.pptx
@@ -29,14 +29,14 @@
   <p:notesSz cx="6858000" cy="9144000"/>
   <p:embeddedFontLst>
     <p:embeddedFont>
-      <p:font typeface="Nunito" panose="020F0502020204030204" pitchFamily="2" charset="0"/>
+      <p:font typeface="Nunito" pitchFamily="2" charset="0"/>
       <p:regular r:id="rId19"/>
       <p:bold r:id="rId20"/>
       <p:italic r:id="rId21"/>
       <p:boldItalic r:id="rId22"/>
     </p:embeddedFont>
     <p:embeddedFont>
-      <p:font typeface="Roboto Mono" panose="020F0502020204030204" pitchFamily="49" charset="0"/>
+      <p:font typeface="Roboto Mono" panose="00000009000000000000" pitchFamily="49" charset="0"/>
       <p:regular r:id="rId23"/>
       <p:bold r:id="rId24"/>
       <p:italic r:id="rId25"/>
@@ -1177,7 +1177,7 @@
         </p:nvSpPr>
         <p:spPr>
           <a:xfrm>
-            <a:off x="381300" y="685800"/>
+            <a:off x="381000" y="685800"/>
             <a:ext cx="6096000" cy="3429000"/>
           </a:xfrm>
           <a:custGeom>
@@ -11049,8 +11049,8 @@
         </p:blipFill>
         <p:spPr>
           <a:xfrm>
-            <a:off x="5628600" y="3137650"/>
-            <a:ext cx="2624975" cy="1746825"/>
+            <a:off x="5628600" y="3343301"/>
+            <a:ext cx="2624975" cy="1541174"/>
           </a:xfrm>
           <a:prstGeom prst="rect">
             <a:avLst/>
